--- a/13/第13回発表_修士研究と大規模計算.pptx
+++ b/13/第13回発表_修士研究と大規模計算.pptx
@@ -511,7 +511,9 @@
           <a:p>
             <a:r>
               <a:rPr lang="en-US" dirty="0"/>
-              <a:t/>
+              <a:t>（約30秒）
+第13回の発表を始めます。私の修士研究は「縄文土器の3Dメッシュから、縄目圧痕の周期を全自動で推定する」というテーマです。
+本日は前半で研究の内容を紹介し、後半で、この講義で学んだ多変量解析と並列化の考え方が、研究のどこを効率化できるのかを説明します。</a:t>
             </a:r>
             <a:endParaRPr lang="en-US" dirty="0"/>
           </a:p>
@@ -599,7 +601,11 @@
           <a:p>
             <a:r>
               <a:rPr lang="en-US" dirty="0"/>
-              <a:t/>
+              <a:t>（約30秒）
+まとめです。縄文土器の3Dメッシュから縄目圧痕の周期・方向・同巡点を全自動推定するパイプラインを構築しました。
+PCAやクラスタリングといった多変量解析の手法が次元削減による効率化の中核となり、FFTによる計算量削減と並列化余地の見極めが、大規模メッシュ処理の実用性を支えています。
+今後は、スイープ実験の並列化とGA・ベイズ最適化によるパラメータ自動化で、講義の内容をさらに研究へ活かしていきます。
+ご清聴ありがとうございました。</a:t>
             </a:r>
             <a:endParaRPr lang="en-US" dirty="0"/>
           </a:p>
@@ -687,7 +693,11 @@
           <a:p>
             <a:r>
               <a:rPr lang="en-US" dirty="0"/>
-              <a:t/>
+              <a:t>（約50秒）
+まず背景です。縄文土器の表面には、縄を転がして付けた「縄目圧痕」という模様が残っています。右の画像が実際の土器片の3Dスキャンです。
+この圧痕の周期、つまり縄目のピッチや、縄の原体が1回転する周期は、どんな縄でどう作られたかを知る考古学的な手がかりになります。
+しかし従来は研究者が目視と手作業で計測しており、時間がかかるうえに、人によって結果が変わり、再現性にも課題がありました。
+そこで本研究では、3Dスキャンで得たPLYメッシュから、縄目の周期・方向・同巡点を全自動で推定するパイプラインの構築を目的としています。</a:t>
             </a:r>
             <a:endParaRPr lang="en-US" dirty="0"/>
           </a:p>
@@ -775,7 +785,10 @@
           <a:p>
             <a:r>
               <a:rPr lang="en-US" dirty="0"/>
-              <a:t/>
+              <a:t>（約60秒）
+処理の全体像です。パイプラインはM1からM5の5段階で構成しています。
+M1でPLYメッシュを読み込み、M2で法線のクラスタリングによって縄目のある面だけを切り出します。M3では、その面にPCAで平面をフィットして格子状にサンプリングし、2次元の高さマップに変換します。M4では、この高さマップに2次元自己相関をかけて縄目の周期ベクトルを推定し、構造テンソルで縄の走行方向を求めます。最後のM5で、縄の原体が1回転するごとに現れる「同巡点」を検出します。
+ポイントは、3Dメッシュを2Dの高さマップへ、さらに1Dの位相プロファイルへと、段階的に次元を落としながら情報を集約している点です。C++版とPython版を実装済みで、合成データによるテスト16件を通過しています。</a:t>
             </a:r>
             <a:endParaRPr lang="en-US" dirty="0"/>
           </a:p>
@@ -863,7 +876,10 @@
           <a:p>
             <a:r>
               <a:rPr lang="en-US" dirty="0"/>
-              <a:t/>
+              <a:t>（約50秒）
+M5について、もう少し詳しく説明します。同巡点とは、縄の原体が1回転するごとに同じ模様が現れる点のことで、その間隔が回転周期Tです。右の画像の黒い点が、目視で付けられた同巡点の位置です。
+手法としては、高さマップを縄目の方向に整列させ、正規化相互相関、NCCのプロファイルから回転周期Tを推定します。その後、アンカー点の位相を揃えて帯フィットを行い、同巡点の3D座標を出力します。土器は曲面なので、局所的な平面フィットで曲率に対応しています。
+合成データでの受け入れ試験では、既知の周期に対して誤差2%未満、データが20%欠損していても2%未満を維持できることを確認しています。</a:t>
             </a:r>
             <a:endParaRPr lang="en-US" dirty="0"/>
           </a:p>
@@ -951,7 +967,11 @@
           <a:p>
             <a:r>
               <a:rPr lang="en-US" dirty="0"/>
-              <a:t/>
+              <a:t>（約45秒）
+現状の結果です。左が実際の土器片データに適用した出力例で、縄目のピッチが約3.4ミリ、回転周期が約44ミリ、同巡点のアンカーが6点検出されています。
+一方で課題も残っています。最大の課題は、実データ上の同巡点の正解座標、ground truthがまだ手に入っておらず、定量評価が保留になっている点です。現在、指導教員に正解座標の計測を依頼しています。
+また、格子ピッチや周期の探索範囲といったパラメータが手動指定のままである点、曲面への対応が局所平面の近似にとどまっている点も課題です。
+ここからが本題で、この研究を講義で学んだ手法でどう効率化できるかを説明します。</a:t>
             </a:r>
             <a:endParaRPr lang="en-US" dirty="0"/>
           </a:p>
@@ -1039,7 +1059,10 @@
           <a:p>
             <a:r>
               <a:rPr lang="en-US" dirty="0"/>
-              <a:t/>
+              <a:t>（約40秒）
+効率化の話に入る前に、扱うデータの規模を確認します。土器片1つのメッシュが約700万頂点あり、そのまま扱うと1回の処理でもメモリと計算時間が問題になる、まさに大規模データです。
+本研究では、対象面の切り出しと高さマップへの次元削減によって、3Dの問題を2Dの画像問題に落として計算量を抑えています。
+それでも自己相関やNCCの計算は繰り返し実行されるため、講義で学んだ「計算量の見積もり」と「並列化できる場所の把握」が重要になります。</a:t>
             </a:r>
             <a:endParaRPr lang="en-US" dirty="0"/>
           </a:p>
@@ -1127,7 +1150,12 @@
           <a:p>
             <a:r>
               <a:rPr lang="en-US" dirty="0"/>
-              <a:t/>
+              <a:t>（約55秒）
+効率化ポイントの1つ目は、多変量解析の手法そのものがパイプラインの中核になっているという点です。
+まずPCA。対象面の頂点群にPCAをかけ、第1・第2主成分で平面を張り、第3成分を高さとすることで、3Dデータを2Dの高さマップに次元削減しています。第4回で学んだ主成分分析の直接の応用です。
+次にクラスタリング。頂点の法線ベクトルをクラスタリングして、縄目のある面だけを切り出すことで、後段の処理対象を大幅に減らしています。
+また、勾配の共分散行列を固有値分解する構造テンソルで縄の走行方向を推定しており、これも多変量解析の基本操作です。周期の検出には自己相関とNCC、つまり相関係数を空間パターンに拡張した手法を使っています。
+つまり、次元削減と対象の絞り込みという多変量解析の考え方が、大規模データを現実的な時間で処理するための効率化そのものになっています。</a:t>
             </a:r>
             <a:endParaRPr lang="en-US" dirty="0"/>
           </a:p>
@@ -1215,7 +1243,11 @@
           <a:p>
             <a:r>
               <a:rPr lang="en-US" dirty="0"/>
-              <a:t/>
+              <a:t>（約55秒）
+効率化ポイントの2つ目は、大規模計算と並列化です。
+まずアルゴリズムによる高速化として、2D自己相関を素朴に計算するとオーダーN の4乗かかるところを、FFTを使ってN2乗 log Nに削減しています。第11回で学んだ、アルゴリズムの選択による計算量削減の実例です。
+次に並列化できる箇所です。格子サンプリングは各格子点が独立に計算でき、NCCプロファイルも各シフト量を独立に評価できます。複数の土器片のバッチ処理も同様です。これらは第12回の遺伝的アルゴリズムの個体評価と同じ、互いに依存しない計算なので、並列化が可能です。
+ただし注意点があります。第12回のGA実験では、1タスクが軽い場合はWorkerの準備やデータの受け渡しのオーバーヘッドが勝ってしまい、並列化するとかえって遅くなりました。本研究でも、1タスクの重さを計測してから並列化するかを判断する方針です。</a:t>
             </a:r>
             <a:endParaRPr lang="en-US" dirty="0"/>
           </a:p>
@@ -1303,7 +1335,11 @@
           <a:p>
             <a:r>
               <a:rPr lang="en-US" dirty="0"/>
-              <a:t/>
+              <a:t>（約45秒）
+今後の展望です。3つ計画しています。
+1つ目は評価ハーネスの整備です。ノイズや欠損をパラメータ化した合成データで大量のスイープ実験を行います。条件の組合せが多く、各条件は独立に実行できるので、multiprocessingで並列化します。
+2つ目はパラメータの自動最適化です。現在手動指定になっている格子ピッチなどを、GAやベイズ最適化で自動チューニングします。1回の評価がパイプライン1実行に相当して重いため、第12回の実験とは逆に、今度は並列化の効果が出やすいと考えています。
+3つ目は複数の土器片への展開で、推定した周期や方向を統計的に比較していきます。</a:t>
             </a:r>
             <a:endParaRPr lang="en-US" dirty="0"/>
           </a:p>
@@ -1804,7 +1840,7 @@
                 <a:ea typeface="Calibri" pitchFamily="34" charset="-122"/>
                 <a:cs typeface="Calibri" pitchFamily="34" charset="-120"/>
               </a:rPr>
-              <a:t>— 修士研究における多変量解析と大規模計算の活用 —</a:t>
+              <a:t>— 修士研究の紹介と、多変量解析・並列化による効率化 —</a:t>
             </a:r>
             <a:endParaRPr lang="en-US" sz="2000" dirty="0"/>
           </a:p>
@@ -1978,7 +2014,7 @@
                 <a:ea typeface="Calibri" pitchFamily="34" charset="-122"/>
                 <a:cs typeface="Calibri" pitchFamily="34" charset="-120"/>
               </a:rPr>
-              <a:t>PCA・クラスタリング・固有値分解・相関という多変量解析の手法が、パイプラインの各段の中核になっている。</a:t>
+              <a:t>PCA・クラスタリング・固有値分解・相関という多変量解析の手法が、次元削減と対象絞り込みによる効率化の中核になっている。</a:t>
             </a:r>
             <a:endParaRPr lang="en-US" sz="1700" dirty="0"/>
           </a:p>
@@ -2600,7 +2636,7 @@
                 <a:ea typeface="Cambria" pitchFamily="34" charset="-122"/>
                 <a:cs typeface="Cambria" pitchFamily="34" charset="-120"/>
               </a:rPr>
-              <a:t>扱うデータ — 3Dメッシュは「大規模データ」</a:t>
+              <a:t>処理パイプライン（M1–M5）</a:t>
             </a:r>
             <a:endParaRPr lang="en-US" sz="3000" dirty="0"/>
           </a:p>
@@ -2614,12 +2650,12 @@
         </p:nvSpPr>
         <p:spPr>
           <a:xfrm>
-            <a:off x="548640" y="1463040"/>
-            <a:ext cx="3566160" cy="2011680"/>
+            <a:off x="502920" y="1828800"/>
+            <a:ext cx="2103120" cy="2377440"/>
           </a:xfrm>
           <a:prstGeom prst="roundRect">
             <a:avLst>
-              <a:gd name="adj" fmla="val 4545"/>
+              <a:gd name="adj" fmla="val 4348"/>
             </a:avLst>
           </a:prstGeom>
           <a:solidFill>
@@ -2636,8 +2672,8 @@
         </p:nvSpPr>
         <p:spPr>
           <a:xfrm>
-            <a:off x="548640" y="1691640"/>
-            <a:ext cx="3566160" cy="1005840"/>
+            <a:off x="502920" y="1965960"/>
+            <a:ext cx="2103120" cy="457200"/>
           </a:xfrm>
           <a:prstGeom prst="rect">
             <a:avLst/>
@@ -2653,7 +2689,7 @@
               <a:buNone/>
             </a:pPr>
             <a:r>
-              <a:rPr lang="en-US" sz="5400" b="1" dirty="0">
+              <a:rPr lang="en-US" sz="2200" b="1" dirty="0">
                 <a:solidFill>
                   <a:srgbClr val="B85042"/>
                 </a:solidFill>
@@ -2661,9 +2697,9 @@
                 <a:ea typeface="Cambria" pitchFamily="34" charset="-122"/>
                 <a:cs typeface="Cambria" pitchFamily="34" charset="-120"/>
               </a:rPr>
-              <a:t>741万</a:t>
-            </a:r>
-            <a:endParaRPr lang="en-US" sz="5400" dirty="0"/>
+              <a:t>M1</a:t>
+            </a:r>
+            <a:endParaRPr lang="en-US" sz="2200" dirty="0"/>
           </a:p>
         </p:txBody>
       </p:sp>
@@ -2675,8 +2711,8 @@
         </p:nvSpPr>
         <p:spPr>
           <a:xfrm>
-            <a:off x="548640" y="2788920"/>
-            <a:ext cx="3566160" cy="457200"/>
+            <a:off x="502920" y="2468880"/>
+            <a:ext cx="2103120" cy="365760"/>
           </a:xfrm>
           <a:prstGeom prst="rect">
             <a:avLst/>
@@ -2692,7 +2728,7 @@
               <a:buNone/>
             </a:pPr>
             <a:r>
-              <a:rPr lang="en-US" sz="1400" dirty="0">
+              <a:rPr lang="en-US" sz="1400" b="1" dirty="0">
                 <a:solidFill>
                   <a:srgbClr val="333333"/>
                 </a:solidFill>
@@ -2700,7 +2736,7 @@
                 <a:ea typeface="Calibri" pitchFamily="34" charset="-122"/>
                 <a:cs typeface="Calibri" pitchFamily="34" charset="-120"/>
               </a:rPr>
-              <a:t>頂点数（土器片 1.ply）</a:t>
+              <a:t>PLY読込</a:t>
             </a:r>
             <a:endParaRPr lang="en-US" sz="1400" dirty="0"/>
           </a:p>
@@ -2708,18 +2744,113 @@
       </p:sp>
       <p:sp>
         <p:nvSpPr>
-          <p:cNvPr id="6" name="Shape 4"/>
-          <p:cNvSpPr/>
-          <p:nvPr/>
-        </p:nvSpPr>
-        <p:spPr>
-          <a:xfrm>
-            <a:off x="4434840" y="1463040"/>
-            <a:ext cx="3566160" cy="2011680"/>
+          <p:cNvPr id="6" name="Text 4"/>
+          <p:cNvSpPr/>
+          <p:nvPr/>
+        </p:nvSpPr>
+        <p:spPr>
+          <a:xfrm>
+            <a:off x="594360" y="2880360"/>
+            <a:ext cx="1920240" cy="1188720"/>
+          </a:xfrm>
+          <a:prstGeom prst="rect">
+            <a:avLst/>
+          </a:prstGeom>
+          <a:noFill/>
+          <a:ln/>
+        </p:spPr>
+        <p:txBody>
+          <a:bodyPr wrap="square" lIns="0" tIns="0" rIns="0" bIns="0" rtlCol="0" anchor="ctr"/>
+          <a:lstStyle/>
+          <a:p>
+            <a:pPr algn="ctr" indent="0" marL="0">
+              <a:buNone/>
+            </a:pPr>
+            <a:r>
+              <a:rPr lang="en-US" sz="1050" dirty="0">
+                <a:solidFill>
+                  <a:srgbClr val="333333"/>
+                </a:solidFill>
+                <a:latin typeface="Calibri" pitchFamily="34" charset="0"/>
+                <a:ea typeface="Calibri" pitchFamily="34" charset="-122"/>
+                <a:cs typeface="Calibri" pitchFamily="34" charset="-120"/>
+              </a:rPr>
+              <a:t>バイナリPLYを読み込み</a:t>
+            </a:r>
+            <a:endParaRPr lang="en-US" sz="1050" dirty="0"/>
+          </a:p>
+          <a:p>
+            <a:pPr algn="ctr" indent="0" marL="0">
+              <a:buNone/>
+            </a:pPr>
+            <a:r>
+              <a:rPr lang="en-US" sz="1050" dirty="0">
+                <a:solidFill>
+                  <a:srgbClr val="333333"/>
+                </a:solidFill>
+                <a:latin typeface="Calibri" pitchFamily="34" charset="0"/>
+                <a:ea typeface="Calibri" pitchFamily="34" charset="-122"/>
+                <a:cs typeface="Calibri" pitchFamily="34" charset="-120"/>
+              </a:rPr>
+              <a:t>(741万頂点級対応)</a:t>
+            </a:r>
+            <a:endParaRPr lang="en-US" sz="1050" dirty="0"/>
+          </a:p>
+        </p:txBody>
+      </p:sp>
+      <p:sp>
+        <p:nvSpPr>
+          <p:cNvPr id="7" name="Text 5"/>
+          <p:cNvSpPr/>
+          <p:nvPr/>
+        </p:nvSpPr>
+        <p:spPr>
+          <a:xfrm>
+            <a:off x="2569464" y="2788920"/>
+            <a:ext cx="365760" cy="457200"/>
+          </a:xfrm>
+          <a:prstGeom prst="rect">
+            <a:avLst/>
+          </a:prstGeom>
+          <a:noFill/>
+          <a:ln/>
+        </p:spPr>
+        <p:txBody>
+          <a:bodyPr wrap="square" lIns="0" tIns="0" rIns="0" bIns="0" rtlCol="0" anchor="ctr"/>
+          <a:lstStyle/>
+          <a:p>
+            <a:pPr algn="ctr" indent="0" marL="0">
+              <a:buNone/>
+            </a:pPr>
+            <a:r>
+              <a:rPr lang="en-US" sz="2000" b="1" dirty="0">
+                <a:solidFill>
+                  <a:srgbClr val="7A6A62"/>
+                </a:solidFill>
+                <a:latin typeface="Calibri" pitchFamily="34" charset="0"/>
+                <a:ea typeface="Calibri" pitchFamily="34" charset="-122"/>
+                <a:cs typeface="Calibri" pitchFamily="34" charset="-120"/>
+              </a:rPr>
+              <a:t>→</a:t>
+            </a:r>
+            <a:endParaRPr lang="en-US" sz="2000" dirty="0"/>
+          </a:p>
+        </p:txBody>
+      </p:sp>
+      <p:sp>
+        <p:nvSpPr>
+          <p:cNvPr id="8" name="Shape 6"/>
+          <p:cNvSpPr/>
+          <p:nvPr/>
+        </p:nvSpPr>
+        <p:spPr>
+          <a:xfrm>
+            <a:off x="2862072" y="1828800"/>
+            <a:ext cx="2103120" cy="2377440"/>
           </a:xfrm>
           <a:prstGeom prst="roundRect">
             <a:avLst>
-              <a:gd name="adj" fmla="val 4545"/>
+              <a:gd name="adj" fmla="val 4348"/>
             </a:avLst>
           </a:prstGeom>
           <a:solidFill>
@@ -2730,14 +2861,14 @@
       </p:sp>
       <p:sp>
         <p:nvSpPr>
-          <p:cNvPr id="7" name="Text 5"/>
-          <p:cNvSpPr/>
-          <p:nvPr/>
-        </p:nvSpPr>
-        <p:spPr>
-          <a:xfrm>
-            <a:off x="4434840" y="1691640"/>
-            <a:ext cx="3566160" cy="1005840"/>
+          <p:cNvPr id="9" name="Text 7"/>
+          <p:cNvSpPr/>
+          <p:nvPr/>
+        </p:nvSpPr>
+        <p:spPr>
+          <a:xfrm>
+            <a:off x="2862072" y="1965960"/>
+            <a:ext cx="2103120" cy="457200"/>
           </a:xfrm>
           <a:prstGeom prst="rect">
             <a:avLst/>
@@ -2753,7 +2884,7 @@
               <a:buNone/>
             </a:pPr>
             <a:r>
-              <a:rPr lang="en-US" sz="5400" b="1" dirty="0">
+              <a:rPr lang="en-US" sz="2200" b="1" dirty="0">
                 <a:solidFill>
                   <a:srgbClr val="B85042"/>
                 </a:solidFill>
@@ -2761,22 +2892,22 @@
                 <a:ea typeface="Cambria" pitchFamily="34" charset="-122"/>
                 <a:cs typeface="Cambria" pitchFamily="34" charset="-120"/>
               </a:rPr>
-              <a:t>697万</a:t>
-            </a:r>
-            <a:endParaRPr lang="en-US" sz="5400" dirty="0"/>
-          </a:p>
-        </p:txBody>
-      </p:sp>
-      <p:sp>
-        <p:nvSpPr>
-          <p:cNvPr id="8" name="Text 6"/>
-          <p:cNvSpPr/>
-          <p:nvPr/>
-        </p:nvSpPr>
-        <p:spPr>
-          <a:xfrm>
-            <a:off x="4434840" y="2788920"/>
-            <a:ext cx="3566160" cy="457200"/>
+              <a:t>M2</a:t>
+            </a:r>
+            <a:endParaRPr lang="en-US" sz="2200" dirty="0"/>
+          </a:p>
+        </p:txBody>
+      </p:sp>
+      <p:sp>
+        <p:nvSpPr>
+          <p:cNvPr id="10" name="Text 8"/>
+          <p:cNvSpPr/>
+          <p:nvPr/>
+        </p:nvSpPr>
+        <p:spPr>
+          <a:xfrm>
+            <a:off x="2862072" y="2468880"/>
+            <a:ext cx="2103120" cy="365760"/>
           </a:xfrm>
           <a:prstGeom prst="rect">
             <a:avLst/>
@@ -2792,7 +2923,7 @@
               <a:buNone/>
             </a:pPr>
             <a:r>
-              <a:rPr lang="en-US" sz="1400" dirty="0">
+              <a:rPr lang="en-US" sz="1400" b="1" dirty="0">
                 <a:solidFill>
                   <a:srgbClr val="333333"/>
                 </a:solidFill>
@@ -2800,7 +2931,7 @@
                 <a:ea typeface="Calibri" pitchFamily="34" charset="-122"/>
                 <a:cs typeface="Calibri" pitchFamily="34" charset="-120"/>
               </a:rPr>
-              <a:t>頂点数（土器片 3.ply）</a:t>
+              <a:t>対象面抽出</a:t>
             </a:r>
             <a:endParaRPr lang="en-US" sz="1400" dirty="0"/>
           </a:p>
@@ -2808,18 +2939,113 @@
       </p:sp>
       <p:sp>
         <p:nvSpPr>
-          <p:cNvPr id="9" name="Shape 7"/>
-          <p:cNvSpPr/>
-          <p:nvPr/>
-        </p:nvSpPr>
-        <p:spPr>
-          <a:xfrm>
-            <a:off x="8321040" y="1463040"/>
-            <a:ext cx="3566160" cy="2011680"/>
+          <p:cNvPr id="11" name="Text 9"/>
+          <p:cNvSpPr/>
+          <p:nvPr/>
+        </p:nvSpPr>
+        <p:spPr>
+          <a:xfrm>
+            <a:off x="2953512" y="2880360"/>
+            <a:ext cx="1920240" cy="1188720"/>
+          </a:xfrm>
+          <a:prstGeom prst="rect">
+            <a:avLst/>
+          </a:prstGeom>
+          <a:noFill/>
+          <a:ln/>
+        </p:spPr>
+        <p:txBody>
+          <a:bodyPr wrap="square" lIns="0" tIns="0" rIns="0" bIns="0" rtlCol="0" anchor="ctr"/>
+          <a:lstStyle/>
+          <a:p>
+            <a:pPr algn="ctr" indent="0" marL="0">
+              <a:buNone/>
+            </a:pPr>
+            <a:r>
+              <a:rPr lang="en-US" sz="1050" dirty="0">
+                <a:solidFill>
+                  <a:srgbClr val="333333"/>
+                </a:solidFill>
+                <a:latin typeface="Calibri" pitchFamily="34" charset="0"/>
+                <a:ea typeface="Calibri" pitchFamily="34" charset="-122"/>
+                <a:cs typeface="Calibri" pitchFamily="34" charset="-120"/>
+              </a:rPr>
+              <a:t>法線クラスタリング＋</a:t>
+            </a:r>
+            <a:endParaRPr lang="en-US" sz="1050" dirty="0"/>
+          </a:p>
+          <a:p>
+            <a:pPr algn="ctr" indent="0" marL="0">
+              <a:buNone/>
+            </a:pPr>
+            <a:r>
+              <a:rPr lang="en-US" sz="1050" dirty="0">
+                <a:solidFill>
+                  <a:srgbClr val="333333"/>
+                </a:solidFill>
+                <a:latin typeface="Calibri" pitchFamily="34" charset="0"/>
+                <a:ea typeface="Calibri" pitchFamily="34" charset="-122"/>
+                <a:cs typeface="Calibri" pitchFamily="34" charset="-120"/>
+              </a:rPr>
+              <a:t>最大連結成分</a:t>
+            </a:r>
+            <a:endParaRPr lang="en-US" sz="1050" dirty="0"/>
+          </a:p>
+        </p:txBody>
+      </p:sp>
+      <p:sp>
+        <p:nvSpPr>
+          <p:cNvPr id="12" name="Text 10"/>
+          <p:cNvSpPr/>
+          <p:nvPr/>
+        </p:nvSpPr>
+        <p:spPr>
+          <a:xfrm>
+            <a:off x="4928616" y="2788920"/>
+            <a:ext cx="365760" cy="457200"/>
+          </a:xfrm>
+          <a:prstGeom prst="rect">
+            <a:avLst/>
+          </a:prstGeom>
+          <a:noFill/>
+          <a:ln/>
+        </p:spPr>
+        <p:txBody>
+          <a:bodyPr wrap="square" lIns="0" tIns="0" rIns="0" bIns="0" rtlCol="0" anchor="ctr"/>
+          <a:lstStyle/>
+          <a:p>
+            <a:pPr algn="ctr" indent="0" marL="0">
+              <a:buNone/>
+            </a:pPr>
+            <a:r>
+              <a:rPr lang="en-US" sz="2000" b="1" dirty="0">
+                <a:solidFill>
+                  <a:srgbClr val="7A6A62"/>
+                </a:solidFill>
+                <a:latin typeface="Calibri" pitchFamily="34" charset="0"/>
+                <a:ea typeface="Calibri" pitchFamily="34" charset="-122"/>
+                <a:cs typeface="Calibri" pitchFamily="34" charset="-120"/>
+              </a:rPr>
+              <a:t>→</a:t>
+            </a:r>
+            <a:endParaRPr lang="en-US" sz="2000" dirty="0"/>
+          </a:p>
+        </p:txBody>
+      </p:sp>
+      <p:sp>
+        <p:nvSpPr>
+          <p:cNvPr id="13" name="Shape 11"/>
+          <p:cNvSpPr/>
+          <p:nvPr/>
+        </p:nvSpPr>
+        <p:spPr>
+          <a:xfrm>
+            <a:off x="5221224" y="1828800"/>
+            <a:ext cx="2103120" cy="2377440"/>
           </a:xfrm>
           <a:prstGeom prst="roundRect">
             <a:avLst>
-              <a:gd name="adj" fmla="val 4545"/>
+              <a:gd name="adj" fmla="val 4348"/>
             </a:avLst>
           </a:prstGeom>
           <a:solidFill>
@@ -2830,14 +3056,14 @@
       </p:sp>
       <p:sp>
         <p:nvSpPr>
-          <p:cNvPr id="10" name="Text 8"/>
-          <p:cNvSpPr/>
-          <p:nvPr/>
-        </p:nvSpPr>
-        <p:spPr>
-          <a:xfrm>
-            <a:off x="8321040" y="1691640"/>
-            <a:ext cx="3566160" cy="1005840"/>
+          <p:cNvPr id="14" name="Text 12"/>
+          <p:cNvSpPr/>
+          <p:nvPr/>
+        </p:nvSpPr>
+        <p:spPr>
+          <a:xfrm>
+            <a:off x="5221224" y="1965960"/>
+            <a:ext cx="2103120" cy="457200"/>
           </a:xfrm>
           <a:prstGeom prst="rect">
             <a:avLst/>
@@ -2853,30 +3079,30 @@
               <a:buNone/>
             </a:pPr>
             <a:r>
-              <a:rPr lang="en-US" sz="5400" b="1" dirty="0">
-                <a:solidFill>
-                  <a:srgbClr val="A7BEAE"/>
+              <a:rPr lang="en-US" sz="2200" b="1" dirty="0">
+                <a:solidFill>
+                  <a:srgbClr val="B85042"/>
                 </a:solidFill>
                 <a:latin typeface="Cambria" pitchFamily="34" charset="0"/>
                 <a:ea typeface="Cambria" pitchFamily="34" charset="-122"/>
                 <a:cs typeface="Cambria" pitchFamily="34" charset="-120"/>
               </a:rPr>
-              <a:t>0.2 mm</a:t>
-            </a:r>
-            <a:endParaRPr lang="en-US" sz="5400" dirty="0"/>
-          </a:p>
-        </p:txBody>
-      </p:sp>
-      <p:sp>
-        <p:nvSpPr>
-          <p:cNvPr id="11" name="Text 9"/>
-          <p:cNvSpPr/>
-          <p:nvPr/>
-        </p:nvSpPr>
-        <p:spPr>
-          <a:xfrm>
-            <a:off x="8321040" y="2788920"/>
-            <a:ext cx="3566160" cy="457200"/>
+              <a:t>M3</a:t>
+            </a:r>
+            <a:endParaRPr lang="en-US" sz="2200" dirty="0"/>
+          </a:p>
+        </p:txBody>
+      </p:sp>
+      <p:sp>
+        <p:nvSpPr>
+          <p:cNvPr id="15" name="Text 13"/>
+          <p:cNvSpPr/>
+          <p:nvPr/>
+        </p:nvSpPr>
+        <p:spPr>
+          <a:xfrm>
+            <a:off x="5221224" y="2468880"/>
+            <a:ext cx="2103120" cy="365760"/>
           </a:xfrm>
           <a:prstGeom prst="rect">
             <a:avLst/>
@@ -2892,7 +3118,7 @@
               <a:buNone/>
             </a:pPr>
             <a:r>
-              <a:rPr lang="en-US" sz="1400" dirty="0">
+              <a:rPr lang="en-US" sz="1400" b="1" dirty="0">
                 <a:solidFill>
                   <a:srgbClr val="333333"/>
                 </a:solidFill>
@@ -2900,7 +3126,7 @@
                 <a:ea typeface="Calibri" pitchFamily="34" charset="-122"/>
                 <a:cs typeface="Calibri" pitchFamily="34" charset="-120"/>
               </a:rPr>
-              <a:t>高さマップの格子解像度</a:t>
+              <a:t>高さマップ化</a:t>
             </a:r>
             <a:endParaRPr lang="en-US" sz="1400" dirty="0"/>
           </a:p>
@@ -2908,14 +3134,460 @@
       </p:sp>
       <p:sp>
         <p:nvSpPr>
-          <p:cNvPr id="12" name="Text 10"/>
-          <p:cNvSpPr/>
-          <p:nvPr/>
-        </p:nvSpPr>
-        <p:spPr>
-          <a:xfrm>
-            <a:off x="640080" y="3931920"/>
-            <a:ext cx="10972800" cy="2103120"/>
+          <p:cNvPr id="16" name="Text 14"/>
+          <p:cNvSpPr/>
+          <p:nvPr/>
+        </p:nvSpPr>
+        <p:spPr>
+          <a:xfrm>
+            <a:off x="5312664" y="2880360"/>
+            <a:ext cx="1920240" cy="1188720"/>
+          </a:xfrm>
+          <a:prstGeom prst="rect">
+            <a:avLst/>
+          </a:prstGeom>
+          <a:noFill/>
+          <a:ln/>
+        </p:spPr>
+        <p:txBody>
+          <a:bodyPr wrap="square" lIns="0" tIns="0" rIns="0" bIns="0" rtlCol="0" anchor="ctr"/>
+          <a:lstStyle/>
+          <a:p>
+            <a:pPr algn="ctr" indent="0" marL="0">
+              <a:buNone/>
+            </a:pPr>
+            <a:r>
+              <a:rPr lang="en-US" sz="1050" dirty="0">
+                <a:solidFill>
+                  <a:srgbClr val="333333"/>
+                </a:solidFill>
+                <a:latin typeface="Calibri" pitchFamily="34" charset="0"/>
+                <a:ea typeface="Calibri" pitchFamily="34" charset="-122"/>
+                <a:cs typeface="Calibri" pitchFamily="34" charset="-120"/>
+              </a:rPr>
+              <a:t>PCA平面フィット＋</a:t>
+            </a:r>
+            <a:endParaRPr lang="en-US" sz="1050" dirty="0"/>
+          </a:p>
+          <a:p>
+            <a:pPr algn="ctr" indent="0" marL="0">
+              <a:buNone/>
+            </a:pPr>
+            <a:r>
+              <a:rPr lang="en-US" sz="1050" dirty="0">
+                <a:solidFill>
+                  <a:srgbClr val="333333"/>
+                </a:solidFill>
+                <a:latin typeface="Calibri" pitchFamily="34" charset="0"/>
+                <a:ea typeface="Calibri" pitchFamily="34" charset="-122"/>
+                <a:cs typeface="Calibri" pitchFamily="34" charset="-120"/>
+              </a:rPr>
+              <a:t>格子サンプリング・detrend</a:t>
+            </a:r>
+            <a:endParaRPr lang="en-US" sz="1050" dirty="0"/>
+          </a:p>
+        </p:txBody>
+      </p:sp>
+      <p:sp>
+        <p:nvSpPr>
+          <p:cNvPr id="17" name="Text 15"/>
+          <p:cNvSpPr/>
+          <p:nvPr/>
+        </p:nvSpPr>
+        <p:spPr>
+          <a:xfrm>
+            <a:off x="7287768" y="2788920"/>
+            <a:ext cx="365760" cy="457200"/>
+          </a:xfrm>
+          <a:prstGeom prst="rect">
+            <a:avLst/>
+          </a:prstGeom>
+          <a:noFill/>
+          <a:ln/>
+        </p:spPr>
+        <p:txBody>
+          <a:bodyPr wrap="square" lIns="0" tIns="0" rIns="0" bIns="0" rtlCol="0" anchor="ctr"/>
+          <a:lstStyle/>
+          <a:p>
+            <a:pPr algn="ctr" indent="0" marL="0">
+              <a:buNone/>
+            </a:pPr>
+            <a:r>
+              <a:rPr lang="en-US" sz="2000" b="1" dirty="0">
+                <a:solidFill>
+                  <a:srgbClr val="7A6A62"/>
+                </a:solidFill>
+                <a:latin typeface="Calibri" pitchFamily="34" charset="0"/>
+                <a:ea typeface="Calibri" pitchFamily="34" charset="-122"/>
+                <a:cs typeface="Calibri" pitchFamily="34" charset="-120"/>
+              </a:rPr>
+              <a:t>→</a:t>
+            </a:r>
+            <a:endParaRPr lang="en-US" sz="2000" dirty="0"/>
+          </a:p>
+        </p:txBody>
+      </p:sp>
+      <p:sp>
+        <p:nvSpPr>
+          <p:cNvPr id="18" name="Shape 16"/>
+          <p:cNvSpPr/>
+          <p:nvPr/>
+        </p:nvSpPr>
+        <p:spPr>
+          <a:xfrm>
+            <a:off x="7580376" y="1828800"/>
+            <a:ext cx="2103120" cy="2377440"/>
+          </a:xfrm>
+          <a:prstGeom prst="roundRect">
+            <a:avLst>
+              <a:gd name="adj" fmla="val 4348"/>
+            </a:avLst>
+          </a:prstGeom>
+          <a:solidFill>
+            <a:srgbClr val="E7E8D1"/>
+          </a:solidFill>
+          <a:ln/>
+        </p:spPr>
+      </p:sp>
+      <p:sp>
+        <p:nvSpPr>
+          <p:cNvPr id="19" name="Text 17"/>
+          <p:cNvSpPr/>
+          <p:nvPr/>
+        </p:nvSpPr>
+        <p:spPr>
+          <a:xfrm>
+            <a:off x="7580376" y="1965960"/>
+            <a:ext cx="2103120" cy="457200"/>
+          </a:xfrm>
+          <a:prstGeom prst="rect">
+            <a:avLst/>
+          </a:prstGeom>
+          <a:noFill/>
+          <a:ln/>
+        </p:spPr>
+        <p:txBody>
+          <a:bodyPr wrap="square" lIns="0" tIns="0" rIns="0" bIns="0" rtlCol="0" anchor="ctr"/>
+          <a:lstStyle/>
+          <a:p>
+            <a:pPr algn="ctr" indent="0" marL="0">
+              <a:buNone/>
+            </a:pPr>
+            <a:r>
+              <a:rPr lang="en-US" sz="2200" b="1" dirty="0">
+                <a:solidFill>
+                  <a:srgbClr val="B85042"/>
+                </a:solidFill>
+                <a:latin typeface="Cambria" pitchFamily="34" charset="0"/>
+                <a:ea typeface="Cambria" pitchFamily="34" charset="-122"/>
+                <a:cs typeface="Cambria" pitchFamily="34" charset="-120"/>
+              </a:rPr>
+              <a:t>M4</a:t>
+            </a:r>
+            <a:endParaRPr lang="en-US" sz="2200" dirty="0"/>
+          </a:p>
+        </p:txBody>
+      </p:sp>
+      <p:sp>
+        <p:nvSpPr>
+          <p:cNvPr id="20" name="Text 18"/>
+          <p:cNvSpPr/>
+          <p:nvPr/>
+        </p:nvSpPr>
+        <p:spPr>
+          <a:xfrm>
+            <a:off x="7580376" y="2468880"/>
+            <a:ext cx="2103120" cy="365760"/>
+          </a:xfrm>
+          <a:prstGeom prst="rect">
+            <a:avLst/>
+          </a:prstGeom>
+          <a:noFill/>
+          <a:ln/>
+        </p:spPr>
+        <p:txBody>
+          <a:bodyPr wrap="square" lIns="0" tIns="0" rIns="0" bIns="0" rtlCol="0" anchor="ctr"/>
+          <a:lstStyle/>
+          <a:p>
+            <a:pPr algn="ctr" indent="0" marL="0">
+              <a:buNone/>
+            </a:pPr>
+            <a:r>
+              <a:rPr lang="en-US" sz="1400" b="1" dirty="0">
+                <a:solidFill>
+                  <a:srgbClr val="333333"/>
+                </a:solidFill>
+                <a:latin typeface="Calibri" pitchFamily="34" charset="0"/>
+                <a:ea typeface="Calibri" pitchFamily="34" charset="-122"/>
+                <a:cs typeface="Calibri" pitchFamily="34" charset="-120"/>
+              </a:rPr>
+              <a:t>周期推定</a:t>
+            </a:r>
+            <a:endParaRPr lang="en-US" sz="1400" dirty="0"/>
+          </a:p>
+        </p:txBody>
+      </p:sp>
+      <p:sp>
+        <p:nvSpPr>
+          <p:cNvPr id="21" name="Text 19"/>
+          <p:cNvSpPr/>
+          <p:nvPr/>
+        </p:nvSpPr>
+        <p:spPr>
+          <a:xfrm>
+            <a:off x="7671816" y="2880360"/>
+            <a:ext cx="1920240" cy="1188720"/>
+          </a:xfrm>
+          <a:prstGeom prst="rect">
+            <a:avLst/>
+          </a:prstGeom>
+          <a:noFill/>
+          <a:ln/>
+        </p:spPr>
+        <p:txBody>
+          <a:bodyPr wrap="square" lIns="0" tIns="0" rIns="0" bIns="0" rtlCol="0" anchor="ctr"/>
+          <a:lstStyle/>
+          <a:p>
+            <a:pPr algn="ctr" indent="0" marL="0">
+              <a:buNone/>
+            </a:pPr>
+            <a:r>
+              <a:rPr lang="en-US" sz="1050" dirty="0">
+                <a:solidFill>
+                  <a:srgbClr val="333333"/>
+                </a:solidFill>
+                <a:latin typeface="Calibri" pitchFamily="34" charset="0"/>
+                <a:ea typeface="Calibri" pitchFamily="34" charset="-122"/>
+                <a:cs typeface="Calibri" pitchFamily="34" charset="-120"/>
+              </a:rPr>
+              <a:t>マスク付き2D自己相関＋</a:t>
+            </a:r>
+            <a:endParaRPr lang="en-US" sz="1050" dirty="0"/>
+          </a:p>
+          <a:p>
+            <a:pPr algn="ctr" indent="0" marL="0">
+              <a:buNone/>
+            </a:pPr>
+            <a:r>
+              <a:rPr lang="en-US" sz="1050" dirty="0">
+                <a:solidFill>
+                  <a:srgbClr val="333333"/>
+                </a:solidFill>
+                <a:latin typeface="Calibri" pitchFamily="34" charset="0"/>
+                <a:ea typeface="Calibri" pitchFamily="34" charset="-122"/>
+                <a:cs typeface="Calibri" pitchFamily="34" charset="-120"/>
+              </a:rPr>
+              <a:t>構造テンソルで方向推定</a:t>
+            </a:r>
+            <a:endParaRPr lang="en-US" sz="1050" dirty="0"/>
+          </a:p>
+        </p:txBody>
+      </p:sp>
+      <p:sp>
+        <p:nvSpPr>
+          <p:cNvPr id="22" name="Text 20"/>
+          <p:cNvSpPr/>
+          <p:nvPr/>
+        </p:nvSpPr>
+        <p:spPr>
+          <a:xfrm>
+            <a:off x="9646920" y="2788920"/>
+            <a:ext cx="365760" cy="457200"/>
+          </a:xfrm>
+          <a:prstGeom prst="rect">
+            <a:avLst/>
+          </a:prstGeom>
+          <a:noFill/>
+          <a:ln/>
+        </p:spPr>
+        <p:txBody>
+          <a:bodyPr wrap="square" lIns="0" tIns="0" rIns="0" bIns="0" rtlCol="0" anchor="ctr"/>
+          <a:lstStyle/>
+          <a:p>
+            <a:pPr algn="ctr" indent="0" marL="0">
+              <a:buNone/>
+            </a:pPr>
+            <a:r>
+              <a:rPr lang="en-US" sz="2000" b="1" dirty="0">
+                <a:solidFill>
+                  <a:srgbClr val="7A6A62"/>
+                </a:solidFill>
+                <a:latin typeface="Calibri" pitchFamily="34" charset="0"/>
+                <a:ea typeface="Calibri" pitchFamily="34" charset="-122"/>
+                <a:cs typeface="Calibri" pitchFamily="34" charset="-120"/>
+              </a:rPr>
+              <a:t>→</a:t>
+            </a:r>
+            <a:endParaRPr lang="en-US" sz="2000" dirty="0"/>
+          </a:p>
+        </p:txBody>
+      </p:sp>
+      <p:sp>
+        <p:nvSpPr>
+          <p:cNvPr id="23" name="Shape 21"/>
+          <p:cNvSpPr/>
+          <p:nvPr/>
+        </p:nvSpPr>
+        <p:spPr>
+          <a:xfrm>
+            <a:off x="9939528" y="1828800"/>
+            <a:ext cx="2103120" cy="2377440"/>
+          </a:xfrm>
+          <a:prstGeom prst="roundRect">
+            <a:avLst>
+              <a:gd name="adj" fmla="val 4348"/>
+            </a:avLst>
+          </a:prstGeom>
+          <a:solidFill>
+            <a:srgbClr val="B85042"/>
+          </a:solidFill>
+          <a:ln/>
+        </p:spPr>
+      </p:sp>
+      <p:sp>
+        <p:nvSpPr>
+          <p:cNvPr id="24" name="Text 22"/>
+          <p:cNvSpPr/>
+          <p:nvPr/>
+        </p:nvSpPr>
+        <p:spPr>
+          <a:xfrm>
+            <a:off x="9939528" y="1965960"/>
+            <a:ext cx="2103120" cy="457200"/>
+          </a:xfrm>
+          <a:prstGeom prst="rect">
+            <a:avLst/>
+          </a:prstGeom>
+          <a:noFill/>
+          <a:ln/>
+        </p:spPr>
+        <p:txBody>
+          <a:bodyPr wrap="square" lIns="0" tIns="0" rIns="0" bIns="0" rtlCol="0" anchor="ctr"/>
+          <a:lstStyle/>
+          <a:p>
+            <a:pPr algn="ctr" indent="0" marL="0">
+              <a:buNone/>
+            </a:pPr>
+            <a:r>
+              <a:rPr lang="en-US" sz="2200" b="1" dirty="0">
+                <a:solidFill>
+                  <a:srgbClr val="FFFFFF"/>
+                </a:solidFill>
+                <a:latin typeface="Cambria" pitchFamily="34" charset="0"/>
+                <a:ea typeface="Cambria" pitchFamily="34" charset="-122"/>
+                <a:cs typeface="Cambria" pitchFamily="34" charset="-120"/>
+              </a:rPr>
+              <a:t>M5</a:t>
+            </a:r>
+            <a:endParaRPr lang="en-US" sz="2200" dirty="0"/>
+          </a:p>
+        </p:txBody>
+      </p:sp>
+      <p:sp>
+        <p:nvSpPr>
+          <p:cNvPr id="25" name="Text 23"/>
+          <p:cNvSpPr/>
+          <p:nvPr/>
+        </p:nvSpPr>
+        <p:spPr>
+          <a:xfrm>
+            <a:off x="9939528" y="2468880"/>
+            <a:ext cx="2103120" cy="365760"/>
+          </a:xfrm>
+          <a:prstGeom prst="rect">
+            <a:avLst/>
+          </a:prstGeom>
+          <a:noFill/>
+          <a:ln/>
+        </p:spPr>
+        <p:txBody>
+          <a:bodyPr wrap="square" lIns="0" tIns="0" rIns="0" bIns="0" rtlCol="0" anchor="ctr"/>
+          <a:lstStyle/>
+          <a:p>
+            <a:pPr algn="ctr" indent="0" marL="0">
+              <a:buNone/>
+            </a:pPr>
+            <a:r>
+              <a:rPr lang="en-US" sz="1400" b="1" dirty="0">
+                <a:solidFill>
+                  <a:srgbClr val="FFFFFF"/>
+                </a:solidFill>
+                <a:latin typeface="Calibri" pitchFamily="34" charset="0"/>
+                <a:ea typeface="Calibri" pitchFamily="34" charset="-122"/>
+                <a:cs typeface="Calibri" pitchFamily="34" charset="-120"/>
+              </a:rPr>
+              <a:t>同巡点検出</a:t>
+            </a:r>
+            <a:endParaRPr lang="en-US" sz="1400" dirty="0"/>
+          </a:p>
+        </p:txBody>
+      </p:sp>
+      <p:sp>
+        <p:nvSpPr>
+          <p:cNvPr id="26" name="Text 24"/>
+          <p:cNvSpPr/>
+          <p:nvPr/>
+        </p:nvSpPr>
+        <p:spPr>
+          <a:xfrm>
+            <a:off x="10030968" y="2880360"/>
+            <a:ext cx="1920240" cy="1188720"/>
+          </a:xfrm>
+          <a:prstGeom prst="rect">
+            <a:avLst/>
+          </a:prstGeom>
+          <a:noFill/>
+          <a:ln/>
+        </p:spPr>
+        <p:txBody>
+          <a:bodyPr wrap="square" lIns="0" tIns="0" rIns="0" bIns="0" rtlCol="0" anchor="ctr"/>
+          <a:lstStyle/>
+          <a:p>
+            <a:pPr algn="ctr" indent="0" marL="0">
+              <a:buNone/>
+            </a:pPr>
+            <a:r>
+              <a:rPr lang="en-US" sz="1050" dirty="0">
+                <a:solidFill>
+                  <a:srgbClr val="FFFFFF"/>
+                </a:solidFill>
+                <a:latin typeface="Calibri" pitchFamily="34" charset="0"/>
+                <a:ea typeface="Calibri" pitchFamily="34" charset="-122"/>
+                <a:cs typeface="Calibri" pitchFamily="34" charset="-120"/>
+              </a:rPr>
+              <a:t>NCCプロファイル→回転周期T</a:t>
+            </a:r>
+            <a:endParaRPr lang="en-US" sz="1050" dirty="0"/>
+          </a:p>
+          <a:p>
+            <a:pPr algn="ctr" indent="0" marL="0">
+              <a:buNone/>
+            </a:pPr>
+            <a:r>
+              <a:rPr lang="en-US" sz="1050" dirty="0">
+                <a:solidFill>
+                  <a:srgbClr val="FFFFFF"/>
+                </a:solidFill>
+                <a:latin typeface="Calibri" pitchFamily="34" charset="0"/>
+                <a:ea typeface="Calibri" pitchFamily="34" charset="-122"/>
+                <a:cs typeface="Calibri" pitchFamily="34" charset="-120"/>
+              </a:rPr>
+              <a:t>→同巡点3D座標</a:t>
+            </a:r>
+            <a:endParaRPr lang="en-US" sz="1050" dirty="0"/>
+          </a:p>
+        </p:txBody>
+      </p:sp>
+      <p:sp>
+        <p:nvSpPr>
+          <p:cNvPr id="27" name="Text 25"/>
+          <p:cNvSpPr/>
+          <p:nvPr/>
+        </p:nvSpPr>
+        <p:spPr>
+          <a:xfrm>
+            <a:off x="640080" y="4663440"/>
+            <a:ext cx="10972800" cy="1280160"/>
           </a:xfrm>
           <a:prstGeom prst="rect">
             <a:avLst/>
@@ -2943,15 +3615,12 @@
                 <a:ea typeface="Calibri" pitchFamily="34" charset="-122"/>
                 <a:cs typeface="Calibri" pitchFamily="34" charset="-120"/>
               </a:rPr>
-              <a:t>数百万頂点の点群・メッシュをそのまま扱うと、1回の処理でもメモリ・計算時間が問題になる規模。</a:t>
+              <a:t>3Dメッシュ → 2D高さマップ → 1D位相プロファイルと、段階的に次元を落としながら情報を集約する設計。</a:t>
             </a:r>
             <a:endParaRPr lang="en-US" sz="1500" dirty="0"/>
           </a:p>
           <a:p>
             <a:pPr marL="342900" indent="-342900">
-              <a:spcAft>
-                <a:spcPts val="800"/>
-              </a:spcAft>
               <a:buSzPct val="100000"/>
               <a:buChar char="•"/>
             </a:pPr>
@@ -2964,64 +3633,46 @@
                 <a:ea typeface="Calibri" pitchFamily="34" charset="-122"/>
                 <a:cs typeface="Calibri" pitchFamily="34" charset="-120"/>
               </a:rPr>
-              <a:t>本研究では「対象面の切り出し → 格子状の高さマップへの次元削減」により、3D問題を2D画像問題へ落として計算量を抑える。</a:t>
+              <a:t>C++17版（M1–M4）とPython版（M1–M5, numpy/scipy）を実装。合成データのテスト16件を通過済み。</a:t>
             </a:r>
             <a:endParaRPr lang="en-US" sz="1500" dirty="0"/>
           </a:p>
-          <a:p>
-            <a:pPr marL="342900" indent="-342900">
-              <a:buSzPct val="100000"/>
-              <a:buChar char="•"/>
-            </a:pPr>
-            <a:r>
-              <a:rPr lang="en-US" sz="1500" dirty="0">
-                <a:solidFill>
-                  <a:srgbClr val="333333"/>
+        </p:txBody>
+      </p:sp>
+      <p:sp>
+        <p:nvSpPr>
+          <p:cNvPr id="28" name="Text 26"/>
+          <p:cNvSpPr/>
+          <p:nvPr/>
+        </p:nvSpPr>
+        <p:spPr>
+          <a:xfrm>
+            <a:off x="548640" y="6446520"/>
+            <a:ext cx="11064240" cy="274320"/>
+          </a:xfrm>
+          <a:prstGeom prst="rect">
+            <a:avLst/>
+          </a:prstGeom>
+          <a:noFill/>
+          <a:ln/>
+        </p:spPr>
+        <p:txBody>
+          <a:bodyPr wrap="square" lIns="0" tIns="0" rIns="0" bIns="0" rtlCol="0" anchor="ctr"/>
+          <a:lstStyle/>
+          <a:p>
+            <a:pPr indent="0" marL="0">
+              <a:buNone/>
+            </a:pPr>
+            <a:r>
+              <a:rPr lang="en-US" sz="1000" dirty="0">
+                <a:solidFill>
+                  <a:srgbClr val="7A6A62"/>
                 </a:solidFill>
                 <a:latin typeface="Calibri" pitchFamily="34" charset="0"/>
                 <a:ea typeface="Calibri" pitchFamily="34" charset="-122"/>
                 <a:cs typeface="Calibri" pitchFamily="34" charset="-120"/>
               </a:rPr>
-              <a:t>それでも高さマップ上のFFT・自己相関・NCC計算は反復実行されるため、講義で学んだ大規模計算の考え方（計算量の見積もり・並列化余地の把握）が直接効いてくる。</a:t>
-            </a:r>
-            <a:endParaRPr lang="en-US" sz="1500" dirty="0"/>
-          </a:p>
-        </p:txBody>
-      </p:sp>
-      <p:sp>
-        <p:nvSpPr>
-          <p:cNvPr id="13" name="Text 11"/>
-          <p:cNvSpPr/>
-          <p:nvPr/>
-        </p:nvSpPr>
-        <p:spPr>
-          <a:xfrm>
-            <a:off x="548640" y="6446520"/>
-            <a:ext cx="11064240" cy="274320"/>
-          </a:xfrm>
-          <a:prstGeom prst="rect">
-            <a:avLst/>
-          </a:prstGeom>
-          <a:noFill/>
-          <a:ln/>
-        </p:spPr>
-        <p:txBody>
-          <a:bodyPr wrap="square" lIns="0" tIns="0" rIns="0" bIns="0" rtlCol="0" anchor="ctr"/>
-          <a:lstStyle/>
-          <a:p>
-            <a:pPr indent="0" marL="0">
-              <a:buNone/>
-            </a:pPr>
-            <a:r>
-              <a:rPr lang="en-US" sz="1000" dirty="0">
-                <a:solidFill>
-                  <a:srgbClr val="7A6A62"/>
-                </a:solidFill>
-                <a:latin typeface="Calibri" pitchFamily="34" charset="0"/>
-                <a:ea typeface="Calibri" pitchFamily="34" charset="-122"/>
-                <a:cs typeface="Calibri" pitchFamily="34" charset="-120"/>
-              </a:rPr>
-              <a:t>根拠: 04_Projects/修士研究/python/README.md</a:t>
+              <a:t>根拠: 04_Projects/修士研究/python/README.md, design_M5_同位相位置検出.md</a:t>
             </a:r>
             <a:endParaRPr lang="en-US" sz="1000" dirty="0"/>
           </a:p>
@@ -3092,7 +3743,7 @@
                 <a:ea typeface="Cambria" pitchFamily="34" charset="-122"/>
                 <a:cs typeface="Cambria" pitchFamily="34" charset="-120"/>
               </a:rPr>
-              <a:t>処理パイプライン（M1–M5）</a:t>
+              <a:t>M5: 回転周期と同巡点の自動検出</a:t>
             </a:r>
             <a:endParaRPr lang="en-US" sz="3000" dirty="0"/>
           </a:p>
@@ -3100,950 +3751,14 @@
       </p:sp>
       <p:sp>
         <p:nvSpPr>
-          <p:cNvPr id="3" name="Shape 1"/>
-          <p:cNvSpPr/>
-          <p:nvPr/>
-        </p:nvSpPr>
-        <p:spPr>
-          <a:xfrm>
-            <a:off x="502920" y="1828800"/>
-            <a:ext cx="2103120" cy="2377440"/>
-          </a:xfrm>
-          <a:prstGeom prst="roundRect">
-            <a:avLst>
-              <a:gd name="adj" fmla="val 4348"/>
-            </a:avLst>
-          </a:prstGeom>
-          <a:solidFill>
-            <a:srgbClr val="E7E8D1"/>
-          </a:solidFill>
-          <a:ln/>
-        </p:spPr>
-      </p:sp>
-      <p:sp>
-        <p:nvSpPr>
-          <p:cNvPr id="4" name="Text 2"/>
-          <p:cNvSpPr/>
-          <p:nvPr/>
-        </p:nvSpPr>
-        <p:spPr>
-          <a:xfrm>
-            <a:off x="502920" y="1965960"/>
-            <a:ext cx="2103120" cy="457200"/>
-          </a:xfrm>
-          <a:prstGeom prst="rect">
-            <a:avLst/>
-          </a:prstGeom>
-          <a:noFill/>
-          <a:ln/>
-        </p:spPr>
-        <p:txBody>
-          <a:bodyPr wrap="square" lIns="0" tIns="0" rIns="0" bIns="0" rtlCol="0" anchor="ctr"/>
-          <a:lstStyle/>
-          <a:p>
-            <a:pPr algn="ctr" indent="0" marL="0">
-              <a:buNone/>
-            </a:pPr>
-            <a:r>
-              <a:rPr lang="en-US" sz="2200" b="1" dirty="0">
-                <a:solidFill>
-                  <a:srgbClr val="B85042"/>
-                </a:solidFill>
-                <a:latin typeface="Cambria" pitchFamily="34" charset="0"/>
-                <a:ea typeface="Cambria" pitchFamily="34" charset="-122"/>
-                <a:cs typeface="Cambria" pitchFamily="34" charset="-120"/>
-              </a:rPr>
-              <a:t>M1</a:t>
-            </a:r>
-            <a:endParaRPr lang="en-US" sz="2200" dirty="0"/>
-          </a:p>
-        </p:txBody>
-      </p:sp>
-      <p:sp>
-        <p:nvSpPr>
-          <p:cNvPr id="5" name="Text 3"/>
-          <p:cNvSpPr/>
-          <p:nvPr/>
-        </p:nvSpPr>
-        <p:spPr>
-          <a:xfrm>
-            <a:off x="502920" y="2468880"/>
-            <a:ext cx="2103120" cy="365760"/>
-          </a:xfrm>
-          <a:prstGeom prst="rect">
-            <a:avLst/>
-          </a:prstGeom>
-          <a:noFill/>
-          <a:ln/>
-        </p:spPr>
-        <p:txBody>
-          <a:bodyPr wrap="square" lIns="0" tIns="0" rIns="0" bIns="0" rtlCol="0" anchor="ctr"/>
-          <a:lstStyle/>
-          <a:p>
-            <a:pPr algn="ctr" indent="0" marL="0">
-              <a:buNone/>
-            </a:pPr>
-            <a:r>
-              <a:rPr lang="en-US" sz="1400" b="1" dirty="0">
-                <a:solidFill>
-                  <a:srgbClr val="333333"/>
-                </a:solidFill>
-                <a:latin typeface="Calibri" pitchFamily="34" charset="0"/>
-                <a:ea typeface="Calibri" pitchFamily="34" charset="-122"/>
-                <a:cs typeface="Calibri" pitchFamily="34" charset="-120"/>
-              </a:rPr>
-              <a:t>PLY読込</a:t>
-            </a:r>
-            <a:endParaRPr lang="en-US" sz="1400" dirty="0"/>
-          </a:p>
-        </p:txBody>
-      </p:sp>
-      <p:sp>
-        <p:nvSpPr>
-          <p:cNvPr id="6" name="Text 4"/>
-          <p:cNvSpPr/>
-          <p:nvPr/>
-        </p:nvSpPr>
-        <p:spPr>
-          <a:xfrm>
-            <a:off x="594360" y="2880360"/>
-            <a:ext cx="1920240" cy="1188720"/>
-          </a:xfrm>
-          <a:prstGeom prst="rect">
-            <a:avLst/>
-          </a:prstGeom>
-          <a:noFill/>
-          <a:ln/>
-        </p:spPr>
-        <p:txBody>
-          <a:bodyPr wrap="square" lIns="0" tIns="0" rIns="0" bIns="0" rtlCol="0" anchor="ctr"/>
-          <a:lstStyle/>
-          <a:p>
-            <a:pPr algn="ctr" indent="0" marL="0">
-              <a:buNone/>
-            </a:pPr>
-            <a:r>
-              <a:rPr lang="en-US" sz="1050" dirty="0">
-                <a:solidFill>
-                  <a:srgbClr val="333333"/>
-                </a:solidFill>
-                <a:latin typeface="Calibri" pitchFamily="34" charset="0"/>
-                <a:ea typeface="Calibri" pitchFamily="34" charset="-122"/>
-                <a:cs typeface="Calibri" pitchFamily="34" charset="-120"/>
-              </a:rPr>
-              <a:t>バイナリPLYを読み込み</a:t>
-            </a:r>
-            <a:endParaRPr lang="en-US" sz="1050" dirty="0"/>
-          </a:p>
-          <a:p>
-            <a:pPr algn="ctr" indent="0" marL="0">
-              <a:buNone/>
-            </a:pPr>
-            <a:r>
-              <a:rPr lang="en-US" sz="1050" dirty="0">
-                <a:solidFill>
-                  <a:srgbClr val="333333"/>
-                </a:solidFill>
-                <a:latin typeface="Calibri" pitchFamily="34" charset="0"/>
-                <a:ea typeface="Calibri" pitchFamily="34" charset="-122"/>
-                <a:cs typeface="Calibri" pitchFamily="34" charset="-120"/>
-              </a:rPr>
-              <a:t>(741万頂点級対応)</a:t>
-            </a:r>
-            <a:endParaRPr lang="en-US" sz="1050" dirty="0"/>
-          </a:p>
-        </p:txBody>
-      </p:sp>
-      <p:sp>
-        <p:nvSpPr>
-          <p:cNvPr id="7" name="Text 5"/>
-          <p:cNvSpPr/>
-          <p:nvPr/>
-        </p:nvSpPr>
-        <p:spPr>
-          <a:xfrm>
-            <a:off x="2569464" y="2788920"/>
-            <a:ext cx="365760" cy="457200"/>
-          </a:xfrm>
-          <a:prstGeom prst="rect">
-            <a:avLst/>
-          </a:prstGeom>
-          <a:noFill/>
-          <a:ln/>
-        </p:spPr>
-        <p:txBody>
-          <a:bodyPr wrap="square" lIns="0" tIns="0" rIns="0" bIns="0" rtlCol="0" anchor="ctr"/>
-          <a:lstStyle/>
-          <a:p>
-            <a:pPr algn="ctr" indent="0" marL="0">
-              <a:buNone/>
-            </a:pPr>
-            <a:r>
-              <a:rPr lang="en-US" sz="2000" b="1" dirty="0">
-                <a:solidFill>
-                  <a:srgbClr val="7A6A62"/>
-                </a:solidFill>
-                <a:latin typeface="Calibri" pitchFamily="34" charset="0"/>
-                <a:ea typeface="Calibri" pitchFamily="34" charset="-122"/>
-                <a:cs typeface="Calibri" pitchFamily="34" charset="-120"/>
-              </a:rPr>
-              <a:t>→</a:t>
-            </a:r>
-            <a:endParaRPr lang="en-US" sz="2000" dirty="0"/>
-          </a:p>
-        </p:txBody>
-      </p:sp>
-      <p:sp>
-        <p:nvSpPr>
-          <p:cNvPr id="8" name="Shape 6"/>
-          <p:cNvSpPr/>
-          <p:nvPr/>
-        </p:nvSpPr>
-        <p:spPr>
-          <a:xfrm>
-            <a:off x="2862072" y="1828800"/>
-            <a:ext cx="2103120" cy="2377440"/>
-          </a:xfrm>
-          <a:prstGeom prst="roundRect">
-            <a:avLst>
-              <a:gd name="adj" fmla="val 4348"/>
-            </a:avLst>
-          </a:prstGeom>
-          <a:solidFill>
-            <a:srgbClr val="E7E8D1"/>
-          </a:solidFill>
-          <a:ln/>
-        </p:spPr>
-      </p:sp>
-      <p:sp>
-        <p:nvSpPr>
-          <p:cNvPr id="9" name="Text 7"/>
-          <p:cNvSpPr/>
-          <p:nvPr/>
-        </p:nvSpPr>
-        <p:spPr>
-          <a:xfrm>
-            <a:off x="2862072" y="1965960"/>
-            <a:ext cx="2103120" cy="457200"/>
-          </a:xfrm>
-          <a:prstGeom prst="rect">
-            <a:avLst/>
-          </a:prstGeom>
-          <a:noFill/>
-          <a:ln/>
-        </p:spPr>
-        <p:txBody>
-          <a:bodyPr wrap="square" lIns="0" tIns="0" rIns="0" bIns="0" rtlCol="0" anchor="ctr"/>
-          <a:lstStyle/>
-          <a:p>
-            <a:pPr algn="ctr" indent="0" marL="0">
-              <a:buNone/>
-            </a:pPr>
-            <a:r>
-              <a:rPr lang="en-US" sz="2200" b="1" dirty="0">
-                <a:solidFill>
-                  <a:srgbClr val="B85042"/>
-                </a:solidFill>
-                <a:latin typeface="Cambria" pitchFamily="34" charset="0"/>
-                <a:ea typeface="Cambria" pitchFamily="34" charset="-122"/>
-                <a:cs typeface="Cambria" pitchFamily="34" charset="-120"/>
-              </a:rPr>
-              <a:t>M2</a:t>
-            </a:r>
-            <a:endParaRPr lang="en-US" sz="2200" dirty="0"/>
-          </a:p>
-        </p:txBody>
-      </p:sp>
-      <p:sp>
-        <p:nvSpPr>
-          <p:cNvPr id="10" name="Text 8"/>
-          <p:cNvSpPr/>
-          <p:nvPr/>
-        </p:nvSpPr>
-        <p:spPr>
-          <a:xfrm>
-            <a:off x="2862072" y="2468880"/>
-            <a:ext cx="2103120" cy="365760"/>
-          </a:xfrm>
-          <a:prstGeom prst="rect">
-            <a:avLst/>
-          </a:prstGeom>
-          <a:noFill/>
-          <a:ln/>
-        </p:spPr>
-        <p:txBody>
-          <a:bodyPr wrap="square" lIns="0" tIns="0" rIns="0" bIns="0" rtlCol="0" anchor="ctr"/>
-          <a:lstStyle/>
-          <a:p>
-            <a:pPr algn="ctr" indent="0" marL="0">
-              <a:buNone/>
-            </a:pPr>
-            <a:r>
-              <a:rPr lang="en-US" sz="1400" b="1" dirty="0">
-                <a:solidFill>
-                  <a:srgbClr val="333333"/>
-                </a:solidFill>
-                <a:latin typeface="Calibri" pitchFamily="34" charset="0"/>
-                <a:ea typeface="Calibri" pitchFamily="34" charset="-122"/>
-                <a:cs typeface="Calibri" pitchFamily="34" charset="-120"/>
-              </a:rPr>
-              <a:t>対象面抽出</a:t>
-            </a:r>
-            <a:endParaRPr lang="en-US" sz="1400" dirty="0"/>
-          </a:p>
-        </p:txBody>
-      </p:sp>
-      <p:sp>
-        <p:nvSpPr>
-          <p:cNvPr id="11" name="Text 9"/>
-          <p:cNvSpPr/>
-          <p:nvPr/>
-        </p:nvSpPr>
-        <p:spPr>
-          <a:xfrm>
-            <a:off x="2953512" y="2880360"/>
-            <a:ext cx="1920240" cy="1188720"/>
-          </a:xfrm>
-          <a:prstGeom prst="rect">
-            <a:avLst/>
-          </a:prstGeom>
-          <a:noFill/>
-          <a:ln/>
-        </p:spPr>
-        <p:txBody>
-          <a:bodyPr wrap="square" lIns="0" tIns="0" rIns="0" bIns="0" rtlCol="0" anchor="ctr"/>
-          <a:lstStyle/>
-          <a:p>
-            <a:pPr algn="ctr" indent="0" marL="0">
-              <a:buNone/>
-            </a:pPr>
-            <a:r>
-              <a:rPr lang="en-US" sz="1050" dirty="0">
-                <a:solidFill>
-                  <a:srgbClr val="333333"/>
-                </a:solidFill>
-                <a:latin typeface="Calibri" pitchFamily="34" charset="0"/>
-                <a:ea typeface="Calibri" pitchFamily="34" charset="-122"/>
-                <a:cs typeface="Calibri" pitchFamily="34" charset="-120"/>
-              </a:rPr>
-              <a:t>法線クラスタリング＋</a:t>
-            </a:r>
-            <a:endParaRPr lang="en-US" sz="1050" dirty="0"/>
-          </a:p>
-          <a:p>
-            <a:pPr algn="ctr" indent="0" marL="0">
-              <a:buNone/>
-            </a:pPr>
-            <a:r>
-              <a:rPr lang="en-US" sz="1050" dirty="0">
-                <a:solidFill>
-                  <a:srgbClr val="333333"/>
-                </a:solidFill>
-                <a:latin typeface="Calibri" pitchFamily="34" charset="0"/>
-                <a:ea typeface="Calibri" pitchFamily="34" charset="-122"/>
-                <a:cs typeface="Calibri" pitchFamily="34" charset="-120"/>
-              </a:rPr>
-              <a:t>最大連結成分</a:t>
-            </a:r>
-            <a:endParaRPr lang="en-US" sz="1050" dirty="0"/>
-          </a:p>
-        </p:txBody>
-      </p:sp>
-      <p:sp>
-        <p:nvSpPr>
-          <p:cNvPr id="12" name="Text 10"/>
-          <p:cNvSpPr/>
-          <p:nvPr/>
-        </p:nvSpPr>
-        <p:spPr>
-          <a:xfrm>
-            <a:off x="4928616" y="2788920"/>
-            <a:ext cx="365760" cy="457200"/>
-          </a:xfrm>
-          <a:prstGeom prst="rect">
-            <a:avLst/>
-          </a:prstGeom>
-          <a:noFill/>
-          <a:ln/>
-        </p:spPr>
-        <p:txBody>
-          <a:bodyPr wrap="square" lIns="0" tIns="0" rIns="0" bIns="0" rtlCol="0" anchor="ctr"/>
-          <a:lstStyle/>
-          <a:p>
-            <a:pPr algn="ctr" indent="0" marL="0">
-              <a:buNone/>
-            </a:pPr>
-            <a:r>
-              <a:rPr lang="en-US" sz="2000" b="1" dirty="0">
-                <a:solidFill>
-                  <a:srgbClr val="7A6A62"/>
-                </a:solidFill>
-                <a:latin typeface="Calibri" pitchFamily="34" charset="0"/>
-                <a:ea typeface="Calibri" pitchFamily="34" charset="-122"/>
-                <a:cs typeface="Calibri" pitchFamily="34" charset="-120"/>
-              </a:rPr>
-              <a:t>→</a:t>
-            </a:r>
-            <a:endParaRPr lang="en-US" sz="2000" dirty="0"/>
-          </a:p>
-        </p:txBody>
-      </p:sp>
-      <p:sp>
-        <p:nvSpPr>
-          <p:cNvPr id="13" name="Shape 11"/>
-          <p:cNvSpPr/>
-          <p:nvPr/>
-        </p:nvSpPr>
-        <p:spPr>
-          <a:xfrm>
-            <a:off x="5221224" y="1828800"/>
-            <a:ext cx="2103120" cy="2377440"/>
-          </a:xfrm>
-          <a:prstGeom prst="roundRect">
-            <a:avLst>
-              <a:gd name="adj" fmla="val 4348"/>
-            </a:avLst>
-          </a:prstGeom>
-          <a:solidFill>
-            <a:srgbClr val="E7E8D1"/>
-          </a:solidFill>
-          <a:ln/>
-        </p:spPr>
-      </p:sp>
-      <p:sp>
-        <p:nvSpPr>
-          <p:cNvPr id="14" name="Text 12"/>
-          <p:cNvSpPr/>
-          <p:nvPr/>
-        </p:nvSpPr>
-        <p:spPr>
-          <a:xfrm>
-            <a:off x="5221224" y="1965960"/>
-            <a:ext cx="2103120" cy="457200"/>
-          </a:xfrm>
-          <a:prstGeom prst="rect">
-            <a:avLst/>
-          </a:prstGeom>
-          <a:noFill/>
-          <a:ln/>
-        </p:spPr>
-        <p:txBody>
-          <a:bodyPr wrap="square" lIns="0" tIns="0" rIns="0" bIns="0" rtlCol="0" anchor="ctr"/>
-          <a:lstStyle/>
-          <a:p>
-            <a:pPr algn="ctr" indent="0" marL="0">
-              <a:buNone/>
-            </a:pPr>
-            <a:r>
-              <a:rPr lang="en-US" sz="2200" b="1" dirty="0">
-                <a:solidFill>
-                  <a:srgbClr val="B85042"/>
-                </a:solidFill>
-                <a:latin typeface="Cambria" pitchFamily="34" charset="0"/>
-                <a:ea typeface="Cambria" pitchFamily="34" charset="-122"/>
-                <a:cs typeface="Cambria" pitchFamily="34" charset="-120"/>
-              </a:rPr>
-              <a:t>M3</a:t>
-            </a:r>
-            <a:endParaRPr lang="en-US" sz="2200" dirty="0"/>
-          </a:p>
-        </p:txBody>
-      </p:sp>
-      <p:sp>
-        <p:nvSpPr>
-          <p:cNvPr id="15" name="Text 13"/>
-          <p:cNvSpPr/>
-          <p:nvPr/>
-        </p:nvSpPr>
-        <p:spPr>
-          <a:xfrm>
-            <a:off x="5221224" y="2468880"/>
-            <a:ext cx="2103120" cy="365760"/>
-          </a:xfrm>
-          <a:prstGeom prst="rect">
-            <a:avLst/>
-          </a:prstGeom>
-          <a:noFill/>
-          <a:ln/>
-        </p:spPr>
-        <p:txBody>
-          <a:bodyPr wrap="square" lIns="0" tIns="0" rIns="0" bIns="0" rtlCol="0" anchor="ctr"/>
-          <a:lstStyle/>
-          <a:p>
-            <a:pPr algn="ctr" indent="0" marL="0">
-              <a:buNone/>
-            </a:pPr>
-            <a:r>
-              <a:rPr lang="en-US" sz="1400" b="1" dirty="0">
-                <a:solidFill>
-                  <a:srgbClr val="333333"/>
-                </a:solidFill>
-                <a:latin typeface="Calibri" pitchFamily="34" charset="0"/>
-                <a:ea typeface="Calibri" pitchFamily="34" charset="-122"/>
-                <a:cs typeface="Calibri" pitchFamily="34" charset="-120"/>
-              </a:rPr>
-              <a:t>高さマップ化</a:t>
-            </a:r>
-            <a:endParaRPr lang="en-US" sz="1400" dirty="0"/>
-          </a:p>
-        </p:txBody>
-      </p:sp>
-      <p:sp>
-        <p:nvSpPr>
-          <p:cNvPr id="16" name="Text 14"/>
-          <p:cNvSpPr/>
-          <p:nvPr/>
-        </p:nvSpPr>
-        <p:spPr>
-          <a:xfrm>
-            <a:off x="5312664" y="2880360"/>
-            <a:ext cx="1920240" cy="1188720"/>
-          </a:xfrm>
-          <a:prstGeom prst="rect">
-            <a:avLst/>
-          </a:prstGeom>
-          <a:noFill/>
-          <a:ln/>
-        </p:spPr>
-        <p:txBody>
-          <a:bodyPr wrap="square" lIns="0" tIns="0" rIns="0" bIns="0" rtlCol="0" anchor="ctr"/>
-          <a:lstStyle/>
-          <a:p>
-            <a:pPr algn="ctr" indent="0" marL="0">
-              <a:buNone/>
-            </a:pPr>
-            <a:r>
-              <a:rPr lang="en-US" sz="1050" dirty="0">
-                <a:solidFill>
-                  <a:srgbClr val="333333"/>
-                </a:solidFill>
-                <a:latin typeface="Calibri" pitchFamily="34" charset="0"/>
-                <a:ea typeface="Calibri" pitchFamily="34" charset="-122"/>
-                <a:cs typeface="Calibri" pitchFamily="34" charset="-120"/>
-              </a:rPr>
-              <a:t>PCA平面フィット＋</a:t>
-            </a:r>
-            <a:endParaRPr lang="en-US" sz="1050" dirty="0"/>
-          </a:p>
-          <a:p>
-            <a:pPr algn="ctr" indent="0" marL="0">
-              <a:buNone/>
-            </a:pPr>
-            <a:r>
-              <a:rPr lang="en-US" sz="1050" dirty="0">
-                <a:solidFill>
-                  <a:srgbClr val="333333"/>
-                </a:solidFill>
-                <a:latin typeface="Calibri" pitchFamily="34" charset="0"/>
-                <a:ea typeface="Calibri" pitchFamily="34" charset="-122"/>
-                <a:cs typeface="Calibri" pitchFamily="34" charset="-120"/>
-              </a:rPr>
-              <a:t>格子サンプリング・detrend</a:t>
-            </a:r>
-            <a:endParaRPr lang="en-US" sz="1050" dirty="0"/>
-          </a:p>
-        </p:txBody>
-      </p:sp>
-      <p:sp>
-        <p:nvSpPr>
-          <p:cNvPr id="17" name="Text 15"/>
-          <p:cNvSpPr/>
-          <p:nvPr/>
-        </p:nvSpPr>
-        <p:spPr>
-          <a:xfrm>
-            <a:off x="7287768" y="2788920"/>
-            <a:ext cx="365760" cy="457200"/>
-          </a:xfrm>
-          <a:prstGeom prst="rect">
-            <a:avLst/>
-          </a:prstGeom>
-          <a:noFill/>
-          <a:ln/>
-        </p:spPr>
-        <p:txBody>
-          <a:bodyPr wrap="square" lIns="0" tIns="0" rIns="0" bIns="0" rtlCol="0" anchor="ctr"/>
-          <a:lstStyle/>
-          <a:p>
-            <a:pPr algn="ctr" indent="0" marL="0">
-              <a:buNone/>
-            </a:pPr>
-            <a:r>
-              <a:rPr lang="en-US" sz="2000" b="1" dirty="0">
-                <a:solidFill>
-                  <a:srgbClr val="7A6A62"/>
-                </a:solidFill>
-                <a:latin typeface="Calibri" pitchFamily="34" charset="0"/>
-                <a:ea typeface="Calibri" pitchFamily="34" charset="-122"/>
-                <a:cs typeface="Calibri" pitchFamily="34" charset="-120"/>
-              </a:rPr>
-              <a:t>→</a:t>
-            </a:r>
-            <a:endParaRPr lang="en-US" sz="2000" dirty="0"/>
-          </a:p>
-        </p:txBody>
-      </p:sp>
-      <p:sp>
-        <p:nvSpPr>
-          <p:cNvPr id="18" name="Shape 16"/>
-          <p:cNvSpPr/>
-          <p:nvPr/>
-        </p:nvSpPr>
-        <p:spPr>
-          <a:xfrm>
-            <a:off x="7580376" y="1828800"/>
-            <a:ext cx="2103120" cy="2377440"/>
-          </a:xfrm>
-          <a:prstGeom prst="roundRect">
-            <a:avLst>
-              <a:gd name="adj" fmla="val 4348"/>
-            </a:avLst>
-          </a:prstGeom>
-          <a:solidFill>
-            <a:srgbClr val="E7E8D1"/>
-          </a:solidFill>
-          <a:ln/>
-        </p:spPr>
-      </p:sp>
-      <p:sp>
-        <p:nvSpPr>
-          <p:cNvPr id="19" name="Text 17"/>
-          <p:cNvSpPr/>
-          <p:nvPr/>
-        </p:nvSpPr>
-        <p:spPr>
-          <a:xfrm>
-            <a:off x="7580376" y="1965960"/>
-            <a:ext cx="2103120" cy="457200"/>
-          </a:xfrm>
-          <a:prstGeom prst="rect">
-            <a:avLst/>
-          </a:prstGeom>
-          <a:noFill/>
-          <a:ln/>
-        </p:spPr>
-        <p:txBody>
-          <a:bodyPr wrap="square" lIns="0" tIns="0" rIns="0" bIns="0" rtlCol="0" anchor="ctr"/>
-          <a:lstStyle/>
-          <a:p>
-            <a:pPr algn="ctr" indent="0" marL="0">
-              <a:buNone/>
-            </a:pPr>
-            <a:r>
-              <a:rPr lang="en-US" sz="2200" b="1" dirty="0">
-                <a:solidFill>
-                  <a:srgbClr val="B85042"/>
-                </a:solidFill>
-                <a:latin typeface="Cambria" pitchFamily="34" charset="0"/>
-                <a:ea typeface="Cambria" pitchFamily="34" charset="-122"/>
-                <a:cs typeface="Cambria" pitchFamily="34" charset="-120"/>
-              </a:rPr>
-              <a:t>M4</a:t>
-            </a:r>
-            <a:endParaRPr lang="en-US" sz="2200" dirty="0"/>
-          </a:p>
-        </p:txBody>
-      </p:sp>
-      <p:sp>
-        <p:nvSpPr>
-          <p:cNvPr id="20" name="Text 18"/>
-          <p:cNvSpPr/>
-          <p:nvPr/>
-        </p:nvSpPr>
-        <p:spPr>
-          <a:xfrm>
-            <a:off x="7580376" y="2468880"/>
-            <a:ext cx="2103120" cy="365760"/>
-          </a:xfrm>
-          <a:prstGeom prst="rect">
-            <a:avLst/>
-          </a:prstGeom>
-          <a:noFill/>
-          <a:ln/>
-        </p:spPr>
-        <p:txBody>
-          <a:bodyPr wrap="square" lIns="0" tIns="0" rIns="0" bIns="0" rtlCol="0" anchor="ctr"/>
-          <a:lstStyle/>
-          <a:p>
-            <a:pPr algn="ctr" indent="0" marL="0">
-              <a:buNone/>
-            </a:pPr>
-            <a:r>
-              <a:rPr lang="en-US" sz="1400" b="1" dirty="0">
-                <a:solidFill>
-                  <a:srgbClr val="333333"/>
-                </a:solidFill>
-                <a:latin typeface="Calibri" pitchFamily="34" charset="0"/>
-                <a:ea typeface="Calibri" pitchFamily="34" charset="-122"/>
-                <a:cs typeface="Calibri" pitchFamily="34" charset="-120"/>
-              </a:rPr>
-              <a:t>周期推定</a:t>
-            </a:r>
-            <a:endParaRPr lang="en-US" sz="1400" dirty="0"/>
-          </a:p>
-        </p:txBody>
-      </p:sp>
-      <p:sp>
-        <p:nvSpPr>
-          <p:cNvPr id="21" name="Text 19"/>
-          <p:cNvSpPr/>
-          <p:nvPr/>
-        </p:nvSpPr>
-        <p:spPr>
-          <a:xfrm>
-            <a:off x="7671816" y="2880360"/>
-            <a:ext cx="1920240" cy="1188720"/>
-          </a:xfrm>
-          <a:prstGeom prst="rect">
-            <a:avLst/>
-          </a:prstGeom>
-          <a:noFill/>
-          <a:ln/>
-        </p:spPr>
-        <p:txBody>
-          <a:bodyPr wrap="square" lIns="0" tIns="0" rIns="0" bIns="0" rtlCol="0" anchor="ctr"/>
-          <a:lstStyle/>
-          <a:p>
-            <a:pPr algn="ctr" indent="0" marL="0">
-              <a:buNone/>
-            </a:pPr>
-            <a:r>
-              <a:rPr lang="en-US" sz="1050" dirty="0">
-                <a:solidFill>
-                  <a:srgbClr val="333333"/>
-                </a:solidFill>
-                <a:latin typeface="Calibri" pitchFamily="34" charset="0"/>
-                <a:ea typeface="Calibri" pitchFamily="34" charset="-122"/>
-                <a:cs typeface="Calibri" pitchFamily="34" charset="-120"/>
-              </a:rPr>
-              <a:t>マスク付き2D自己相関＋</a:t>
-            </a:r>
-            <a:endParaRPr lang="en-US" sz="1050" dirty="0"/>
-          </a:p>
-          <a:p>
-            <a:pPr algn="ctr" indent="0" marL="0">
-              <a:buNone/>
-            </a:pPr>
-            <a:r>
-              <a:rPr lang="en-US" sz="1050" dirty="0">
-                <a:solidFill>
-                  <a:srgbClr val="333333"/>
-                </a:solidFill>
-                <a:latin typeface="Calibri" pitchFamily="34" charset="0"/>
-                <a:ea typeface="Calibri" pitchFamily="34" charset="-122"/>
-                <a:cs typeface="Calibri" pitchFamily="34" charset="-120"/>
-              </a:rPr>
-              <a:t>構造テンソルで方向推定</a:t>
-            </a:r>
-            <a:endParaRPr lang="en-US" sz="1050" dirty="0"/>
-          </a:p>
-        </p:txBody>
-      </p:sp>
-      <p:sp>
-        <p:nvSpPr>
-          <p:cNvPr id="22" name="Text 20"/>
-          <p:cNvSpPr/>
-          <p:nvPr/>
-        </p:nvSpPr>
-        <p:spPr>
-          <a:xfrm>
-            <a:off x="9646920" y="2788920"/>
-            <a:ext cx="365760" cy="457200"/>
-          </a:xfrm>
-          <a:prstGeom prst="rect">
-            <a:avLst/>
-          </a:prstGeom>
-          <a:noFill/>
-          <a:ln/>
-        </p:spPr>
-        <p:txBody>
-          <a:bodyPr wrap="square" lIns="0" tIns="0" rIns="0" bIns="0" rtlCol="0" anchor="ctr"/>
-          <a:lstStyle/>
-          <a:p>
-            <a:pPr algn="ctr" indent="0" marL="0">
-              <a:buNone/>
-            </a:pPr>
-            <a:r>
-              <a:rPr lang="en-US" sz="2000" b="1" dirty="0">
-                <a:solidFill>
-                  <a:srgbClr val="7A6A62"/>
-                </a:solidFill>
-                <a:latin typeface="Calibri" pitchFamily="34" charset="0"/>
-                <a:ea typeface="Calibri" pitchFamily="34" charset="-122"/>
-                <a:cs typeface="Calibri" pitchFamily="34" charset="-120"/>
-              </a:rPr>
-              <a:t>→</a:t>
-            </a:r>
-            <a:endParaRPr lang="en-US" sz="2000" dirty="0"/>
-          </a:p>
-        </p:txBody>
-      </p:sp>
-      <p:sp>
-        <p:nvSpPr>
-          <p:cNvPr id="23" name="Shape 21"/>
-          <p:cNvSpPr/>
-          <p:nvPr/>
-        </p:nvSpPr>
-        <p:spPr>
-          <a:xfrm>
-            <a:off x="9939528" y="1828800"/>
-            <a:ext cx="2103120" cy="2377440"/>
-          </a:xfrm>
-          <a:prstGeom prst="roundRect">
-            <a:avLst>
-              <a:gd name="adj" fmla="val 4348"/>
-            </a:avLst>
-          </a:prstGeom>
-          <a:solidFill>
-            <a:srgbClr val="B85042"/>
-          </a:solidFill>
-          <a:ln/>
-        </p:spPr>
-      </p:sp>
-      <p:sp>
-        <p:nvSpPr>
-          <p:cNvPr id="24" name="Text 22"/>
-          <p:cNvSpPr/>
-          <p:nvPr/>
-        </p:nvSpPr>
-        <p:spPr>
-          <a:xfrm>
-            <a:off x="9939528" y="1965960"/>
-            <a:ext cx="2103120" cy="457200"/>
-          </a:xfrm>
-          <a:prstGeom prst="rect">
-            <a:avLst/>
-          </a:prstGeom>
-          <a:noFill/>
-          <a:ln/>
-        </p:spPr>
-        <p:txBody>
-          <a:bodyPr wrap="square" lIns="0" tIns="0" rIns="0" bIns="0" rtlCol="0" anchor="ctr"/>
-          <a:lstStyle/>
-          <a:p>
-            <a:pPr algn="ctr" indent="0" marL="0">
-              <a:buNone/>
-            </a:pPr>
-            <a:r>
-              <a:rPr lang="en-US" sz="2200" b="1" dirty="0">
-                <a:solidFill>
-                  <a:srgbClr val="FFFFFF"/>
-                </a:solidFill>
-                <a:latin typeface="Cambria" pitchFamily="34" charset="0"/>
-                <a:ea typeface="Cambria" pitchFamily="34" charset="-122"/>
-                <a:cs typeface="Cambria" pitchFamily="34" charset="-120"/>
-              </a:rPr>
-              <a:t>M5</a:t>
-            </a:r>
-            <a:endParaRPr lang="en-US" sz="2200" dirty="0"/>
-          </a:p>
-        </p:txBody>
-      </p:sp>
-      <p:sp>
-        <p:nvSpPr>
-          <p:cNvPr id="25" name="Text 23"/>
-          <p:cNvSpPr/>
-          <p:nvPr/>
-        </p:nvSpPr>
-        <p:spPr>
-          <a:xfrm>
-            <a:off x="9939528" y="2468880"/>
-            <a:ext cx="2103120" cy="365760"/>
-          </a:xfrm>
-          <a:prstGeom prst="rect">
-            <a:avLst/>
-          </a:prstGeom>
-          <a:noFill/>
-          <a:ln/>
-        </p:spPr>
-        <p:txBody>
-          <a:bodyPr wrap="square" lIns="0" tIns="0" rIns="0" bIns="0" rtlCol="0" anchor="ctr"/>
-          <a:lstStyle/>
-          <a:p>
-            <a:pPr algn="ctr" indent="0" marL="0">
-              <a:buNone/>
-            </a:pPr>
-            <a:r>
-              <a:rPr lang="en-US" sz="1400" b="1" dirty="0">
-                <a:solidFill>
-                  <a:srgbClr val="FFFFFF"/>
-                </a:solidFill>
-                <a:latin typeface="Calibri" pitchFamily="34" charset="0"/>
-                <a:ea typeface="Calibri" pitchFamily="34" charset="-122"/>
-                <a:cs typeface="Calibri" pitchFamily="34" charset="-120"/>
-              </a:rPr>
-              <a:t>同巡点検出</a:t>
-            </a:r>
-            <a:endParaRPr lang="en-US" sz="1400" dirty="0"/>
-          </a:p>
-        </p:txBody>
-      </p:sp>
-      <p:sp>
-        <p:nvSpPr>
-          <p:cNvPr id="26" name="Text 24"/>
-          <p:cNvSpPr/>
-          <p:nvPr/>
-        </p:nvSpPr>
-        <p:spPr>
-          <a:xfrm>
-            <a:off x="10030968" y="2880360"/>
-            <a:ext cx="1920240" cy="1188720"/>
-          </a:xfrm>
-          <a:prstGeom prst="rect">
-            <a:avLst/>
-          </a:prstGeom>
-          <a:noFill/>
-          <a:ln/>
-        </p:spPr>
-        <p:txBody>
-          <a:bodyPr wrap="square" lIns="0" tIns="0" rIns="0" bIns="0" rtlCol="0" anchor="ctr"/>
-          <a:lstStyle/>
-          <a:p>
-            <a:pPr algn="ctr" indent="0" marL="0">
-              <a:buNone/>
-            </a:pPr>
-            <a:r>
-              <a:rPr lang="en-US" sz="1050" dirty="0">
-                <a:solidFill>
-                  <a:srgbClr val="FFFFFF"/>
-                </a:solidFill>
-                <a:latin typeface="Calibri" pitchFamily="34" charset="0"/>
-                <a:ea typeface="Calibri" pitchFamily="34" charset="-122"/>
-                <a:cs typeface="Calibri" pitchFamily="34" charset="-120"/>
-              </a:rPr>
-              <a:t>NCCプロファイル→回転周期T</a:t>
-            </a:r>
-            <a:endParaRPr lang="en-US" sz="1050" dirty="0"/>
-          </a:p>
-          <a:p>
-            <a:pPr algn="ctr" indent="0" marL="0">
-              <a:buNone/>
-            </a:pPr>
-            <a:r>
-              <a:rPr lang="en-US" sz="1050" dirty="0">
-                <a:solidFill>
-                  <a:srgbClr val="FFFFFF"/>
-                </a:solidFill>
-                <a:latin typeface="Calibri" pitchFamily="34" charset="0"/>
-                <a:ea typeface="Calibri" pitchFamily="34" charset="-122"/>
-                <a:cs typeface="Calibri" pitchFamily="34" charset="-120"/>
-              </a:rPr>
-              <a:t>→同巡点3D座標</a:t>
-            </a:r>
-            <a:endParaRPr lang="en-US" sz="1050" dirty="0"/>
-          </a:p>
-        </p:txBody>
-      </p:sp>
-      <p:sp>
-        <p:nvSpPr>
-          <p:cNvPr id="27" name="Text 25"/>
-          <p:cNvSpPr/>
-          <p:nvPr/>
-        </p:nvSpPr>
-        <p:spPr>
-          <a:xfrm>
-            <a:off x="640080" y="4663440"/>
-            <a:ext cx="10972800" cy="1280160"/>
+          <p:cNvPr id="3" name="Text 1"/>
+          <p:cNvSpPr/>
+          <p:nvPr/>
+        </p:nvSpPr>
+        <p:spPr>
+          <a:xfrm>
+            <a:off x="548640" y="1371600"/>
+            <a:ext cx="6035040" cy="2377440"/>
           </a:xfrm>
           <a:prstGeom prst="rect">
             <a:avLst/>
@@ -4063,7 +3778,7 @@
               <a:buChar char="•"/>
             </a:pPr>
             <a:r>
-              <a:rPr lang="en-US" sz="1500" dirty="0">
+              <a:rPr lang="en-US" sz="1450" dirty="0">
                 <a:solidFill>
                   <a:srgbClr val="333333"/>
                 </a:solidFill>
@@ -4071,9 +3786,51 @@
                 <a:ea typeface="Calibri" pitchFamily="34" charset="-122"/>
                 <a:cs typeface="Calibri" pitchFamily="34" charset="-120"/>
               </a:rPr>
-              <a:t>3Dメッシュ → 2D高さマップ → 1D位相プロファイルと、段階的に次元を落としながら情報を集約する設計。</a:t>
-            </a:r>
-            <a:endParaRPr lang="en-US" sz="1500" dirty="0"/>
+              <a:t>縄の原体が1回転するごとに同じ模様が現れる点＝同巡点。その間隔が「回転周期 T」。</a:t>
+            </a:r>
+            <a:endParaRPr lang="en-US" sz="1450" dirty="0"/>
+          </a:p>
+          <a:p>
+            <a:pPr marL="342900" indent="-342900">
+              <a:spcAft>
+                <a:spcPts val="800"/>
+              </a:spcAft>
+              <a:buSzPct val="100000"/>
+              <a:buChar char="•"/>
+            </a:pPr>
+            <a:r>
+              <a:rPr lang="en-US" sz="1450" dirty="0">
+                <a:solidFill>
+                  <a:srgbClr val="333333"/>
+                </a:solidFill>
+                <a:latin typeface="Calibri" pitchFamily="34" charset="0"/>
+                <a:ea typeface="Calibri" pitchFamily="34" charset="-122"/>
+                <a:cs typeface="Calibri" pitchFamily="34" charset="-120"/>
+              </a:rPr>
+              <a:t>高さマップを縄目方向に整列し、NCC（正規化相互相関）のプロファイルから T を推定。</a:t>
+            </a:r>
+            <a:endParaRPr lang="en-US" sz="1450" dirty="0"/>
+          </a:p>
+          <a:p>
+            <a:pPr marL="342900" indent="-342900">
+              <a:spcAft>
+                <a:spcPts val="800"/>
+              </a:spcAft>
+              <a:buSzPct val="100000"/>
+              <a:buChar char="•"/>
+            </a:pPr>
+            <a:r>
+              <a:rPr lang="en-US" sz="1450" dirty="0">
+                <a:solidFill>
+                  <a:srgbClr val="333333"/>
+                </a:solidFill>
+                <a:latin typeface="Calibri" pitchFamily="34" charset="0"/>
+                <a:ea typeface="Calibri" pitchFamily="34" charset="-122"/>
+                <a:cs typeface="Calibri" pitchFamily="34" charset="-120"/>
+              </a:rPr>
+              <a:t>アンカー点の位相を揃えて帯フィットし、同巡点の3D座標を出力する。</a:t>
+            </a:r>
+            <a:endParaRPr lang="en-US" sz="1450" dirty="0"/>
           </a:p>
           <a:p>
             <a:pPr marL="342900" indent="-342900">
@@ -4081,7 +3838,7 @@
               <a:buChar char="•"/>
             </a:pPr>
             <a:r>
-              <a:rPr lang="en-US" sz="1500" dirty="0">
+              <a:rPr lang="en-US" sz="1450" dirty="0">
                 <a:solidFill>
                   <a:srgbClr val="333333"/>
                 </a:solidFill>
@@ -4089,22 +3846,44 @@
                 <a:ea typeface="Calibri" pitchFamily="34" charset="-122"/>
                 <a:cs typeface="Calibri" pitchFamily="34" charset="-120"/>
               </a:rPr>
-              <a:t>C++17版（M1–M4）とPython版（M1–M5, numpy/scipy）を実装。合成データのテスト16件を通過済み。</a:t>
-            </a:r>
-            <a:endParaRPr lang="en-US" sz="1500" dirty="0"/>
-          </a:p>
-        </p:txBody>
-      </p:sp>
-      <p:sp>
-        <p:nvSpPr>
-          <p:cNvPr id="28" name="Text 26"/>
-          <p:cNvSpPr/>
-          <p:nvPr/>
-        </p:nvSpPr>
-        <p:spPr>
-          <a:xfrm>
-            <a:off x="548640" y="6446520"/>
-            <a:ext cx="11064240" cy="274320"/>
+              <a:t>曲面（土器の円筒面）には局所平面フィットで対応。</a:t>
+            </a:r>
+            <a:endParaRPr lang="en-US" sz="1450" dirty="0"/>
+          </a:p>
+        </p:txBody>
+      </p:sp>
+      <p:sp>
+        <p:nvSpPr>
+          <p:cNvPr id="4" name="Shape 2"/>
+          <p:cNvSpPr/>
+          <p:nvPr/>
+        </p:nvSpPr>
+        <p:spPr>
+          <a:xfrm>
+            <a:off x="548640" y="3931920"/>
+            <a:ext cx="6035040" cy="2194560"/>
+          </a:xfrm>
+          <a:prstGeom prst="roundRect">
+            <a:avLst>
+              <a:gd name="adj" fmla="val 4167"/>
+            </a:avLst>
+          </a:prstGeom>
+          <a:solidFill>
+            <a:srgbClr val="3B2A26"/>
+          </a:solidFill>
+          <a:ln/>
+        </p:spPr>
+      </p:sp>
+      <p:sp>
+        <p:nvSpPr>
+          <p:cNvPr id="5" name="Text 3"/>
+          <p:cNvSpPr/>
+          <p:nvPr/>
+        </p:nvSpPr>
+        <p:spPr>
+          <a:xfrm>
+            <a:off x="822960" y="4114800"/>
+            <a:ext cx="5486400" cy="365760"/>
           </a:xfrm>
           <a:prstGeom prst="rect">
             <a:avLst/>
@@ -4120,15 +3899,199 @@
               <a:buNone/>
             </a:pPr>
             <a:r>
-              <a:rPr lang="en-US" sz="1000" dirty="0">
-                <a:solidFill>
-                  <a:srgbClr val="7A6A62"/>
+              <a:rPr lang="en-US" sz="1400" b="1" dirty="0">
+                <a:solidFill>
+                  <a:srgbClr val="E7E8D1"/>
+                </a:solidFill>
+                <a:latin typeface="Cambria" pitchFamily="34" charset="0"/>
+                <a:ea typeface="Cambria" pitchFamily="34" charset="-122"/>
+                <a:cs typeface="Cambria" pitchFamily="34" charset="-120"/>
+              </a:rPr>
+              <a:t>合成データでの受け入れ試験（テスト16件通過）</a:t>
+            </a:r>
+            <a:endParaRPr lang="en-US" sz="1400" dirty="0"/>
+          </a:p>
+        </p:txBody>
+      </p:sp>
+      <p:sp>
+        <p:nvSpPr>
+          <p:cNvPr id="6" name="Text 4"/>
+          <p:cNvSpPr/>
+          <p:nvPr/>
+        </p:nvSpPr>
+        <p:spPr>
+          <a:xfrm>
+            <a:off x="822960" y="4572000"/>
+            <a:ext cx="5486400" cy="1463040"/>
+          </a:xfrm>
+          <a:prstGeom prst="rect">
+            <a:avLst/>
+          </a:prstGeom>
+          <a:noFill/>
+          <a:ln/>
+        </p:spPr>
+        <p:txBody>
+          <a:bodyPr wrap="square" rtlCol="0" anchor="ctr"/>
+          <a:lstStyle/>
+          <a:p>
+            <a:pPr marL="342900" indent="-342900">
+              <a:spcAft>
+                <a:spcPts val="600"/>
+              </a:spcAft>
+              <a:buSzPct val="100000"/>
+              <a:buChar char="•"/>
+            </a:pPr>
+            <a:r>
+              <a:rPr lang="en-US" sz="1300" dirty="0">
+                <a:solidFill>
+                  <a:srgbClr val="FFFFFF"/>
                 </a:solidFill>
                 <a:latin typeface="Calibri" pitchFamily="34" charset="0"/>
                 <a:ea typeface="Calibri" pitchFamily="34" charset="-122"/>
                 <a:cs typeface="Calibri" pitchFamily="34" charset="-120"/>
               </a:rPr>
-              <a:t>根拠: 04_Projects/修士研究/python/README.md, design_M5_同位相位置検出.md</a:t>
+              <a:t>既知周期に対する誤差 &lt; 2%</a:t>
+            </a:r>
+            <a:endParaRPr lang="en-US" sz="1300" dirty="0"/>
+          </a:p>
+          <a:p>
+            <a:pPr marL="342900" indent="-342900">
+              <a:spcAft>
+                <a:spcPts val="600"/>
+              </a:spcAft>
+              <a:buSzPct val="100000"/>
+              <a:buChar char="•"/>
+            </a:pPr>
+            <a:r>
+              <a:rPr lang="en-US" sz="1300" dirty="0">
+                <a:solidFill>
+                  <a:srgbClr val="FFFFFF"/>
+                </a:solidFill>
+                <a:latin typeface="Calibri" pitchFamily="34" charset="0"/>
+                <a:ea typeface="Calibri" pitchFamily="34" charset="-122"/>
+                <a:cs typeface="Calibri" pitchFamily="34" charset="-120"/>
+              </a:rPr>
+              <a:t>データ欠損20%でも誤差 &lt; 2% を維持</a:t>
+            </a:r>
+            <a:endParaRPr lang="en-US" sz="1300" dirty="0"/>
+          </a:p>
+          <a:p>
+            <a:pPr marL="342900" indent="-342900">
+              <a:buSzPct val="100000"/>
+              <a:buChar char="•"/>
+            </a:pPr>
+            <a:r>
+              <a:rPr lang="en-US" sz="1300" dirty="0">
+                <a:solidFill>
+                  <a:srgbClr val="FFFFFF"/>
+                </a:solidFill>
+                <a:latin typeface="Calibri" pitchFamily="34" charset="0"/>
+                <a:ea typeface="Calibri" pitchFamily="34" charset="-122"/>
+                <a:cs typeface="Calibri" pitchFamily="34" charset="-120"/>
+              </a:rPr>
+              <a:t>同巡点間隔が周期の整数倍に一致することを確認</a:t>
+            </a:r>
+            <a:endParaRPr lang="en-US" sz="1300" dirty="0"/>
+          </a:p>
+        </p:txBody>
+      </p:sp>
+      <p:pic>
+        <p:nvPicPr>
+          <p:cNvPr id="7" name="Image 0" descr="/Users/ryusan/brain/02_Raw/土器3（同巡点）.png">    </p:cNvPr>
+          <p:cNvPicPr>
+            <a:picLocks noChangeAspect="1"/>
+          </p:cNvPicPr>
+          <p:nvPr/>
+        </p:nvPicPr>
+        <p:blipFill>
+          <a:blip r:embed="rId1"/>
+          <a:stretch>
+            <a:fillRect/>
+          </a:stretch>
+        </p:blipFill>
+        <p:spPr>
+          <a:xfrm>
+            <a:off x="7040880" y="1463040"/>
+            <a:ext cx="4572000" cy="3236976"/>
+          </a:xfrm>
+          <a:prstGeom prst="rect">
+            <a:avLst/>
+          </a:prstGeom>
+        </p:spPr>
+      </p:pic>
+      <p:sp>
+        <p:nvSpPr>
+          <p:cNvPr id="8" name="Text 5"/>
+          <p:cNvSpPr/>
+          <p:nvPr/>
+        </p:nvSpPr>
+        <p:spPr>
+          <a:xfrm>
+            <a:off x="7040880" y="4800600"/>
+            <a:ext cx="4572000" cy="320040"/>
+          </a:xfrm>
+          <a:prstGeom prst="rect">
+            <a:avLst/>
+          </a:prstGeom>
+          <a:noFill/>
+          <a:ln/>
+        </p:spPr>
+        <p:txBody>
+          <a:bodyPr wrap="square" lIns="0" tIns="0" rIns="0" bIns="0" rtlCol="0" anchor="ctr"/>
+          <a:lstStyle/>
+          <a:p>
+            <a:pPr indent="0" marL="0">
+              <a:buNone/>
+            </a:pPr>
+            <a:r>
+              <a:rPr lang="en-US" sz="1100" dirty="0">
+                <a:solidFill>
+                  <a:srgbClr val="7A6A62"/>
+                </a:solidFill>
+                <a:latin typeface="Calibri" pitchFamily="34" charset="0"/>
+                <a:ea typeface="Calibri" pitchFamily="34" charset="-122"/>
+                <a:cs typeface="Calibri" pitchFamily="34" charset="-120"/>
+              </a:rPr>
+              <a:t>ground truth候補: 同巡点の目視位置（指導教員提供画像）</a:t>
+            </a:r>
+            <a:endParaRPr lang="en-US" sz="1100" dirty="0"/>
+          </a:p>
+        </p:txBody>
+      </p:sp>
+      <p:sp>
+        <p:nvSpPr>
+          <p:cNvPr id="9" name="Text 6"/>
+          <p:cNvSpPr/>
+          <p:nvPr/>
+        </p:nvSpPr>
+        <p:spPr>
+          <a:xfrm>
+            <a:off x="548640" y="6446520"/>
+            <a:ext cx="11064240" cy="274320"/>
+          </a:xfrm>
+          <a:prstGeom prst="rect">
+            <a:avLst/>
+          </a:prstGeom>
+          <a:noFill/>
+          <a:ln/>
+        </p:spPr>
+        <p:txBody>
+          <a:bodyPr wrap="square" lIns="0" tIns="0" rIns="0" bIns="0" rtlCol="0" anchor="ctr"/>
+          <a:lstStyle/>
+          <a:p>
+            <a:pPr indent="0" marL="0">
+              <a:buNone/>
+            </a:pPr>
+            <a:r>
+              <a:rPr lang="en-US" sz="1000" dirty="0">
+                <a:solidFill>
+                  <a:srgbClr val="7A6A62"/>
+                </a:solidFill>
+                <a:latin typeface="Calibri" pitchFamily="34" charset="0"/>
+                <a:ea typeface="Calibri" pitchFamily="34" charset="-122"/>
+                <a:cs typeface="Calibri" pitchFamily="34" charset="-120"/>
+              </a:rPr>
+              <a:t>根拠: 04_Projects/修士研究/design_M5_同位相位置検出.md, STATE.md</a:t>
             </a:r>
             <a:endParaRPr lang="en-US" sz="1000" dirty="0"/>
           </a:p>
@@ -4199,7 +4162,7 @@
                 <a:ea typeface="Cambria" pitchFamily="34" charset="-122"/>
                 <a:cs typeface="Cambria" pitchFamily="34" charset="-120"/>
               </a:rPr>
-              <a:t>講義との接点①  多変量解析の手法</a:t>
+              <a:t>現状の結果と課題</a:t>
             </a:r>
             <a:endParaRPr lang="en-US" sz="3000" dirty="0"/>
           </a:p>
@@ -4207,36 +4170,14 @@
       </p:sp>
       <p:sp>
         <p:nvSpPr>
-          <p:cNvPr id="3" name="Shape 1"/>
-          <p:cNvSpPr/>
-          <p:nvPr/>
-        </p:nvSpPr>
-        <p:spPr>
-          <a:xfrm>
-            <a:off x="548640" y="1371600"/>
-            <a:ext cx="5394960" cy="2194560"/>
-          </a:xfrm>
-          <a:prstGeom prst="roundRect">
-            <a:avLst>
-              <a:gd name="adj" fmla="val 4167"/>
-            </a:avLst>
-          </a:prstGeom>
-          <a:solidFill>
-            <a:srgbClr val="E7E8D1"/>
-          </a:solidFill>
-          <a:ln/>
-        </p:spPr>
-      </p:sp>
-      <p:sp>
-        <p:nvSpPr>
-          <p:cNvPr id="4" name="Text 2"/>
-          <p:cNvSpPr/>
-          <p:nvPr/>
-        </p:nvSpPr>
-        <p:spPr>
-          <a:xfrm>
-            <a:off x="777240" y="1508760"/>
-            <a:ext cx="4937760" cy="411480"/>
+          <p:cNvPr id="3" name="Text 1"/>
+          <p:cNvSpPr/>
+          <p:nvPr/>
+        </p:nvSpPr>
+        <p:spPr>
+          <a:xfrm>
+            <a:off x="548640" y="1325880"/>
+            <a:ext cx="5943600" cy="365760"/>
           </a:xfrm>
           <a:prstGeom prst="rect">
             <a:avLst/>
@@ -4260,7 +4201,7 @@
                 <a:ea typeface="Cambria" pitchFamily="34" charset="-122"/>
                 <a:cs typeface="Cambria" pitchFamily="34" charset="-120"/>
               </a:rPr>
-              <a:t>PCA（主成分分析）</a:t>
+              <a:t>実データ（1.ply）での出力例</a:t>
             </a:r>
             <a:endParaRPr lang="en-US" sz="1600" dirty="0"/>
           </a:p>
@@ -4268,14 +4209,36 @@
       </p:sp>
       <p:sp>
         <p:nvSpPr>
+          <p:cNvPr id="4" name="Shape 2"/>
+          <p:cNvSpPr/>
+          <p:nvPr/>
+        </p:nvSpPr>
+        <p:spPr>
+          <a:xfrm>
+            <a:off x="548640" y="1783080"/>
+            <a:ext cx="5760720" cy="2651760"/>
+          </a:xfrm>
+          <a:prstGeom prst="roundRect">
+            <a:avLst>
+              <a:gd name="adj" fmla="val 2759"/>
+            </a:avLst>
+          </a:prstGeom>
+          <a:solidFill>
+            <a:srgbClr val="2B2B2B"/>
+          </a:solidFill>
+          <a:ln/>
+        </p:spPr>
+      </p:sp>
+      <p:sp>
+        <p:nvSpPr>
           <p:cNvPr id="5" name="Text 3"/>
           <p:cNvSpPr/>
           <p:nvPr/>
         </p:nvSpPr>
         <p:spPr>
           <a:xfrm>
-            <a:off x="777240" y="1965960"/>
-            <a:ext cx="4937760" cy="1463040"/>
+            <a:off x="822960" y="1965960"/>
+            <a:ext cx="5303520" cy="2286000"/>
           </a:xfrm>
           <a:prstGeom prst="rect">
             <a:avLst/>
@@ -4292,6 +4255,190 @@
             </a:pPr>
             <a:r>
               <a:rPr lang="en-US" sz="1250" dirty="0">
+                <a:solidFill>
+                  <a:srgbClr val="A7E8A7"/>
+                </a:solidFill>
+                <a:latin typeface="Courier New" pitchFamily="34" charset="0"/>
+                <a:ea typeface="Courier New" pitchFamily="34" charset="-122"/>
+                <a:cs typeface="Courier New" pitchFamily="34" charset="-120"/>
+              </a:rPr>
+              <a:t>pitch=3.426mm  groove_dir=115.2deg</a:t>
+            </a:r>
+            <a:endParaRPr lang="en-US" sz="1250" dirty="0"/>
+          </a:p>
+          <a:p>
+            <a:pPr indent="0" marL="0">
+              <a:buNone/>
+            </a:pPr>
+            <a:r>
+              <a:rPr lang="en-US" sz="1250" dirty="0">
+                <a:solidFill>
+                  <a:srgbClr val="A7E8A7"/>
+                </a:solidFill>
+                <a:latin typeface="Courier New" pitchFamily="34" charset="0"/>
+                <a:ea typeface="Courier New" pitchFamily="34" charset="-122"/>
+                <a:cs typeface="Courier New" pitchFamily="34" charset="-120"/>
+              </a:rPr>
+              <a:t>rolling_dir=63.2deg  confidence=1.00</a:t>
+            </a:r>
+            <a:endParaRPr lang="en-US" sz="1250" dirty="0"/>
+          </a:p>
+          <a:p>
+            <a:pPr indent="0" marL="0">
+              <a:buNone/>
+            </a:pPr>
+            <a:r>
+              <a:rPr lang="en-US" sz="1250" dirty="0">
+                <a:solidFill>
+                  <a:srgbClr val="A7E8A7"/>
+                </a:solidFill>
+                <a:latin typeface="Courier New" pitchFamily="34" charset="0"/>
+                <a:ea typeface="Courier New" pitchFamily="34" charset="-122"/>
+                <a:cs typeface="Courier New" pitchFamily="34" charset="-120"/>
+              </a:rPr>
+              <a:t>period_vec=(3.100, 1.458)mm</a:t>
+            </a:r>
+            <a:endParaRPr lang="en-US" sz="1250" dirty="0"/>
+          </a:p>
+          <a:p>
+            <a:pPr indent="0" marL="0">
+              <a:buNone/>
+            </a:pPr>
+            <a:r>
+              <a:rPr lang="en-US" sz="1250" dirty="0">
+                <a:solidFill>
+                  <a:srgbClr val="A7E8A7"/>
+                </a:solidFill>
+                <a:latin typeface="Courier New" pitchFamily="34" charset="0"/>
+                <a:ea typeface="Courier New" pitchFamily="34" charset="-122"/>
+                <a:cs typeface="Courier New" pitchFamily="34" charset="-120"/>
+              </a:rPr>
+              <a:t>grid=0.20mm  detrend_window=12</a:t>
+            </a:r>
+            <a:endParaRPr lang="en-US" sz="1250" dirty="0"/>
+          </a:p>
+          <a:p>
+            <a:pPr indent="0" marL="0">
+              <a:buNone/>
+            </a:pPr>
+            <a:r>
+              <a:rPr lang="en-US" sz="1250" dirty="0">
+                <a:solidFill>
+                  <a:srgbClr val="A7E8A7"/>
+                </a:solidFill>
+                <a:latin typeface="Courier New" pitchFamily="34" charset="0"/>
+                <a:ea typeface="Courier New" pitchFamily="34" charset="-122"/>
+                <a:cs typeface="Courier New" pitchFamily="34" charset="-120"/>
+              </a:rPr>
+              <a:t>rolling_period=44.06mm</a:t>
+            </a:r>
+            <a:endParaRPr lang="en-US" sz="1250" dirty="0"/>
+          </a:p>
+          <a:p>
+            <a:pPr indent="0" marL="0">
+              <a:buNone/>
+            </a:pPr>
+            <a:r>
+              <a:rPr lang="en-US" sz="1250" dirty="0">
+                <a:solidFill>
+                  <a:srgbClr val="A7E8A7"/>
+                </a:solidFill>
+                <a:latin typeface="Courier New" pitchFamily="34" charset="0"/>
+                <a:ea typeface="Courier New" pitchFamily="34" charset="-122"/>
+                <a:cs typeface="Courier New" pitchFamily="34" charset="-120"/>
+              </a:rPr>
+              <a:t>phase_confidence=0.83  anchors=6</a:t>
+            </a:r>
+            <a:endParaRPr lang="en-US" sz="1250" dirty="0"/>
+          </a:p>
+          <a:p>
+            <a:pPr indent="0" marL="0">
+              <a:buNone/>
+            </a:pPr>
+            <a:r>
+              <a:rPr lang="en-US" sz="1250" dirty="0">
+                <a:solidFill>
+                  <a:srgbClr val="A7E8A7"/>
+                </a:solidFill>
+                <a:latin typeface="Courier New" pitchFamily="34" charset="0"/>
+                <a:ea typeface="Courier New" pitchFamily="34" charset="-122"/>
+                <a:cs typeface="Courier New" pitchFamily="34" charset="-120"/>
+              </a:rPr>
+              <a:t>anchor[0]=(17.255, -12.212, 6.215)</a:t>
+            </a:r>
+            <a:endParaRPr lang="en-US" sz="1250" dirty="0"/>
+          </a:p>
+        </p:txBody>
+      </p:sp>
+      <p:sp>
+        <p:nvSpPr>
+          <p:cNvPr id="6" name="Text 4"/>
+          <p:cNvSpPr/>
+          <p:nvPr/>
+        </p:nvSpPr>
+        <p:spPr>
+          <a:xfrm>
+            <a:off x="6766560" y="1325880"/>
+            <a:ext cx="4846320" cy="365760"/>
+          </a:xfrm>
+          <a:prstGeom prst="rect">
+            <a:avLst/>
+          </a:prstGeom>
+          <a:noFill/>
+          <a:ln/>
+        </p:spPr>
+        <p:txBody>
+          <a:bodyPr wrap="square" lIns="0" tIns="0" rIns="0" bIns="0" rtlCol="0" anchor="ctr"/>
+          <a:lstStyle/>
+          <a:p>
+            <a:pPr indent="0" marL="0">
+              <a:buNone/>
+            </a:pPr>
+            <a:r>
+              <a:rPr lang="en-US" sz="1600" b="1" dirty="0">
+                <a:solidFill>
+                  <a:srgbClr val="B85042"/>
+                </a:solidFill>
+                <a:latin typeface="Cambria" pitchFamily="34" charset="0"/>
+                <a:ea typeface="Cambria" pitchFamily="34" charset="-122"/>
+                <a:cs typeface="Cambria" pitchFamily="34" charset="-120"/>
+              </a:rPr>
+              <a:t>残る課題</a:t>
+            </a:r>
+            <a:endParaRPr lang="en-US" sz="1600" dirty="0"/>
+          </a:p>
+        </p:txBody>
+      </p:sp>
+      <p:sp>
+        <p:nvSpPr>
+          <p:cNvPr id="7" name="Text 5"/>
+          <p:cNvSpPr/>
+          <p:nvPr/>
+        </p:nvSpPr>
+        <p:spPr>
+          <a:xfrm>
+            <a:off x="6766560" y="1783080"/>
+            <a:ext cx="4846320" cy="2926080"/>
+          </a:xfrm>
+          <a:prstGeom prst="rect">
+            <a:avLst/>
+          </a:prstGeom>
+          <a:noFill/>
+          <a:ln/>
+        </p:spPr>
+        <p:txBody>
+          <a:bodyPr wrap="square" rtlCol="0" anchor="ctr"/>
+          <a:lstStyle/>
+          <a:p>
+            <a:pPr marL="342900" indent="-342900">
+              <a:spcAft>
+                <a:spcPts val="800"/>
+              </a:spcAft>
+              <a:buSzPct val="100000"/>
+              <a:buChar char="•"/>
+            </a:pPr>
+            <a:r>
+              <a:rPr lang="en-US" sz="1350" dirty="0">
                 <a:solidFill>
                   <a:srgbClr val="333333"/>
                 </a:solidFill>
@@ -4299,99 +4446,20 @@
                 <a:ea typeface="Calibri" pitchFamily="34" charset="-122"/>
                 <a:cs typeface="Calibri" pitchFamily="34" charset="-120"/>
               </a:rPr>
-              <a:t>M3: 対象面の頂点群3次元座標にPCAを適用し、第1・第2主成分で局所平面を張って高さマップ（第3成分＝高さ）を作る。第4回で学んだ次元削減の直接応用。</a:t>
-            </a:r>
-            <a:endParaRPr lang="en-US" sz="1250" dirty="0"/>
-          </a:p>
-        </p:txBody>
-      </p:sp>
-      <p:sp>
-        <p:nvSpPr>
-          <p:cNvPr id="6" name="Shape 4"/>
-          <p:cNvSpPr/>
-          <p:nvPr/>
-        </p:nvSpPr>
-        <p:spPr>
-          <a:xfrm>
-            <a:off x="6263640" y="1371600"/>
-            <a:ext cx="5394960" cy="2194560"/>
-          </a:xfrm>
-          <a:prstGeom prst="roundRect">
-            <a:avLst>
-              <a:gd name="adj" fmla="val 4167"/>
-            </a:avLst>
-          </a:prstGeom>
-          <a:solidFill>
-            <a:srgbClr val="E7E8D1"/>
-          </a:solidFill>
-          <a:ln/>
-        </p:spPr>
-      </p:sp>
-      <p:sp>
-        <p:nvSpPr>
-          <p:cNvPr id="7" name="Text 5"/>
-          <p:cNvSpPr/>
-          <p:nvPr/>
-        </p:nvSpPr>
-        <p:spPr>
-          <a:xfrm>
-            <a:off x="6492240" y="1508760"/>
-            <a:ext cx="4937760" cy="411480"/>
-          </a:xfrm>
-          <a:prstGeom prst="rect">
-            <a:avLst/>
-          </a:prstGeom>
-          <a:noFill/>
-          <a:ln/>
-        </p:spPr>
-        <p:txBody>
-          <a:bodyPr wrap="square" lIns="0" tIns="0" rIns="0" bIns="0" rtlCol="0" anchor="ctr"/>
-          <a:lstStyle/>
-          <a:p>
-            <a:pPr indent="0" marL="0">
-              <a:buNone/>
-            </a:pPr>
-            <a:r>
-              <a:rPr lang="en-US" sz="1600" b="1" dirty="0">
-                <a:solidFill>
-                  <a:srgbClr val="B85042"/>
-                </a:solidFill>
-                <a:latin typeface="Cambria" pitchFamily="34" charset="0"/>
-                <a:ea typeface="Cambria" pitchFamily="34" charset="-122"/>
-                <a:cs typeface="Cambria" pitchFamily="34" charset="-120"/>
-              </a:rPr>
-              <a:t>クラスタリング</a:t>
-            </a:r>
-            <a:endParaRPr lang="en-US" sz="1600" dirty="0"/>
-          </a:p>
-        </p:txBody>
-      </p:sp>
-      <p:sp>
-        <p:nvSpPr>
-          <p:cNvPr id="8" name="Text 6"/>
-          <p:cNvSpPr/>
-          <p:nvPr/>
-        </p:nvSpPr>
-        <p:spPr>
-          <a:xfrm>
-            <a:off x="6492240" y="1965960"/>
-            <a:ext cx="4937760" cy="1463040"/>
-          </a:xfrm>
-          <a:prstGeom prst="rect">
-            <a:avLst/>
-          </a:prstGeom>
-          <a:noFill/>
-          <a:ln/>
-        </p:spPr>
-        <p:txBody>
-          <a:bodyPr wrap="square" lIns="0" tIns="0" rIns="0" bIns="0" rtlCol="0" anchor="ctr"/>
-          <a:lstStyle/>
-          <a:p>
-            <a:pPr indent="0" marL="0">
-              <a:buNone/>
-            </a:pPr>
-            <a:r>
-              <a:rPr lang="en-US" sz="1250" dirty="0">
+              <a:t>実データ上の同巡点3D座標の正解（ground truth）が未入手 → 定量評価が保留中</a:t>
+            </a:r>
+            <a:endParaRPr lang="en-US" sz="1350" dirty="0"/>
+          </a:p>
+          <a:p>
+            <a:pPr marL="342900" indent="-342900">
+              <a:spcAft>
+                <a:spcPts val="800"/>
+              </a:spcAft>
+              <a:buSzPct val="100000"/>
+              <a:buChar char="•"/>
+            </a:pPr>
+            <a:r>
+              <a:rPr lang="en-US" sz="1350" dirty="0">
                 <a:solidFill>
                   <a:srgbClr val="333333"/>
                 </a:solidFill>
@@ -4399,99 +4467,20 @@
                 <a:ea typeface="Calibri" pitchFamily="34" charset="-122"/>
                 <a:cs typeface="Calibri" pitchFamily="34" charset="-120"/>
               </a:rPr>
-              <a:t>M2: 頂点法線ベクトルのクラスタリングで「縄目のある面」だけを切り出す。第5回のクラスタ分析の考え方と同じ。</a:t>
-            </a:r>
-            <a:endParaRPr lang="en-US" sz="1250" dirty="0"/>
-          </a:p>
-        </p:txBody>
-      </p:sp>
-      <p:sp>
-        <p:nvSpPr>
-          <p:cNvPr id="9" name="Shape 7"/>
-          <p:cNvSpPr/>
-          <p:nvPr/>
-        </p:nvSpPr>
-        <p:spPr>
-          <a:xfrm>
-            <a:off x="548640" y="3794760"/>
-            <a:ext cx="5394960" cy="2194560"/>
-          </a:xfrm>
-          <a:prstGeom prst="roundRect">
-            <a:avLst>
-              <a:gd name="adj" fmla="val 4167"/>
-            </a:avLst>
-          </a:prstGeom>
-          <a:solidFill>
-            <a:srgbClr val="E7E8D1"/>
-          </a:solidFill>
-          <a:ln/>
-        </p:spPr>
-      </p:sp>
-      <p:sp>
-        <p:nvSpPr>
-          <p:cNvPr id="10" name="Text 8"/>
-          <p:cNvSpPr/>
-          <p:nvPr/>
-        </p:nvSpPr>
-        <p:spPr>
-          <a:xfrm>
-            <a:off x="777240" y="3931920"/>
-            <a:ext cx="4937760" cy="411480"/>
-          </a:xfrm>
-          <a:prstGeom prst="rect">
-            <a:avLst/>
-          </a:prstGeom>
-          <a:noFill/>
-          <a:ln/>
-        </p:spPr>
-        <p:txBody>
-          <a:bodyPr wrap="square" lIns="0" tIns="0" rIns="0" bIns="0" rtlCol="0" anchor="ctr"/>
-          <a:lstStyle/>
-          <a:p>
-            <a:pPr indent="0" marL="0">
-              <a:buNone/>
-            </a:pPr>
-            <a:r>
-              <a:rPr lang="en-US" sz="1600" b="1" dirty="0">
-                <a:solidFill>
-                  <a:srgbClr val="B85042"/>
-                </a:solidFill>
-                <a:latin typeface="Cambria" pitchFamily="34" charset="0"/>
-                <a:ea typeface="Cambria" pitchFamily="34" charset="-122"/>
-                <a:cs typeface="Cambria" pitchFamily="34" charset="-120"/>
-              </a:rPr>
-              <a:t>構造テンソル（固有値分解）</a:t>
-            </a:r>
-            <a:endParaRPr lang="en-US" sz="1600" dirty="0"/>
-          </a:p>
-        </p:txBody>
-      </p:sp>
-      <p:sp>
-        <p:nvSpPr>
-          <p:cNvPr id="11" name="Text 9"/>
-          <p:cNvSpPr/>
-          <p:nvPr/>
-        </p:nvSpPr>
-        <p:spPr>
-          <a:xfrm>
-            <a:off x="777240" y="4389120"/>
-            <a:ext cx="4937760" cy="1463040"/>
-          </a:xfrm>
-          <a:prstGeom prst="rect">
-            <a:avLst/>
-          </a:prstGeom>
-          <a:noFill/>
-          <a:ln/>
-        </p:spPr>
-        <p:txBody>
-          <a:bodyPr wrap="square" lIns="0" tIns="0" rIns="0" bIns="0" rtlCol="0" anchor="ctr"/>
-          <a:lstStyle/>
-          <a:p>
-            <a:pPr indent="0" marL="0">
-              <a:buNone/>
-            </a:pPr>
-            <a:r>
-              <a:rPr lang="en-US" sz="1250" dirty="0">
+              <a:t>MeshLab Picked Pointsによる正解座標を指導教員に依頼中</a:t>
+            </a:r>
+            <a:endParaRPr lang="en-US" sz="1350" dirty="0"/>
+          </a:p>
+          <a:p>
+            <a:pPr marL="342900" indent="-342900">
+              <a:spcAft>
+                <a:spcPts val="800"/>
+              </a:spcAft>
+              <a:buSzPct val="100000"/>
+              <a:buChar char="•"/>
+            </a:pPr>
+            <a:r>
+              <a:rPr lang="en-US" sz="1350" dirty="0">
                 <a:solidFill>
                   <a:srgbClr val="333333"/>
                 </a:solidFill>
@@ -4499,99 +4488,17 @@
                 <a:ea typeface="Calibri" pitchFamily="34" charset="-122"/>
                 <a:cs typeface="Calibri" pitchFamily="34" charset="-120"/>
               </a:rPr>
-              <a:t>M4: 勾配の共分散行列の固有ベクトルから縄の走行方向を推定。分散共分散行列と固有値分解という多変量解析の基本操作。</a:t>
-            </a:r>
-            <a:endParaRPr lang="en-US" sz="1250" dirty="0"/>
-          </a:p>
-        </p:txBody>
-      </p:sp>
-      <p:sp>
-        <p:nvSpPr>
-          <p:cNvPr id="12" name="Shape 10"/>
-          <p:cNvSpPr/>
-          <p:nvPr/>
-        </p:nvSpPr>
-        <p:spPr>
-          <a:xfrm>
-            <a:off x="6263640" y="3794760"/>
-            <a:ext cx="5394960" cy="2194560"/>
-          </a:xfrm>
-          <a:prstGeom prst="roundRect">
-            <a:avLst>
-              <a:gd name="adj" fmla="val 4167"/>
-            </a:avLst>
-          </a:prstGeom>
-          <a:solidFill>
-            <a:srgbClr val="E7E8D1"/>
-          </a:solidFill>
-          <a:ln/>
-        </p:spPr>
-      </p:sp>
-      <p:sp>
-        <p:nvSpPr>
-          <p:cNvPr id="13" name="Text 11"/>
-          <p:cNvSpPr/>
-          <p:nvPr/>
-        </p:nvSpPr>
-        <p:spPr>
-          <a:xfrm>
-            <a:off x="6492240" y="3931920"/>
-            <a:ext cx="4937760" cy="411480"/>
-          </a:xfrm>
-          <a:prstGeom prst="rect">
-            <a:avLst/>
-          </a:prstGeom>
-          <a:noFill/>
-          <a:ln/>
-        </p:spPr>
-        <p:txBody>
-          <a:bodyPr wrap="square" lIns="0" tIns="0" rIns="0" bIns="0" rtlCol="0" anchor="ctr"/>
-          <a:lstStyle/>
-          <a:p>
-            <a:pPr indent="0" marL="0">
-              <a:buNone/>
-            </a:pPr>
-            <a:r>
-              <a:rPr lang="en-US" sz="1600" b="1" dirty="0">
-                <a:solidFill>
-                  <a:srgbClr val="B85042"/>
-                </a:solidFill>
-                <a:latin typeface="Cambria" pitchFamily="34" charset="0"/>
-                <a:ea typeface="Cambria" pitchFamily="34" charset="-122"/>
-                <a:cs typeface="Cambria" pitchFamily="34" charset="-120"/>
-              </a:rPr>
-              <a:t>相関・NCC</a:t>
-            </a:r>
-            <a:endParaRPr lang="en-US" sz="1600" dirty="0"/>
-          </a:p>
-        </p:txBody>
-      </p:sp>
-      <p:sp>
-        <p:nvSpPr>
-          <p:cNvPr id="14" name="Text 12"/>
-          <p:cNvSpPr/>
-          <p:nvPr/>
-        </p:nvSpPr>
-        <p:spPr>
-          <a:xfrm>
-            <a:off x="6492240" y="4389120"/>
-            <a:ext cx="4937760" cy="1463040"/>
-          </a:xfrm>
-          <a:prstGeom prst="rect">
-            <a:avLst/>
-          </a:prstGeom>
-          <a:noFill/>
-          <a:ln/>
-        </p:spPr>
-        <p:txBody>
-          <a:bodyPr wrap="square" lIns="0" tIns="0" rIns="0" bIns="0" rtlCol="0" anchor="ctr"/>
-          <a:lstStyle/>
-          <a:p>
-            <a:pPr indent="0" marL="0">
-              <a:buNone/>
-            </a:pPr>
-            <a:r>
-              <a:rPr lang="en-US" sz="1250" dirty="0">
+              <a:t>パラメータ（格子ピッチ・周期探索範囲）が手動指定のまま</a:t>
+            </a:r>
+            <a:endParaRPr lang="en-US" sz="1350" dirty="0"/>
+          </a:p>
+          <a:p>
+            <a:pPr marL="342900" indent="-342900">
+              <a:buSzPct val="100000"/>
+              <a:buChar char="•"/>
+            </a:pPr>
+            <a:r>
+              <a:rPr lang="en-US" sz="1350" dirty="0">
                 <a:solidFill>
                   <a:srgbClr val="333333"/>
                 </a:solidFill>
@@ -4599,15 +4506,15 @@
                 <a:ea typeface="Calibri" pitchFamily="34" charset="-122"/>
                 <a:cs typeface="Calibri" pitchFamily="34" charset="-120"/>
               </a:rPr>
-              <a:t>M4/M5: 2D自己相関で周期ベクトルを、正規化相互相関（NCC）で同位相位置を検出。相関係数の空間パターンへの拡張。</a:t>
-            </a:r>
-            <a:endParaRPr lang="en-US" sz="1250" dirty="0"/>
-          </a:p>
-        </p:txBody>
-      </p:sp>
-      <p:sp>
-        <p:nvSpPr>
-          <p:cNvPr id="15" name="Text 13"/>
+              <a:t>曲面対応は局所平面フィット近似 → 円筒フィット＋展開への拡張を検討</a:t>
+            </a:r>
+            <a:endParaRPr lang="en-US" sz="1350" dirty="0"/>
+          </a:p>
+        </p:txBody>
+      </p:sp>
+      <p:sp>
+        <p:nvSpPr>
+          <p:cNvPr id="8" name="Text 6"/>
           <p:cNvSpPr/>
           <p:nvPr/>
         </p:nvSpPr>
@@ -4638,7 +4545,7 @@
                 <a:ea typeface="Calibri" pitchFamily="34" charset="-122"/>
                 <a:cs typeface="Calibri" pitchFamily="34" charset="-120"/>
               </a:rPr>
-              <a:t>根拠: 04_Projects/修士研究/python/README.md（height_map.py, face_extract.py, autocorr2d.py, phase_detect.py）</a:t>
+              <a:t>根拠: 04_Projects/修士研究/STATE.md, python/README.md</a:t>
             </a:r>
             <a:endParaRPr lang="en-US" sz="1000" dirty="0"/>
           </a:p>
@@ -4709,7 +4616,7 @@
                 <a:ea typeface="Cambria" pitchFamily="34" charset="-122"/>
                 <a:cs typeface="Cambria" pitchFamily="34" charset="-120"/>
               </a:rPr>
-              <a:t>講義との接点②  大規模計算・並列化</a:t>
+              <a:t>効率化の前提 — 3Dメッシュは「大規模データ」</a:t>
             </a:r>
             <a:endParaRPr lang="en-US" sz="3000" dirty="0"/>
           </a:p>
@@ -4723,12 +4630,12 @@
         </p:nvSpPr>
         <p:spPr>
           <a:xfrm>
-            <a:off x="548640" y="1371600"/>
-            <a:ext cx="11064240" cy="1463040"/>
+            <a:off x="548640" y="1463040"/>
+            <a:ext cx="3566160" cy="2011680"/>
           </a:xfrm>
           <a:prstGeom prst="roundRect">
             <a:avLst>
-              <a:gd name="adj" fmla="val 6250"/>
+              <a:gd name="adj" fmla="val 4545"/>
             </a:avLst>
           </a:prstGeom>
           <a:solidFill>
@@ -4745,24 +4652,24 @@
         </p:nvSpPr>
         <p:spPr>
           <a:xfrm>
-            <a:off x="777240" y="1481328"/>
-            <a:ext cx="2926080" cy="1188720"/>
-          </a:xfrm>
-          <a:prstGeom prst="rect">
-            <a:avLst/>
-          </a:prstGeom>
-          <a:noFill/>
-          <a:ln/>
-        </p:spPr>
-        <p:txBody>
-          <a:bodyPr wrap="square" lIns="0" tIns="0" rIns="0" bIns="0" rtlCol="0" anchor="ctr"/>
-          <a:lstStyle/>
-          <a:p>
-            <a:pPr indent="0" marL="0">
-              <a:buNone/>
-            </a:pPr>
-            <a:r>
-              <a:rPr lang="en-US" sz="1600" b="1" dirty="0">
+            <a:off x="548640" y="1691640"/>
+            <a:ext cx="3566160" cy="1005840"/>
+          </a:xfrm>
+          <a:prstGeom prst="rect">
+            <a:avLst/>
+          </a:prstGeom>
+          <a:noFill/>
+          <a:ln/>
+        </p:spPr>
+        <p:txBody>
+          <a:bodyPr wrap="square" lIns="0" tIns="0" rIns="0" bIns="0" rtlCol="0" anchor="ctr"/>
+          <a:lstStyle/>
+          <a:p>
+            <a:pPr algn="ctr" indent="0" marL="0">
+              <a:buNone/>
+            </a:pPr>
+            <a:r>
+              <a:rPr lang="en-US" sz="5400" b="1" dirty="0">
                 <a:solidFill>
                   <a:srgbClr val="B85042"/>
                 </a:solidFill>
@@ -4770,9 +4677,9 @@
                 <a:ea typeface="Cambria" pitchFamily="34" charset="-122"/>
                 <a:cs typeface="Cambria" pitchFamily="34" charset="-120"/>
               </a:rPr>
-              <a:t>FFTによる高速化</a:t>
-            </a:r>
-            <a:endParaRPr lang="en-US" sz="1600" dirty="0"/>
+              <a:t>741万</a:t>
+            </a:r>
+            <a:endParaRPr lang="en-US" sz="5400" dirty="0"/>
           </a:p>
         </p:txBody>
       </p:sp>
@@ -4784,24 +4691,24 @@
         </p:nvSpPr>
         <p:spPr>
           <a:xfrm>
-            <a:off x="3840480" y="1508760"/>
-            <a:ext cx="7498080" cy="1234440"/>
-          </a:xfrm>
-          <a:prstGeom prst="rect">
-            <a:avLst/>
-          </a:prstGeom>
-          <a:noFill/>
-          <a:ln/>
-        </p:spPr>
-        <p:txBody>
-          <a:bodyPr wrap="square" lIns="0" tIns="0" rIns="0" bIns="0" rtlCol="0" anchor="ctr"/>
-          <a:lstStyle/>
-          <a:p>
-            <a:pPr indent="0" marL="0">
-              <a:buNone/>
-            </a:pPr>
-            <a:r>
-              <a:rPr lang="en-US" sz="1300" dirty="0">
+            <a:off x="548640" y="2788920"/>
+            <a:ext cx="3566160" cy="457200"/>
+          </a:xfrm>
+          <a:prstGeom prst="rect">
+            <a:avLst/>
+          </a:prstGeom>
+          <a:noFill/>
+          <a:ln/>
+        </p:spPr>
+        <p:txBody>
+          <a:bodyPr wrap="square" lIns="0" tIns="0" rIns="0" bIns="0" rtlCol="0" anchor="ctr"/>
+          <a:lstStyle/>
+          <a:p>
+            <a:pPr algn="ctr" indent="0" marL="0">
+              <a:buNone/>
+            </a:pPr>
+            <a:r>
+              <a:rPr lang="en-US" sz="1400" dirty="0">
                 <a:solidFill>
                   <a:srgbClr val="333333"/>
                 </a:solidFill>
@@ -4809,9 +4716,9 @@
                 <a:ea typeface="Calibri" pitchFamily="34" charset="-122"/>
                 <a:cs typeface="Calibri" pitchFamily="34" charset="-120"/>
               </a:rPr>
-              <a:t>2D自己相関は素朴に計算するとO(N⁴)。FFTを使いO(N² log N)へ削減。第11回の「アルゴリズムによる計算量削減」の実例。</a:t>
-            </a:r>
-            <a:endParaRPr lang="en-US" sz="1300" dirty="0"/>
+              <a:t>頂点数（土器片 1.ply）</a:t>
+            </a:r>
+            <a:endParaRPr lang="en-US" sz="1400" dirty="0"/>
           </a:p>
         </p:txBody>
       </p:sp>
@@ -4823,12 +4730,12 @@
         </p:nvSpPr>
         <p:spPr>
           <a:xfrm>
-            <a:off x="548640" y="3017520"/>
-            <a:ext cx="11064240" cy="1463040"/>
+            <a:off x="4434840" y="1463040"/>
+            <a:ext cx="3566160" cy="2011680"/>
           </a:xfrm>
           <a:prstGeom prst="roundRect">
             <a:avLst>
-              <a:gd name="adj" fmla="val 6250"/>
+              <a:gd name="adj" fmla="val 4545"/>
             </a:avLst>
           </a:prstGeom>
           <a:solidFill>
@@ -4845,24 +4752,24 @@
         </p:nvSpPr>
         <p:spPr>
           <a:xfrm>
-            <a:off x="777240" y="3127248"/>
-            <a:ext cx="2926080" cy="1188720"/>
-          </a:xfrm>
-          <a:prstGeom prst="rect">
-            <a:avLst/>
-          </a:prstGeom>
-          <a:noFill/>
-          <a:ln/>
-        </p:spPr>
-        <p:txBody>
-          <a:bodyPr wrap="square" lIns="0" tIns="0" rIns="0" bIns="0" rtlCol="0" anchor="ctr"/>
-          <a:lstStyle/>
-          <a:p>
-            <a:pPr indent="0" marL="0">
-              <a:buNone/>
-            </a:pPr>
-            <a:r>
-              <a:rPr lang="en-US" sz="1600" b="1" dirty="0">
+            <a:off x="4434840" y="1691640"/>
+            <a:ext cx="3566160" cy="1005840"/>
+          </a:xfrm>
+          <a:prstGeom prst="rect">
+            <a:avLst/>
+          </a:prstGeom>
+          <a:noFill/>
+          <a:ln/>
+        </p:spPr>
+        <p:txBody>
+          <a:bodyPr wrap="square" lIns="0" tIns="0" rIns="0" bIns="0" rtlCol="0" anchor="ctr"/>
+          <a:lstStyle/>
+          <a:p>
+            <a:pPr algn="ctr" indent="0" marL="0">
+              <a:buNone/>
+            </a:pPr>
+            <a:r>
+              <a:rPr lang="en-US" sz="5400" b="1" dirty="0">
                 <a:solidFill>
                   <a:srgbClr val="B85042"/>
                 </a:solidFill>
@@ -4870,9 +4777,9 @@
                 <a:ea typeface="Cambria" pitchFamily="34" charset="-122"/>
                 <a:cs typeface="Cambria" pitchFamily="34" charset="-120"/>
               </a:rPr>
-              <a:t>並列化できる箇所</a:t>
-            </a:r>
-            <a:endParaRPr lang="en-US" sz="1600" dirty="0"/>
+              <a:t>697万</a:t>
+            </a:r>
+            <a:endParaRPr lang="en-US" sz="5400" dirty="0"/>
           </a:p>
         </p:txBody>
       </p:sp>
@@ -4884,24 +4791,24 @@
         </p:nvSpPr>
         <p:spPr>
           <a:xfrm>
-            <a:off x="3840480" y="3154680"/>
-            <a:ext cx="7498080" cy="1234440"/>
-          </a:xfrm>
-          <a:prstGeom prst="rect">
-            <a:avLst/>
-          </a:prstGeom>
-          <a:noFill/>
-          <a:ln/>
-        </p:spPr>
-        <p:txBody>
-          <a:bodyPr wrap="square" lIns="0" tIns="0" rIns="0" bIns="0" rtlCol="0" anchor="ctr"/>
-          <a:lstStyle/>
-          <a:p>
-            <a:pPr indent="0" marL="0">
-              <a:buNone/>
-            </a:pPr>
-            <a:r>
-              <a:rPr lang="en-US" sz="1300" dirty="0">
+            <a:off x="4434840" y="2788920"/>
+            <a:ext cx="3566160" cy="457200"/>
+          </a:xfrm>
+          <a:prstGeom prst="rect">
+            <a:avLst/>
+          </a:prstGeom>
+          <a:noFill/>
+          <a:ln/>
+        </p:spPr>
+        <p:txBody>
+          <a:bodyPr wrap="square" lIns="0" tIns="0" rIns="0" bIns="0" rtlCol="0" anchor="ctr"/>
+          <a:lstStyle/>
+          <a:p>
+            <a:pPr algn="ctr" indent="0" marL="0">
+              <a:buNone/>
+            </a:pPr>
+            <a:r>
+              <a:rPr lang="en-US" sz="1400" dirty="0">
                 <a:solidFill>
                   <a:srgbClr val="333333"/>
                 </a:solidFill>
@@ -4909,9 +4816,9 @@
                 <a:ea typeface="Calibri" pitchFamily="34" charset="-122"/>
                 <a:cs typeface="Calibri" pitchFamily="34" charset="-120"/>
               </a:rPr>
-              <a:t>格子サンプリング（各格子点の独立計算）、NCCプロファイル（各シフト量の独立評価）、複数土器片のバッチ処理は、GAの個体評価と同じ「互いに依存しない計算」であり並列化可能。</a:t>
-            </a:r>
-            <a:endParaRPr lang="en-US" sz="1300" dirty="0"/>
+              <a:t>頂点数（土器片 3.ply）</a:t>
+            </a:r>
+            <a:endParaRPr lang="en-US" sz="1400" dirty="0"/>
           </a:p>
         </p:txBody>
       </p:sp>
@@ -4923,16 +4830,16 @@
         </p:nvSpPr>
         <p:spPr>
           <a:xfrm>
-            <a:off x="548640" y="4663440"/>
-            <a:ext cx="11064240" cy="1463040"/>
+            <a:off x="8321040" y="1463040"/>
+            <a:ext cx="3566160" cy="2011680"/>
           </a:xfrm>
           <a:prstGeom prst="roundRect">
             <a:avLst>
-              <a:gd name="adj" fmla="val 6250"/>
+              <a:gd name="adj" fmla="val 4545"/>
             </a:avLst>
           </a:prstGeom>
           <a:solidFill>
-            <a:srgbClr val="B85042"/>
+            <a:srgbClr val="E7E8D1"/>
           </a:solidFill>
           <a:ln/>
         </p:spPr>
@@ -4945,34 +4852,34 @@
         </p:nvSpPr>
         <p:spPr>
           <a:xfrm>
-            <a:off x="777240" y="4773168"/>
-            <a:ext cx="2926080" cy="1188720"/>
-          </a:xfrm>
-          <a:prstGeom prst="rect">
-            <a:avLst/>
-          </a:prstGeom>
-          <a:noFill/>
-          <a:ln/>
-        </p:spPr>
-        <p:txBody>
-          <a:bodyPr wrap="square" lIns="0" tIns="0" rIns="0" bIns="0" rtlCol="0" anchor="ctr"/>
-          <a:lstStyle/>
-          <a:p>
-            <a:pPr indent="0" marL="0">
-              <a:buNone/>
-            </a:pPr>
-            <a:r>
-              <a:rPr lang="en-US" sz="1600" b="1" dirty="0">
-                <a:solidFill>
-                  <a:srgbClr val="FFFFFF"/>
+            <a:off x="8321040" y="1691640"/>
+            <a:ext cx="3566160" cy="1005840"/>
+          </a:xfrm>
+          <a:prstGeom prst="rect">
+            <a:avLst/>
+          </a:prstGeom>
+          <a:noFill/>
+          <a:ln/>
+        </p:spPr>
+        <p:txBody>
+          <a:bodyPr wrap="square" lIns="0" tIns="0" rIns="0" bIns="0" rtlCol="0" anchor="ctr"/>
+          <a:lstStyle/>
+          <a:p>
+            <a:pPr algn="ctr" indent="0" marL="0">
+              <a:buNone/>
+            </a:pPr>
+            <a:r>
+              <a:rPr lang="en-US" sz="5400" b="1" dirty="0">
+                <a:solidFill>
+                  <a:srgbClr val="A7BEAE"/>
                 </a:solidFill>
                 <a:latin typeface="Cambria" pitchFamily="34" charset="0"/>
                 <a:ea typeface="Cambria" pitchFamily="34" charset="-122"/>
                 <a:cs typeface="Cambria" pitchFamily="34" charset="-120"/>
               </a:rPr>
-              <a:t>並列化のコスト</a:t>
-            </a:r>
-            <a:endParaRPr lang="en-US" sz="1600" dirty="0"/>
+              <a:t>0.2 mm</a:t>
+            </a:r>
+            <a:endParaRPr lang="en-US" sz="5400" dirty="0"/>
           </a:p>
         </p:txBody>
       </p:sp>
@@ -4984,34 +4891,34 @@
         </p:nvSpPr>
         <p:spPr>
           <a:xfrm>
-            <a:off x="3840480" y="4800600"/>
-            <a:ext cx="7498080" cy="1234440"/>
-          </a:xfrm>
-          <a:prstGeom prst="rect">
-            <a:avLst/>
-          </a:prstGeom>
-          <a:noFill/>
-          <a:ln/>
-        </p:spPr>
-        <p:txBody>
-          <a:bodyPr wrap="square" lIns="0" tIns="0" rIns="0" bIns="0" rtlCol="0" anchor="ctr"/>
-          <a:lstStyle/>
-          <a:p>
-            <a:pPr indent="0" marL="0">
-              <a:buNone/>
-            </a:pPr>
-            <a:r>
-              <a:rPr lang="en-US" sz="1300" dirty="0">
-                <a:solidFill>
-                  <a:srgbClr val="FFFFFF"/>
+            <a:off x="8321040" y="2788920"/>
+            <a:ext cx="3566160" cy="457200"/>
+          </a:xfrm>
+          <a:prstGeom prst="rect">
+            <a:avLst/>
+          </a:prstGeom>
+          <a:noFill/>
+          <a:ln/>
+        </p:spPr>
+        <p:txBody>
+          <a:bodyPr wrap="square" lIns="0" tIns="0" rIns="0" bIns="0" rtlCol="0" anchor="ctr"/>
+          <a:lstStyle/>
+          <a:p>
+            <a:pPr algn="ctr" indent="0" marL="0">
+              <a:buNone/>
+            </a:pPr>
+            <a:r>
+              <a:rPr lang="en-US" sz="1400" dirty="0">
+                <a:solidFill>
+                  <a:srgbClr val="333333"/>
                 </a:solidFill>
                 <a:latin typeface="Calibri" pitchFamily="34" charset="0"/>
                 <a:ea typeface="Calibri" pitchFamily="34" charset="-122"/>
                 <a:cs typeface="Calibri" pitchFamily="34" charset="-120"/>
               </a:rPr>
-              <a:t>第12回のGA実験では、1タスクが軽い場合はWorker準備・データ受け渡しのオーバーヘッドが勝り、逆に遅くなった。本研究でも「1タスクの重さ」を見てから並列化を判断する。</a:t>
-            </a:r>
-            <a:endParaRPr lang="en-US" sz="1300" dirty="0"/>
+              <a:t>高さマップの格子解像度</a:t>
+            </a:r>
+            <a:endParaRPr lang="en-US" sz="1400" dirty="0"/>
           </a:p>
         </p:txBody>
       </p:sp>
@@ -5023,32 +4930,114 @@
         </p:nvSpPr>
         <p:spPr>
           <a:xfrm>
-            <a:off x="548640" y="6446520"/>
-            <a:ext cx="11064240" cy="274320"/>
-          </a:xfrm>
-          <a:prstGeom prst="rect">
-            <a:avLst/>
-          </a:prstGeom>
-          <a:noFill/>
-          <a:ln/>
-        </p:spPr>
-        <p:txBody>
-          <a:bodyPr wrap="square" lIns="0" tIns="0" rIns="0" bIns="0" rtlCol="0" anchor="ctr"/>
-          <a:lstStyle/>
-          <a:p>
-            <a:pPr indent="0" marL="0">
-              <a:buNone/>
-            </a:pPr>
-            <a:r>
-              <a:rPr lang="en-US" sz="1000" dirty="0">
-                <a:solidFill>
-                  <a:srgbClr val="7A6A62"/>
+            <a:off x="640080" y="3931920"/>
+            <a:ext cx="10972800" cy="2103120"/>
+          </a:xfrm>
+          <a:prstGeom prst="rect">
+            <a:avLst/>
+          </a:prstGeom>
+          <a:noFill/>
+          <a:ln/>
+        </p:spPr>
+        <p:txBody>
+          <a:bodyPr wrap="square" rtlCol="0" anchor="ctr"/>
+          <a:lstStyle/>
+          <a:p>
+            <a:pPr marL="342900" indent="-342900">
+              <a:spcAft>
+                <a:spcPts val="800"/>
+              </a:spcAft>
+              <a:buSzPct val="100000"/>
+              <a:buChar char="•"/>
+            </a:pPr>
+            <a:r>
+              <a:rPr lang="en-US" sz="1500" dirty="0">
+                <a:solidFill>
+                  <a:srgbClr val="333333"/>
                 </a:solidFill>
                 <a:latin typeface="Calibri" pitchFamily="34" charset="0"/>
                 <a:ea typeface="Calibri" pitchFamily="34" charset="-122"/>
                 <a:cs typeface="Calibri" pitchFamily="34" charset="-120"/>
               </a:rPr>
-              <a:t>根拠: 04_Projects/MultivariatAanalysis/11, 12（並列化課題の実験結果）</a:t>
+              <a:t>数百万頂点の点群・メッシュをそのまま扱うと、1回の処理でもメモリ・計算時間が問題になる規模。</a:t>
+            </a:r>
+            <a:endParaRPr lang="en-US" sz="1500" dirty="0"/>
+          </a:p>
+          <a:p>
+            <a:pPr marL="342900" indent="-342900">
+              <a:spcAft>
+                <a:spcPts val="800"/>
+              </a:spcAft>
+              <a:buSzPct val="100000"/>
+              <a:buChar char="•"/>
+            </a:pPr>
+            <a:r>
+              <a:rPr lang="en-US" sz="1500" dirty="0">
+                <a:solidFill>
+                  <a:srgbClr val="333333"/>
+                </a:solidFill>
+                <a:latin typeface="Calibri" pitchFamily="34" charset="0"/>
+                <a:ea typeface="Calibri" pitchFamily="34" charset="-122"/>
+                <a:cs typeface="Calibri" pitchFamily="34" charset="-120"/>
+              </a:rPr>
+              <a:t>本研究では「対象面の切り出し → 格子状の高さマップへの次元削減」により、3D問題を2D画像問題へ落として計算量を抑える。</a:t>
+            </a:r>
+            <a:endParaRPr lang="en-US" sz="1500" dirty="0"/>
+          </a:p>
+          <a:p>
+            <a:pPr marL="342900" indent="-342900">
+              <a:buSzPct val="100000"/>
+              <a:buChar char="•"/>
+            </a:pPr>
+            <a:r>
+              <a:rPr lang="en-US" sz="1500" dirty="0">
+                <a:solidFill>
+                  <a:srgbClr val="333333"/>
+                </a:solidFill>
+                <a:latin typeface="Calibri" pitchFamily="34" charset="0"/>
+                <a:ea typeface="Calibri" pitchFamily="34" charset="-122"/>
+                <a:cs typeface="Calibri" pitchFamily="34" charset="-120"/>
+              </a:rPr>
+              <a:t>それでも高さマップ上のFFT・自己相関・NCC計算は反復実行されるため、計算量の見積もりと並列化余地の把握が重要になる。</a:t>
+            </a:r>
+            <a:endParaRPr lang="en-US" sz="1500" dirty="0"/>
+          </a:p>
+        </p:txBody>
+      </p:sp>
+      <p:sp>
+        <p:nvSpPr>
+          <p:cNvPr id="13" name="Text 11"/>
+          <p:cNvSpPr/>
+          <p:nvPr/>
+        </p:nvSpPr>
+        <p:spPr>
+          <a:xfrm>
+            <a:off x="548640" y="6446520"/>
+            <a:ext cx="11064240" cy="274320"/>
+          </a:xfrm>
+          <a:prstGeom prst="rect">
+            <a:avLst/>
+          </a:prstGeom>
+          <a:noFill/>
+          <a:ln/>
+        </p:spPr>
+        <p:txBody>
+          <a:bodyPr wrap="square" lIns="0" tIns="0" rIns="0" bIns="0" rtlCol="0" anchor="ctr"/>
+          <a:lstStyle/>
+          <a:p>
+            <a:pPr indent="0" marL="0">
+              <a:buNone/>
+            </a:pPr>
+            <a:r>
+              <a:rPr lang="en-US" sz="1000" dirty="0">
+                <a:solidFill>
+                  <a:srgbClr val="7A6A62"/>
+                </a:solidFill>
+                <a:latin typeface="Calibri" pitchFamily="34" charset="0"/>
+                <a:ea typeface="Calibri" pitchFamily="34" charset="-122"/>
+                <a:cs typeface="Calibri" pitchFamily="34" charset="-120"/>
+              </a:rPr>
+              <a:t>根拠: 04_Projects/修士研究/python/README.md</a:t>
             </a:r>
             <a:endParaRPr lang="en-US" sz="1000" dirty="0"/>
           </a:p>
@@ -5119,7 +5108,7 @@
                 <a:ea typeface="Cambria" pitchFamily="34" charset="-122"/>
                 <a:cs typeface="Cambria" pitchFamily="34" charset="-120"/>
               </a:rPr>
-              <a:t>M5: 回転周期と同巡点の自動検出</a:t>
+              <a:t>効率化ポイント①  多変量解析の手法</a:t>
             </a:r>
             <a:endParaRPr lang="en-US" sz="3000" dirty="0"/>
           </a:p>
@@ -5127,117 +5116,14 @@
       </p:sp>
       <p:sp>
         <p:nvSpPr>
-          <p:cNvPr id="3" name="Text 1"/>
+          <p:cNvPr id="3" name="Shape 1"/>
           <p:cNvSpPr/>
           <p:nvPr/>
         </p:nvSpPr>
         <p:spPr>
           <a:xfrm>
             <a:off x="548640" y="1371600"/>
-            <a:ext cx="6035040" cy="2377440"/>
-          </a:xfrm>
-          <a:prstGeom prst="rect">
-            <a:avLst/>
-          </a:prstGeom>
-          <a:noFill/>
-          <a:ln/>
-        </p:spPr>
-        <p:txBody>
-          <a:bodyPr wrap="square" rtlCol="0" anchor="ctr"/>
-          <a:lstStyle/>
-          <a:p>
-            <a:pPr marL="342900" indent="-342900">
-              <a:spcAft>
-                <a:spcPts val="800"/>
-              </a:spcAft>
-              <a:buSzPct val="100000"/>
-              <a:buChar char="•"/>
-            </a:pPr>
-            <a:r>
-              <a:rPr lang="en-US" sz="1450" dirty="0">
-                <a:solidFill>
-                  <a:srgbClr val="333333"/>
-                </a:solidFill>
-                <a:latin typeface="Calibri" pitchFamily="34" charset="0"/>
-                <a:ea typeface="Calibri" pitchFamily="34" charset="-122"/>
-                <a:cs typeface="Calibri" pitchFamily="34" charset="-120"/>
-              </a:rPr>
-              <a:t>縄の原体が1回転するごとに同じ模様が現れる点＝同巡点。その間隔が「回転周期 T」。</a:t>
-            </a:r>
-            <a:endParaRPr lang="en-US" sz="1450" dirty="0"/>
-          </a:p>
-          <a:p>
-            <a:pPr marL="342900" indent="-342900">
-              <a:spcAft>
-                <a:spcPts val="800"/>
-              </a:spcAft>
-              <a:buSzPct val="100000"/>
-              <a:buChar char="•"/>
-            </a:pPr>
-            <a:r>
-              <a:rPr lang="en-US" sz="1450" dirty="0">
-                <a:solidFill>
-                  <a:srgbClr val="333333"/>
-                </a:solidFill>
-                <a:latin typeface="Calibri" pitchFamily="34" charset="0"/>
-                <a:ea typeface="Calibri" pitchFamily="34" charset="-122"/>
-                <a:cs typeface="Calibri" pitchFamily="34" charset="-120"/>
-              </a:rPr>
-              <a:t>高さマップを縄目方向に整列し、NCC（正規化相互相関）のプロファイルから T を推定。</a:t>
-            </a:r>
-            <a:endParaRPr lang="en-US" sz="1450" dirty="0"/>
-          </a:p>
-          <a:p>
-            <a:pPr marL="342900" indent="-342900">
-              <a:spcAft>
-                <a:spcPts val="800"/>
-              </a:spcAft>
-              <a:buSzPct val="100000"/>
-              <a:buChar char="•"/>
-            </a:pPr>
-            <a:r>
-              <a:rPr lang="en-US" sz="1450" dirty="0">
-                <a:solidFill>
-                  <a:srgbClr val="333333"/>
-                </a:solidFill>
-                <a:latin typeface="Calibri" pitchFamily="34" charset="0"/>
-                <a:ea typeface="Calibri" pitchFamily="34" charset="-122"/>
-                <a:cs typeface="Calibri" pitchFamily="34" charset="-120"/>
-              </a:rPr>
-              <a:t>アンカー点の位相を揃えて帯フィットし、同巡点の3D座標を出力する。</a:t>
-            </a:r>
-            <a:endParaRPr lang="en-US" sz="1450" dirty="0"/>
-          </a:p>
-          <a:p>
-            <a:pPr marL="342900" indent="-342900">
-              <a:buSzPct val="100000"/>
-              <a:buChar char="•"/>
-            </a:pPr>
-            <a:r>
-              <a:rPr lang="en-US" sz="1450" dirty="0">
-                <a:solidFill>
-                  <a:srgbClr val="333333"/>
-                </a:solidFill>
-                <a:latin typeface="Calibri" pitchFamily="34" charset="0"/>
-                <a:ea typeface="Calibri" pitchFamily="34" charset="-122"/>
-                <a:cs typeface="Calibri" pitchFamily="34" charset="-120"/>
-              </a:rPr>
-              <a:t>曲面（土器の円筒面）には局所平面フィットで対応。</a:t>
-            </a:r>
-            <a:endParaRPr lang="en-US" sz="1450" dirty="0"/>
-          </a:p>
-        </p:txBody>
-      </p:sp>
-      <p:sp>
-        <p:nvSpPr>
-          <p:cNvPr id="4" name="Shape 2"/>
-          <p:cNvSpPr/>
-          <p:nvPr/>
-        </p:nvSpPr>
-        <p:spPr>
-          <a:xfrm>
-            <a:off x="548640" y="3931920"/>
-            <a:ext cx="6035040" cy="2194560"/>
+            <a:ext cx="5394960" cy="2194560"/>
           </a:xfrm>
           <a:prstGeom prst="roundRect">
             <a:avLst>
@@ -5245,21 +5131,21 @@
             </a:avLst>
           </a:prstGeom>
           <a:solidFill>
-            <a:srgbClr val="3B2A26"/>
+            <a:srgbClr val="E7E8D1"/>
           </a:solidFill>
           <a:ln/>
         </p:spPr>
       </p:sp>
       <p:sp>
         <p:nvSpPr>
-          <p:cNvPr id="5" name="Text 3"/>
-          <p:cNvSpPr/>
-          <p:nvPr/>
-        </p:nvSpPr>
-        <p:spPr>
-          <a:xfrm>
-            <a:off x="822960" y="4114800"/>
-            <a:ext cx="5486400" cy="365760"/>
+          <p:cNvPr id="4" name="Text 2"/>
+          <p:cNvSpPr/>
+          <p:nvPr/>
+        </p:nvSpPr>
+        <p:spPr>
+          <a:xfrm>
+            <a:off x="777240" y="1508760"/>
+            <a:ext cx="4937760" cy="411480"/>
           </a:xfrm>
           <a:prstGeom prst="rect">
             <a:avLst/>
@@ -5275,136 +5161,291 @@
               <a:buNone/>
             </a:pPr>
             <a:r>
-              <a:rPr lang="en-US" sz="1400" b="1" dirty="0">
-                <a:solidFill>
-                  <a:srgbClr val="E7E8D1"/>
+              <a:rPr lang="en-US" sz="1600" b="1" dirty="0">
+                <a:solidFill>
+                  <a:srgbClr val="B85042"/>
                 </a:solidFill>
                 <a:latin typeface="Cambria" pitchFamily="34" charset="0"/>
                 <a:ea typeface="Cambria" pitchFamily="34" charset="-122"/>
                 <a:cs typeface="Cambria" pitchFamily="34" charset="-120"/>
               </a:rPr>
-              <a:t>合成データでの受け入れ試験（テスト16件通過）</a:t>
-            </a:r>
-            <a:endParaRPr lang="en-US" sz="1400" dirty="0"/>
-          </a:p>
-        </p:txBody>
-      </p:sp>
-      <p:sp>
-        <p:nvSpPr>
-          <p:cNvPr id="6" name="Text 4"/>
-          <p:cNvSpPr/>
-          <p:nvPr/>
-        </p:nvSpPr>
-        <p:spPr>
-          <a:xfrm>
-            <a:off x="822960" y="4572000"/>
-            <a:ext cx="5486400" cy="1463040"/>
-          </a:xfrm>
-          <a:prstGeom prst="rect">
-            <a:avLst/>
-          </a:prstGeom>
-          <a:noFill/>
-          <a:ln/>
-        </p:spPr>
-        <p:txBody>
-          <a:bodyPr wrap="square" rtlCol="0" anchor="ctr"/>
-          <a:lstStyle/>
-          <a:p>
-            <a:pPr marL="342900" indent="-342900">
-              <a:spcAft>
-                <a:spcPts val="600"/>
-              </a:spcAft>
-              <a:buSzPct val="100000"/>
-              <a:buChar char="•"/>
-            </a:pPr>
-            <a:r>
-              <a:rPr lang="en-US" sz="1300" dirty="0">
-                <a:solidFill>
-                  <a:srgbClr val="FFFFFF"/>
+              <a:t>PCA（主成分分析）</a:t>
+            </a:r>
+            <a:endParaRPr lang="en-US" sz="1600" dirty="0"/>
+          </a:p>
+        </p:txBody>
+      </p:sp>
+      <p:sp>
+        <p:nvSpPr>
+          <p:cNvPr id="5" name="Text 3"/>
+          <p:cNvSpPr/>
+          <p:nvPr/>
+        </p:nvSpPr>
+        <p:spPr>
+          <a:xfrm>
+            <a:off x="777240" y="1965960"/>
+            <a:ext cx="4937760" cy="1463040"/>
+          </a:xfrm>
+          <a:prstGeom prst="rect">
+            <a:avLst/>
+          </a:prstGeom>
+          <a:noFill/>
+          <a:ln/>
+        </p:spPr>
+        <p:txBody>
+          <a:bodyPr wrap="square" lIns="0" tIns="0" rIns="0" bIns="0" rtlCol="0" anchor="ctr"/>
+          <a:lstStyle/>
+          <a:p>
+            <a:pPr indent="0" marL="0">
+              <a:buNone/>
+            </a:pPr>
+            <a:r>
+              <a:rPr lang="en-US" sz="1250" dirty="0">
+                <a:solidFill>
+                  <a:srgbClr val="333333"/>
                 </a:solidFill>
                 <a:latin typeface="Calibri" pitchFamily="34" charset="0"/>
                 <a:ea typeface="Calibri" pitchFamily="34" charset="-122"/>
                 <a:cs typeface="Calibri" pitchFamily="34" charset="-120"/>
               </a:rPr>
-              <a:t>既知周期に対する誤差 &lt; 2%</a:t>
-            </a:r>
-            <a:endParaRPr lang="en-US" sz="1300" dirty="0"/>
-          </a:p>
-          <a:p>
-            <a:pPr marL="342900" indent="-342900">
-              <a:spcAft>
-                <a:spcPts val="600"/>
-              </a:spcAft>
-              <a:buSzPct val="100000"/>
-              <a:buChar char="•"/>
-            </a:pPr>
-            <a:r>
-              <a:rPr lang="en-US" sz="1300" dirty="0">
-                <a:solidFill>
-                  <a:srgbClr val="FFFFFF"/>
+              <a:t>M3: 対象面の頂点群3次元座標にPCAを適用し、第1・第2主成分で局所平面を張って高さマップ（第3成分＝高さ）を作る。第4回で学んだ次元削減の直接応用。</a:t>
+            </a:r>
+            <a:endParaRPr lang="en-US" sz="1250" dirty="0"/>
+          </a:p>
+        </p:txBody>
+      </p:sp>
+      <p:sp>
+        <p:nvSpPr>
+          <p:cNvPr id="6" name="Shape 4"/>
+          <p:cNvSpPr/>
+          <p:nvPr/>
+        </p:nvSpPr>
+        <p:spPr>
+          <a:xfrm>
+            <a:off x="6263640" y="1371600"/>
+            <a:ext cx="5394960" cy="2194560"/>
+          </a:xfrm>
+          <a:prstGeom prst="roundRect">
+            <a:avLst>
+              <a:gd name="adj" fmla="val 4167"/>
+            </a:avLst>
+          </a:prstGeom>
+          <a:solidFill>
+            <a:srgbClr val="E7E8D1"/>
+          </a:solidFill>
+          <a:ln/>
+        </p:spPr>
+      </p:sp>
+      <p:sp>
+        <p:nvSpPr>
+          <p:cNvPr id="7" name="Text 5"/>
+          <p:cNvSpPr/>
+          <p:nvPr/>
+        </p:nvSpPr>
+        <p:spPr>
+          <a:xfrm>
+            <a:off x="6492240" y="1508760"/>
+            <a:ext cx="4937760" cy="411480"/>
+          </a:xfrm>
+          <a:prstGeom prst="rect">
+            <a:avLst/>
+          </a:prstGeom>
+          <a:noFill/>
+          <a:ln/>
+        </p:spPr>
+        <p:txBody>
+          <a:bodyPr wrap="square" lIns="0" tIns="0" rIns="0" bIns="0" rtlCol="0" anchor="ctr"/>
+          <a:lstStyle/>
+          <a:p>
+            <a:pPr indent="0" marL="0">
+              <a:buNone/>
+            </a:pPr>
+            <a:r>
+              <a:rPr lang="en-US" sz="1600" b="1" dirty="0">
+                <a:solidFill>
+                  <a:srgbClr val="B85042"/>
+                </a:solidFill>
+                <a:latin typeface="Cambria" pitchFamily="34" charset="0"/>
+                <a:ea typeface="Cambria" pitchFamily="34" charset="-122"/>
+                <a:cs typeface="Cambria" pitchFamily="34" charset="-120"/>
+              </a:rPr>
+              <a:t>クラスタリング</a:t>
+            </a:r>
+            <a:endParaRPr lang="en-US" sz="1600" dirty="0"/>
+          </a:p>
+        </p:txBody>
+      </p:sp>
+      <p:sp>
+        <p:nvSpPr>
+          <p:cNvPr id="8" name="Text 6"/>
+          <p:cNvSpPr/>
+          <p:nvPr/>
+        </p:nvSpPr>
+        <p:spPr>
+          <a:xfrm>
+            <a:off x="6492240" y="1965960"/>
+            <a:ext cx="4937760" cy="1463040"/>
+          </a:xfrm>
+          <a:prstGeom prst="rect">
+            <a:avLst/>
+          </a:prstGeom>
+          <a:noFill/>
+          <a:ln/>
+        </p:spPr>
+        <p:txBody>
+          <a:bodyPr wrap="square" lIns="0" tIns="0" rIns="0" bIns="0" rtlCol="0" anchor="ctr"/>
+          <a:lstStyle/>
+          <a:p>
+            <a:pPr indent="0" marL="0">
+              <a:buNone/>
+            </a:pPr>
+            <a:r>
+              <a:rPr lang="en-US" sz="1250" dirty="0">
+                <a:solidFill>
+                  <a:srgbClr val="333333"/>
                 </a:solidFill>
                 <a:latin typeface="Calibri" pitchFamily="34" charset="0"/>
                 <a:ea typeface="Calibri" pitchFamily="34" charset="-122"/>
                 <a:cs typeface="Calibri" pitchFamily="34" charset="-120"/>
               </a:rPr>
-              <a:t>データ欠損20%でも誤差 &lt; 2% を維持</a:t>
-            </a:r>
-            <a:endParaRPr lang="en-US" sz="1300" dirty="0"/>
-          </a:p>
-          <a:p>
-            <a:pPr marL="342900" indent="-342900">
-              <a:buSzPct val="100000"/>
-              <a:buChar char="•"/>
-            </a:pPr>
-            <a:r>
-              <a:rPr lang="en-US" sz="1300" dirty="0">
-                <a:solidFill>
-                  <a:srgbClr val="FFFFFF"/>
+              <a:t>M2: 頂点法線ベクトルのクラスタリングで「縄目のある面」だけを切り出す。第5回のクラスタ分析の考え方と同じ。</a:t>
+            </a:r>
+            <a:endParaRPr lang="en-US" sz="1250" dirty="0"/>
+          </a:p>
+        </p:txBody>
+      </p:sp>
+      <p:sp>
+        <p:nvSpPr>
+          <p:cNvPr id="9" name="Shape 7"/>
+          <p:cNvSpPr/>
+          <p:nvPr/>
+        </p:nvSpPr>
+        <p:spPr>
+          <a:xfrm>
+            <a:off x="548640" y="3794760"/>
+            <a:ext cx="5394960" cy="2194560"/>
+          </a:xfrm>
+          <a:prstGeom prst="roundRect">
+            <a:avLst>
+              <a:gd name="adj" fmla="val 4167"/>
+            </a:avLst>
+          </a:prstGeom>
+          <a:solidFill>
+            <a:srgbClr val="E7E8D1"/>
+          </a:solidFill>
+          <a:ln/>
+        </p:spPr>
+      </p:sp>
+      <p:sp>
+        <p:nvSpPr>
+          <p:cNvPr id="10" name="Text 8"/>
+          <p:cNvSpPr/>
+          <p:nvPr/>
+        </p:nvSpPr>
+        <p:spPr>
+          <a:xfrm>
+            <a:off x="777240" y="3931920"/>
+            <a:ext cx="4937760" cy="411480"/>
+          </a:xfrm>
+          <a:prstGeom prst="rect">
+            <a:avLst/>
+          </a:prstGeom>
+          <a:noFill/>
+          <a:ln/>
+        </p:spPr>
+        <p:txBody>
+          <a:bodyPr wrap="square" lIns="0" tIns="0" rIns="0" bIns="0" rtlCol="0" anchor="ctr"/>
+          <a:lstStyle/>
+          <a:p>
+            <a:pPr indent="0" marL="0">
+              <a:buNone/>
+            </a:pPr>
+            <a:r>
+              <a:rPr lang="en-US" sz="1600" b="1" dirty="0">
+                <a:solidFill>
+                  <a:srgbClr val="B85042"/>
+                </a:solidFill>
+                <a:latin typeface="Cambria" pitchFamily="34" charset="0"/>
+                <a:ea typeface="Cambria" pitchFamily="34" charset="-122"/>
+                <a:cs typeface="Cambria" pitchFamily="34" charset="-120"/>
+              </a:rPr>
+              <a:t>構造テンソル（固有値分解）</a:t>
+            </a:r>
+            <a:endParaRPr lang="en-US" sz="1600" dirty="0"/>
+          </a:p>
+        </p:txBody>
+      </p:sp>
+      <p:sp>
+        <p:nvSpPr>
+          <p:cNvPr id="11" name="Text 9"/>
+          <p:cNvSpPr/>
+          <p:nvPr/>
+        </p:nvSpPr>
+        <p:spPr>
+          <a:xfrm>
+            <a:off x="777240" y="4389120"/>
+            <a:ext cx="4937760" cy="1463040"/>
+          </a:xfrm>
+          <a:prstGeom prst="rect">
+            <a:avLst/>
+          </a:prstGeom>
+          <a:noFill/>
+          <a:ln/>
+        </p:spPr>
+        <p:txBody>
+          <a:bodyPr wrap="square" lIns="0" tIns="0" rIns="0" bIns="0" rtlCol="0" anchor="ctr"/>
+          <a:lstStyle/>
+          <a:p>
+            <a:pPr indent="0" marL="0">
+              <a:buNone/>
+            </a:pPr>
+            <a:r>
+              <a:rPr lang="en-US" sz="1250" dirty="0">
+                <a:solidFill>
+                  <a:srgbClr val="333333"/>
                 </a:solidFill>
                 <a:latin typeface="Calibri" pitchFamily="34" charset="0"/>
                 <a:ea typeface="Calibri" pitchFamily="34" charset="-122"/>
                 <a:cs typeface="Calibri" pitchFamily="34" charset="-120"/>
               </a:rPr>
-              <a:t>同巡点間隔が周期の整数倍に一致することを確認</a:t>
-            </a:r>
-            <a:endParaRPr lang="en-US" sz="1300" dirty="0"/>
-          </a:p>
-        </p:txBody>
-      </p:sp>
-      <p:pic>
-        <p:nvPicPr>
-          <p:cNvPr id="7" name="Image 0" descr="/Users/ryusan/brain/02_Raw/土器3（同巡点）.png">    </p:cNvPr>
-          <p:cNvPicPr>
-            <a:picLocks noChangeAspect="1"/>
-          </p:cNvPicPr>
-          <p:nvPr/>
-        </p:nvPicPr>
-        <p:blipFill>
-          <a:blip r:embed="rId1"/>
-          <a:stretch>
-            <a:fillRect/>
-          </a:stretch>
-        </p:blipFill>
-        <p:spPr>
-          <a:xfrm>
-            <a:off x="7040880" y="1463040"/>
-            <a:ext cx="4572000" cy="3236976"/>
-          </a:xfrm>
-          <a:prstGeom prst="rect">
-            <a:avLst/>
-          </a:prstGeom>
-        </p:spPr>
-      </p:pic>
-      <p:sp>
-        <p:nvSpPr>
-          <p:cNvPr id="8" name="Text 5"/>
-          <p:cNvSpPr/>
-          <p:nvPr/>
-        </p:nvSpPr>
-        <p:spPr>
-          <a:xfrm>
-            <a:off x="7040880" y="4800600"/>
-            <a:ext cx="4572000" cy="320040"/>
+              <a:t>M4: 勾配の共分散行列の固有ベクトルから縄の走行方向を推定。分散共分散行列と固有値分解という多変量解析の基本操作。</a:t>
+            </a:r>
+            <a:endParaRPr lang="en-US" sz="1250" dirty="0"/>
+          </a:p>
+        </p:txBody>
+      </p:sp>
+      <p:sp>
+        <p:nvSpPr>
+          <p:cNvPr id="12" name="Shape 10"/>
+          <p:cNvSpPr/>
+          <p:nvPr/>
+        </p:nvSpPr>
+        <p:spPr>
+          <a:xfrm>
+            <a:off x="6263640" y="3794760"/>
+            <a:ext cx="5394960" cy="2194560"/>
+          </a:xfrm>
+          <a:prstGeom prst="roundRect">
+            <a:avLst>
+              <a:gd name="adj" fmla="val 4167"/>
+            </a:avLst>
+          </a:prstGeom>
+          <a:solidFill>
+            <a:srgbClr val="E7E8D1"/>
+          </a:solidFill>
+          <a:ln/>
+        </p:spPr>
+      </p:sp>
+      <p:sp>
+        <p:nvSpPr>
+          <p:cNvPr id="13" name="Text 11"/>
+          <p:cNvSpPr/>
+          <p:nvPr/>
+        </p:nvSpPr>
+        <p:spPr>
+          <a:xfrm>
+            <a:off x="6492240" y="3931920"/>
+            <a:ext cx="4937760" cy="411480"/>
           </a:xfrm>
           <a:prstGeom prst="rect">
             <a:avLst/>
@@ -5420,23 +5461,62 @@
               <a:buNone/>
             </a:pPr>
             <a:r>
-              <a:rPr lang="en-US" sz="1100" dirty="0">
-                <a:solidFill>
-                  <a:srgbClr val="7A6A62"/>
+              <a:rPr lang="en-US" sz="1600" b="1" dirty="0">
+                <a:solidFill>
+                  <a:srgbClr val="B85042"/>
+                </a:solidFill>
+                <a:latin typeface="Cambria" pitchFamily="34" charset="0"/>
+                <a:ea typeface="Cambria" pitchFamily="34" charset="-122"/>
+                <a:cs typeface="Cambria" pitchFamily="34" charset="-120"/>
+              </a:rPr>
+              <a:t>相関・NCC</a:t>
+            </a:r>
+            <a:endParaRPr lang="en-US" sz="1600" dirty="0"/>
+          </a:p>
+        </p:txBody>
+      </p:sp>
+      <p:sp>
+        <p:nvSpPr>
+          <p:cNvPr id="14" name="Text 12"/>
+          <p:cNvSpPr/>
+          <p:nvPr/>
+        </p:nvSpPr>
+        <p:spPr>
+          <a:xfrm>
+            <a:off x="6492240" y="4389120"/>
+            <a:ext cx="4937760" cy="1463040"/>
+          </a:xfrm>
+          <a:prstGeom prst="rect">
+            <a:avLst/>
+          </a:prstGeom>
+          <a:noFill/>
+          <a:ln/>
+        </p:spPr>
+        <p:txBody>
+          <a:bodyPr wrap="square" lIns="0" tIns="0" rIns="0" bIns="0" rtlCol="0" anchor="ctr"/>
+          <a:lstStyle/>
+          <a:p>
+            <a:pPr indent="0" marL="0">
+              <a:buNone/>
+            </a:pPr>
+            <a:r>
+              <a:rPr lang="en-US" sz="1250" dirty="0">
+                <a:solidFill>
+                  <a:srgbClr val="333333"/>
                 </a:solidFill>
                 <a:latin typeface="Calibri" pitchFamily="34" charset="0"/>
                 <a:ea typeface="Calibri" pitchFamily="34" charset="-122"/>
                 <a:cs typeface="Calibri" pitchFamily="34" charset="-120"/>
               </a:rPr>
-              <a:t>ground truth候補: 同巡点の目視位置（指導教員提供画像）</a:t>
-            </a:r>
-            <a:endParaRPr lang="en-US" sz="1100" dirty="0"/>
-          </a:p>
-        </p:txBody>
-      </p:sp>
-      <p:sp>
-        <p:nvSpPr>
-          <p:cNvPr id="9" name="Text 6"/>
+              <a:t>M4/M5: 2D自己相関で周期ベクトルを、正規化相互相関（NCC）で同位相位置を検出。相関係数の空間パターンへの拡張。</a:t>
+            </a:r>
+            <a:endParaRPr lang="en-US" sz="1250" dirty="0"/>
+          </a:p>
+        </p:txBody>
+      </p:sp>
+      <p:sp>
+        <p:nvSpPr>
+          <p:cNvPr id="15" name="Text 13"/>
           <p:cNvSpPr/>
           <p:nvPr/>
         </p:nvSpPr>
@@ -5467,7 +5547,7 @@
                 <a:ea typeface="Calibri" pitchFamily="34" charset="-122"/>
                 <a:cs typeface="Calibri" pitchFamily="34" charset="-120"/>
               </a:rPr>
-              <a:t>根拠: 04_Projects/修士研究/design_M5_同位相位置検出.md, STATE.md</a:t>
+              <a:t>根拠: 04_Projects/修士研究/python/README.md（height_map.py, face_extract.py, autocorr2d.py, phase_detect.py）</a:t>
             </a:r>
             <a:endParaRPr lang="en-US" sz="1000" dirty="0"/>
           </a:p>
@@ -5538,7 +5618,7 @@
                 <a:ea typeface="Cambria" pitchFamily="34" charset="-122"/>
                 <a:cs typeface="Cambria" pitchFamily="34" charset="-120"/>
               </a:rPr>
-              <a:t>現状の結果と課題</a:t>
+              <a:t>効率化ポイント②  大規模計算・並列化</a:t>
             </a:r>
             <a:endParaRPr lang="en-US" sz="3000" dirty="0"/>
           </a:p>
@@ -5546,14 +5626,36 @@
       </p:sp>
       <p:sp>
         <p:nvSpPr>
-          <p:cNvPr id="3" name="Text 1"/>
-          <p:cNvSpPr/>
-          <p:nvPr/>
-        </p:nvSpPr>
-        <p:spPr>
-          <a:xfrm>
-            <a:off x="548640" y="1325880"/>
-            <a:ext cx="5943600" cy="365760"/>
+          <p:cNvPr id="3" name="Shape 1"/>
+          <p:cNvSpPr/>
+          <p:nvPr/>
+        </p:nvSpPr>
+        <p:spPr>
+          <a:xfrm>
+            <a:off x="548640" y="1371600"/>
+            <a:ext cx="11064240" cy="1463040"/>
+          </a:xfrm>
+          <a:prstGeom prst="roundRect">
+            <a:avLst>
+              <a:gd name="adj" fmla="val 6250"/>
+            </a:avLst>
+          </a:prstGeom>
+          <a:solidFill>
+            <a:srgbClr val="E7E8D1"/>
+          </a:solidFill>
+          <a:ln/>
+        </p:spPr>
+      </p:sp>
+      <p:sp>
+        <p:nvSpPr>
+          <p:cNvPr id="4" name="Text 2"/>
+          <p:cNvSpPr/>
+          <p:nvPr/>
+        </p:nvSpPr>
+        <p:spPr>
+          <a:xfrm>
+            <a:off x="777240" y="1481328"/>
+            <a:ext cx="2926080" cy="1188720"/>
           </a:xfrm>
           <a:prstGeom prst="rect">
             <a:avLst/>
@@ -5577,7 +5679,7 @@
                 <a:ea typeface="Cambria" pitchFamily="34" charset="-122"/>
                 <a:cs typeface="Cambria" pitchFamily="34" charset="-120"/>
               </a:rPr>
-              <a:t>実データ（1.ply）での出力例</a:t>
+              <a:t>FFTによる高速化</a:t>
             </a:r>
             <a:endParaRPr lang="en-US" sz="1600" dirty="0"/>
           </a:p>
@@ -5585,177 +5687,75 @@
       </p:sp>
       <p:sp>
         <p:nvSpPr>
-          <p:cNvPr id="4" name="Shape 2"/>
-          <p:cNvSpPr/>
-          <p:nvPr/>
-        </p:nvSpPr>
-        <p:spPr>
-          <a:xfrm>
-            <a:off x="548640" y="1783080"/>
-            <a:ext cx="5760720" cy="2651760"/>
+          <p:cNvPr id="5" name="Text 3"/>
+          <p:cNvSpPr/>
+          <p:nvPr/>
+        </p:nvSpPr>
+        <p:spPr>
+          <a:xfrm>
+            <a:off x="3840480" y="1508760"/>
+            <a:ext cx="7498080" cy="1234440"/>
+          </a:xfrm>
+          <a:prstGeom prst="rect">
+            <a:avLst/>
+          </a:prstGeom>
+          <a:noFill/>
+          <a:ln/>
+        </p:spPr>
+        <p:txBody>
+          <a:bodyPr wrap="square" lIns="0" tIns="0" rIns="0" bIns="0" rtlCol="0" anchor="ctr"/>
+          <a:lstStyle/>
+          <a:p>
+            <a:pPr indent="0" marL="0">
+              <a:buNone/>
+            </a:pPr>
+            <a:r>
+              <a:rPr lang="en-US" sz="1300" dirty="0">
+                <a:solidFill>
+                  <a:srgbClr val="333333"/>
+                </a:solidFill>
+                <a:latin typeface="Calibri" pitchFamily="34" charset="0"/>
+                <a:ea typeface="Calibri" pitchFamily="34" charset="-122"/>
+                <a:cs typeface="Calibri" pitchFamily="34" charset="-120"/>
+              </a:rPr>
+              <a:t>2D自己相関は素朴に計算するとO(N⁴)。FFTを使いO(N² log N)へ削減。第11回の「アルゴリズムによる計算量削減」の実例。</a:t>
+            </a:r>
+            <a:endParaRPr lang="en-US" sz="1300" dirty="0"/>
+          </a:p>
+        </p:txBody>
+      </p:sp>
+      <p:sp>
+        <p:nvSpPr>
+          <p:cNvPr id="6" name="Shape 4"/>
+          <p:cNvSpPr/>
+          <p:nvPr/>
+        </p:nvSpPr>
+        <p:spPr>
+          <a:xfrm>
+            <a:off x="548640" y="3017520"/>
+            <a:ext cx="11064240" cy="1463040"/>
           </a:xfrm>
           <a:prstGeom prst="roundRect">
             <a:avLst>
-              <a:gd name="adj" fmla="val 2759"/>
+              <a:gd name="adj" fmla="val 6250"/>
             </a:avLst>
           </a:prstGeom>
           <a:solidFill>
-            <a:srgbClr val="2B2B2B"/>
+            <a:srgbClr val="E7E8D1"/>
           </a:solidFill>
           <a:ln/>
         </p:spPr>
       </p:sp>
       <p:sp>
         <p:nvSpPr>
-          <p:cNvPr id="5" name="Text 3"/>
-          <p:cNvSpPr/>
-          <p:nvPr/>
-        </p:nvSpPr>
-        <p:spPr>
-          <a:xfrm>
-            <a:off x="822960" y="1965960"/>
-            <a:ext cx="5303520" cy="2286000"/>
-          </a:xfrm>
-          <a:prstGeom prst="rect">
-            <a:avLst/>
-          </a:prstGeom>
-          <a:noFill/>
-          <a:ln/>
-        </p:spPr>
-        <p:txBody>
-          <a:bodyPr wrap="square" lIns="0" tIns="0" rIns="0" bIns="0" rtlCol="0" anchor="ctr"/>
-          <a:lstStyle/>
-          <a:p>
-            <a:pPr indent="0" marL="0">
-              <a:buNone/>
-            </a:pPr>
-            <a:r>
-              <a:rPr lang="en-US" sz="1250" dirty="0">
-                <a:solidFill>
-                  <a:srgbClr val="A7E8A7"/>
-                </a:solidFill>
-                <a:latin typeface="Courier New" pitchFamily="34" charset="0"/>
-                <a:ea typeface="Courier New" pitchFamily="34" charset="-122"/>
-                <a:cs typeface="Courier New" pitchFamily="34" charset="-120"/>
-              </a:rPr>
-              <a:t>pitch=3.426mm  groove_dir=115.2deg</a:t>
-            </a:r>
-            <a:endParaRPr lang="en-US" sz="1250" dirty="0"/>
-          </a:p>
-          <a:p>
-            <a:pPr indent="0" marL="0">
-              <a:buNone/>
-            </a:pPr>
-            <a:r>
-              <a:rPr lang="en-US" sz="1250" dirty="0">
-                <a:solidFill>
-                  <a:srgbClr val="A7E8A7"/>
-                </a:solidFill>
-                <a:latin typeface="Courier New" pitchFamily="34" charset="0"/>
-                <a:ea typeface="Courier New" pitchFamily="34" charset="-122"/>
-                <a:cs typeface="Courier New" pitchFamily="34" charset="-120"/>
-              </a:rPr>
-              <a:t>rolling_dir=63.2deg  confidence=1.00</a:t>
-            </a:r>
-            <a:endParaRPr lang="en-US" sz="1250" dirty="0"/>
-          </a:p>
-          <a:p>
-            <a:pPr indent="0" marL="0">
-              <a:buNone/>
-            </a:pPr>
-            <a:r>
-              <a:rPr lang="en-US" sz="1250" dirty="0">
-                <a:solidFill>
-                  <a:srgbClr val="A7E8A7"/>
-                </a:solidFill>
-                <a:latin typeface="Courier New" pitchFamily="34" charset="0"/>
-                <a:ea typeface="Courier New" pitchFamily="34" charset="-122"/>
-                <a:cs typeface="Courier New" pitchFamily="34" charset="-120"/>
-              </a:rPr>
-              <a:t>period_vec=(3.100, 1.458)mm</a:t>
-            </a:r>
-            <a:endParaRPr lang="en-US" sz="1250" dirty="0"/>
-          </a:p>
-          <a:p>
-            <a:pPr indent="0" marL="0">
-              <a:buNone/>
-            </a:pPr>
-            <a:r>
-              <a:rPr lang="en-US" sz="1250" dirty="0">
-                <a:solidFill>
-                  <a:srgbClr val="A7E8A7"/>
-                </a:solidFill>
-                <a:latin typeface="Courier New" pitchFamily="34" charset="0"/>
-                <a:ea typeface="Courier New" pitchFamily="34" charset="-122"/>
-                <a:cs typeface="Courier New" pitchFamily="34" charset="-120"/>
-              </a:rPr>
-              <a:t>grid=0.20mm  detrend_window=12</a:t>
-            </a:r>
-            <a:endParaRPr lang="en-US" sz="1250" dirty="0"/>
-          </a:p>
-          <a:p>
-            <a:pPr indent="0" marL="0">
-              <a:buNone/>
-            </a:pPr>
-            <a:r>
-              <a:rPr lang="en-US" sz="1250" dirty="0">
-                <a:solidFill>
-                  <a:srgbClr val="A7E8A7"/>
-                </a:solidFill>
-                <a:latin typeface="Courier New" pitchFamily="34" charset="0"/>
-                <a:ea typeface="Courier New" pitchFamily="34" charset="-122"/>
-                <a:cs typeface="Courier New" pitchFamily="34" charset="-120"/>
-              </a:rPr>
-              <a:t>rolling_period=44.06mm</a:t>
-            </a:r>
-            <a:endParaRPr lang="en-US" sz="1250" dirty="0"/>
-          </a:p>
-          <a:p>
-            <a:pPr indent="0" marL="0">
-              <a:buNone/>
-            </a:pPr>
-            <a:r>
-              <a:rPr lang="en-US" sz="1250" dirty="0">
-                <a:solidFill>
-                  <a:srgbClr val="A7E8A7"/>
-                </a:solidFill>
-                <a:latin typeface="Courier New" pitchFamily="34" charset="0"/>
-                <a:ea typeface="Courier New" pitchFamily="34" charset="-122"/>
-                <a:cs typeface="Courier New" pitchFamily="34" charset="-120"/>
-              </a:rPr>
-              <a:t>phase_confidence=0.83  anchors=6</a:t>
-            </a:r>
-            <a:endParaRPr lang="en-US" sz="1250" dirty="0"/>
-          </a:p>
-          <a:p>
-            <a:pPr indent="0" marL="0">
-              <a:buNone/>
-            </a:pPr>
-            <a:r>
-              <a:rPr lang="en-US" sz="1250" dirty="0">
-                <a:solidFill>
-                  <a:srgbClr val="A7E8A7"/>
-                </a:solidFill>
-                <a:latin typeface="Courier New" pitchFamily="34" charset="0"/>
-                <a:ea typeface="Courier New" pitchFamily="34" charset="-122"/>
-                <a:cs typeface="Courier New" pitchFamily="34" charset="-120"/>
-              </a:rPr>
-              <a:t>anchor[0]=(17.255, -12.212, 6.215)</a:t>
-            </a:r>
-            <a:endParaRPr lang="en-US" sz="1250" dirty="0"/>
-          </a:p>
-        </p:txBody>
-      </p:sp>
-      <p:sp>
-        <p:nvSpPr>
-          <p:cNvPr id="6" name="Text 4"/>
-          <p:cNvSpPr/>
-          <p:nvPr/>
-        </p:nvSpPr>
-        <p:spPr>
-          <a:xfrm>
-            <a:off x="6766560" y="1325880"/>
-            <a:ext cx="4846320" cy="365760"/>
+          <p:cNvPr id="7" name="Text 5"/>
+          <p:cNvSpPr/>
+          <p:nvPr/>
+        </p:nvSpPr>
+        <p:spPr>
+          <a:xfrm>
+            <a:off x="777240" y="3127248"/>
+            <a:ext cx="2926080" cy="1188720"/>
           </a:xfrm>
           <a:prstGeom prst="rect">
             <a:avLst/>
@@ -5779,7 +5779,7 @@
                 <a:ea typeface="Cambria" pitchFamily="34" charset="-122"/>
                 <a:cs typeface="Cambria" pitchFamily="34" charset="-120"/>
               </a:rPr>
-              <a:t>残る課題</a:t>
+              <a:t>並列化できる箇所</a:t>
             </a:r>
             <a:endParaRPr lang="en-US" sz="1600" dirty="0"/>
           </a:p>
@@ -5787,34 +5787,30 @@
       </p:sp>
       <p:sp>
         <p:nvSpPr>
-          <p:cNvPr id="7" name="Text 5"/>
-          <p:cNvSpPr/>
-          <p:nvPr/>
-        </p:nvSpPr>
-        <p:spPr>
-          <a:xfrm>
-            <a:off x="6766560" y="1783080"/>
-            <a:ext cx="4846320" cy="2926080"/>
-          </a:xfrm>
-          <a:prstGeom prst="rect">
-            <a:avLst/>
-          </a:prstGeom>
-          <a:noFill/>
-          <a:ln/>
-        </p:spPr>
-        <p:txBody>
-          <a:bodyPr wrap="square" rtlCol="0" anchor="ctr"/>
-          <a:lstStyle/>
-          <a:p>
-            <a:pPr marL="342900" indent="-342900">
-              <a:spcAft>
-                <a:spcPts val="800"/>
-              </a:spcAft>
-              <a:buSzPct val="100000"/>
-              <a:buChar char="•"/>
-            </a:pPr>
-            <a:r>
-              <a:rPr lang="en-US" sz="1350" dirty="0">
+          <p:cNvPr id="8" name="Text 6"/>
+          <p:cNvSpPr/>
+          <p:nvPr/>
+        </p:nvSpPr>
+        <p:spPr>
+          <a:xfrm>
+            <a:off x="3840480" y="3154680"/>
+            <a:ext cx="7498080" cy="1234440"/>
+          </a:xfrm>
+          <a:prstGeom prst="rect">
+            <a:avLst/>
+          </a:prstGeom>
+          <a:noFill/>
+          <a:ln/>
+        </p:spPr>
+        <p:txBody>
+          <a:bodyPr wrap="square" lIns="0" tIns="0" rIns="0" bIns="0" rtlCol="0" anchor="ctr"/>
+          <a:lstStyle/>
+          <a:p>
+            <a:pPr indent="0" marL="0">
+              <a:buNone/>
+            </a:pPr>
+            <a:r>
+              <a:rPr lang="en-US" sz="1300" dirty="0">
                 <a:solidFill>
                   <a:srgbClr val="333333"/>
                 </a:solidFill>
@@ -5822,106 +5818,146 @@
                 <a:ea typeface="Calibri" pitchFamily="34" charset="-122"/>
                 <a:cs typeface="Calibri" pitchFamily="34" charset="-120"/>
               </a:rPr>
-              <a:t>実データ上の同巡点3D座標の正解（ground truth）が未入手 → 定量評価が保留中</a:t>
-            </a:r>
-            <a:endParaRPr lang="en-US" sz="1350" dirty="0"/>
-          </a:p>
-          <a:p>
-            <a:pPr marL="342900" indent="-342900">
-              <a:spcAft>
-                <a:spcPts val="800"/>
-              </a:spcAft>
-              <a:buSzPct val="100000"/>
-              <a:buChar char="•"/>
-            </a:pPr>
-            <a:r>
-              <a:rPr lang="en-US" sz="1350" dirty="0">
-                <a:solidFill>
-                  <a:srgbClr val="333333"/>
+              <a:t>格子サンプリング（各格子点の独立計算）、NCCプロファイル（各シフト量の独立評価）、複数土器片のバッチ処理は、GAの個体評価と同じ「互いに依存しない計算」であり並列化可能。</a:t>
+            </a:r>
+            <a:endParaRPr lang="en-US" sz="1300" dirty="0"/>
+          </a:p>
+        </p:txBody>
+      </p:sp>
+      <p:sp>
+        <p:nvSpPr>
+          <p:cNvPr id="9" name="Shape 7"/>
+          <p:cNvSpPr/>
+          <p:nvPr/>
+        </p:nvSpPr>
+        <p:spPr>
+          <a:xfrm>
+            <a:off x="548640" y="4663440"/>
+            <a:ext cx="11064240" cy="1463040"/>
+          </a:xfrm>
+          <a:prstGeom prst="roundRect">
+            <a:avLst>
+              <a:gd name="adj" fmla="val 6250"/>
+            </a:avLst>
+          </a:prstGeom>
+          <a:solidFill>
+            <a:srgbClr val="B85042"/>
+          </a:solidFill>
+          <a:ln/>
+        </p:spPr>
+      </p:sp>
+      <p:sp>
+        <p:nvSpPr>
+          <p:cNvPr id="10" name="Text 8"/>
+          <p:cNvSpPr/>
+          <p:nvPr/>
+        </p:nvSpPr>
+        <p:spPr>
+          <a:xfrm>
+            <a:off x="777240" y="4773168"/>
+            <a:ext cx="2926080" cy="1188720"/>
+          </a:xfrm>
+          <a:prstGeom prst="rect">
+            <a:avLst/>
+          </a:prstGeom>
+          <a:noFill/>
+          <a:ln/>
+        </p:spPr>
+        <p:txBody>
+          <a:bodyPr wrap="square" lIns="0" tIns="0" rIns="0" bIns="0" rtlCol="0" anchor="ctr"/>
+          <a:lstStyle/>
+          <a:p>
+            <a:pPr indent="0" marL="0">
+              <a:buNone/>
+            </a:pPr>
+            <a:r>
+              <a:rPr lang="en-US" sz="1600" b="1" dirty="0">
+                <a:solidFill>
+                  <a:srgbClr val="FFFFFF"/>
+                </a:solidFill>
+                <a:latin typeface="Cambria" pitchFamily="34" charset="0"/>
+                <a:ea typeface="Cambria" pitchFamily="34" charset="-122"/>
+                <a:cs typeface="Cambria" pitchFamily="34" charset="-120"/>
+              </a:rPr>
+              <a:t>並列化のコスト</a:t>
+            </a:r>
+            <a:endParaRPr lang="en-US" sz="1600" dirty="0"/>
+          </a:p>
+        </p:txBody>
+      </p:sp>
+      <p:sp>
+        <p:nvSpPr>
+          <p:cNvPr id="11" name="Text 9"/>
+          <p:cNvSpPr/>
+          <p:nvPr/>
+        </p:nvSpPr>
+        <p:spPr>
+          <a:xfrm>
+            <a:off x="3840480" y="4800600"/>
+            <a:ext cx="7498080" cy="1234440"/>
+          </a:xfrm>
+          <a:prstGeom prst="rect">
+            <a:avLst/>
+          </a:prstGeom>
+          <a:noFill/>
+          <a:ln/>
+        </p:spPr>
+        <p:txBody>
+          <a:bodyPr wrap="square" lIns="0" tIns="0" rIns="0" bIns="0" rtlCol="0" anchor="ctr"/>
+          <a:lstStyle/>
+          <a:p>
+            <a:pPr indent="0" marL="0">
+              <a:buNone/>
+            </a:pPr>
+            <a:r>
+              <a:rPr lang="en-US" sz="1300" dirty="0">
+                <a:solidFill>
+                  <a:srgbClr val="FFFFFF"/>
                 </a:solidFill>
                 <a:latin typeface="Calibri" pitchFamily="34" charset="0"/>
                 <a:ea typeface="Calibri" pitchFamily="34" charset="-122"/>
                 <a:cs typeface="Calibri" pitchFamily="34" charset="-120"/>
               </a:rPr>
-              <a:t>MeshLab Picked Pointsによる正解座標を指導教員に依頼中</a:t>
-            </a:r>
-            <a:endParaRPr lang="en-US" sz="1350" dirty="0"/>
-          </a:p>
-          <a:p>
-            <a:pPr marL="342900" indent="-342900">
-              <a:spcAft>
-                <a:spcPts val="800"/>
-              </a:spcAft>
-              <a:buSzPct val="100000"/>
-              <a:buChar char="•"/>
-            </a:pPr>
-            <a:r>
-              <a:rPr lang="en-US" sz="1350" dirty="0">
-                <a:solidFill>
-                  <a:srgbClr val="333333"/>
+              <a:t>第12回のGA実験では、1タスクが軽い場合はWorker準備・データ受け渡しのオーバーヘッドが勝り、逆に遅くなった。本研究でも「1タスクの重さ」を見てから並列化を判断する。</a:t>
+            </a:r>
+            <a:endParaRPr lang="en-US" sz="1300" dirty="0"/>
+          </a:p>
+        </p:txBody>
+      </p:sp>
+      <p:sp>
+        <p:nvSpPr>
+          <p:cNvPr id="12" name="Text 10"/>
+          <p:cNvSpPr/>
+          <p:nvPr/>
+        </p:nvSpPr>
+        <p:spPr>
+          <a:xfrm>
+            <a:off x="548640" y="6446520"/>
+            <a:ext cx="11064240" cy="274320"/>
+          </a:xfrm>
+          <a:prstGeom prst="rect">
+            <a:avLst/>
+          </a:prstGeom>
+          <a:noFill/>
+          <a:ln/>
+        </p:spPr>
+        <p:txBody>
+          <a:bodyPr wrap="square" lIns="0" tIns="0" rIns="0" bIns="0" rtlCol="0" anchor="ctr"/>
+          <a:lstStyle/>
+          <a:p>
+            <a:pPr indent="0" marL="0">
+              <a:buNone/>
+            </a:pPr>
+            <a:r>
+              <a:rPr lang="en-US" sz="1000" dirty="0">
+                <a:solidFill>
+                  <a:srgbClr val="7A6A62"/>
                 </a:solidFill>
                 <a:latin typeface="Calibri" pitchFamily="34" charset="0"/>
                 <a:ea typeface="Calibri" pitchFamily="34" charset="-122"/>
                 <a:cs typeface="Calibri" pitchFamily="34" charset="-120"/>
               </a:rPr>
-              <a:t>パラメータ（格子ピッチ・周期探索範囲）が手動指定のまま</a:t>
-            </a:r>
-            <a:endParaRPr lang="en-US" sz="1350" dirty="0"/>
-          </a:p>
-          <a:p>
-            <a:pPr marL="342900" indent="-342900">
-              <a:buSzPct val="100000"/>
-              <a:buChar char="•"/>
-            </a:pPr>
-            <a:r>
-              <a:rPr lang="en-US" sz="1350" dirty="0">
-                <a:solidFill>
-                  <a:srgbClr val="333333"/>
-                </a:solidFill>
-                <a:latin typeface="Calibri" pitchFamily="34" charset="0"/>
-                <a:ea typeface="Calibri" pitchFamily="34" charset="-122"/>
-                <a:cs typeface="Calibri" pitchFamily="34" charset="-120"/>
-              </a:rPr>
-              <a:t>曲面対応は局所平面フィット近似 → 円筒フィット＋展開への拡張を検討</a:t>
-            </a:r>
-            <a:endParaRPr lang="en-US" sz="1350" dirty="0"/>
-          </a:p>
-        </p:txBody>
-      </p:sp>
-      <p:sp>
-        <p:nvSpPr>
-          <p:cNvPr id="8" name="Text 6"/>
-          <p:cNvSpPr/>
-          <p:nvPr/>
-        </p:nvSpPr>
-        <p:spPr>
-          <a:xfrm>
-            <a:off x="548640" y="6446520"/>
-            <a:ext cx="11064240" cy="274320"/>
-          </a:xfrm>
-          <a:prstGeom prst="rect">
-            <a:avLst/>
-          </a:prstGeom>
-          <a:noFill/>
-          <a:ln/>
-        </p:spPr>
-        <p:txBody>
-          <a:bodyPr wrap="square" lIns="0" tIns="0" rIns="0" bIns="0" rtlCol="0" anchor="ctr"/>
-          <a:lstStyle/>
-          <a:p>
-            <a:pPr indent="0" marL="0">
-              <a:buNone/>
-            </a:pPr>
-            <a:r>
-              <a:rPr lang="en-US" sz="1000" dirty="0">
-                <a:solidFill>
-                  <a:srgbClr val="7A6A62"/>
-                </a:solidFill>
-                <a:latin typeface="Calibri" pitchFamily="34" charset="0"/>
-                <a:ea typeface="Calibri" pitchFamily="34" charset="-122"/>
-                <a:cs typeface="Calibri" pitchFamily="34" charset="-120"/>
-              </a:rPr>
-              <a:t>根拠: 04_Projects/修士研究/STATE.md, python/README.md</a:t>
+              <a:t>根拠: 04_Projects/MultivariatAanalysis/11, 12（並列化課題の実験結果）</a:t>
             </a:r>
             <a:endParaRPr lang="en-US" sz="1000" dirty="0"/>
           </a:p>
@@ -5992,7 +6028,7 @@
                 <a:ea typeface="Cambria" pitchFamily="34" charset="-122"/>
                 <a:cs typeface="Cambria" pitchFamily="34" charset="-120"/>
               </a:rPr>
-              <a:t>今後の展望 — 講義内容の研究への応用</a:t>
+              <a:t>今後の展望 — 効率化の適用計画</a:t>
             </a:r>
             <a:endParaRPr lang="en-US" sz="3000" dirty="0"/>
           </a:p>

--- a/13/第13回発表_修士研究と大規模計算.pptx
+++ b/13/第13回発表_修士研究と大規模計算.pptx
@@ -512,8 +512,8 @@
             <a:r>
               <a:rPr lang="en-US" dirty="0"/>
               <a:t>（約30秒）
-第13回の発表を始めます。私の修士研究は「縄文土器の3Dメッシュから、縄目圧痕の周期を全自動で推定する」というテーマです。
-本日は前半で研究の内容を紹介し、後半で、この講義で学んだ多変量解析と並列化の考え方が、研究のどこを効率化できるのかを説明します。</a:t>
+第13回の発表を始めます。私の修士研究は、ひとことで言うと「縄文土器の表面にある縄目のもようを、コンピュータで自動的に測る」というものです。
+本日は前半で研究の中身を紹介し、後半で、この講義で学んだことが研究のどこで役に立つのかをお話しします。</a:t>
             </a:r>
             <a:endParaRPr lang="en-US" dirty="0"/>
           </a:p>
@@ -602,9 +602,9 @@
             <a:r>
               <a:rPr lang="en-US" dirty="0"/>
               <a:t>（約30秒）
-まとめです。縄文土器の3Dメッシュから縄目圧痕の周期・方向・同巡点を全自動推定するパイプラインを構築しました。
-PCAやクラスタリングといった多変量解析の手法が次元削減による効率化の中核となり、FFTによる計算量削減と並列化余地の見極めが、大規模メッシュ処理の実用性を支えています。
-今後は、スイープ実験の並列化とGA・ベイズ最適化によるパラメータ自動化で、講義の内容をさらに研究へ活かしていきます。
+まとめです。私の研究は、縄文土器の縄目もようを3Dスキャンデータから全自動で測る仕組みづくりです。
+講義前半のデータ分析の手法が「データを減らして対象を絞る」効率化の中心になっていて、後半の大規模計算の考え方が、巨大なデータを現実的な時間で処理する鍵になっています。
+今後は精度テストの並列実行と設定の自動チューニングに、講義の内容を活かしていきます。
 ご清聴ありがとうございました。</a:t>
             </a:r>
             <a:endParaRPr lang="en-US" dirty="0"/>
@@ -694,10 +694,10 @@
             <a:r>
               <a:rPr lang="en-US" dirty="0"/>
               <a:t>（約50秒）
-まず背景です。縄文土器の表面には、縄を転がして付けた「縄目圧痕」という模様が残っています。右の画像が実際の土器片の3Dスキャンです。
-この圧痕の周期、つまり縄目のピッチや、縄の原体が1回転する周期は、どんな縄でどう作られたかを知る考古学的な手がかりになります。
-しかし従来は研究者が目視と手作業で計測しており、時間がかかるうえに、人によって結果が変わり、再現性にも課題がありました。
-そこで本研究では、3Dスキャンで得たPLYメッシュから、縄目の周期・方向・同巡点を全自動で推定するパイプラインの構築を目的としています。</a:t>
+まず、どんな研究かを説明します。縄文土器の表面には、縄を転がして付けた縄目のもようが残っています。右の画像が、実際に使っている土器のかけらの3Dスキャンです。
+このもようの間隔や、縄が1回転する長さがわかると、どんな縄を使ってどう作られたのか、という考古学の手がかりになります。
+ただ、いままでは研究者が目で見て手作業で測っていました。時間がかかりますし、測る人によって結果が変わってしまうという問題があります。
+そこで私の研究では、土器を3Dスキャンしたデータをコンピュータに読み込ませて、縄目の間隔や向きを全部自動で測れるようにすることを目指しています。</a:t>
             </a:r>
             <a:endParaRPr lang="en-US" dirty="0"/>
           </a:p>
@@ -785,10 +785,12 @@
           <a:p>
             <a:r>
               <a:rPr lang="en-US" dirty="0"/>
-              <a:t>（約60秒）
-処理の全体像です。パイプラインはM1からM5の5段階で構成しています。
-M1でPLYメッシュを読み込み、M2で法線のクラスタリングによって縄目のある面だけを切り出します。M3では、その面にPCAで平面をフィットして格子状にサンプリングし、2次元の高さマップに変換します。M4では、この高さマップに2次元自己相関をかけて縄目の周期ベクトルを推定し、構造テンソルで縄の走行方向を求めます。最後のM5で、縄の原体が1回転するごとに現れる「同巡点」を検出します。
-ポイントは、3Dメッシュを2Dの高さマップへ、さらに1Dの位相プロファイルへと、段階的に次元を落としながら情報を集約している点です。C++版とPython版を実装済みで、合成データによるテスト16件を通過しています。</a:t>
+              <a:t>（約55秒）
+処理の流れは5つのステップです。
+まず3Dスキャンのデータを読み込み、次に、縄目のもようがある面だけを選び出します。3つ目のステップで、その面のでこぼこを普通の2次元の画像に変換します。ここまでくれば、あとは画像処理の問題になります。
+4つ目のステップで、もようの繰り返しの間隔と向きを測り、最後の5つ目で、縄が1回転するごとの区切りの位置を見つけます。
+ポイントは、3Dの複雑な形をそのまま扱うのではなく、2Dの画像、さらに1本の波形へと、だんだんシンプルなデータに変換しながら測っていくことです。
+プログラムはすでに動いていて、答えがわかっているテスト用のデータでは、正しく測れることを確認しています。</a:t>
             </a:r>
             <a:endParaRPr lang="en-US" dirty="0"/>
           </a:p>
@@ -877,9 +879,10 @@
             <a:r>
               <a:rPr lang="en-US" dirty="0"/>
               <a:t>（約50秒）
-M5について、もう少し詳しく説明します。同巡点とは、縄の原体が1回転するごとに同じ模様が現れる点のことで、その間隔が回転周期Tです。右の画像の黒い点が、目視で付けられた同巡点の位置です。
-手法としては、高さマップを縄目の方向に整列させ、正規化相互相関、NCCのプロファイルから回転周期Tを推定します。その後、アンカー点の位相を揃えて帯フィットを行い、同巡点の3D座標を出力します。土器は曲面なので、局所的な平面フィットで曲率に対応しています。
-合成データでの受け入れ試験では、既知の周期に対して誤差2%未満、データが20%欠損していても2%未満を維持できることを確認しています。</a:t>
+この研究のいちばんの新しさが、最後のステップです。
+縄は1回転するごとに同じもようが繰り返されます。右の画像の黒い点は、人が目で見て付けた「縄1回転分の区切り」の位置です。これをコンピュータに見つけさせたい、というわけです。
+やり方のイメージは単純で、もようの画像を少しずつずらしながら重ねてみて、「どれだけずらすと一番ぴったり重なるか」を調べます。一番よく重なるずらし幅が、ちょうど縄1回転分の長さになります。
+テスト用のデータで確認したところ、正解とのずれは2%未満で、データの2割が欠けていても精度を保てました。用意した16件のテストにすべて合格しています。</a:t>
             </a:r>
             <a:endParaRPr lang="en-US" dirty="0"/>
           </a:p>
@@ -968,10 +971,10 @@
             <a:r>
               <a:rPr lang="en-US" dirty="0"/>
               <a:t>（約45秒）
-現状の結果です。左が実際の土器片データに適用した出力例で、縄目のピッチが約3.4ミリ、回転周期が約44ミリ、同巡点のアンカーが6点検出されています。
-一方で課題も残っています。最大の課題は、実データ上の同巡点の正解座標、ground truthがまだ手に入っておらず、定量評価が保留になっている点です。現在、指導教員に正解座標の計測を依頼しています。
-また、格子ピッチや周期の探索範囲といったパラメータが手動指定のままである点、曲面への対応が局所平面の近似にとどまっている点も課題です。
-ここからが本題で、この研究を講義で学んだ手法でどう効率化できるかを説明します。</a:t>
+いまどこまでできているかです。本物の土器のデータで動かすと、縄目の間隔が約3.4ミリ、縄1回転分の長さが約44ミリ、区切りの位置が6か所、というように自動で測れています。
+ただし課題もあります。いちばん大きいのは、本物の土器については「本当の正解」のデータがまだ手元になく、どれくらい正確に測れているのかを数字で示せていないことです。いま、正解データの計測を指導教員にお願いしています。
+また、測るときの細かい設定を人が手で決めている点も、今後自動化したいところです。
+ここからが後半の本題で、この研究を講義で学んだ内容でどう効率化できるか、という話です。</a:t>
             </a:r>
             <a:endParaRPr lang="en-US" dirty="0"/>
           </a:p>
@@ -1060,9 +1063,9 @@
             <a:r>
               <a:rPr lang="en-US" dirty="0"/>
               <a:t>（約40秒）
-効率化の話に入る前に、扱うデータの規模を確認します。土器片1つのメッシュが約700万頂点あり、そのまま扱うと1回の処理でもメモリと計算時間が問題になる、まさに大規模データです。
-本研究では、対象面の切り出しと高さマップへの次元削減によって、3Dの問題を2Dの画像問題に落として計算量を抑えています。
-それでも自己相関やNCCの計算は繰り返し実行されるため、講義で学んだ「計算量の見積もり」と「並列化できる場所の把握」が重要になります。</a:t>
+なぜ効率化が必要かというと、データがとにかく大きいからです。土器のかけら1つをスキャンしただけで、点の数が約700万個あります。これをまともに全部計算すると、メモリも時間も足りなくなります。
+そこで、必要な面だけを切り出す、3Dを2Dの画像に変換する、という2段階で、扱うデータをぐっと小さくしています。
+それでも重い計算は残るので、講義で学んだ計算のさせ方の工夫が効いてくる、というのが後半の話です。</a:t>
             </a:r>
             <a:endParaRPr lang="en-US" dirty="0"/>
           </a:p>
@@ -1150,12 +1153,12 @@
           <a:p>
             <a:r>
               <a:rPr lang="en-US" dirty="0"/>
-              <a:t>（約55秒）
-効率化ポイントの1つ目は、多変量解析の手法そのものがパイプラインの中核になっているという点です。
-まずPCA。対象面の頂点群にPCAをかけ、第1・第2主成分で平面を張り、第3成分を高さとすることで、3Dデータを2Dの高さマップに次元削減しています。第4回で学んだ主成分分析の直接の応用です。
-次にクラスタリング。頂点の法線ベクトルをクラスタリングして、縄目のある面だけを切り出すことで、後段の処理対象を大幅に減らしています。
-また、勾配の共分散行列を固有値分解する構造テンソルで縄の走行方向を推定しており、これも多変量解析の基本操作です。周期の検出には自己相関とNCC、つまり相関係数を空間パターンに拡張した手法を使っています。
-つまり、次元削減と対象の絞り込みという多変量解析の考え方が、大規模データを現実的な時間で処理するための効率化そのものになっています。</a:t>
+              <a:t>（約50秒）
+効率化ポイントの1つ目は、講義前半で学んだデータ分析の手法です。
+まず主成分分析。土器の面を2Dの画像に変換するとき、面のちょうどいい向きを自動で見つける必要がありますが、そこに主成分分析を使っています。3Dのデータを2Dに減らす主役です。
+次にクラスタ分析。土器の表面を、似た向きの面ごとにグループ分けして、縄目のある面だけを選び出しています。計算する範囲を絞る役目です。
+そして相関。「ずらして重ねて、どれだけ似ているか」を調べるのは相関係数の考え方そのもので、もようの間隔も縄1回転分の長さも、これで見つけています。
+つまり講義前半の手法は、データを減らす、対象を絞る、繰り返しを見つける、という形でこの研究の中心にいます。</a:t>
             </a:r>
             <a:endParaRPr lang="en-US" dirty="0"/>
           </a:p>
@@ -1244,10 +1247,10 @@
             <a:r>
               <a:rPr lang="en-US" dirty="0"/>
               <a:t>（約55秒）
-効率化ポイントの2つ目は、大規模計算と並列化です。
-まずアルゴリズムによる高速化として、2D自己相関を素朴に計算するとオーダーN の4乗かかるところを、FFTを使ってN2乗 log Nに削減しています。第11回で学んだ、アルゴリズムの選択による計算量削減の実例です。
-次に並列化できる箇所です。格子サンプリングは各格子点が独立に計算でき、NCCプロファイルも各シフト量を独立に評価できます。複数の土器片のバッチ処理も同様です。これらは第12回の遺伝的アルゴリズムの個体評価と同じ、互いに依存しない計算なので、並列化が可能です。
-ただし注意点があります。第12回のGA実験では、1タスクが軽い場合はWorkerの準備やデータの受け渡しのオーバーヘッドが勝ってしまい、並列化するとかえって遅くなりました。本研究でも、1タスクの重さを計測してから並列化するかを判断する方針です。</a:t>
+効率化ポイントの2つ目は、講義後半で学んだ大規模計算の考え方です。3つあります。
+1つ目は、計算のやり方そのものを変えて速くすることです。「ずらして重ねる」計算はまともにやるととても重いのですが、計算の順番を工夫する定番の方法を使うと、同じ答えをずっと速く出せます。
+2つ目は、同時に計算できるところを見つけることです。画像の各マス目の計算や、複数の土器を測る処理は、お互いの結果を待つ必要がありません。これは第12回でやった遺伝的アルゴリズムの個体評価と同じ形なので、手分けして同時に計算できます。
+ただし3つ目、手分けにはコストもあります。第12回の実験では、1つ1つの計算が軽すぎると、手分けの準備のほうに時間がかかって、逆に遅くなりました。なので本研究でも、1つの計算の重さを見てから手分けするかどうかを決める方針です。</a:t>
             </a:r>
             <a:endParaRPr lang="en-US" dirty="0"/>
           </a:p>
@@ -1336,10 +1339,10 @@
             <a:r>
               <a:rPr lang="en-US" dirty="0"/>
               <a:t>（約45秒）
-今後の展望です。3つ計画しています。
-1つ目は評価ハーネスの整備です。ノイズや欠損をパラメータ化した合成データで大量のスイープ実験を行います。条件の組合せが多く、各条件は独立に実行できるので、multiprocessingで並列化します。
-2つ目はパラメータの自動最適化です。現在手動指定になっている格子ピッチなどを、GAやベイズ最適化で自動チューニングします。1回の評価がパイプライン1実行に相当して重いため、第12回の実験とは逆に、今度は並列化の効果が出やすいと考えています。
-3つ目は複数の土器片への展開で、推定した周期や方向を統計的に比較していきます。</a:t>
+これからの計画は3つです。
+1つ目は、たくさんの条件での精度テストです。ノイズや欠けの量を変えたテストデータを大量に作って、どこまで正しく測れるかを調べます。条件ごとに独立した計算なので、手分けして同時に走らせます。
+2つ目は、設定の自動チューニングです。いま人が手で決めている設定を、第12回で学んだ遺伝的アルゴリズムなどで自動的に探させます。こちらは1回の試行が重いので、第12回の実験とは逆に、手分けの効果が出やすいと考えています。
+3つ目は、たくさんの土器への適用です。自動で測れるようになれば、土器ごとの違いを統計的に比べられるようになります。</a:t>
             </a:r>
             <a:endParaRPr lang="en-US" dirty="0"/>
           </a:p>
@@ -1784,7 +1787,7 @@
                 <a:ea typeface="Cambria" pitchFamily="34" charset="-122"/>
                 <a:cs typeface="Cambria" pitchFamily="34" charset="-120"/>
               </a:rPr>
-              <a:t>縄文土器の3Dメッシュからの</a:t>
+              <a:t>縄文土器の縄目もようを</a:t>
             </a:r>
             <a:endParaRPr lang="en-US" sz="4000" dirty="0"/>
           </a:p>
@@ -1801,7 +1804,7 @@
                 <a:ea typeface="Cambria" pitchFamily="34" charset="-122"/>
                 <a:cs typeface="Cambria" pitchFamily="34" charset="-120"/>
               </a:rPr>
-              <a:t>縄目圧痕周期の全自動推定</a:t>
+              <a:t>コンピュータで自動計測する研究</a:t>
             </a:r>
             <a:endParaRPr lang="en-US" sz="4000" dirty="0"/>
           </a:p>
@@ -1840,7 +1843,7 @@
                 <a:ea typeface="Calibri" pitchFamily="34" charset="-122"/>
                 <a:cs typeface="Calibri" pitchFamily="34" charset="-120"/>
               </a:rPr>
-              <a:t>— 修士研究の紹介と、多変量解析・並列化による効率化 —</a:t>
+              <a:t>— 研究紹介と、講義で学んだ手法による効率化 —</a:t>
             </a:r>
             <a:endParaRPr lang="en-US" sz="2000" dirty="0"/>
           </a:p>
@@ -1993,7 +1996,7 @@
                 <a:ea typeface="Calibri" pitchFamily="34" charset="-122"/>
                 <a:cs typeface="Calibri" pitchFamily="34" charset="-120"/>
               </a:rPr>
-              <a:t>縄文土器の3Dメッシュ（数百万頂点）から縄目圧痕の周期・方向・同巡点を全自動推定するパイプラインM1–M5を構築した。</a:t>
+              <a:t>縄文土器の縄目もようを、3Dスキャンデータから全自動で測る仕組みを作っている。</a:t>
             </a:r>
             <a:endParaRPr lang="en-US" sz="1700" dirty="0"/>
           </a:p>
@@ -2014,7 +2017,7 @@
                 <a:ea typeface="Calibri" pitchFamily="34" charset="-122"/>
                 <a:cs typeface="Calibri" pitchFamily="34" charset="-120"/>
               </a:rPr>
-              <a:t>PCA・クラスタリング・固有値分解・相関という多変量解析の手法が、次元削減と対象絞り込みによる効率化の中核になっている。</a:t>
+              <a:t>講義前半のデータ分析の手法（主成分分析・クラスタ分析・相関）が、「データを減らして対象を絞る」効率化の中心になっている。</a:t>
             </a:r>
             <a:endParaRPr lang="en-US" sz="1700" dirty="0"/>
           </a:p>
@@ -2035,7 +2038,7 @@
                 <a:ea typeface="Calibri" pitchFamily="34" charset="-122"/>
                 <a:cs typeface="Calibri" pitchFamily="34" charset="-120"/>
               </a:rPr>
-              <a:t>FFTによる計算量削減と、独立計算の並列化余地の見極め（第12回の実験知見）が大規模メッシュ処理の実用性を支える。</a:t>
+              <a:t>講義後半の大規模計算の考え方（速い計算方法・手分けとそのコスト）が、巨大なデータを現実的な時間で処理する鍵になっている。</a:t>
             </a:r>
             <a:endParaRPr lang="en-US" sz="1700" dirty="0"/>
           </a:p>
@@ -2053,7 +2056,7 @@
                 <a:ea typeface="Calibri" pitchFamily="34" charset="-122"/>
                 <a:cs typeface="Calibri" pitchFamily="34" charset="-120"/>
               </a:rPr>
-              <a:t>今後は評価実験のスイープ並列化と、GA・ベイズ最適化によるパラメータ自動化で、講義内容をさらに研究へ還元する。</a:t>
+              <a:t>今後は精度テストの並列実行と、設定の自動チューニングに講義の内容を活かしていく。</a:t>
             </a:r>
             <a:endParaRPr lang="en-US" sz="1700" dirty="0"/>
           </a:p>
@@ -2163,7 +2166,7 @@
                 <a:ea typeface="Cambria" pitchFamily="34" charset="-122"/>
                 <a:cs typeface="Cambria" pitchFamily="34" charset="-120"/>
               </a:rPr>
-              <a:t>研究の背景と目的</a:t>
+              <a:t>どんな研究か</a:t>
             </a:r>
             <a:endParaRPr lang="en-US" sz="3000" dirty="0"/>
           </a:p>
@@ -2200,7 +2203,7 @@
         <p:spPr>
           <a:xfrm>
             <a:off x="777240" y="1417320"/>
-            <a:ext cx="1188720" cy="365760"/>
+            <a:ext cx="1828800" cy="365760"/>
           </a:xfrm>
           <a:prstGeom prst="rect">
             <a:avLst/>
@@ -2263,7 +2266,7 @@
                 <a:ea typeface="Calibri" pitchFamily="34" charset="-122"/>
                 <a:cs typeface="Calibri" pitchFamily="34" charset="-120"/>
               </a:rPr>
-              <a:t>縄文土器の表面には、縄を転がして付けた「縄目圧痕」が残る。圧痕の周期（ピッチ）や原体の回転周期は、製作技法を知る考古学的手がかりになる。</a:t>
+              <a:t>縄文土器の表面には、縄を転がして付けた「縄目もよう」が残っている。もようの間隔や縄1回転分の長さがわかると、どんな縄でどう作られたかの手がかりになる。</a:t>
             </a:r>
             <a:endParaRPr lang="en-US" sz="1250" dirty="0"/>
           </a:p>
@@ -2300,7 +2303,7 @@
         <p:spPr>
           <a:xfrm>
             <a:off x="777240" y="2651760"/>
-            <a:ext cx="1188720" cy="365760"/>
+            <a:ext cx="1828800" cy="365760"/>
           </a:xfrm>
           <a:prstGeom prst="rect">
             <a:avLst/>
@@ -2324,7 +2327,7 @@
                 <a:ea typeface="Cambria" pitchFamily="34" charset="-122"/>
                 <a:cs typeface="Cambria" pitchFamily="34" charset="-120"/>
               </a:rPr>
-              <a:t>課題</a:t>
+              <a:t>困りごと</a:t>
             </a:r>
             <a:endParaRPr lang="en-US" sz="1600" dirty="0"/>
           </a:p>
@@ -2363,7 +2366,7 @@
                 <a:ea typeface="Calibri" pitchFamily="34" charset="-122"/>
                 <a:cs typeface="Calibri" pitchFamily="34" charset="-120"/>
               </a:rPr>
-              <a:t>従来は研究者が目視・手作業で計測しており、時間がかかり客観性・再現性に欠ける。</a:t>
+              <a:t>いままでは研究者が目で見て手作業で測っていた。時間がかかるし、人によって結果が変わってしまう。</a:t>
             </a:r>
             <a:endParaRPr lang="en-US" sz="1250" dirty="0"/>
           </a:p>
@@ -2400,7 +2403,7 @@
         <p:spPr>
           <a:xfrm>
             <a:off x="777240" y="3886200"/>
-            <a:ext cx="1188720" cy="365760"/>
+            <a:ext cx="1828800" cy="365760"/>
           </a:xfrm>
           <a:prstGeom prst="rect">
             <a:avLst/>
@@ -2424,7 +2427,7 @@
                 <a:ea typeface="Cambria" pitchFamily="34" charset="-122"/>
                 <a:cs typeface="Cambria" pitchFamily="34" charset="-120"/>
               </a:rPr>
-              <a:t>目的</a:t>
+              <a:t>やりたいこと</a:t>
             </a:r>
             <a:endParaRPr lang="en-US" sz="1600" dirty="0"/>
           </a:p>
@@ -2463,7 +2466,7 @@
                 <a:ea typeface="Calibri" pitchFamily="34" charset="-122"/>
                 <a:cs typeface="Calibri" pitchFamily="34" charset="-120"/>
               </a:rPr>
-              <a:t>3Dスキャンした土器のPLYメッシュから、縄目の周期・方向・同巡点（原体1回転ごとの同一模様点）を全自動で推定するパイプラインを構築する。</a:t>
+              <a:t>土器を3Dスキャンしたデータをコンピュータに読み込ませて、縄目の間隔・向き・縄1回転分の区切りを、全部自動で測れるようにする。</a:t>
             </a:r>
             <a:endParaRPr lang="en-US" sz="1250" dirty="0"/>
           </a:p>
@@ -2526,48 +2529,9 @@
                 <a:ea typeface="Calibri" pitchFamily="34" charset="-122"/>
                 <a:cs typeface="Calibri" pitchFamily="34" charset="-120"/>
               </a:rPr>
-              <a:t>対象データ例: 縄文土器片（同巡点の目視位置つき）</a:t>
+              <a:t>研究で使っている土器片の3Dスキャンデータ</a:t>
             </a:r>
             <a:endParaRPr lang="en-US" sz="1100" dirty="0"/>
-          </a:p>
-        </p:txBody>
-      </p:sp>
-      <p:sp>
-        <p:nvSpPr>
-          <p:cNvPr id="14" name="Text 11"/>
-          <p:cNvSpPr/>
-          <p:nvPr/>
-        </p:nvSpPr>
-        <p:spPr>
-          <a:xfrm>
-            <a:off x="548640" y="6446520"/>
-            <a:ext cx="11064240" cy="274320"/>
-          </a:xfrm>
-          <a:prstGeom prst="rect">
-            <a:avLst/>
-          </a:prstGeom>
-          <a:noFill/>
-          <a:ln/>
-        </p:spPr>
-        <p:txBody>
-          <a:bodyPr wrap="square" lIns="0" tIns="0" rIns="0" bIns="0" rtlCol="0" anchor="ctr"/>
-          <a:lstStyle/>
-          <a:p>
-            <a:pPr indent="0" marL="0">
-              <a:buNone/>
-            </a:pPr>
-            <a:r>
-              <a:rPr lang="en-US" sz="1000" dirty="0">
-                <a:solidFill>
-                  <a:srgbClr val="7A6A62"/>
-                </a:solidFill>
-                <a:latin typeface="Calibri" pitchFamily="34" charset="0"/>
-                <a:ea typeface="Calibri" pitchFamily="34" charset="-122"/>
-                <a:cs typeface="Calibri" pitchFamily="34" charset="-120"/>
-              </a:rPr>
-              <a:t>根拠: 04_Projects/修士研究/README.md</a:t>
-            </a:r>
-            <a:endParaRPr lang="en-US" sz="1000" dirty="0"/>
           </a:p>
         </p:txBody>
       </p:sp>
@@ -2636,7 +2600,7 @@
                 <a:ea typeface="Cambria" pitchFamily="34" charset="-122"/>
                 <a:cs typeface="Cambria" pitchFamily="34" charset="-120"/>
               </a:rPr>
-              <a:t>処理パイプライン（M1–M5）</a:t>
+              <a:t>処理の流れ（5つのステップ）</a:t>
             </a:r>
             <a:endParaRPr lang="en-US" sz="3000" dirty="0"/>
           </a:p>
@@ -2736,7 +2700,7 @@
                 <a:ea typeface="Calibri" pitchFamily="34" charset="-122"/>
                 <a:cs typeface="Calibri" pitchFamily="34" charset="-120"/>
               </a:rPr>
-              <a:t>PLY読込</a:t>
+              <a:t>読み込み</a:t>
             </a:r>
             <a:endParaRPr lang="en-US" sz="1400" dirty="0"/>
           </a:p>
@@ -2767,7 +2731,7 @@
               <a:buNone/>
             </a:pPr>
             <a:r>
-              <a:rPr lang="en-US" sz="1050" dirty="0">
+              <a:rPr lang="en-US" sz="1100" dirty="0">
                 <a:solidFill>
                   <a:srgbClr val="333333"/>
                 </a:solidFill>
@@ -2775,16 +2739,16 @@
                 <a:ea typeface="Calibri" pitchFamily="34" charset="-122"/>
                 <a:cs typeface="Calibri" pitchFamily="34" charset="-120"/>
               </a:rPr>
-              <a:t>バイナリPLYを読み込み</a:t>
-            </a:r>
-            <a:endParaRPr lang="en-US" sz="1050" dirty="0"/>
+              <a:t>3Dスキャンデータを</a:t>
+            </a:r>
+            <a:endParaRPr lang="en-US" sz="1100" dirty="0"/>
           </a:p>
           <a:p>
             <a:pPr algn="ctr" indent="0" marL="0">
               <a:buNone/>
             </a:pPr>
             <a:r>
-              <a:rPr lang="en-US" sz="1050" dirty="0">
+              <a:rPr lang="en-US" sz="1100" dirty="0">
                 <a:solidFill>
                   <a:srgbClr val="333333"/>
                 </a:solidFill>
@@ -2792,9 +2756,9 @@
                 <a:ea typeface="Calibri" pitchFamily="34" charset="-122"/>
                 <a:cs typeface="Calibri" pitchFamily="34" charset="-120"/>
               </a:rPr>
-              <a:t>(741万頂点級対応)</a:t>
-            </a:r>
-            <a:endParaRPr lang="en-US" sz="1050" dirty="0"/>
+              <a:t>読み込む</a:t>
+            </a:r>
+            <a:endParaRPr lang="en-US" sz="1100" dirty="0"/>
           </a:p>
         </p:txBody>
       </p:sp>
@@ -2931,7 +2895,7 @@
                 <a:ea typeface="Calibri" pitchFamily="34" charset="-122"/>
                 <a:cs typeface="Calibri" pitchFamily="34" charset="-120"/>
               </a:rPr>
-              <a:t>対象面抽出</a:t>
+              <a:t>面の切り出し</a:t>
             </a:r>
             <a:endParaRPr lang="en-US" sz="1400" dirty="0"/>
           </a:p>
@@ -2962,7 +2926,7 @@
               <a:buNone/>
             </a:pPr>
             <a:r>
-              <a:rPr lang="en-US" sz="1050" dirty="0">
+              <a:rPr lang="en-US" sz="1100" dirty="0">
                 <a:solidFill>
                   <a:srgbClr val="333333"/>
                 </a:solidFill>
@@ -2970,16 +2934,16 @@
                 <a:ea typeface="Calibri" pitchFamily="34" charset="-122"/>
                 <a:cs typeface="Calibri" pitchFamily="34" charset="-120"/>
               </a:rPr>
-              <a:t>法線クラスタリング＋</a:t>
-            </a:r>
-            <a:endParaRPr lang="en-US" sz="1050" dirty="0"/>
+              <a:t>縄目がある面だけを</a:t>
+            </a:r>
+            <a:endParaRPr lang="en-US" sz="1100" dirty="0"/>
           </a:p>
           <a:p>
             <a:pPr algn="ctr" indent="0" marL="0">
               <a:buNone/>
             </a:pPr>
             <a:r>
-              <a:rPr lang="en-US" sz="1050" dirty="0">
+              <a:rPr lang="en-US" sz="1100" dirty="0">
                 <a:solidFill>
                   <a:srgbClr val="333333"/>
                 </a:solidFill>
@@ -2987,9 +2951,9 @@
                 <a:ea typeface="Calibri" pitchFamily="34" charset="-122"/>
                 <a:cs typeface="Calibri" pitchFamily="34" charset="-120"/>
               </a:rPr>
-              <a:t>最大連結成分</a:t>
-            </a:r>
-            <a:endParaRPr lang="en-US" sz="1050" dirty="0"/>
+              <a:t>選び出す</a:t>
+            </a:r>
+            <a:endParaRPr lang="en-US" sz="1100" dirty="0"/>
           </a:p>
         </p:txBody>
       </p:sp>
@@ -3126,7 +3090,7 @@
                 <a:ea typeface="Calibri" pitchFamily="34" charset="-122"/>
                 <a:cs typeface="Calibri" pitchFamily="34" charset="-120"/>
               </a:rPr>
-              <a:t>高さマップ化</a:t>
+              <a:t>画像に変換</a:t>
             </a:r>
             <a:endParaRPr lang="en-US" sz="1400" dirty="0"/>
           </a:p>
@@ -3157,7 +3121,7 @@
               <a:buNone/>
             </a:pPr>
             <a:r>
-              <a:rPr lang="en-US" sz="1050" dirty="0">
+              <a:rPr lang="en-US" sz="1100" dirty="0">
                 <a:solidFill>
                   <a:srgbClr val="333333"/>
                 </a:solidFill>
@@ -3165,16 +3129,16 @@
                 <a:ea typeface="Calibri" pitchFamily="34" charset="-122"/>
                 <a:cs typeface="Calibri" pitchFamily="34" charset="-120"/>
               </a:rPr>
-              <a:t>PCA平面フィット＋</a:t>
-            </a:r>
-            <a:endParaRPr lang="en-US" sz="1050" dirty="0"/>
+              <a:t>でこぼこを</a:t>
+            </a:r>
+            <a:endParaRPr lang="en-US" sz="1100" dirty="0"/>
           </a:p>
           <a:p>
             <a:pPr algn="ctr" indent="0" marL="0">
               <a:buNone/>
             </a:pPr>
             <a:r>
-              <a:rPr lang="en-US" sz="1050" dirty="0">
+              <a:rPr lang="en-US" sz="1100" dirty="0">
                 <a:solidFill>
                   <a:srgbClr val="333333"/>
                 </a:solidFill>
@@ -3182,9 +3146,9 @@
                 <a:ea typeface="Calibri" pitchFamily="34" charset="-122"/>
                 <a:cs typeface="Calibri" pitchFamily="34" charset="-120"/>
               </a:rPr>
-              <a:t>格子サンプリング・detrend</a:t>
-            </a:r>
-            <a:endParaRPr lang="en-US" sz="1050" dirty="0"/>
+              <a:t>2Dの画像にする</a:t>
+            </a:r>
+            <a:endParaRPr lang="en-US" sz="1100" dirty="0"/>
           </a:p>
         </p:txBody>
       </p:sp>
@@ -3321,7 +3285,7 @@
                 <a:ea typeface="Calibri" pitchFamily="34" charset="-122"/>
                 <a:cs typeface="Calibri" pitchFamily="34" charset="-120"/>
               </a:rPr>
-              <a:t>周期推定</a:t>
+              <a:t>間隔を測る</a:t>
             </a:r>
             <a:endParaRPr lang="en-US" sz="1400" dirty="0"/>
           </a:p>
@@ -3352,7 +3316,7 @@
               <a:buNone/>
             </a:pPr>
             <a:r>
-              <a:rPr lang="en-US" sz="1050" dirty="0">
+              <a:rPr lang="en-US" sz="1100" dirty="0">
                 <a:solidFill>
                   <a:srgbClr val="333333"/>
                 </a:solidFill>
@@ -3360,16 +3324,16 @@
                 <a:ea typeface="Calibri" pitchFamily="34" charset="-122"/>
                 <a:cs typeface="Calibri" pitchFamily="34" charset="-120"/>
               </a:rPr>
-              <a:t>マスク付き2D自己相関＋</a:t>
-            </a:r>
-            <a:endParaRPr lang="en-US" sz="1050" dirty="0"/>
+              <a:t>もようの繰り返しの</a:t>
+            </a:r>
+            <a:endParaRPr lang="en-US" sz="1100" dirty="0"/>
           </a:p>
           <a:p>
             <a:pPr algn="ctr" indent="0" marL="0">
               <a:buNone/>
             </a:pPr>
             <a:r>
-              <a:rPr lang="en-US" sz="1050" dirty="0">
+              <a:rPr lang="en-US" sz="1100" dirty="0">
                 <a:solidFill>
                   <a:srgbClr val="333333"/>
                 </a:solidFill>
@@ -3377,9 +3341,9 @@
                 <a:ea typeface="Calibri" pitchFamily="34" charset="-122"/>
                 <a:cs typeface="Calibri" pitchFamily="34" charset="-120"/>
               </a:rPr>
-              <a:t>構造テンソルで方向推定</a:t>
-            </a:r>
-            <a:endParaRPr lang="en-US" sz="1050" dirty="0"/>
+              <a:t>間隔と向きを測る</a:t>
+            </a:r>
+            <a:endParaRPr lang="en-US" sz="1100" dirty="0"/>
           </a:p>
         </p:txBody>
       </p:sp>
@@ -3516,7 +3480,7 @@
                 <a:ea typeface="Calibri" pitchFamily="34" charset="-122"/>
                 <a:cs typeface="Calibri" pitchFamily="34" charset="-120"/>
               </a:rPr>
-              <a:t>同巡点検出</a:t>
+              <a:t>回転を見つける</a:t>
             </a:r>
             <a:endParaRPr lang="en-US" sz="1400" dirty="0"/>
           </a:p>
@@ -3547,7 +3511,7 @@
               <a:buNone/>
             </a:pPr>
             <a:r>
-              <a:rPr lang="en-US" sz="1050" dirty="0">
+              <a:rPr lang="en-US" sz="1100" dirty="0">
                 <a:solidFill>
                   <a:srgbClr val="FFFFFF"/>
                 </a:solidFill>
@@ -3555,16 +3519,16 @@
                 <a:ea typeface="Calibri" pitchFamily="34" charset="-122"/>
                 <a:cs typeface="Calibri" pitchFamily="34" charset="-120"/>
               </a:rPr>
-              <a:t>NCCプロファイル→回転周期T</a:t>
-            </a:r>
-            <a:endParaRPr lang="en-US" sz="1050" dirty="0"/>
+              <a:t>縄1回転分の</a:t>
+            </a:r>
+            <a:endParaRPr lang="en-US" sz="1100" dirty="0"/>
           </a:p>
           <a:p>
             <a:pPr algn="ctr" indent="0" marL="0">
               <a:buNone/>
             </a:pPr>
             <a:r>
-              <a:rPr lang="en-US" sz="1050" dirty="0">
+              <a:rPr lang="en-US" sz="1100" dirty="0">
                 <a:solidFill>
                   <a:srgbClr val="FFFFFF"/>
                 </a:solidFill>
@@ -3572,9 +3536,9 @@
                 <a:ea typeface="Calibri" pitchFamily="34" charset="-122"/>
                 <a:cs typeface="Calibri" pitchFamily="34" charset="-120"/>
               </a:rPr>
-              <a:t>→同巡点3D座標</a:t>
-            </a:r>
-            <a:endParaRPr lang="en-US" sz="1050" dirty="0"/>
+              <a:t>区切り位置を見つける</a:t>
+            </a:r>
+            <a:endParaRPr lang="en-US" sz="1100" dirty="0"/>
           </a:p>
         </p:txBody>
       </p:sp>
@@ -3615,7 +3579,7 @@
                 <a:ea typeface="Calibri" pitchFamily="34" charset="-122"/>
                 <a:cs typeface="Calibri" pitchFamily="34" charset="-120"/>
               </a:rPr>
-              <a:t>3Dメッシュ → 2D高さマップ → 1D位相プロファイルと、段階的に次元を落としながら情報を集約する設計。</a:t>
+              <a:t>「3Dの形 → 2Dの画像 → 1本の波形」と、だんだんシンプルなデータに変換しながら測っていく。</a:t>
             </a:r>
             <a:endParaRPr lang="en-US" sz="1500" dirty="0"/>
           </a:p>
@@ -3633,48 +3597,9 @@
                 <a:ea typeface="Calibri" pitchFamily="34" charset="-122"/>
                 <a:cs typeface="Calibri" pitchFamily="34" charset="-120"/>
               </a:rPr>
-              <a:t>C++17版（M1–M4）とPython版（M1–M5, numpy/scipy）を実装。合成データのテスト16件を通過済み。</a:t>
+              <a:t>プログラムは実装済みで、答えがわかっているテスト用データでは正しく測れることを確認済み。</a:t>
             </a:r>
             <a:endParaRPr lang="en-US" sz="1500" dirty="0"/>
-          </a:p>
-        </p:txBody>
-      </p:sp>
-      <p:sp>
-        <p:nvSpPr>
-          <p:cNvPr id="28" name="Text 26"/>
-          <p:cNvSpPr/>
-          <p:nvPr/>
-        </p:nvSpPr>
-        <p:spPr>
-          <a:xfrm>
-            <a:off x="548640" y="6446520"/>
-            <a:ext cx="11064240" cy="274320"/>
-          </a:xfrm>
-          <a:prstGeom prst="rect">
-            <a:avLst/>
-          </a:prstGeom>
-          <a:noFill/>
-          <a:ln/>
-        </p:spPr>
-        <p:txBody>
-          <a:bodyPr wrap="square" lIns="0" tIns="0" rIns="0" bIns="0" rtlCol="0" anchor="ctr"/>
-          <a:lstStyle/>
-          <a:p>
-            <a:pPr indent="0" marL="0">
-              <a:buNone/>
-            </a:pPr>
-            <a:r>
-              <a:rPr lang="en-US" sz="1000" dirty="0">
-                <a:solidFill>
-                  <a:srgbClr val="7A6A62"/>
-                </a:solidFill>
-                <a:latin typeface="Calibri" pitchFamily="34" charset="0"/>
-                <a:ea typeface="Calibri" pitchFamily="34" charset="-122"/>
-                <a:cs typeface="Calibri" pitchFamily="34" charset="-120"/>
-              </a:rPr>
-              <a:t>根拠: 04_Projects/修士研究/python/README.md, design_M5_同位相位置検出.md</a:t>
-            </a:r>
-            <a:endParaRPr lang="en-US" sz="1000" dirty="0"/>
           </a:p>
         </p:txBody>
       </p:sp>
@@ -3743,7 +3668,7 @@
                 <a:ea typeface="Cambria" pitchFamily="34" charset="-122"/>
                 <a:cs typeface="Cambria" pitchFamily="34" charset="-120"/>
               </a:rPr>
-              <a:t>M5: 回転周期と同巡点の自動検出</a:t>
+              <a:t>いちばんの新しさ: 縄1回転分の区切りを見つける</a:t>
             </a:r>
             <a:endParaRPr lang="en-US" sz="3000" dirty="0"/>
           </a:p>
@@ -3786,7 +3711,7 @@
                 <a:ea typeface="Calibri" pitchFamily="34" charset="-122"/>
                 <a:cs typeface="Calibri" pitchFamily="34" charset="-120"/>
               </a:rPr>
-              <a:t>縄の原体が1回転するごとに同じ模様が現れる点＝同巡点。その間隔が「回転周期 T」。</a:t>
+              <a:t>縄は1回転するごとに同じもようが繰り返される。その「同じもようが現れる点」を自動で見つけたい。</a:t>
             </a:r>
             <a:endParaRPr lang="en-US" sz="1450" dirty="0"/>
           </a:p>
@@ -3807,7 +3732,7 @@
                 <a:ea typeface="Calibri" pitchFamily="34" charset="-122"/>
                 <a:cs typeface="Calibri" pitchFamily="34" charset="-120"/>
               </a:rPr>
-              <a:t>高さマップを縄目方向に整列し、NCC（正規化相互相関）のプロファイルから T を推定。</a:t>
+              <a:t>画像をずらしながら重ね、「どれだけずらすと一番よく重なるか」を調べると、1回転分の長さがわかる。</a:t>
             </a:r>
             <a:endParaRPr lang="en-US" sz="1450" dirty="0"/>
           </a:p>
@@ -3828,7 +3753,7 @@
                 <a:ea typeface="Calibri" pitchFamily="34" charset="-122"/>
                 <a:cs typeface="Calibri" pitchFamily="34" charset="-120"/>
               </a:rPr>
-              <a:t>アンカー点の位相を揃えて帯フィットし、同巡点の3D座標を出力する。</a:t>
+              <a:t>見つけた区切り位置は、元の3Dデータ上の座標として出力する。</a:t>
             </a:r>
             <a:endParaRPr lang="en-US" sz="1450" dirty="0"/>
           </a:p>
@@ -3846,7 +3771,7 @@
                 <a:ea typeface="Calibri" pitchFamily="34" charset="-122"/>
                 <a:cs typeface="Calibri" pitchFamily="34" charset="-120"/>
               </a:rPr>
-              <a:t>曲面（土器の円筒面）には局所平面フィットで対応。</a:t>
+              <a:t>土器は丸く曲がっているので、小さい範囲ごとに平らとみなして処理する工夫をしている。</a:t>
             </a:r>
             <a:endParaRPr lang="en-US" sz="1450" dirty="0"/>
           </a:p>
@@ -3907,7 +3832,7 @@
                 <a:ea typeface="Cambria" pitchFamily="34" charset="-122"/>
                 <a:cs typeface="Cambria" pitchFamily="34" charset="-120"/>
               </a:rPr>
-              <a:t>合成データでの受け入れ試験（テスト16件通過）</a:t>
+              <a:t>テスト用データでの確認結果</a:t>
             </a:r>
             <a:endParaRPr lang="en-US" sz="1400" dirty="0"/>
           </a:p>
@@ -3950,7 +3875,7 @@
                 <a:ea typeface="Calibri" pitchFamily="34" charset="-122"/>
                 <a:cs typeface="Calibri" pitchFamily="34" charset="-120"/>
               </a:rPr>
-              <a:t>既知周期に対する誤差 &lt; 2%</a:t>
+              <a:t>正解と比べたずれは 2% 未満</a:t>
             </a:r>
             <a:endParaRPr lang="en-US" sz="1300" dirty="0"/>
           </a:p>
@@ -3971,7 +3896,7 @@
                 <a:ea typeface="Calibri" pitchFamily="34" charset="-122"/>
                 <a:cs typeface="Calibri" pitchFamily="34" charset="-120"/>
               </a:rPr>
-              <a:t>データ欠損20%でも誤差 &lt; 2% を維持</a:t>
+              <a:t>データの2割が欠けていても、精度を保てた</a:t>
             </a:r>
             <a:endParaRPr lang="en-US" sz="1300" dirty="0"/>
           </a:p>
@@ -3989,7 +3914,7 @@
                 <a:ea typeface="Calibri" pitchFamily="34" charset="-122"/>
                 <a:cs typeface="Calibri" pitchFamily="34" charset="-120"/>
               </a:rPr>
-              <a:t>同巡点間隔が周期の整数倍に一致することを確認</a:t>
+              <a:t>テスト16件すべてに合格</a:t>
             </a:r>
             <a:endParaRPr lang="en-US" sz="1300" dirty="0"/>
           </a:p>
@@ -4052,48 +3977,9 @@
                 <a:ea typeface="Calibri" pitchFamily="34" charset="-122"/>
                 <a:cs typeface="Calibri" pitchFamily="34" charset="-120"/>
               </a:rPr>
-              <a:t>ground truth候補: 同巡点の目視位置（指導教員提供画像）</a:t>
+              <a:t>黒い点 = 人が目で見て付けた「縄1回転分の区切り」の位置</a:t>
             </a:r>
             <a:endParaRPr lang="en-US" sz="1100" dirty="0"/>
-          </a:p>
-        </p:txBody>
-      </p:sp>
-      <p:sp>
-        <p:nvSpPr>
-          <p:cNvPr id="9" name="Text 6"/>
-          <p:cNvSpPr/>
-          <p:nvPr/>
-        </p:nvSpPr>
-        <p:spPr>
-          <a:xfrm>
-            <a:off x="548640" y="6446520"/>
-            <a:ext cx="11064240" cy="274320"/>
-          </a:xfrm>
-          <a:prstGeom prst="rect">
-            <a:avLst/>
-          </a:prstGeom>
-          <a:noFill/>
-          <a:ln/>
-        </p:spPr>
-        <p:txBody>
-          <a:bodyPr wrap="square" lIns="0" tIns="0" rIns="0" bIns="0" rtlCol="0" anchor="ctr"/>
-          <a:lstStyle/>
-          <a:p>
-            <a:pPr indent="0" marL="0">
-              <a:buNone/>
-            </a:pPr>
-            <a:r>
-              <a:rPr lang="en-US" sz="1000" dirty="0">
-                <a:solidFill>
-                  <a:srgbClr val="7A6A62"/>
-                </a:solidFill>
-                <a:latin typeface="Calibri" pitchFamily="34" charset="0"/>
-                <a:ea typeface="Calibri" pitchFamily="34" charset="-122"/>
-                <a:cs typeface="Calibri" pitchFamily="34" charset="-120"/>
-              </a:rPr>
-              <a:t>根拠: 04_Projects/修士研究/design_M5_同位相位置検出.md, STATE.md</a:t>
-            </a:r>
-            <a:endParaRPr lang="en-US" sz="1000" dirty="0"/>
           </a:p>
         </p:txBody>
       </p:sp>
@@ -4162,7 +4048,7 @@
                 <a:ea typeface="Cambria" pitchFamily="34" charset="-122"/>
                 <a:cs typeface="Cambria" pitchFamily="34" charset="-120"/>
               </a:rPr>
-              <a:t>現状の結果と課題</a:t>
+              <a:t>いまどこまでできているか</a:t>
             </a:r>
             <a:endParaRPr lang="en-US" sz="3000" dirty="0"/>
           </a:p>
@@ -4201,7 +4087,7 @@
                 <a:ea typeface="Cambria" pitchFamily="34" charset="-122"/>
                 <a:cs typeface="Cambria" pitchFamily="34" charset="-120"/>
               </a:rPr>
-              <a:t>実データ（1.ply）での出力例</a:t>
+              <a:t>本物の土器データで測れた値の例</a:t>
             </a:r>
             <a:endParaRPr lang="en-US" sz="1600" dirty="0"/>
           </a:p>
@@ -4216,15 +4102,15 @@
         <p:spPr>
           <a:xfrm>
             <a:off x="548640" y="1783080"/>
-            <a:ext cx="5760720" cy="2651760"/>
+            <a:ext cx="5760720" cy="777240"/>
           </a:xfrm>
           <a:prstGeom prst="roundRect">
             <a:avLst>
-              <a:gd name="adj" fmla="val 2759"/>
+              <a:gd name="adj" fmla="val 9412"/>
             </a:avLst>
           </a:prstGeom>
           <a:solidFill>
-            <a:srgbClr val="2B2B2B"/>
+            <a:srgbClr val="E7E8D1"/>
           </a:solidFill>
           <a:ln/>
         </p:spPr>
@@ -4238,7 +4124,7 @@
         <p:spPr>
           <a:xfrm>
             <a:off x="822960" y="1965960"/>
-            <a:ext cx="5303520" cy="2286000"/>
+            <a:ext cx="3108960" cy="457200"/>
           </a:xfrm>
           <a:prstGeom prst="rect">
             <a:avLst/>
@@ -4254,148 +4140,46 @@
               <a:buNone/>
             </a:pPr>
             <a:r>
-              <a:rPr lang="en-US" sz="1250" dirty="0">
-                <a:solidFill>
-                  <a:srgbClr val="A7E8A7"/>
-                </a:solidFill>
-                <a:latin typeface="Courier New" pitchFamily="34" charset="0"/>
-                <a:ea typeface="Courier New" pitchFamily="34" charset="-122"/>
-                <a:cs typeface="Courier New" pitchFamily="34" charset="-120"/>
-              </a:rPr>
-              <a:t>pitch=3.426mm  groove_dir=115.2deg</a:t>
-            </a:r>
-            <a:endParaRPr lang="en-US" sz="1250" dirty="0"/>
-          </a:p>
+              <a:rPr lang="en-US" sz="1400" dirty="0">
+                <a:solidFill>
+                  <a:srgbClr val="333333"/>
+                </a:solidFill>
+                <a:latin typeface="Calibri" pitchFamily="34" charset="0"/>
+                <a:ea typeface="Calibri" pitchFamily="34" charset="-122"/>
+                <a:cs typeface="Calibri" pitchFamily="34" charset="-120"/>
+              </a:rPr>
+              <a:t>縄目の間隔</a:t>
+            </a:r>
+            <a:endParaRPr lang="en-US" sz="1400" dirty="0"/>
+          </a:p>
+        </p:txBody>
+      </p:sp>
+      <p:sp>
+        <p:nvSpPr>
+          <p:cNvPr id="6" name="Text 4"/>
+          <p:cNvSpPr/>
+          <p:nvPr/>
+        </p:nvSpPr>
+        <p:spPr>
+          <a:xfrm>
+            <a:off x="3931920" y="1901952"/>
+            <a:ext cx="2194560" cy="548640"/>
+          </a:xfrm>
+          <a:prstGeom prst="rect">
+            <a:avLst/>
+          </a:prstGeom>
+          <a:noFill/>
+          <a:ln/>
+        </p:spPr>
+        <p:txBody>
+          <a:bodyPr wrap="square" lIns="0" tIns="0" rIns="0" bIns="0" rtlCol="0" anchor="ctr"/>
+          <a:lstStyle/>
           <a:p>
             <a:pPr indent="0" marL="0">
               <a:buNone/>
             </a:pPr>
             <a:r>
-              <a:rPr lang="en-US" sz="1250" dirty="0">
-                <a:solidFill>
-                  <a:srgbClr val="A7E8A7"/>
-                </a:solidFill>
-                <a:latin typeface="Courier New" pitchFamily="34" charset="0"/>
-                <a:ea typeface="Courier New" pitchFamily="34" charset="-122"/>
-                <a:cs typeface="Courier New" pitchFamily="34" charset="-120"/>
-              </a:rPr>
-              <a:t>rolling_dir=63.2deg  confidence=1.00</a:t>
-            </a:r>
-            <a:endParaRPr lang="en-US" sz="1250" dirty="0"/>
-          </a:p>
-          <a:p>
-            <a:pPr indent="0" marL="0">
-              <a:buNone/>
-            </a:pPr>
-            <a:r>
-              <a:rPr lang="en-US" sz="1250" dirty="0">
-                <a:solidFill>
-                  <a:srgbClr val="A7E8A7"/>
-                </a:solidFill>
-                <a:latin typeface="Courier New" pitchFamily="34" charset="0"/>
-                <a:ea typeface="Courier New" pitchFamily="34" charset="-122"/>
-                <a:cs typeface="Courier New" pitchFamily="34" charset="-120"/>
-              </a:rPr>
-              <a:t>period_vec=(3.100, 1.458)mm</a:t>
-            </a:r>
-            <a:endParaRPr lang="en-US" sz="1250" dirty="0"/>
-          </a:p>
-          <a:p>
-            <a:pPr indent="0" marL="0">
-              <a:buNone/>
-            </a:pPr>
-            <a:r>
-              <a:rPr lang="en-US" sz="1250" dirty="0">
-                <a:solidFill>
-                  <a:srgbClr val="A7E8A7"/>
-                </a:solidFill>
-                <a:latin typeface="Courier New" pitchFamily="34" charset="0"/>
-                <a:ea typeface="Courier New" pitchFamily="34" charset="-122"/>
-                <a:cs typeface="Courier New" pitchFamily="34" charset="-120"/>
-              </a:rPr>
-              <a:t>grid=0.20mm  detrend_window=12</a:t>
-            </a:r>
-            <a:endParaRPr lang="en-US" sz="1250" dirty="0"/>
-          </a:p>
-          <a:p>
-            <a:pPr indent="0" marL="0">
-              <a:buNone/>
-            </a:pPr>
-            <a:r>
-              <a:rPr lang="en-US" sz="1250" dirty="0">
-                <a:solidFill>
-                  <a:srgbClr val="A7E8A7"/>
-                </a:solidFill>
-                <a:latin typeface="Courier New" pitchFamily="34" charset="0"/>
-                <a:ea typeface="Courier New" pitchFamily="34" charset="-122"/>
-                <a:cs typeface="Courier New" pitchFamily="34" charset="-120"/>
-              </a:rPr>
-              <a:t>rolling_period=44.06mm</a:t>
-            </a:r>
-            <a:endParaRPr lang="en-US" sz="1250" dirty="0"/>
-          </a:p>
-          <a:p>
-            <a:pPr indent="0" marL="0">
-              <a:buNone/>
-            </a:pPr>
-            <a:r>
-              <a:rPr lang="en-US" sz="1250" dirty="0">
-                <a:solidFill>
-                  <a:srgbClr val="A7E8A7"/>
-                </a:solidFill>
-                <a:latin typeface="Courier New" pitchFamily="34" charset="0"/>
-                <a:ea typeface="Courier New" pitchFamily="34" charset="-122"/>
-                <a:cs typeface="Courier New" pitchFamily="34" charset="-120"/>
-              </a:rPr>
-              <a:t>phase_confidence=0.83  anchors=6</a:t>
-            </a:r>
-            <a:endParaRPr lang="en-US" sz="1250" dirty="0"/>
-          </a:p>
-          <a:p>
-            <a:pPr indent="0" marL="0">
-              <a:buNone/>
-            </a:pPr>
-            <a:r>
-              <a:rPr lang="en-US" sz="1250" dirty="0">
-                <a:solidFill>
-                  <a:srgbClr val="A7E8A7"/>
-                </a:solidFill>
-                <a:latin typeface="Courier New" pitchFamily="34" charset="0"/>
-                <a:ea typeface="Courier New" pitchFamily="34" charset="-122"/>
-                <a:cs typeface="Courier New" pitchFamily="34" charset="-120"/>
-              </a:rPr>
-              <a:t>anchor[0]=(17.255, -12.212, 6.215)</a:t>
-            </a:r>
-            <a:endParaRPr lang="en-US" sz="1250" dirty="0"/>
-          </a:p>
-        </p:txBody>
-      </p:sp>
-      <p:sp>
-        <p:nvSpPr>
-          <p:cNvPr id="6" name="Text 4"/>
-          <p:cNvSpPr/>
-          <p:nvPr/>
-        </p:nvSpPr>
-        <p:spPr>
-          <a:xfrm>
-            <a:off x="6766560" y="1325880"/>
-            <a:ext cx="4846320" cy="365760"/>
-          </a:xfrm>
-          <a:prstGeom prst="rect">
-            <a:avLst/>
-          </a:prstGeom>
-          <a:noFill/>
-          <a:ln/>
-        </p:spPr>
-        <p:txBody>
-          <a:bodyPr wrap="square" lIns="0" tIns="0" rIns="0" bIns="0" rtlCol="0" anchor="ctr"/>
-          <a:lstStyle/>
-          <a:p>
-            <a:pPr indent="0" marL="0">
-              <a:buNone/>
-            </a:pPr>
-            <a:r>
-              <a:rPr lang="en-US" sz="1600" b="1" dirty="0">
+              <a:rPr lang="en-US" sz="2000" b="1" dirty="0">
                 <a:solidFill>
                   <a:srgbClr val="B85042"/>
                 </a:solidFill>
@@ -4403,7 +4187,246 @@
                 <a:ea typeface="Cambria" pitchFamily="34" charset="-122"/>
                 <a:cs typeface="Cambria" pitchFamily="34" charset="-120"/>
               </a:rPr>
-              <a:t>残る課題</a:t>
+              <a:t>約 3.4 mm</a:t>
+            </a:r>
+            <a:endParaRPr lang="en-US" sz="2000" dirty="0"/>
+          </a:p>
+        </p:txBody>
+      </p:sp>
+      <p:sp>
+        <p:nvSpPr>
+          <p:cNvPr id="7" name="Shape 5"/>
+          <p:cNvSpPr/>
+          <p:nvPr/>
+        </p:nvSpPr>
+        <p:spPr>
+          <a:xfrm>
+            <a:off x="548640" y="2697480"/>
+            <a:ext cx="5760720" cy="777240"/>
+          </a:xfrm>
+          <a:prstGeom prst="roundRect">
+            <a:avLst>
+              <a:gd name="adj" fmla="val 9412"/>
+            </a:avLst>
+          </a:prstGeom>
+          <a:solidFill>
+            <a:srgbClr val="E7E8D1"/>
+          </a:solidFill>
+          <a:ln/>
+        </p:spPr>
+      </p:sp>
+      <p:sp>
+        <p:nvSpPr>
+          <p:cNvPr id="8" name="Text 6"/>
+          <p:cNvSpPr/>
+          <p:nvPr/>
+        </p:nvSpPr>
+        <p:spPr>
+          <a:xfrm>
+            <a:off x="822960" y="2880360"/>
+            <a:ext cx="3108960" cy="457200"/>
+          </a:xfrm>
+          <a:prstGeom prst="rect">
+            <a:avLst/>
+          </a:prstGeom>
+          <a:noFill/>
+          <a:ln/>
+        </p:spPr>
+        <p:txBody>
+          <a:bodyPr wrap="square" lIns="0" tIns="0" rIns="0" bIns="0" rtlCol="0" anchor="ctr"/>
+          <a:lstStyle/>
+          <a:p>
+            <a:pPr indent="0" marL="0">
+              <a:buNone/>
+            </a:pPr>
+            <a:r>
+              <a:rPr lang="en-US" sz="1400" dirty="0">
+                <a:solidFill>
+                  <a:srgbClr val="333333"/>
+                </a:solidFill>
+                <a:latin typeface="Calibri" pitchFamily="34" charset="0"/>
+                <a:ea typeface="Calibri" pitchFamily="34" charset="-122"/>
+                <a:cs typeface="Calibri" pitchFamily="34" charset="-120"/>
+              </a:rPr>
+              <a:t>縄1回転分の長さ</a:t>
+            </a:r>
+            <a:endParaRPr lang="en-US" sz="1400" dirty="0"/>
+          </a:p>
+        </p:txBody>
+      </p:sp>
+      <p:sp>
+        <p:nvSpPr>
+          <p:cNvPr id="9" name="Text 7"/>
+          <p:cNvSpPr/>
+          <p:nvPr/>
+        </p:nvSpPr>
+        <p:spPr>
+          <a:xfrm>
+            <a:off x="3931920" y="2816352"/>
+            <a:ext cx="2194560" cy="548640"/>
+          </a:xfrm>
+          <a:prstGeom prst="rect">
+            <a:avLst/>
+          </a:prstGeom>
+          <a:noFill/>
+          <a:ln/>
+        </p:spPr>
+        <p:txBody>
+          <a:bodyPr wrap="square" lIns="0" tIns="0" rIns="0" bIns="0" rtlCol="0" anchor="ctr"/>
+          <a:lstStyle/>
+          <a:p>
+            <a:pPr indent="0" marL="0">
+              <a:buNone/>
+            </a:pPr>
+            <a:r>
+              <a:rPr lang="en-US" sz="2000" b="1" dirty="0">
+                <a:solidFill>
+                  <a:srgbClr val="B85042"/>
+                </a:solidFill>
+                <a:latin typeface="Cambria" pitchFamily="34" charset="0"/>
+                <a:ea typeface="Cambria" pitchFamily="34" charset="-122"/>
+                <a:cs typeface="Cambria" pitchFamily="34" charset="-120"/>
+              </a:rPr>
+              <a:t>約 44 mm</a:t>
+            </a:r>
+            <a:endParaRPr lang="en-US" sz="2000" dirty="0"/>
+          </a:p>
+        </p:txBody>
+      </p:sp>
+      <p:sp>
+        <p:nvSpPr>
+          <p:cNvPr id="10" name="Shape 8"/>
+          <p:cNvSpPr/>
+          <p:nvPr/>
+        </p:nvSpPr>
+        <p:spPr>
+          <a:xfrm>
+            <a:off x="548640" y="3611880"/>
+            <a:ext cx="5760720" cy="777240"/>
+          </a:xfrm>
+          <a:prstGeom prst="roundRect">
+            <a:avLst>
+              <a:gd name="adj" fmla="val 9412"/>
+            </a:avLst>
+          </a:prstGeom>
+          <a:solidFill>
+            <a:srgbClr val="E7E8D1"/>
+          </a:solidFill>
+          <a:ln/>
+        </p:spPr>
+      </p:sp>
+      <p:sp>
+        <p:nvSpPr>
+          <p:cNvPr id="11" name="Text 9"/>
+          <p:cNvSpPr/>
+          <p:nvPr/>
+        </p:nvSpPr>
+        <p:spPr>
+          <a:xfrm>
+            <a:off x="822960" y="3794760"/>
+            <a:ext cx="3108960" cy="457200"/>
+          </a:xfrm>
+          <a:prstGeom prst="rect">
+            <a:avLst/>
+          </a:prstGeom>
+          <a:noFill/>
+          <a:ln/>
+        </p:spPr>
+        <p:txBody>
+          <a:bodyPr wrap="square" lIns="0" tIns="0" rIns="0" bIns="0" rtlCol="0" anchor="ctr"/>
+          <a:lstStyle/>
+          <a:p>
+            <a:pPr indent="0" marL="0">
+              <a:buNone/>
+            </a:pPr>
+            <a:r>
+              <a:rPr lang="en-US" sz="1400" dirty="0">
+                <a:solidFill>
+                  <a:srgbClr val="333333"/>
+                </a:solidFill>
+                <a:latin typeface="Calibri" pitchFamily="34" charset="0"/>
+                <a:ea typeface="Calibri" pitchFamily="34" charset="-122"/>
+                <a:cs typeface="Calibri" pitchFamily="34" charset="-120"/>
+              </a:rPr>
+              <a:t>見つけた区切りの数</a:t>
+            </a:r>
+            <a:endParaRPr lang="en-US" sz="1400" dirty="0"/>
+          </a:p>
+        </p:txBody>
+      </p:sp>
+      <p:sp>
+        <p:nvSpPr>
+          <p:cNvPr id="12" name="Text 10"/>
+          <p:cNvSpPr/>
+          <p:nvPr/>
+        </p:nvSpPr>
+        <p:spPr>
+          <a:xfrm>
+            <a:off x="3931920" y="3730752"/>
+            <a:ext cx="2194560" cy="548640"/>
+          </a:xfrm>
+          <a:prstGeom prst="rect">
+            <a:avLst/>
+          </a:prstGeom>
+          <a:noFill/>
+          <a:ln/>
+        </p:spPr>
+        <p:txBody>
+          <a:bodyPr wrap="square" lIns="0" tIns="0" rIns="0" bIns="0" rtlCol="0" anchor="ctr"/>
+          <a:lstStyle/>
+          <a:p>
+            <a:pPr indent="0" marL="0">
+              <a:buNone/>
+            </a:pPr>
+            <a:r>
+              <a:rPr lang="en-US" sz="2000" b="1" dirty="0">
+                <a:solidFill>
+                  <a:srgbClr val="B85042"/>
+                </a:solidFill>
+                <a:latin typeface="Cambria" pitchFamily="34" charset="0"/>
+                <a:ea typeface="Cambria" pitchFamily="34" charset="-122"/>
+                <a:cs typeface="Cambria" pitchFamily="34" charset="-120"/>
+              </a:rPr>
+              <a:t>6 か所</a:t>
+            </a:r>
+            <a:endParaRPr lang="en-US" sz="2000" dirty="0"/>
+          </a:p>
+        </p:txBody>
+      </p:sp>
+      <p:sp>
+        <p:nvSpPr>
+          <p:cNvPr id="13" name="Text 11"/>
+          <p:cNvSpPr/>
+          <p:nvPr/>
+        </p:nvSpPr>
+        <p:spPr>
+          <a:xfrm>
+            <a:off x="6766560" y="1325880"/>
+            <a:ext cx="4846320" cy="365760"/>
+          </a:xfrm>
+          <a:prstGeom prst="rect">
+            <a:avLst/>
+          </a:prstGeom>
+          <a:noFill/>
+          <a:ln/>
+        </p:spPr>
+        <p:txBody>
+          <a:bodyPr wrap="square" lIns="0" tIns="0" rIns="0" bIns="0" rtlCol="0" anchor="ctr"/>
+          <a:lstStyle/>
+          <a:p>
+            <a:pPr indent="0" marL="0">
+              <a:buNone/>
+            </a:pPr>
+            <a:r>
+              <a:rPr lang="en-US" sz="1600" b="1" dirty="0">
+                <a:solidFill>
+                  <a:srgbClr val="B85042"/>
+                </a:solidFill>
+                <a:latin typeface="Cambria" pitchFamily="34" charset="0"/>
+                <a:ea typeface="Cambria" pitchFamily="34" charset="-122"/>
+                <a:cs typeface="Cambria" pitchFamily="34" charset="-120"/>
+              </a:rPr>
+              <a:t>これからやること・課題</a:t>
             </a:r>
             <a:endParaRPr lang="en-US" sz="1600" dirty="0"/>
           </a:p>
@@ -4411,7 +4434,7 @@
       </p:sp>
       <p:sp>
         <p:nvSpPr>
-          <p:cNvPr id="7" name="Text 5"/>
+          <p:cNvPr id="14" name="Text 12"/>
           <p:cNvSpPr/>
           <p:nvPr/>
         </p:nvSpPr>
@@ -4446,7 +4469,7 @@
                 <a:ea typeface="Calibri" pitchFamily="34" charset="-122"/>
                 <a:cs typeface="Calibri" pitchFamily="34" charset="-120"/>
               </a:rPr>
-              <a:t>実データ上の同巡点3D座標の正解（ground truth）が未入手 → 定量評価が保留中</a:t>
+              <a:t>本物の土器では「本当の正解」がまだ手元になく、どれくらい正確かを数字で示せていない</a:t>
             </a:r>
             <a:endParaRPr lang="en-US" sz="1350" dirty="0"/>
           </a:p>
@@ -4467,7 +4490,7 @@
                 <a:ea typeface="Calibri" pitchFamily="34" charset="-122"/>
                 <a:cs typeface="Calibri" pitchFamily="34" charset="-120"/>
               </a:rPr>
-              <a:t>MeshLab Picked Pointsによる正解座標を指導教員に依頼中</a:t>
+              <a:t>正解データの計測を指導教員にお願いしているところ</a:t>
             </a:r>
             <a:endParaRPr lang="en-US" sz="1350" dirty="0"/>
           </a:p>
@@ -4488,7 +4511,7 @@
                 <a:ea typeface="Calibri" pitchFamily="34" charset="-122"/>
                 <a:cs typeface="Calibri" pitchFamily="34" charset="-120"/>
               </a:rPr>
-              <a:t>パラメータ（格子ピッチ・周期探索範囲）が手動指定のまま</a:t>
+              <a:t>測るときの細かい設定を、いまは人が手で決めている → 自動にしたい</a:t>
             </a:r>
             <a:endParaRPr lang="en-US" sz="1350" dirty="0"/>
           </a:p>
@@ -4506,48 +4529,9 @@
                 <a:ea typeface="Calibri" pitchFamily="34" charset="-122"/>
                 <a:cs typeface="Calibri" pitchFamily="34" charset="-120"/>
               </a:rPr>
-              <a:t>曲面対応は局所平面フィット近似 → 円筒フィット＋展開への拡張を検討</a:t>
+              <a:t>土器の丸い曲がりへの対応を、もっとしっかりしたやり方にしたい</a:t>
             </a:r>
             <a:endParaRPr lang="en-US" sz="1350" dirty="0"/>
-          </a:p>
-        </p:txBody>
-      </p:sp>
-      <p:sp>
-        <p:nvSpPr>
-          <p:cNvPr id="8" name="Text 6"/>
-          <p:cNvSpPr/>
-          <p:nvPr/>
-        </p:nvSpPr>
-        <p:spPr>
-          <a:xfrm>
-            <a:off x="548640" y="6446520"/>
-            <a:ext cx="11064240" cy="274320"/>
-          </a:xfrm>
-          <a:prstGeom prst="rect">
-            <a:avLst/>
-          </a:prstGeom>
-          <a:noFill/>
-          <a:ln/>
-        </p:spPr>
-        <p:txBody>
-          <a:bodyPr wrap="square" lIns="0" tIns="0" rIns="0" bIns="0" rtlCol="0" anchor="ctr"/>
-          <a:lstStyle/>
-          <a:p>
-            <a:pPr indent="0" marL="0">
-              <a:buNone/>
-            </a:pPr>
-            <a:r>
-              <a:rPr lang="en-US" sz="1000" dirty="0">
-                <a:solidFill>
-                  <a:srgbClr val="7A6A62"/>
-                </a:solidFill>
-                <a:latin typeface="Calibri" pitchFamily="34" charset="0"/>
-                <a:ea typeface="Calibri" pitchFamily="34" charset="-122"/>
-                <a:cs typeface="Calibri" pitchFamily="34" charset="-120"/>
-              </a:rPr>
-              <a:t>根拠: 04_Projects/修士研究/STATE.md, python/README.md</a:t>
-            </a:r>
-            <a:endParaRPr lang="en-US" sz="1000" dirty="0"/>
           </a:p>
         </p:txBody>
       </p:sp>
@@ -4616,7 +4600,7 @@
                 <a:ea typeface="Cambria" pitchFamily="34" charset="-122"/>
                 <a:cs typeface="Cambria" pitchFamily="34" charset="-120"/>
               </a:rPr>
-              <a:t>効率化の前提 — 3Dメッシュは「大規模データ」</a:t>
+              <a:t>効率化が必要な理由 — データがとにかく大きい</a:t>
             </a:r>
             <a:endParaRPr lang="en-US" sz="3000" dirty="0"/>
           </a:p>
@@ -4716,7 +4700,7 @@
                 <a:ea typeface="Calibri" pitchFamily="34" charset="-122"/>
                 <a:cs typeface="Calibri" pitchFamily="34" charset="-120"/>
               </a:rPr>
-              <a:t>頂点数（土器片 1.ply）</a:t>
+              <a:t>土器片1つ分の点の数（1つめ）</a:t>
             </a:r>
             <a:endParaRPr lang="en-US" sz="1400" dirty="0"/>
           </a:p>
@@ -4816,7 +4800,7 @@
                 <a:ea typeface="Calibri" pitchFamily="34" charset="-122"/>
                 <a:cs typeface="Calibri" pitchFamily="34" charset="-120"/>
               </a:rPr>
-              <a:t>頂点数（土器片 3.ply）</a:t>
+              <a:t>土器片1つ分の点の数（2つめ）</a:t>
             </a:r>
             <a:endParaRPr lang="en-US" sz="1400" dirty="0"/>
           </a:p>
@@ -4916,7 +4900,7 @@
                 <a:ea typeface="Calibri" pitchFamily="34" charset="-122"/>
                 <a:cs typeface="Calibri" pitchFamily="34" charset="-120"/>
               </a:rPr>
-              <a:t>高さマップの格子解像度</a:t>
+              <a:t>画像に変換するときの細かさ</a:t>
             </a:r>
             <a:endParaRPr lang="en-US" sz="1400" dirty="0"/>
           </a:p>
@@ -4959,7 +4943,7 @@
                 <a:ea typeface="Calibri" pitchFamily="34" charset="-122"/>
                 <a:cs typeface="Calibri" pitchFamily="34" charset="-120"/>
               </a:rPr>
-              <a:t>数百万頂点の点群・メッシュをそのまま扱うと、1回の処理でもメモリ・計算時間が問題になる規模。</a:t>
+              <a:t>土器のかけら1つで約700万個の点。まともに全部計算すると、メモリも時間も足りなくなる規模。</a:t>
             </a:r>
             <a:endParaRPr lang="en-US" sz="1500" dirty="0"/>
           </a:p>
@@ -4980,7 +4964,7 @@
                 <a:ea typeface="Calibri" pitchFamily="34" charset="-122"/>
                 <a:cs typeface="Calibri" pitchFamily="34" charset="-120"/>
               </a:rPr>
-              <a:t>本研究では「対象面の切り出し → 格子状の高さマップへの次元削減」により、3D問題を2D画像問題へ落として計算量を抑える。</a:t>
+              <a:t>だから「必要な面だけ切り出す」「3Dを2Dの画像に変換する」ことで、扱うデータをぐっと小さくしている。</a:t>
             </a:r>
             <a:endParaRPr lang="en-US" sz="1500" dirty="0"/>
           </a:p>
@@ -4998,48 +4982,9 @@
                 <a:ea typeface="Calibri" pitchFamily="34" charset="-122"/>
                 <a:cs typeface="Calibri" pitchFamily="34" charset="-120"/>
               </a:rPr>
-              <a:t>それでも高さマップ上のFFT・自己相関・NCC計算は反復実行されるため、計算量の見積もりと並列化余地の把握が重要になる。</a:t>
+              <a:t>それでも重い計算は残るので、講義で学んだ「計算のさせ方の工夫」が効いてくる。</a:t>
             </a:r>
             <a:endParaRPr lang="en-US" sz="1500" dirty="0"/>
-          </a:p>
-        </p:txBody>
-      </p:sp>
-      <p:sp>
-        <p:nvSpPr>
-          <p:cNvPr id="13" name="Text 11"/>
-          <p:cNvSpPr/>
-          <p:nvPr/>
-        </p:nvSpPr>
-        <p:spPr>
-          <a:xfrm>
-            <a:off x="548640" y="6446520"/>
-            <a:ext cx="11064240" cy="274320"/>
-          </a:xfrm>
-          <a:prstGeom prst="rect">
-            <a:avLst/>
-          </a:prstGeom>
-          <a:noFill/>
-          <a:ln/>
-        </p:spPr>
-        <p:txBody>
-          <a:bodyPr wrap="square" lIns="0" tIns="0" rIns="0" bIns="0" rtlCol="0" anchor="ctr"/>
-          <a:lstStyle/>
-          <a:p>
-            <a:pPr indent="0" marL="0">
-              <a:buNone/>
-            </a:pPr>
-            <a:r>
-              <a:rPr lang="en-US" sz="1000" dirty="0">
-                <a:solidFill>
-                  <a:srgbClr val="7A6A62"/>
-                </a:solidFill>
-                <a:latin typeface="Calibri" pitchFamily="34" charset="0"/>
-                <a:ea typeface="Calibri" pitchFamily="34" charset="-122"/>
-                <a:cs typeface="Calibri" pitchFamily="34" charset="-120"/>
-              </a:rPr>
-              <a:t>根拠: 04_Projects/修士研究/python/README.md</a:t>
-            </a:r>
-            <a:endParaRPr lang="en-US" sz="1000" dirty="0"/>
           </a:p>
         </p:txBody>
       </p:sp>
@@ -5108,7 +5053,7 @@
                 <a:ea typeface="Cambria" pitchFamily="34" charset="-122"/>
                 <a:cs typeface="Cambria" pitchFamily="34" charset="-120"/>
               </a:rPr>
-              <a:t>効率化ポイント①  多変量解析の手法</a:t>
+              <a:t>効率化ポイント①  講義前半（データ分析）の手法</a:t>
             </a:r>
             <a:endParaRPr lang="en-US" sz="3000" dirty="0"/>
           </a:p>
@@ -5169,7 +5114,7 @@
                 <a:ea typeface="Cambria" pitchFamily="34" charset="-122"/>
                 <a:cs typeface="Cambria" pitchFamily="34" charset="-120"/>
               </a:rPr>
-              <a:t>PCA（主成分分析）</a:t>
+              <a:t>主成分分析（第4回）</a:t>
             </a:r>
             <a:endParaRPr lang="en-US" sz="1600" dirty="0"/>
           </a:p>
@@ -5208,7 +5153,7 @@
                 <a:ea typeface="Calibri" pitchFamily="34" charset="-122"/>
                 <a:cs typeface="Calibri" pitchFamily="34" charset="-120"/>
               </a:rPr>
-              <a:t>M3: 対象面の頂点群3次元座標にPCAを適用し、第1・第2主成分で局所平面を張って高さマップ（第3成分＝高さ）を作る。第4回で学んだ次元削減の直接応用。</a:t>
+              <a:t>土器の面のちょうどいい「向き」を自動で見つけて、3Dのでこぼこを2Dの画像に変換するのに使っている。データを減らす主役。</a:t>
             </a:r>
             <a:endParaRPr lang="en-US" sz="1250" dirty="0"/>
           </a:p>
@@ -5269,7 +5214,7 @@
                 <a:ea typeface="Cambria" pitchFamily="34" charset="-122"/>
                 <a:cs typeface="Cambria" pitchFamily="34" charset="-120"/>
               </a:rPr>
-              <a:t>クラスタリング</a:t>
+              <a:t>クラスタ分析（第5回）</a:t>
             </a:r>
             <a:endParaRPr lang="en-US" sz="1600" dirty="0"/>
           </a:p>
@@ -5308,7 +5253,7 @@
                 <a:ea typeface="Calibri" pitchFamily="34" charset="-122"/>
                 <a:cs typeface="Calibri" pitchFamily="34" charset="-120"/>
               </a:rPr>
-              <a:t>M2: 頂点法線ベクトルのクラスタリングで「縄目のある面」だけを切り出す。第5回のクラスタ分析の考え方と同じ。</a:t>
+              <a:t>似た向きを向いている面ごとにグループ分けして、「縄目がある面」だけを選び出すのに使っている。計算する範囲を絞る役目。</a:t>
             </a:r>
             <a:endParaRPr lang="en-US" sz="1250" dirty="0"/>
           </a:p>
@@ -5369,7 +5314,7 @@
                 <a:ea typeface="Cambria" pitchFamily="34" charset="-122"/>
                 <a:cs typeface="Cambria" pitchFamily="34" charset="-120"/>
               </a:rPr>
-              <a:t>構造テンソル（固有値分解）</a:t>
+              <a:t>相関（第2回）</a:t>
             </a:r>
             <a:endParaRPr lang="en-US" sz="1600" dirty="0"/>
           </a:p>
@@ -5408,7 +5353,7 @@
                 <a:ea typeface="Calibri" pitchFamily="34" charset="-122"/>
                 <a:cs typeface="Calibri" pitchFamily="34" charset="-120"/>
               </a:rPr>
-              <a:t>M4: 勾配の共分散行列の固有ベクトルから縄の走行方向を推定。分散共分散行列と固有値分解という多変量解析の基本操作。</a:t>
+              <a:t>「ずらして重ねてどれだけ似ているか」は、相関係数の考え方そのもの。もようの間隔と縄1回転分の長さは、これで見つけている。</a:t>
             </a:r>
             <a:endParaRPr lang="en-US" sz="1250" dirty="0"/>
           </a:p>
@@ -5431,7 +5376,7 @@
             </a:avLst>
           </a:prstGeom>
           <a:solidFill>
-            <a:srgbClr val="E7E8D1"/>
+            <a:srgbClr val="B85042"/>
           </a:solidFill>
           <a:ln/>
         </p:spPr>
@@ -5463,13 +5408,13 @@
             <a:r>
               <a:rPr lang="en-US" sz="1600" b="1" dirty="0">
                 <a:solidFill>
-                  <a:srgbClr val="B85042"/>
+                  <a:srgbClr val="FFFFFF"/>
                 </a:solidFill>
                 <a:latin typeface="Cambria" pitchFamily="34" charset="0"/>
                 <a:ea typeface="Cambria" pitchFamily="34" charset="-122"/>
                 <a:cs typeface="Cambria" pitchFamily="34" charset="-120"/>
               </a:rPr>
-              <a:t>相関・NCC</a:t>
+              <a:t>まとめると</a:t>
             </a:r>
             <a:endParaRPr lang="en-US" sz="1600" dirty="0"/>
           </a:p>
@@ -5502,54 +5447,15 @@
             <a:r>
               <a:rPr lang="en-US" sz="1250" dirty="0">
                 <a:solidFill>
-                  <a:srgbClr val="333333"/>
+                  <a:srgbClr val="FFFFFF"/>
                 </a:solidFill>
                 <a:latin typeface="Calibri" pitchFamily="34" charset="0"/>
                 <a:ea typeface="Calibri" pitchFamily="34" charset="-122"/>
                 <a:cs typeface="Calibri" pitchFamily="34" charset="-120"/>
               </a:rPr>
-              <a:t>M4/M5: 2D自己相関で周期ベクトルを、正規化相互相関（NCC）で同位相位置を検出。相関係数の空間パターンへの拡張。</a:t>
+              <a:t>講義前半で学んだ手法は、本研究では「データを減らす」「対象を絞る」「繰り返しを見つける」という形で、パイプラインの中心にいる。</a:t>
             </a:r>
             <a:endParaRPr lang="en-US" sz="1250" dirty="0"/>
-          </a:p>
-        </p:txBody>
-      </p:sp>
-      <p:sp>
-        <p:nvSpPr>
-          <p:cNvPr id="15" name="Text 13"/>
-          <p:cNvSpPr/>
-          <p:nvPr/>
-        </p:nvSpPr>
-        <p:spPr>
-          <a:xfrm>
-            <a:off x="548640" y="6446520"/>
-            <a:ext cx="11064240" cy="274320"/>
-          </a:xfrm>
-          <a:prstGeom prst="rect">
-            <a:avLst/>
-          </a:prstGeom>
-          <a:noFill/>
-          <a:ln/>
-        </p:spPr>
-        <p:txBody>
-          <a:bodyPr wrap="square" lIns="0" tIns="0" rIns="0" bIns="0" rtlCol="0" anchor="ctr"/>
-          <a:lstStyle/>
-          <a:p>
-            <a:pPr indent="0" marL="0">
-              <a:buNone/>
-            </a:pPr>
-            <a:r>
-              <a:rPr lang="en-US" sz="1000" dirty="0">
-                <a:solidFill>
-                  <a:srgbClr val="7A6A62"/>
-                </a:solidFill>
-                <a:latin typeface="Calibri" pitchFamily="34" charset="0"/>
-                <a:ea typeface="Calibri" pitchFamily="34" charset="-122"/>
-                <a:cs typeface="Calibri" pitchFamily="34" charset="-120"/>
-              </a:rPr>
-              <a:t>根拠: 04_Projects/修士研究/python/README.md（height_map.py, face_extract.py, autocorr2d.py, phase_detect.py）</a:t>
-            </a:r>
-            <a:endParaRPr lang="en-US" sz="1000" dirty="0"/>
           </a:p>
         </p:txBody>
       </p:sp>
@@ -5618,7 +5524,7 @@
                 <a:ea typeface="Cambria" pitchFamily="34" charset="-122"/>
                 <a:cs typeface="Cambria" pitchFamily="34" charset="-120"/>
               </a:rPr>
-              <a:t>効率化ポイント②  大規模計算・並列化</a:t>
+              <a:t>効率化ポイント②  講義後半（大規模計算）の考え方</a:t>
             </a:r>
             <a:endParaRPr lang="en-US" sz="3000" dirty="0"/>
           </a:p>
@@ -5655,7 +5561,7 @@
         <p:spPr>
           <a:xfrm>
             <a:off x="777240" y="1481328"/>
-            <a:ext cx="2926080" cy="1188720"/>
+            <a:ext cx="3108960" cy="1188720"/>
           </a:xfrm>
           <a:prstGeom prst="rect">
             <a:avLst/>
@@ -5671,7 +5577,7 @@
               <a:buNone/>
             </a:pPr>
             <a:r>
-              <a:rPr lang="en-US" sz="1600" b="1" dirty="0">
+              <a:rPr lang="en-US" sz="1500" b="1" dirty="0">
                 <a:solidFill>
                   <a:srgbClr val="B85042"/>
                 </a:solidFill>
@@ -5679,9 +5585,9 @@
                 <a:ea typeface="Cambria" pitchFamily="34" charset="-122"/>
                 <a:cs typeface="Cambria" pitchFamily="34" charset="-120"/>
               </a:rPr>
-              <a:t>FFTによる高速化</a:t>
-            </a:r>
-            <a:endParaRPr lang="en-US" sz="1600" dirty="0"/>
+              <a:t>計算のやり方を変えて速くする</a:t>
+            </a:r>
+            <a:endParaRPr lang="en-US" sz="1500" dirty="0"/>
           </a:p>
         </p:txBody>
       </p:sp>
@@ -5693,8 +5599,8 @@
         </p:nvSpPr>
         <p:spPr>
           <a:xfrm>
-            <a:off x="3840480" y="1508760"/>
-            <a:ext cx="7498080" cy="1234440"/>
+            <a:off x="4023360" y="1508760"/>
+            <a:ext cx="7315200" cy="1234440"/>
           </a:xfrm>
           <a:prstGeom prst="rect">
             <a:avLst/>
@@ -5718,7 +5624,7 @@
                 <a:ea typeface="Calibri" pitchFamily="34" charset="-122"/>
                 <a:cs typeface="Calibri" pitchFamily="34" charset="-120"/>
               </a:rPr>
-              <a:t>2D自己相関は素朴に計算するとO(N⁴)。FFTを使いO(N² log N)へ削減。第11回の「アルゴリズムによる計算量削減」の実例。</a:t>
+              <a:t>「ずらして重ねる」計算は、まともにやるととても重い。計算の順番を工夫する定番の方法（FFT）を使うと、同じ答えをずっと速く出せる。</a:t>
             </a:r>
             <a:endParaRPr lang="en-US" sz="1300" dirty="0"/>
           </a:p>
@@ -5755,7 +5661,7 @@
         <p:spPr>
           <a:xfrm>
             <a:off x="777240" y="3127248"/>
-            <a:ext cx="2926080" cy="1188720"/>
+            <a:ext cx="3108960" cy="1188720"/>
           </a:xfrm>
           <a:prstGeom prst="rect">
             <a:avLst/>
@@ -5771,7 +5677,7 @@
               <a:buNone/>
             </a:pPr>
             <a:r>
-              <a:rPr lang="en-US" sz="1600" b="1" dirty="0">
+              <a:rPr lang="en-US" sz="1500" b="1" dirty="0">
                 <a:solidFill>
                   <a:srgbClr val="B85042"/>
                 </a:solidFill>
@@ -5779,9 +5685,9 @@
                 <a:ea typeface="Cambria" pitchFamily="34" charset="-122"/>
                 <a:cs typeface="Cambria" pitchFamily="34" charset="-120"/>
               </a:rPr>
-              <a:t>並列化できる箇所</a:t>
-            </a:r>
-            <a:endParaRPr lang="en-US" sz="1600" dirty="0"/>
+              <a:t>同時に計算できる所を見つける</a:t>
+            </a:r>
+            <a:endParaRPr lang="en-US" sz="1500" dirty="0"/>
           </a:p>
         </p:txBody>
       </p:sp>
@@ -5793,8 +5699,8 @@
         </p:nvSpPr>
         <p:spPr>
           <a:xfrm>
-            <a:off x="3840480" y="3154680"/>
-            <a:ext cx="7498080" cy="1234440"/>
+            <a:off x="4023360" y="3154680"/>
+            <a:ext cx="7315200" cy="1234440"/>
           </a:xfrm>
           <a:prstGeom prst="rect">
             <a:avLst/>
@@ -5818,7 +5724,7 @@
                 <a:ea typeface="Calibri" pitchFamily="34" charset="-122"/>
                 <a:cs typeface="Calibri" pitchFamily="34" charset="-120"/>
               </a:rPr>
-              <a:t>格子サンプリング（各格子点の独立計算）、NCCプロファイル（各シフト量の独立評価）、複数土器片のバッチ処理は、GAの個体評価と同じ「互いに依存しない計算」であり並列化可能。</a:t>
+              <a:t>画像の各マス目の計算や、複数の土器を測る処理は、お互いの結果を待つ必要がない。第12回の遺伝的アルゴリズムの個体評価と同じで、手分けして同時に計算できる。</a:t>
             </a:r>
             <a:endParaRPr lang="en-US" sz="1300" dirty="0"/>
           </a:p>
@@ -5855,7 +5761,7 @@
         <p:spPr>
           <a:xfrm>
             <a:off x="777240" y="4773168"/>
-            <a:ext cx="2926080" cy="1188720"/>
+            <a:ext cx="3108960" cy="1188720"/>
           </a:xfrm>
           <a:prstGeom prst="rect">
             <a:avLst/>
@@ -5871,7 +5777,7 @@
               <a:buNone/>
             </a:pPr>
             <a:r>
-              <a:rPr lang="en-US" sz="1600" b="1" dirty="0">
+              <a:rPr lang="en-US" sz="1500" b="1" dirty="0">
                 <a:solidFill>
                   <a:srgbClr val="FFFFFF"/>
                 </a:solidFill>
@@ -5879,9 +5785,9 @@
                 <a:ea typeface="Cambria" pitchFamily="34" charset="-122"/>
                 <a:cs typeface="Cambria" pitchFamily="34" charset="-120"/>
               </a:rPr>
-              <a:t>並列化のコスト</a:t>
-            </a:r>
-            <a:endParaRPr lang="en-US" sz="1600" dirty="0"/>
+              <a:t>手分けにはコストもある</a:t>
+            </a:r>
+            <a:endParaRPr lang="en-US" sz="1500" dirty="0"/>
           </a:p>
         </p:txBody>
       </p:sp>
@@ -5893,8 +5799,8 @@
         </p:nvSpPr>
         <p:spPr>
           <a:xfrm>
-            <a:off x="3840480" y="4800600"/>
-            <a:ext cx="7498080" cy="1234440"/>
+            <a:off x="4023360" y="4800600"/>
+            <a:ext cx="7315200" cy="1234440"/>
           </a:xfrm>
           <a:prstGeom prst="rect">
             <a:avLst/>
@@ -5918,48 +5824,9 @@
                 <a:ea typeface="Calibri" pitchFamily="34" charset="-122"/>
                 <a:cs typeface="Calibri" pitchFamily="34" charset="-120"/>
               </a:rPr>
-              <a:t>第12回のGA実験では、1タスクが軽い場合はWorker準備・データ受け渡しのオーバーヘッドが勝り、逆に遅くなった。本研究でも「1タスクの重さ」を見てから並列化を判断する。</a:t>
+              <a:t>第12回の実験では、1つ1つの計算が軽すぎると、手分けの準備のほうに時間がかかって逆に遅くなった。本研究でも「1つの計算の重さ」を見てから手分けするか決める。</a:t>
             </a:r>
             <a:endParaRPr lang="en-US" sz="1300" dirty="0"/>
-          </a:p>
-        </p:txBody>
-      </p:sp>
-      <p:sp>
-        <p:nvSpPr>
-          <p:cNvPr id="12" name="Text 10"/>
-          <p:cNvSpPr/>
-          <p:nvPr/>
-        </p:nvSpPr>
-        <p:spPr>
-          <a:xfrm>
-            <a:off x="548640" y="6446520"/>
-            <a:ext cx="11064240" cy="274320"/>
-          </a:xfrm>
-          <a:prstGeom prst="rect">
-            <a:avLst/>
-          </a:prstGeom>
-          <a:noFill/>
-          <a:ln/>
-        </p:spPr>
-        <p:txBody>
-          <a:bodyPr wrap="square" lIns="0" tIns="0" rIns="0" bIns="0" rtlCol="0" anchor="ctr"/>
-          <a:lstStyle/>
-          <a:p>
-            <a:pPr indent="0" marL="0">
-              <a:buNone/>
-            </a:pPr>
-            <a:r>
-              <a:rPr lang="en-US" sz="1000" dirty="0">
-                <a:solidFill>
-                  <a:srgbClr val="7A6A62"/>
-                </a:solidFill>
-                <a:latin typeface="Calibri" pitchFamily="34" charset="0"/>
-                <a:ea typeface="Calibri" pitchFamily="34" charset="-122"/>
-                <a:cs typeface="Calibri" pitchFamily="34" charset="-120"/>
-              </a:rPr>
-              <a:t>根拠: 04_Projects/MultivariatAanalysis/11, 12（並列化課題の実験結果）</a:t>
-            </a:r>
-            <a:endParaRPr lang="en-US" sz="1000" dirty="0"/>
           </a:p>
         </p:txBody>
       </p:sp>
@@ -6028,7 +5895,7 @@
                 <a:ea typeface="Cambria" pitchFamily="34" charset="-122"/>
                 <a:cs typeface="Cambria" pitchFamily="34" charset="-120"/>
               </a:rPr>
-              <a:t>今後の展望 — 効率化の適用計画</a:t>
+              <a:t>これからの計画</a:t>
             </a:r>
             <a:endParaRPr lang="en-US" sz="3000" dirty="0"/>
           </a:p>
@@ -6126,7 +5993,7 @@
                 <a:ea typeface="Cambria" pitchFamily="34" charset="-122"/>
                 <a:cs typeface="Cambria" pitchFamily="34" charset="-120"/>
               </a:rPr>
-              <a:t>評価ハーネスの整備</a:t>
+              <a:t>たくさんの条件で精度テスト</a:t>
             </a:r>
             <a:endParaRPr lang="en-US" sz="1700" dirty="0"/>
           </a:p>
@@ -6165,7 +6032,7 @@
                 <a:ea typeface="Calibri" pitchFamily="34" charset="-122"/>
                 <a:cs typeface="Calibri" pitchFamily="34" charset="-120"/>
               </a:rPr>
-              <a:t>ノイズ・欠損をパラメータ化した合成データのスイープ実験。条件の組合せが多いため、独立実行できる各条件をmultiprocessingで並列化する（第11–12回）。</a:t>
+              <a:t>ノイズや欠けの量を変えたテストデータを大量に作って、どこまで正しく測れるか調べる。条件ごとに独立した計算なので、手分けして同時に走らせる。</a:t>
             </a:r>
             <a:endParaRPr lang="en-US" sz="1350" dirty="0"/>
           </a:p>
@@ -6263,7 +6130,7 @@
                 <a:ea typeface="Cambria" pitchFamily="34" charset="-122"/>
                 <a:cs typeface="Cambria" pitchFamily="34" charset="-120"/>
               </a:rPr>
-              <a:t>パラメータの自動最適化</a:t>
+              <a:t>設定の自動チューニング</a:t>
             </a:r>
             <a:endParaRPr lang="en-US" sz="1700" dirty="0"/>
           </a:p>
@@ -6302,7 +6169,7 @@
                 <a:ea typeface="Calibri" pitchFamily="34" charset="-122"/>
                 <a:cs typeface="Calibri" pitchFamily="34" charset="-120"/>
               </a:rPr>
-              <a:t>格子ピッチ・detrend窓・周期探索範囲を、GAやベイズ最適化で自動チューニングする（第12回の遺伝的アルゴリズム）。1評価＝パイプライン1実行と重いため、今度は並列化の効果が出やすい。</a:t>
+              <a:t>いま人が手で決めている設定を、第12回で学んだ遺伝的アルゴリズムなどで自動的に探させる。1回の試行が重い処理なので、今度は手分けの効果が出やすいはず。</a:t>
             </a:r>
             <a:endParaRPr lang="en-US" sz="1350" dirty="0"/>
           </a:p>
@@ -6400,7 +6267,7 @@
                 <a:ea typeface="Cambria" pitchFamily="34" charset="-122"/>
                 <a:cs typeface="Cambria" pitchFamily="34" charset="-120"/>
               </a:rPr>
-              <a:t>多土器片への展開</a:t>
+              <a:t>たくさんの土器への適用</a:t>
             </a:r>
             <a:endParaRPr lang="en-US" sz="1700" dirty="0"/>
           </a:p>
@@ -6439,48 +6306,9 @@
                 <a:ea typeface="Calibri" pitchFamily="34" charset="-122"/>
                 <a:cs typeface="Calibri" pitchFamily="34" charset="-120"/>
               </a:rPr>
-              <a:t>複数の土器片へのバッチ適用と、推定された周期・方向の統計的比較（多変量解析パート）。</a:t>
+              <a:t>複数の土器を自動で測って、測った値どうしを比べる。土器ごとの違いを統計的に調べていく。</a:t>
             </a:r>
             <a:endParaRPr lang="en-US" sz="1350" dirty="0"/>
-          </a:p>
-        </p:txBody>
-      </p:sp>
-      <p:sp>
-        <p:nvSpPr>
-          <p:cNvPr id="15" name="Text 13"/>
-          <p:cNvSpPr/>
-          <p:nvPr/>
-        </p:nvSpPr>
-        <p:spPr>
-          <a:xfrm>
-            <a:off x="548640" y="6446520"/>
-            <a:ext cx="11064240" cy="274320"/>
-          </a:xfrm>
-          <a:prstGeom prst="rect">
-            <a:avLst/>
-          </a:prstGeom>
-          <a:noFill/>
-          <a:ln/>
-        </p:spPr>
-        <p:txBody>
-          <a:bodyPr wrap="square" lIns="0" tIns="0" rIns="0" bIns="0" rtlCol="0" anchor="ctr"/>
-          <a:lstStyle/>
-          <a:p>
-            <a:pPr indent="0" marL="0">
-              <a:buNone/>
-            </a:pPr>
-            <a:r>
-              <a:rPr lang="en-US" sz="1000" dirty="0">
-                <a:solidFill>
-                  <a:srgbClr val="7A6A62"/>
-                </a:solidFill>
-                <a:latin typeface="Calibri" pitchFamily="34" charset="0"/>
-                <a:ea typeface="Calibri" pitchFamily="34" charset="-122"/>
-                <a:cs typeface="Calibri" pitchFamily="34" charset="-120"/>
-              </a:rPr>
-              <a:t>根拠: 04_Projects/修士研究/README.md（Phase 1–2計画）</a:t>
-            </a:r>
-            <a:endParaRPr lang="en-US" sz="1000" dirty="0"/>
           </a:p>
         </p:txBody>
       </p:sp>

--- a/13/第13回発表_修士研究と大規模計算.pptx
+++ b/13/第13回発表_修士研究と大規模計算.pptx
@@ -14,10 +14,9 @@
     <p:sldId id="262" r:id="rId8"/>
     <p:sldId id="263" r:id="rId9"/>
     <p:sldId id="264" r:id="rId10"/>
-    <p:sldId id="265" r:id="rId11"/>
   </p:sldIdLst>
   <p:notesMasterIdLst>
-    <p:notesMasterId r:id="rId12"/>
+    <p:notesMasterId r:id="rId11"/>
   </p:notesMasterIdLst>
   <p:sldSz cx="12192000" cy="6858000"/>
   <p:notesSz cx="6858000" cy="12192000"/>
@@ -513,7 +512,7 @@
               <a:rPr lang="en-US" dirty="0"/>
               <a:t>（約30秒）
 第13回の発表を始めます。私の修士研究は、ひとことで言うと「縄文土器の表面にある縄目のもようを、コンピュータで自動的に測る」というものです。
-本日は前半で研究の中身を紹介し、後半で、この講義で学んだことが研究のどこで役に立つのかをお話しします。</a:t>
+本日は前半で研究の中身を紹介し、後半で、この講義で学んだことを使うと、研究のどこをこれから効率化できそうか、という見通しをお話しします。</a:t>
             </a:r>
             <a:endParaRPr lang="en-US" dirty="0"/>
           </a:p>
@@ -537,98 +536,6 @@
             <a:fld id="{F7021451-1387-4CA6-816F-3879F97B5CBC}" type="slidenum">
               <a:rPr lang="en-US"/>
               <a:t>1</a:t>
-            </a:fld>
-            <a:endParaRPr lang="en-US"/>
-          </a:p>
-        </p:txBody>
-      </p:sp>
-    </p:spTree>
-    <p:extLst>
-      <p:ext uri="{BB962C8B-B14F-4D97-AF65-F5344CB8AC3E}">
-        <p14:creationId xmlns:p14="http://schemas.microsoft.com/office/powerpoint/2010/main" val="1024086991"/>
-      </p:ext>
-    </p:extLst>
-  </p:cSld>
-  <p:clrMapOvr>
-    <a:masterClrMapping/>
-  </p:clrMapOvr>
-</p:notes>
-</file>
-
-<file path=ppt/notesSlides/notesSlide10.xml><?xml version="1.0" encoding="utf-8"?>
-<p:notes xmlns:a="http://schemas.openxmlformats.org/drawingml/2006/main" xmlns:r="http://schemas.openxmlformats.org/officeDocument/2006/relationships" xmlns:p="http://schemas.openxmlformats.org/presentationml/2006/main">
-  <p:cSld>
-    <p:spTree>
-      <p:nvGrpSpPr>
-        <p:cNvPr id="1" name=""/>
-        <p:cNvGrpSpPr/>
-        <p:nvPr/>
-      </p:nvGrpSpPr>
-      <p:grpSpPr>
-        <a:xfrm>
-          <a:off x="0" y="0"/>
-          <a:ext cx="0" cy="0"/>
-          <a:chOff x="0" y="0"/>
-          <a:chExt cx="0" cy="0"/>
-        </a:xfrm>
-      </p:grpSpPr>
-      <p:sp>
-        <p:nvSpPr>
-          <p:cNvPr id="2" name="Slide Image Placeholder 1"/>
-          <p:cNvSpPr>
-            <a:spLocks noGrp="1" noRot="1" noChangeAspect="1"/>
-          </p:cNvSpPr>
-          <p:nvPr>
-            <p:ph type="sldImg"/>
-          </p:nvPr>
-        </p:nvSpPr>
-        <p:spPr/>
-      </p:sp>
-      <p:sp>
-        <p:nvSpPr>
-          <p:cNvPr id="3" name="Notes Placeholder 2"/>
-          <p:cNvSpPr>
-            <a:spLocks noGrp="1"/>
-          </p:cNvSpPr>
-          <p:nvPr>
-            <p:ph type="body" idx="1"/>
-          </p:nvPr>
-        </p:nvSpPr>
-        <p:spPr/>
-        <p:txBody>
-          <a:bodyPr/>
-          <a:lstStyle/>
-          <a:p>
-            <a:r>
-              <a:rPr lang="en-US" dirty="0"/>
-              <a:t>（約30秒）
-まとめです。私の研究は、縄文土器の縄目もようを3Dスキャンデータから全自動で測る仕組みづくりです。
-講義前半のデータ分析の手法が「データを減らして対象を絞る」効率化の中心になっていて、後半の大規模計算の考え方が、巨大なデータを現実的な時間で処理する鍵になっています。
-今後は精度テストの並列実行と設定の自動チューニングに、講義の内容を活かしていきます。
-ご清聴ありがとうございました。</a:t>
-            </a:r>
-            <a:endParaRPr lang="en-US" dirty="0"/>
-          </a:p>
-        </p:txBody>
-      </p:sp>
-      <p:sp>
-        <p:nvSpPr>
-          <p:cNvPr id="4" name="Slide Number Placeholder 3"/>
-          <p:cNvSpPr>
-            <a:spLocks noGrp="1"/>
-          </p:cNvSpPr>
-          <p:nvPr>
-            <p:ph type="sldNum" sz="quarter" idx="10"/>
-          </p:nvPr>
-        </p:nvSpPr>
-        <p:spPr/>
-        <p:txBody>
-          <a:bodyPr/>
-          <a:lstStyle/>
-          <a:p>
-            <a:fld id="{F7021451-1387-4CA6-816F-3879F97B5CBC}" type="slidenum">
-              <a:rPr lang="en-US"/>
-              <a:t>10</a:t>
             </a:fld>
             <a:endParaRPr lang="en-US"/>
           </a:p>
@@ -974,7 +881,7 @@
 いまどこまでできているかです。本物の土器のデータで動かすと、縄目の間隔が約3.4ミリ、縄1回転分の長さが約44ミリ、区切りの位置が6か所、というように自動で測れています。
 ただし課題もあります。いちばん大きいのは、本物の土器については「本当の正解」のデータがまだ手元になく、どれくらい正確に測れているのかを数字で示せていないことです。いま、正解データの計測を指導教員にお願いしています。
 また、測るときの細かい設定を人が手で決めている点も、今後自動化したいところです。
-ここからが後半の本題で、この研究を講義で学んだ内容でどう効率化できるか、という話です。</a:t>
+ここからが後半の本題で、この研究を、講義で学んだ内容を使ってこれからどう効率化できそうか、という見通しの話です。</a:t>
             </a:r>
             <a:endParaRPr lang="en-US" dirty="0"/>
           </a:p>
@@ -1063,9 +970,9 @@
             <a:r>
               <a:rPr lang="en-US" dirty="0"/>
               <a:t>（約40秒）
-なぜ効率化が必要かというと、データがとにかく大きいからです。土器のかけら1つをスキャンしただけで、点の数が約700万個あります。これをまともに全部計算すると、メモリも時間も足りなくなります。
-そこで、必要な面だけを切り出す、3Dを2Dの画像に変換する、という2段階で、扱うデータをぐっと小さくしています。
-それでも重い計算は残るので、講義で学んだ計算のさせ方の工夫が効いてくる、というのが後半の話です。</a:t>
+効率化の余地についてです。土器のかけら1つで点の数が約700万個という大きなデータですが、いまのプログラムは、これを1台のマシンで順番に処理しています。
+土器1つを測るだけならこれでも動きます。ただ、研究はこれから「テストを何百回も回す」「土器を何十個も測る」というフェーズに入っていきます。
+つまり、講義で学んだ効率化の考え方が本領を発揮するのはまさにこれからです。次の2枚で、その候補を挙げます。</a:t>
             </a:r>
             <a:endParaRPr lang="en-US" dirty="0"/>
           </a:p>
@@ -1153,12 +1060,11 @@
           <a:p>
             <a:r>
               <a:rPr lang="en-US" dirty="0"/>
-              <a:t>（約50秒）
-効率化ポイントの1つ目は、講義前半で学んだデータ分析の手法です。
-まず主成分分析。土器の面を2Dの画像に変換するとき、面のちょうどいい向きを自動で見つける必要がありますが、そこに主成分分析を使っています。3Dのデータを2Dに減らす主役です。
-次にクラスタ分析。土器の表面を、似た向きの面ごとにグループ分けして、縄目のある面だけを選び出しています。計算する範囲を絞る役目です。
-そして相関。「ずらして重ねて、どれだけ似ているか」を調べるのは相関係数の考え方そのもので、もようの間隔も縄1回転分の長さも、これで見つけています。
-つまり講義前半の手法は、データを減らす、対象を絞る、繰り返しを見つける、という形でこの研究の中心にいます。</a:t>
+              <a:t>（約70秒）
+これから効率化できそうな場所は、大きく3つあると考えています。
+1つ目は、精度テストの大量実行です。今後、ノイズや欠けの量を変えたテストデータで、何百回も精度を測る予定です。それぞれの条件は独立した計算で、お互いの結果を待つ必要がありません。第11回・12回で学んだ並列化がそのまま使える形だと考えています。
+2つ目は、手動の設定の自動チューニングです。いまは画像の細かさや探す範囲などを人が手で決めていて、ここに試行錯誤の時間がかかっています。第12回で学んだ遺伝的アルゴリズムのような「よい設定を自動で探す」手法に置き換えれば、この時間をなくせるはずです。
+3つ目は、たくさんの土器をまとめて処理する段階です。土器ごとの処理は独立なので手分けできますし、測った値を土器どうしで比べるところでは、講義前半で学んだ統計的な手法が使えると考えています。</a:t>
             </a:r>
             <a:endParaRPr lang="en-US" dirty="0"/>
           </a:p>
@@ -1246,11 +1152,11 @@
           <a:p>
             <a:r>
               <a:rPr lang="en-US" dirty="0"/>
-              <a:t>（約55秒）
-効率化ポイントの2つ目は、講義後半で学んだ大規模計算の考え方です。3つあります。
-1つ目は、計算のやり方そのものを変えて速くすることです。「ずらして重ねる」計算はまともにやるととても重いのですが、計算の順番を工夫する定番の方法を使うと、同じ答えをずっと速く出せます。
-2つ目は、同時に計算できるところを見つけることです。画像の各マス目の計算や、複数の土器を測る処理は、お互いの結果を待つ必要がありません。これは第12回でやった遺伝的アルゴリズムの個体評価と同じ形なので、手分けして同時に計算できます。
-ただし3つ目、手分けにはコストもあります。第12回の実験では、1つ1つの計算が軽すぎると、手分けの準備のほうに時間がかかって、逆に遅くなりました。なので本研究でも、1つの計算の重さを見てから手分けするかどうかを決める方針です。</a:t>
+              <a:t>（約60秒）
+ただし、手分けすれば必ず速くなるわけではない、というのが第12回の実験で学んだことです。
+第12回の遺伝的アルゴリズムの実験では、1つ1つの計算が軽すぎたため、手分けの準備、つまりWorkerの用意やデータの受け渡しのほうに時間がかかって、並列化するとかえって遅くなりました。
+これを本研究にあてはめると、土器1つの処理やテスト1回は数分かかる重い計算です。準備のコストより計算そのもののほうがずっと重いので、こちらは手分けの効果が出やすい形だと見込んでいます。
+とはいえ、思い込みで並列化はしません。まず1つの計算にかかる時間をきちんと測ってから、手分けする単位を決める。これが第12回の実験から得たいちばんの教訓だと考えています。</a:t>
             </a:r>
             <a:endParaRPr lang="en-US" dirty="0"/>
           </a:p>
@@ -1338,11 +1244,11 @@
           <a:p>
             <a:r>
               <a:rPr lang="en-US" dirty="0"/>
-              <a:t>（約45秒）
-これからの計画は3つです。
-1つ目は、たくさんの条件での精度テストです。ノイズや欠けの量を変えたテストデータを大量に作って、どこまで正しく測れるかを調べます。条件ごとに独立した計算なので、手分けして同時に走らせます。
-2つ目は、設定の自動チューニングです。いま人が手で決めている設定を、第12回で学んだ遺伝的アルゴリズムなどで自動的に探させます。こちらは1回の試行が重いので、第12回の実験とは逆に、手分けの効果が出やすいと考えています。
-3つ目は、たくさんの土器への適用です。自動で測れるようになれば、土器ごとの違いを統計的に比べられるようになります。</a:t>
+              <a:t>（約35秒）
+まとめです。私の研究は、縄文土器の縄目もようを3Dスキャンデータから全自動で測る仕組みづくりで、テスト用データでは精度を確認できています。
+研究はこれから、テストの大量実行、設定の調整、多数の土器への適用というフェーズに入り、ここに効率化の余地が大きくあります。
+具体的には、独立な計算の並列実行と、遺伝的アルゴリズムによる設定の自動チューニングが使えそうだと考えており、その際は「1つの計算の重さを測ってから手分けを決める」という第12回の教訓に従って進めていきます。
+ご清聴ありがとうございました。</a:t>
             </a:r>
             <a:endParaRPr lang="en-US" dirty="0"/>
           </a:p>
@@ -1843,7 +1749,7 @@
                 <a:ea typeface="Calibri" pitchFamily="34" charset="-122"/>
                 <a:cs typeface="Calibri" pitchFamily="34" charset="-120"/>
               </a:rPr>
-              <a:t>— 研究紹介と、講義で学んだ手法による効率化 —</a:t>
+              <a:t>— 研究紹介と、講義内容を活かした今後の効率化 —</a:t>
             </a:r>
             <a:endParaRPr lang="en-US" sz="2000" dirty="0"/>
           </a:p>
@@ -1885,219 +1791,6 @@
               <a:t>愛知工業大学大学院</a:t>
             </a:r>
             <a:endParaRPr lang="en-US" sz="1400" dirty="0"/>
-          </a:p>
-        </p:txBody>
-      </p:sp>
-    </p:spTree>
-  </p:cSld>
-  <p:clrMapOvr>
-    <a:masterClrMapping/>
-  </p:clrMapOvr>
-</p:sld>
-</file>
-
-<file path=ppt/slides/slide10.xml><?xml version="1.0" encoding="utf-8"?>
-<p:sld xmlns:a="http://schemas.openxmlformats.org/drawingml/2006/main" xmlns:r="http://schemas.openxmlformats.org/officeDocument/2006/relationships" xmlns:p="http://schemas.openxmlformats.org/presentationml/2006/main">
-  <p:cSld name="Slide 10">
-    <p:bg>
-      <p:bgPr>
-        <a:solidFill>
-          <a:srgbClr val="3B2A26"/>
-        </a:solidFill>
-      </p:bgPr>
-    </p:bg>
-    <p:spTree>
-      <p:nvGrpSpPr>
-        <p:cNvPr id="1" name=""/>
-        <p:cNvGrpSpPr/>
-        <p:nvPr/>
-      </p:nvGrpSpPr>
-      <p:grpSpPr>
-        <a:xfrm>
-          <a:off x="0" y="0"/>
-          <a:ext cx="0" cy="0"/>
-          <a:chOff x="0" y="0"/>
-          <a:chExt cx="0" cy="0"/>
-        </a:xfrm>
-      </p:grpSpPr>
-      <p:sp>
-        <p:nvSpPr>
-          <p:cNvPr id="2" name="Text 0"/>
-          <p:cNvSpPr/>
-          <p:nvPr/>
-        </p:nvSpPr>
-        <p:spPr>
-          <a:xfrm>
-            <a:off x="731520" y="548640"/>
-            <a:ext cx="10698480" cy="731520"/>
-          </a:xfrm>
-          <a:prstGeom prst="rect">
-            <a:avLst/>
-          </a:prstGeom>
-          <a:noFill/>
-          <a:ln/>
-        </p:spPr>
-        <p:txBody>
-          <a:bodyPr wrap="square" lIns="0" tIns="0" rIns="0" bIns="0" rtlCol="0" anchor="ctr"/>
-          <a:lstStyle/>
-          <a:p>
-            <a:pPr indent="0" marL="0">
-              <a:buNone/>
-            </a:pPr>
-            <a:r>
-              <a:rPr lang="en-US" sz="3200" b="1" dirty="0">
-                <a:solidFill>
-                  <a:srgbClr val="FFFFFF"/>
-                </a:solidFill>
-                <a:latin typeface="Cambria" pitchFamily="34" charset="0"/>
-                <a:ea typeface="Cambria" pitchFamily="34" charset="-122"/>
-                <a:cs typeface="Cambria" pitchFamily="34" charset="-120"/>
-              </a:rPr>
-              <a:t>まとめ</a:t>
-            </a:r>
-            <a:endParaRPr lang="en-US" sz="3200" dirty="0"/>
-          </a:p>
-        </p:txBody>
-      </p:sp>
-      <p:sp>
-        <p:nvSpPr>
-          <p:cNvPr id="3" name="Text 1"/>
-          <p:cNvSpPr/>
-          <p:nvPr/>
-        </p:nvSpPr>
-        <p:spPr>
-          <a:xfrm>
-            <a:off x="822960" y="1554480"/>
-            <a:ext cx="10515600" cy="3657600"/>
-          </a:xfrm>
-          <a:prstGeom prst="rect">
-            <a:avLst/>
-          </a:prstGeom>
-          <a:noFill/>
-          <a:ln/>
-        </p:spPr>
-        <p:txBody>
-          <a:bodyPr wrap="square" rtlCol="0" anchor="ctr"/>
-          <a:lstStyle/>
-          <a:p>
-            <a:pPr marL="342900" indent="-342900">
-              <a:spcAft>
-                <a:spcPts val="1400"/>
-              </a:spcAft>
-              <a:buSzPct val="100000"/>
-              <a:buChar char="•"/>
-            </a:pPr>
-            <a:r>
-              <a:rPr lang="en-US" sz="1700" dirty="0">
-                <a:solidFill>
-                  <a:srgbClr val="E7E8D1"/>
-                </a:solidFill>
-                <a:latin typeface="Calibri" pitchFamily="34" charset="0"/>
-                <a:ea typeface="Calibri" pitchFamily="34" charset="-122"/>
-                <a:cs typeface="Calibri" pitchFamily="34" charset="-120"/>
-              </a:rPr>
-              <a:t>縄文土器の縄目もようを、3Dスキャンデータから全自動で測る仕組みを作っている。</a:t>
-            </a:r>
-            <a:endParaRPr lang="en-US" sz="1700" dirty="0"/>
-          </a:p>
-          <a:p>
-            <a:pPr marL="342900" indent="-342900">
-              <a:spcAft>
-                <a:spcPts val="1400"/>
-              </a:spcAft>
-              <a:buSzPct val="100000"/>
-              <a:buChar char="•"/>
-            </a:pPr>
-            <a:r>
-              <a:rPr lang="en-US" sz="1700" dirty="0">
-                <a:solidFill>
-                  <a:srgbClr val="E7E8D1"/>
-                </a:solidFill>
-                <a:latin typeface="Calibri" pitchFamily="34" charset="0"/>
-                <a:ea typeface="Calibri" pitchFamily="34" charset="-122"/>
-                <a:cs typeface="Calibri" pitchFamily="34" charset="-120"/>
-              </a:rPr>
-              <a:t>講義前半のデータ分析の手法（主成分分析・クラスタ分析・相関）が、「データを減らして対象を絞る」効率化の中心になっている。</a:t>
-            </a:r>
-            <a:endParaRPr lang="en-US" sz="1700" dirty="0"/>
-          </a:p>
-          <a:p>
-            <a:pPr marL="342900" indent="-342900">
-              <a:spcAft>
-                <a:spcPts val="1400"/>
-              </a:spcAft>
-              <a:buSzPct val="100000"/>
-              <a:buChar char="•"/>
-            </a:pPr>
-            <a:r>
-              <a:rPr lang="en-US" sz="1700" dirty="0">
-                <a:solidFill>
-                  <a:srgbClr val="E7E8D1"/>
-                </a:solidFill>
-                <a:latin typeface="Calibri" pitchFamily="34" charset="0"/>
-                <a:ea typeface="Calibri" pitchFamily="34" charset="-122"/>
-                <a:cs typeface="Calibri" pitchFamily="34" charset="-120"/>
-              </a:rPr>
-              <a:t>講義後半の大規模計算の考え方（速い計算方法・手分けとそのコスト）が、巨大なデータを現実的な時間で処理する鍵になっている。</a:t>
-            </a:r>
-            <a:endParaRPr lang="en-US" sz="1700" dirty="0"/>
-          </a:p>
-          <a:p>
-            <a:pPr marL="342900" indent="-342900">
-              <a:buSzPct val="100000"/>
-              <a:buChar char="•"/>
-            </a:pPr>
-            <a:r>
-              <a:rPr lang="en-US" sz="1700" dirty="0">
-                <a:solidFill>
-                  <a:srgbClr val="E7E8D1"/>
-                </a:solidFill>
-                <a:latin typeface="Calibri" pitchFamily="34" charset="0"/>
-                <a:ea typeface="Calibri" pitchFamily="34" charset="-122"/>
-                <a:cs typeface="Calibri" pitchFamily="34" charset="-120"/>
-              </a:rPr>
-              <a:t>今後は精度テストの並列実行と、設定の自動チューニングに講義の内容を活かしていく。</a:t>
-            </a:r>
-            <a:endParaRPr lang="en-US" sz="1700" dirty="0"/>
-          </a:p>
-        </p:txBody>
-      </p:sp>
-      <p:sp>
-        <p:nvSpPr>
-          <p:cNvPr id="4" name="Text 2"/>
-          <p:cNvSpPr/>
-          <p:nvPr/>
-        </p:nvSpPr>
-        <p:spPr>
-          <a:xfrm>
-            <a:off x="731520" y="5669280"/>
-            <a:ext cx="10698480" cy="548640"/>
-          </a:xfrm>
-          <a:prstGeom prst="rect">
-            <a:avLst/>
-          </a:prstGeom>
-          <a:noFill/>
-          <a:ln/>
-        </p:spPr>
-        <p:txBody>
-          <a:bodyPr wrap="square" lIns="0" tIns="0" rIns="0" bIns="0" rtlCol="0" anchor="ctr"/>
-          <a:lstStyle/>
-          <a:p>
-            <a:pPr algn="ctr" indent="0" marL="0">
-              <a:buNone/>
-            </a:pPr>
-            <a:r>
-              <a:rPr lang="en-US" sz="2000" i="1" dirty="0">
-                <a:solidFill>
-                  <a:srgbClr val="A7BEAE"/>
-                </a:solidFill>
-                <a:latin typeface="Cambria" pitchFamily="34" charset="0"/>
-                <a:ea typeface="Cambria" pitchFamily="34" charset="-122"/>
-                <a:cs typeface="Cambria" pitchFamily="34" charset="-120"/>
-              </a:rPr>
-              <a:t>ご清聴ありがとうございました</a:t>
-            </a:r>
-            <a:endParaRPr lang="en-US" sz="2000" dirty="0"/>
           </a:p>
         </p:txBody>
       </p:sp>
@@ -4600,7 +4293,7 @@
                 <a:ea typeface="Cambria" pitchFamily="34" charset="-122"/>
                 <a:cs typeface="Cambria" pitchFamily="34" charset="-120"/>
               </a:rPr>
-              <a:t>効率化が必要な理由 — データがとにかく大きい</a:t>
+              <a:t>効率化の余地 — データは大きく、いまは1台で順番に計算</a:t>
             </a:r>
             <a:endParaRPr lang="en-US" sz="3000" dirty="0"/>
           </a:p>
@@ -4861,7 +4554,7 @@
                 <a:ea typeface="Cambria" pitchFamily="34" charset="-122"/>
                 <a:cs typeface="Cambria" pitchFamily="34" charset="-120"/>
               </a:rPr>
-              <a:t>0.2 mm</a:t>
+              <a:t>1台</a:t>
             </a:r>
             <a:endParaRPr lang="en-US" sz="5400" dirty="0"/>
           </a:p>
@@ -4900,7 +4593,7 @@
                 <a:ea typeface="Calibri" pitchFamily="34" charset="-122"/>
                 <a:cs typeface="Calibri" pitchFamily="34" charset="-120"/>
               </a:rPr>
-              <a:t>画像に変換するときの細かさ</a:t>
+              <a:t>いまは並列化なしで順番に処理</a:t>
             </a:r>
             <a:endParaRPr lang="en-US" sz="1400" dirty="0"/>
           </a:p>
@@ -4943,7 +4636,7 @@
                 <a:ea typeface="Calibri" pitchFamily="34" charset="-122"/>
                 <a:cs typeface="Calibri" pitchFamily="34" charset="-120"/>
               </a:rPr>
-              <a:t>土器のかけら1つで約700万個の点。まともに全部計算すると、メモリも時間も足りなくなる規模。</a:t>
+              <a:t>土器のかけら1つで約700万個の点。いまのプログラムは、これを1台のマシンで順番に処理している。</a:t>
             </a:r>
             <a:endParaRPr lang="en-US" sz="1500" dirty="0"/>
           </a:p>
@@ -4964,7 +4657,7 @@
                 <a:ea typeface="Calibri" pitchFamily="34" charset="-122"/>
                 <a:cs typeface="Calibri" pitchFamily="34" charset="-120"/>
               </a:rPr>
-              <a:t>だから「必要な面だけ切り出す」「3Dを2Dの画像に変換する」ことで、扱うデータをぐっと小さくしている。</a:t>
+              <a:t>土器1つを測るだけならこれでも動くが、今後は「テストを何百回も回す」「土器を何十個も測る」フェーズに入る。</a:t>
             </a:r>
             <a:endParaRPr lang="en-US" sz="1500" dirty="0"/>
           </a:p>
@@ -4982,7 +4675,7 @@
                 <a:ea typeface="Calibri" pitchFamily="34" charset="-122"/>
                 <a:cs typeface="Calibri" pitchFamily="34" charset="-120"/>
               </a:rPr>
-              <a:t>それでも重い計算は残るので、講義で学んだ「計算のさせ方の工夫」が効いてくる。</a:t>
+              <a:t>つまり、講義で学んだ効率化の考え方が本領を発揮するのはまさにこれから。次の2枚で候補を挙げる。</a:t>
             </a:r>
             <a:endParaRPr lang="en-US" sz="1500" dirty="0"/>
           </a:p>
@@ -5053,7 +4746,7 @@
                 <a:ea typeface="Cambria" pitchFamily="34" charset="-122"/>
                 <a:cs typeface="Cambria" pitchFamily="34" charset="-120"/>
               </a:rPr>
-              <a:t>効率化ポイント①  講義前半（データ分析）の手法</a:t>
+              <a:t>これから効率化できそうな場所</a:t>
             </a:r>
             <a:endParaRPr lang="en-US" sz="3000" dirty="0"/>
           </a:p>
@@ -5067,16 +4760,14 @@
         </p:nvSpPr>
         <p:spPr>
           <a:xfrm>
-            <a:off x="548640" y="1371600"/>
-            <a:ext cx="5394960" cy="2194560"/>
-          </a:xfrm>
-          <a:prstGeom prst="roundRect">
-            <a:avLst>
-              <a:gd name="adj" fmla="val 4167"/>
-            </a:avLst>
+            <a:off x="548640" y="1691640"/>
+            <a:ext cx="685800" cy="685800"/>
+          </a:xfrm>
+          <a:prstGeom prst="ellipse">
+            <a:avLst/>
           </a:prstGeom>
           <a:solidFill>
-            <a:srgbClr val="E7E8D1"/>
+            <a:srgbClr val="B85042"/>
           </a:solidFill>
           <a:ln/>
         </p:spPr>
@@ -5089,34 +4780,34 @@
         </p:nvSpPr>
         <p:spPr>
           <a:xfrm>
-            <a:off x="777240" y="1508760"/>
-            <a:ext cx="4937760" cy="411480"/>
-          </a:xfrm>
-          <a:prstGeom prst="rect">
-            <a:avLst/>
-          </a:prstGeom>
-          <a:noFill/>
-          <a:ln/>
-        </p:spPr>
-        <p:txBody>
-          <a:bodyPr wrap="square" lIns="0" tIns="0" rIns="0" bIns="0" rtlCol="0" anchor="ctr"/>
-          <a:lstStyle/>
-          <a:p>
-            <a:pPr indent="0" marL="0">
-              <a:buNone/>
-            </a:pPr>
-            <a:r>
-              <a:rPr lang="en-US" sz="1600" b="1" dirty="0">
-                <a:solidFill>
-                  <a:srgbClr val="B85042"/>
+            <a:off x="548640" y="1691640"/>
+            <a:ext cx="685800" cy="685800"/>
+          </a:xfrm>
+          <a:prstGeom prst="rect">
+            <a:avLst/>
+          </a:prstGeom>
+          <a:noFill/>
+          <a:ln/>
+        </p:spPr>
+        <p:txBody>
+          <a:bodyPr wrap="square" lIns="0" tIns="0" rIns="0" bIns="0" rtlCol="0" anchor="ctr"/>
+          <a:lstStyle/>
+          <a:p>
+            <a:pPr algn="ctr" indent="0" marL="0">
+              <a:buNone/>
+            </a:pPr>
+            <a:r>
+              <a:rPr lang="en-US" sz="2400" b="1" dirty="0">
+                <a:solidFill>
+                  <a:srgbClr val="FFFFFF"/>
                 </a:solidFill>
                 <a:latin typeface="Cambria" pitchFamily="34" charset="0"/>
                 <a:ea typeface="Cambria" pitchFamily="34" charset="-122"/>
                 <a:cs typeface="Cambria" pitchFamily="34" charset="-120"/>
               </a:rPr>
-              <a:t>主成分分析（第4回）</a:t>
-            </a:r>
-            <a:endParaRPr lang="en-US" sz="1600" dirty="0"/>
+              <a:t>1</a:t>
+            </a:r>
+            <a:endParaRPr lang="en-US" sz="2400" dirty="0"/>
           </a:p>
         </p:txBody>
       </p:sp>
@@ -5128,8 +4819,8 @@
         </p:nvSpPr>
         <p:spPr>
           <a:xfrm>
-            <a:off x="777240" y="1965960"/>
-            <a:ext cx="4937760" cy="1463040"/>
+            <a:off x="1508760" y="1417320"/>
+            <a:ext cx="10058400" cy="411480"/>
           </a:xfrm>
           <a:prstGeom prst="rect">
             <a:avLst/>
@@ -5145,7 +4836,46 @@
               <a:buNone/>
             </a:pPr>
             <a:r>
-              <a:rPr lang="en-US" sz="1250" dirty="0">
+              <a:rPr lang="en-US" sz="1700" b="1" dirty="0">
+                <a:solidFill>
+                  <a:srgbClr val="333333"/>
+                </a:solidFill>
+                <a:latin typeface="Cambria" pitchFamily="34" charset="0"/>
+                <a:ea typeface="Cambria" pitchFamily="34" charset="-122"/>
+                <a:cs typeface="Cambria" pitchFamily="34" charset="-120"/>
+              </a:rPr>
+              <a:t>精度テストの大量実行を手分けする</a:t>
+            </a:r>
+            <a:endParaRPr lang="en-US" sz="1700" dirty="0"/>
+          </a:p>
+        </p:txBody>
+      </p:sp>
+      <p:sp>
+        <p:nvSpPr>
+          <p:cNvPr id="6" name="Text 4"/>
+          <p:cNvSpPr/>
+          <p:nvPr/>
+        </p:nvSpPr>
+        <p:spPr>
+          <a:xfrm>
+            <a:off x="1508760" y="1874520"/>
+            <a:ext cx="10058400" cy="1005840"/>
+          </a:xfrm>
+          <a:prstGeom prst="rect">
+            <a:avLst/>
+          </a:prstGeom>
+          <a:noFill/>
+          <a:ln/>
+        </p:spPr>
+        <p:txBody>
+          <a:bodyPr wrap="square" lIns="0" tIns="0" rIns="0" bIns="0" rtlCol="0" anchor="ctr"/>
+          <a:lstStyle/>
+          <a:p>
+            <a:pPr indent="0" marL="0">
+              <a:buNone/>
+            </a:pPr>
+            <a:r>
+              <a:rPr lang="en-US" sz="1350" dirty="0">
                 <a:solidFill>
                   <a:srgbClr val="333333"/>
                 </a:solidFill>
@@ -5153,83 +4883,81 @@
                 <a:ea typeface="Calibri" pitchFamily="34" charset="-122"/>
                 <a:cs typeface="Calibri" pitchFamily="34" charset="-120"/>
               </a:rPr>
-              <a:t>土器の面のちょうどいい「向き」を自動で見つけて、3Dのでこぼこを2Dの画像に変換するのに使っている。データを減らす主役。</a:t>
-            </a:r>
-            <a:endParaRPr lang="en-US" sz="1250" dirty="0"/>
-          </a:p>
-        </p:txBody>
-      </p:sp>
-      <p:sp>
-        <p:nvSpPr>
-          <p:cNvPr id="6" name="Shape 4"/>
-          <p:cNvSpPr/>
-          <p:nvPr/>
-        </p:nvSpPr>
-        <p:spPr>
-          <a:xfrm>
-            <a:off x="6263640" y="1371600"/>
-            <a:ext cx="5394960" cy="2194560"/>
-          </a:xfrm>
-          <a:prstGeom prst="roundRect">
-            <a:avLst>
-              <a:gd name="adj" fmla="val 4167"/>
-            </a:avLst>
+              <a:t>ノイズや欠けの量を変えたテストデータで何百回も精度を測る予定。条件ごとに独立した計算なので、第11–12回で学んだ並列化がそのまま使えるはず。</a:t>
+            </a:r>
+            <a:endParaRPr lang="en-US" sz="1350" dirty="0"/>
+          </a:p>
+        </p:txBody>
+      </p:sp>
+      <p:sp>
+        <p:nvSpPr>
+          <p:cNvPr id="7" name="Shape 5"/>
+          <p:cNvSpPr/>
+          <p:nvPr/>
+        </p:nvSpPr>
+        <p:spPr>
+          <a:xfrm>
+            <a:off x="548640" y="3337560"/>
+            <a:ext cx="685800" cy="685800"/>
+          </a:xfrm>
+          <a:prstGeom prst="ellipse">
+            <a:avLst/>
           </a:prstGeom>
           <a:solidFill>
-            <a:srgbClr val="E7E8D1"/>
+            <a:srgbClr val="B85042"/>
           </a:solidFill>
           <a:ln/>
         </p:spPr>
       </p:sp>
       <p:sp>
         <p:nvSpPr>
-          <p:cNvPr id="7" name="Text 5"/>
-          <p:cNvSpPr/>
-          <p:nvPr/>
-        </p:nvSpPr>
-        <p:spPr>
-          <a:xfrm>
-            <a:off x="6492240" y="1508760"/>
-            <a:ext cx="4937760" cy="411480"/>
-          </a:xfrm>
-          <a:prstGeom prst="rect">
-            <a:avLst/>
-          </a:prstGeom>
-          <a:noFill/>
-          <a:ln/>
-        </p:spPr>
-        <p:txBody>
-          <a:bodyPr wrap="square" lIns="0" tIns="0" rIns="0" bIns="0" rtlCol="0" anchor="ctr"/>
-          <a:lstStyle/>
-          <a:p>
-            <a:pPr indent="0" marL="0">
-              <a:buNone/>
-            </a:pPr>
-            <a:r>
-              <a:rPr lang="en-US" sz="1600" b="1" dirty="0">
-                <a:solidFill>
-                  <a:srgbClr val="B85042"/>
+          <p:cNvPr id="8" name="Text 6"/>
+          <p:cNvSpPr/>
+          <p:nvPr/>
+        </p:nvSpPr>
+        <p:spPr>
+          <a:xfrm>
+            <a:off x="548640" y="3337560"/>
+            <a:ext cx="685800" cy="685800"/>
+          </a:xfrm>
+          <a:prstGeom prst="rect">
+            <a:avLst/>
+          </a:prstGeom>
+          <a:noFill/>
+          <a:ln/>
+        </p:spPr>
+        <p:txBody>
+          <a:bodyPr wrap="square" lIns="0" tIns="0" rIns="0" bIns="0" rtlCol="0" anchor="ctr"/>
+          <a:lstStyle/>
+          <a:p>
+            <a:pPr algn="ctr" indent="0" marL="0">
+              <a:buNone/>
+            </a:pPr>
+            <a:r>
+              <a:rPr lang="en-US" sz="2400" b="1" dirty="0">
+                <a:solidFill>
+                  <a:srgbClr val="FFFFFF"/>
                 </a:solidFill>
                 <a:latin typeface="Cambria" pitchFamily="34" charset="0"/>
                 <a:ea typeface="Cambria" pitchFamily="34" charset="-122"/>
                 <a:cs typeface="Cambria" pitchFamily="34" charset="-120"/>
               </a:rPr>
-              <a:t>クラスタ分析（第5回）</a:t>
-            </a:r>
-            <a:endParaRPr lang="en-US" sz="1600" dirty="0"/>
-          </a:p>
-        </p:txBody>
-      </p:sp>
-      <p:sp>
-        <p:nvSpPr>
-          <p:cNvPr id="8" name="Text 6"/>
-          <p:cNvSpPr/>
-          <p:nvPr/>
-        </p:nvSpPr>
-        <p:spPr>
-          <a:xfrm>
-            <a:off x="6492240" y="1965960"/>
-            <a:ext cx="4937760" cy="1463040"/>
+              <a:t>2</a:t>
+            </a:r>
+            <a:endParaRPr lang="en-US" sz="2400" dirty="0"/>
+          </a:p>
+        </p:txBody>
+      </p:sp>
+      <p:sp>
+        <p:nvSpPr>
+          <p:cNvPr id="9" name="Text 7"/>
+          <p:cNvSpPr/>
+          <p:nvPr/>
+        </p:nvSpPr>
+        <p:spPr>
+          <a:xfrm>
+            <a:off x="1508760" y="3063240"/>
+            <a:ext cx="10058400" cy="411480"/>
           </a:xfrm>
           <a:prstGeom prst="rect">
             <a:avLst/>
@@ -5245,7 +4973,46 @@
               <a:buNone/>
             </a:pPr>
             <a:r>
-              <a:rPr lang="en-US" sz="1250" dirty="0">
+              <a:rPr lang="en-US" sz="1700" b="1" dirty="0">
+                <a:solidFill>
+                  <a:srgbClr val="333333"/>
+                </a:solidFill>
+                <a:latin typeface="Cambria" pitchFamily="34" charset="0"/>
+                <a:ea typeface="Cambria" pitchFamily="34" charset="-122"/>
+                <a:cs typeface="Cambria" pitchFamily="34" charset="-120"/>
+              </a:rPr>
+              <a:t>手動の設定を自動チューニングに置き換える</a:t>
+            </a:r>
+            <a:endParaRPr lang="en-US" sz="1700" dirty="0"/>
+          </a:p>
+        </p:txBody>
+      </p:sp>
+      <p:sp>
+        <p:nvSpPr>
+          <p:cNvPr id="10" name="Text 8"/>
+          <p:cNvSpPr/>
+          <p:nvPr/>
+        </p:nvSpPr>
+        <p:spPr>
+          <a:xfrm>
+            <a:off x="1508760" y="3520440"/>
+            <a:ext cx="10058400" cy="1005840"/>
+          </a:xfrm>
+          <a:prstGeom prst="rect">
+            <a:avLst/>
+          </a:prstGeom>
+          <a:noFill/>
+          <a:ln/>
+        </p:spPr>
+        <p:txBody>
+          <a:bodyPr wrap="square" lIns="0" tIns="0" rIns="0" bIns="0" rtlCol="0" anchor="ctr"/>
+          <a:lstStyle/>
+          <a:p>
+            <a:pPr indent="0" marL="0">
+              <a:buNone/>
+            </a:pPr>
+            <a:r>
+              <a:rPr lang="en-US" sz="1350" dirty="0">
                 <a:solidFill>
                   <a:srgbClr val="333333"/>
                 </a:solidFill>
@@ -5253,83 +5020,81 @@
                 <a:ea typeface="Calibri" pitchFamily="34" charset="-122"/>
                 <a:cs typeface="Calibri" pitchFamily="34" charset="-120"/>
               </a:rPr>
-              <a:t>似た向きを向いている面ごとにグループ分けして、「縄目がある面」だけを選び出すのに使っている。計算する範囲を絞る役目。</a:t>
-            </a:r>
-            <a:endParaRPr lang="en-US" sz="1250" dirty="0"/>
-          </a:p>
-        </p:txBody>
-      </p:sp>
-      <p:sp>
-        <p:nvSpPr>
-          <p:cNvPr id="9" name="Shape 7"/>
-          <p:cNvSpPr/>
-          <p:nvPr/>
-        </p:nvSpPr>
-        <p:spPr>
-          <a:xfrm>
-            <a:off x="548640" y="3794760"/>
-            <a:ext cx="5394960" cy="2194560"/>
-          </a:xfrm>
-          <a:prstGeom prst="roundRect">
-            <a:avLst>
-              <a:gd name="adj" fmla="val 4167"/>
-            </a:avLst>
+              <a:t>いまは人が手で決めている設定（画像の細かさ・探す範囲など）を、第12回で学んだ遺伝的アルゴリズムなどに探させれば、人の試行錯誤の時間をなくせるはず。</a:t>
+            </a:r>
+            <a:endParaRPr lang="en-US" sz="1350" dirty="0"/>
+          </a:p>
+        </p:txBody>
+      </p:sp>
+      <p:sp>
+        <p:nvSpPr>
+          <p:cNvPr id="11" name="Shape 9"/>
+          <p:cNvSpPr/>
+          <p:nvPr/>
+        </p:nvSpPr>
+        <p:spPr>
+          <a:xfrm>
+            <a:off x="548640" y="4983480"/>
+            <a:ext cx="685800" cy="685800"/>
+          </a:xfrm>
+          <a:prstGeom prst="ellipse">
+            <a:avLst/>
           </a:prstGeom>
           <a:solidFill>
-            <a:srgbClr val="E7E8D1"/>
+            <a:srgbClr val="B85042"/>
           </a:solidFill>
           <a:ln/>
         </p:spPr>
       </p:sp>
       <p:sp>
         <p:nvSpPr>
-          <p:cNvPr id="10" name="Text 8"/>
-          <p:cNvSpPr/>
-          <p:nvPr/>
-        </p:nvSpPr>
-        <p:spPr>
-          <a:xfrm>
-            <a:off x="777240" y="3931920"/>
-            <a:ext cx="4937760" cy="411480"/>
-          </a:xfrm>
-          <a:prstGeom prst="rect">
-            <a:avLst/>
-          </a:prstGeom>
-          <a:noFill/>
-          <a:ln/>
-        </p:spPr>
-        <p:txBody>
-          <a:bodyPr wrap="square" lIns="0" tIns="0" rIns="0" bIns="0" rtlCol="0" anchor="ctr"/>
-          <a:lstStyle/>
-          <a:p>
-            <a:pPr indent="0" marL="0">
-              <a:buNone/>
-            </a:pPr>
-            <a:r>
-              <a:rPr lang="en-US" sz="1600" b="1" dirty="0">
-                <a:solidFill>
-                  <a:srgbClr val="B85042"/>
+          <p:cNvPr id="12" name="Text 10"/>
+          <p:cNvSpPr/>
+          <p:nvPr/>
+        </p:nvSpPr>
+        <p:spPr>
+          <a:xfrm>
+            <a:off x="548640" y="4983480"/>
+            <a:ext cx="685800" cy="685800"/>
+          </a:xfrm>
+          <a:prstGeom prst="rect">
+            <a:avLst/>
+          </a:prstGeom>
+          <a:noFill/>
+          <a:ln/>
+        </p:spPr>
+        <p:txBody>
+          <a:bodyPr wrap="square" lIns="0" tIns="0" rIns="0" bIns="0" rtlCol="0" anchor="ctr"/>
+          <a:lstStyle/>
+          <a:p>
+            <a:pPr algn="ctr" indent="0" marL="0">
+              <a:buNone/>
+            </a:pPr>
+            <a:r>
+              <a:rPr lang="en-US" sz="2400" b="1" dirty="0">
+                <a:solidFill>
+                  <a:srgbClr val="FFFFFF"/>
                 </a:solidFill>
                 <a:latin typeface="Cambria" pitchFamily="34" charset="0"/>
                 <a:ea typeface="Cambria" pitchFamily="34" charset="-122"/>
                 <a:cs typeface="Cambria" pitchFamily="34" charset="-120"/>
               </a:rPr>
-              <a:t>相関（第2回）</a:t>
-            </a:r>
-            <a:endParaRPr lang="en-US" sz="1600" dirty="0"/>
-          </a:p>
-        </p:txBody>
-      </p:sp>
-      <p:sp>
-        <p:nvSpPr>
-          <p:cNvPr id="11" name="Text 9"/>
-          <p:cNvSpPr/>
-          <p:nvPr/>
-        </p:nvSpPr>
-        <p:spPr>
-          <a:xfrm>
-            <a:off x="777240" y="4389120"/>
-            <a:ext cx="4937760" cy="1463040"/>
+              <a:t>3</a:t>
+            </a:r>
+            <a:endParaRPr lang="en-US" sz="2400" dirty="0"/>
+          </a:p>
+        </p:txBody>
+      </p:sp>
+      <p:sp>
+        <p:nvSpPr>
+          <p:cNvPr id="13" name="Text 11"/>
+          <p:cNvSpPr/>
+          <p:nvPr/>
+        </p:nvSpPr>
+        <p:spPr>
+          <a:xfrm>
+            <a:off x="1508760" y="4709160"/>
+            <a:ext cx="10058400" cy="411480"/>
           </a:xfrm>
           <a:prstGeom prst="rect">
             <a:avLst/>
@@ -5345,7 +5110,46 @@
               <a:buNone/>
             </a:pPr>
             <a:r>
-              <a:rPr lang="en-US" sz="1250" dirty="0">
+              <a:rPr lang="en-US" sz="1700" b="1" dirty="0">
+                <a:solidFill>
+                  <a:srgbClr val="333333"/>
+                </a:solidFill>
+                <a:latin typeface="Cambria" pitchFamily="34" charset="0"/>
+                <a:ea typeface="Cambria" pitchFamily="34" charset="-122"/>
+                <a:cs typeface="Cambria" pitchFamily="34" charset="-120"/>
+              </a:rPr>
+              <a:t>たくさんの土器をまとめて処理する</a:t>
+            </a:r>
+            <a:endParaRPr lang="en-US" sz="1700" dirty="0"/>
+          </a:p>
+        </p:txBody>
+      </p:sp>
+      <p:sp>
+        <p:nvSpPr>
+          <p:cNvPr id="14" name="Text 12"/>
+          <p:cNvSpPr/>
+          <p:nvPr/>
+        </p:nvSpPr>
+        <p:spPr>
+          <a:xfrm>
+            <a:off x="1508760" y="5166360"/>
+            <a:ext cx="10058400" cy="1005840"/>
+          </a:xfrm>
+          <a:prstGeom prst="rect">
+            <a:avLst/>
+          </a:prstGeom>
+          <a:noFill/>
+          <a:ln/>
+        </p:spPr>
+        <p:txBody>
+          <a:bodyPr wrap="square" lIns="0" tIns="0" rIns="0" bIns="0" rtlCol="0" anchor="ctr"/>
+          <a:lstStyle/>
+          <a:p>
+            <a:pPr indent="0" marL="0">
+              <a:buNone/>
+            </a:pPr>
+            <a:r>
+              <a:rPr lang="en-US" sz="1350" dirty="0">
                 <a:solidFill>
                   <a:srgbClr val="333333"/>
                 </a:solidFill>
@@ -5353,109 +5157,9 @@
                 <a:ea typeface="Calibri" pitchFamily="34" charset="-122"/>
                 <a:cs typeface="Calibri" pitchFamily="34" charset="-120"/>
               </a:rPr>
-              <a:t>「ずらして重ねてどれだけ似ているか」は、相関係数の考え方そのもの。もようの間隔と縄1回転分の長さは、これで見つけている。</a:t>
-            </a:r>
-            <a:endParaRPr lang="en-US" sz="1250" dirty="0"/>
-          </a:p>
-        </p:txBody>
-      </p:sp>
-      <p:sp>
-        <p:nvSpPr>
-          <p:cNvPr id="12" name="Shape 10"/>
-          <p:cNvSpPr/>
-          <p:nvPr/>
-        </p:nvSpPr>
-        <p:spPr>
-          <a:xfrm>
-            <a:off x="6263640" y="3794760"/>
-            <a:ext cx="5394960" cy="2194560"/>
-          </a:xfrm>
-          <a:prstGeom prst="roundRect">
-            <a:avLst>
-              <a:gd name="adj" fmla="val 4167"/>
-            </a:avLst>
-          </a:prstGeom>
-          <a:solidFill>
-            <a:srgbClr val="B85042"/>
-          </a:solidFill>
-          <a:ln/>
-        </p:spPr>
-      </p:sp>
-      <p:sp>
-        <p:nvSpPr>
-          <p:cNvPr id="13" name="Text 11"/>
-          <p:cNvSpPr/>
-          <p:nvPr/>
-        </p:nvSpPr>
-        <p:spPr>
-          <a:xfrm>
-            <a:off x="6492240" y="3931920"/>
-            <a:ext cx="4937760" cy="411480"/>
-          </a:xfrm>
-          <a:prstGeom prst="rect">
-            <a:avLst/>
-          </a:prstGeom>
-          <a:noFill/>
-          <a:ln/>
-        </p:spPr>
-        <p:txBody>
-          <a:bodyPr wrap="square" lIns="0" tIns="0" rIns="0" bIns="0" rtlCol="0" anchor="ctr"/>
-          <a:lstStyle/>
-          <a:p>
-            <a:pPr indent="0" marL="0">
-              <a:buNone/>
-            </a:pPr>
-            <a:r>
-              <a:rPr lang="en-US" sz="1600" b="1" dirty="0">
-                <a:solidFill>
-                  <a:srgbClr val="FFFFFF"/>
-                </a:solidFill>
-                <a:latin typeface="Cambria" pitchFamily="34" charset="0"/>
-                <a:ea typeface="Cambria" pitchFamily="34" charset="-122"/>
-                <a:cs typeface="Cambria" pitchFamily="34" charset="-120"/>
-              </a:rPr>
-              <a:t>まとめると</a:t>
-            </a:r>
-            <a:endParaRPr lang="en-US" sz="1600" dirty="0"/>
-          </a:p>
-        </p:txBody>
-      </p:sp>
-      <p:sp>
-        <p:nvSpPr>
-          <p:cNvPr id="14" name="Text 12"/>
-          <p:cNvSpPr/>
-          <p:nvPr/>
-        </p:nvSpPr>
-        <p:spPr>
-          <a:xfrm>
-            <a:off x="6492240" y="4389120"/>
-            <a:ext cx="4937760" cy="1463040"/>
-          </a:xfrm>
-          <a:prstGeom prst="rect">
-            <a:avLst/>
-          </a:prstGeom>
-          <a:noFill/>
-          <a:ln/>
-        </p:spPr>
-        <p:txBody>
-          <a:bodyPr wrap="square" lIns="0" tIns="0" rIns="0" bIns="0" rtlCol="0" anchor="ctr"/>
-          <a:lstStyle/>
-          <a:p>
-            <a:pPr indent="0" marL="0">
-              <a:buNone/>
-            </a:pPr>
-            <a:r>
-              <a:rPr lang="en-US" sz="1250" dirty="0">
-                <a:solidFill>
-                  <a:srgbClr val="FFFFFF"/>
-                </a:solidFill>
-                <a:latin typeface="Calibri" pitchFamily="34" charset="0"/>
-                <a:ea typeface="Calibri" pitchFamily="34" charset="-122"/>
-                <a:cs typeface="Calibri" pitchFamily="34" charset="-120"/>
-              </a:rPr>
-              <a:t>講義前半で学んだ手法は、本研究では「データを減らす」「対象を絞る」「繰り返しを見つける」という形で、パイプラインの中心にいる。</a:t>
-            </a:r>
-            <a:endParaRPr lang="en-US" sz="1250" dirty="0"/>
+              <a:t>土器ごとの処理は独立なので、何十個も測る段階では手分けして同時に走らせられる。測った値の比較には、講義前半の統計的な手法が使えるはず。</a:t>
+            </a:r>
+            <a:endParaRPr lang="en-US" sz="1350" dirty="0"/>
           </a:p>
         </p:txBody>
       </p:sp>
@@ -5524,7 +5228,7 @@
                 <a:ea typeface="Cambria" pitchFamily="34" charset="-122"/>
                 <a:cs typeface="Cambria" pitchFamily="34" charset="-120"/>
               </a:rPr>
-              <a:t>効率化ポイント②  講義後半（大規模計算）の考え方</a:t>
+              <a:t>手分けは本当に効くのか — 第12回の実験からの見通し</a:t>
             </a:r>
             <a:endParaRPr lang="en-US" sz="3000" dirty="0"/>
           </a:p>
@@ -5585,7 +5289,7 @@
                 <a:ea typeface="Cambria" pitchFamily="34" charset="-122"/>
                 <a:cs typeface="Cambria" pitchFamily="34" charset="-120"/>
               </a:rPr>
-              <a:t>計算のやり方を変えて速くする</a:t>
+              <a:t>第12回の実験でわかったこと</a:t>
             </a:r>
             <a:endParaRPr lang="en-US" sz="1500" dirty="0"/>
           </a:p>
@@ -5624,7 +5328,7 @@
                 <a:ea typeface="Calibri" pitchFamily="34" charset="-122"/>
                 <a:cs typeface="Calibri" pitchFamily="34" charset="-120"/>
               </a:rPr>
-              <a:t>「ずらして重ねる」計算は、まともにやるととても重い。計算の順番を工夫する定番の方法（FFT）を使うと、同じ答えをずっと速く出せる。</a:t>
+              <a:t>1つ1つの計算が軽すぎると、手分けの準備（Workerの用意やデータの受け渡し）のほうに時間がかかり、並列化してもかえって遅くなった。</a:t>
             </a:r>
             <a:endParaRPr lang="en-US" sz="1300" dirty="0"/>
           </a:p>
@@ -5685,7 +5389,7 @@
                 <a:ea typeface="Cambria" pitchFamily="34" charset="-122"/>
                 <a:cs typeface="Cambria" pitchFamily="34" charset="-120"/>
               </a:rPr>
-              <a:t>同時に計算できる所を見つける</a:t>
+              <a:t>本研究にあてはめると</a:t>
             </a:r>
             <a:endParaRPr lang="en-US" sz="1500" dirty="0"/>
           </a:p>
@@ -5724,7 +5428,7 @@
                 <a:ea typeface="Calibri" pitchFamily="34" charset="-122"/>
                 <a:cs typeface="Calibri" pitchFamily="34" charset="-120"/>
               </a:rPr>
-              <a:t>画像の各マス目の計算や、複数の土器を測る処理は、お互いの結果を待つ必要がない。第12回の遺伝的アルゴリズムの個体評価と同じで、手分けして同時に計算できる。</a:t>
+              <a:t>土器1つの処理やテスト1回は、数分かかる重い計算。準備のコストより計算そのものがずっと重いので、手分けの効果が出やすい形だと見込んでいる。</a:t>
             </a:r>
             <a:endParaRPr lang="en-US" sz="1300" dirty="0"/>
           </a:p>
@@ -5785,7 +5489,7 @@
                 <a:ea typeface="Cambria" pitchFamily="34" charset="-122"/>
                 <a:cs typeface="Cambria" pitchFamily="34" charset="-120"/>
               </a:rPr>
-              <a:t>手分けにはコストもある</a:t>
+              <a:t>進め方</a:t>
             </a:r>
             <a:endParaRPr lang="en-US" sz="1500" dirty="0"/>
           </a:p>
@@ -5824,7 +5528,7 @@
                 <a:ea typeface="Calibri" pitchFamily="34" charset="-122"/>
                 <a:cs typeface="Calibri" pitchFamily="34" charset="-120"/>
               </a:rPr>
-              <a:t>第12回の実験では、1つ1つの計算が軽すぎると、手分けの準備のほうに時間がかかって逆に遅くなった。本研究でも「1つの計算の重さ」を見てから手分けするか決める。</a:t>
+              <a:t>思い込みで並列化せず、まず「1つの計算にかかる時間」を測ってから、手分けする単位を決める。これは第12回の実験から得たいちばんの教訓。</a:t>
             </a:r>
             <a:endParaRPr lang="en-US" sz="1300" dirty="0"/>
           </a:p>
@@ -5844,7 +5548,7 @@
     <p:bg>
       <p:bgPr>
         <a:solidFill>
-          <a:srgbClr val="FFFFFF"/>
+          <a:srgbClr val="3B2A26"/>
         </a:solidFill>
       </p:bgPr>
     </p:bg>
@@ -5870,8 +5574,8 @@
         </p:nvSpPr>
         <p:spPr>
           <a:xfrm>
-            <a:off x="548640" y="320040"/>
-            <a:ext cx="11064240" cy="731520"/>
+            <a:off x="731520" y="548640"/>
+            <a:ext cx="10698480" cy="731520"/>
           </a:xfrm>
           <a:prstGeom prst="rect">
             <a:avLst/>
@@ -5887,39 +5591,122 @@
               <a:buNone/>
             </a:pPr>
             <a:r>
-              <a:rPr lang="en-US" sz="3000" b="1" dirty="0">
-                <a:solidFill>
-                  <a:srgbClr val="333333"/>
+              <a:rPr lang="en-US" sz="3200" b="1" dirty="0">
+                <a:solidFill>
+                  <a:srgbClr val="FFFFFF"/>
                 </a:solidFill>
                 <a:latin typeface="Cambria" pitchFamily="34" charset="0"/>
                 <a:ea typeface="Cambria" pitchFamily="34" charset="-122"/>
                 <a:cs typeface="Cambria" pitchFamily="34" charset="-120"/>
               </a:rPr>
-              <a:t>これからの計画</a:t>
-            </a:r>
-            <a:endParaRPr lang="en-US" sz="3000" dirty="0"/>
-          </a:p>
-        </p:txBody>
-      </p:sp>
-      <p:sp>
-        <p:nvSpPr>
-          <p:cNvPr id="3" name="Shape 1"/>
-          <p:cNvSpPr/>
-          <p:nvPr/>
-        </p:nvSpPr>
-        <p:spPr>
-          <a:xfrm>
-            <a:off x="548640" y="1691640"/>
-            <a:ext cx="685800" cy="685800"/>
-          </a:xfrm>
-          <a:prstGeom prst="ellipse">
-            <a:avLst/>
-          </a:prstGeom>
-          <a:solidFill>
-            <a:srgbClr val="B85042"/>
-          </a:solidFill>
-          <a:ln/>
-        </p:spPr>
+              <a:t>まとめ</a:t>
+            </a:r>
+            <a:endParaRPr lang="en-US" sz="3200" dirty="0"/>
+          </a:p>
+        </p:txBody>
+      </p:sp>
+      <p:sp>
+        <p:nvSpPr>
+          <p:cNvPr id="3" name="Text 1"/>
+          <p:cNvSpPr/>
+          <p:nvPr/>
+        </p:nvSpPr>
+        <p:spPr>
+          <a:xfrm>
+            <a:off x="822960" y="1554480"/>
+            <a:ext cx="10515600" cy="3657600"/>
+          </a:xfrm>
+          <a:prstGeom prst="rect">
+            <a:avLst/>
+          </a:prstGeom>
+          <a:noFill/>
+          <a:ln/>
+        </p:spPr>
+        <p:txBody>
+          <a:bodyPr wrap="square" rtlCol="0" anchor="ctr"/>
+          <a:lstStyle/>
+          <a:p>
+            <a:pPr marL="342900" indent="-342900">
+              <a:spcAft>
+                <a:spcPts val="1400"/>
+              </a:spcAft>
+              <a:buSzPct val="100000"/>
+              <a:buChar char="•"/>
+            </a:pPr>
+            <a:r>
+              <a:rPr lang="en-US" sz="1700" dirty="0">
+                <a:solidFill>
+                  <a:srgbClr val="E7E8D1"/>
+                </a:solidFill>
+                <a:latin typeface="Calibri" pitchFamily="34" charset="0"/>
+                <a:ea typeface="Calibri" pitchFamily="34" charset="-122"/>
+                <a:cs typeface="Calibri" pitchFamily="34" charset="-120"/>
+              </a:rPr>
+              <a:t>縄文土器の縄目もようを、3Dスキャンデータから全自動で測る仕組みを作っている。テスト用データでは精度を確認済み。</a:t>
+            </a:r>
+            <a:endParaRPr lang="en-US" sz="1700" dirty="0"/>
+          </a:p>
+          <a:p>
+            <a:pPr marL="342900" indent="-342900">
+              <a:spcAft>
+                <a:spcPts val="1400"/>
+              </a:spcAft>
+              <a:buSzPct val="100000"/>
+              <a:buChar char="•"/>
+            </a:pPr>
+            <a:r>
+              <a:rPr lang="en-US" sz="1700" dirty="0">
+                <a:solidFill>
+                  <a:srgbClr val="E7E8D1"/>
+                </a:solidFill>
+                <a:latin typeface="Calibri" pitchFamily="34" charset="0"/>
+                <a:ea typeface="Calibri" pitchFamily="34" charset="-122"/>
+                <a:cs typeface="Calibri" pitchFamily="34" charset="-120"/>
+              </a:rPr>
+              <a:t>研究はこれから「テストの大量実行」「設定の調整」「多数の土器への適用」のフェーズに入り、ここに効率化の余地が大きい。</a:t>
+            </a:r>
+            <a:endParaRPr lang="en-US" sz="1700" dirty="0"/>
+          </a:p>
+          <a:p>
+            <a:pPr marL="342900" indent="-342900">
+              <a:spcAft>
+                <a:spcPts val="1400"/>
+              </a:spcAft>
+              <a:buSzPct val="100000"/>
+              <a:buChar char="•"/>
+            </a:pPr>
+            <a:r>
+              <a:rPr lang="en-US" sz="1700" dirty="0">
+                <a:solidFill>
+                  <a:srgbClr val="E7E8D1"/>
+                </a:solidFill>
+                <a:latin typeface="Calibri" pitchFamily="34" charset="0"/>
+                <a:ea typeface="Calibri" pitchFamily="34" charset="-122"/>
+                <a:cs typeface="Calibri" pitchFamily="34" charset="-120"/>
+              </a:rPr>
+              <a:t>具体的には、独立な計算の並列実行（第11–12回）と、遺伝的アルゴリズムによる設定の自動チューニング（第12回）が使えそうだと考えている。</a:t>
+            </a:r>
+            <a:endParaRPr lang="en-US" sz="1700" dirty="0"/>
+          </a:p>
+          <a:p>
+            <a:pPr marL="342900" indent="-342900">
+              <a:buSzPct val="100000"/>
+              <a:buChar char="•"/>
+            </a:pPr>
+            <a:r>
+              <a:rPr lang="en-US" sz="1700" dirty="0">
+                <a:solidFill>
+                  <a:srgbClr val="E7E8D1"/>
+                </a:solidFill>
+                <a:latin typeface="Calibri" pitchFamily="34" charset="0"/>
+                <a:ea typeface="Calibri" pitchFamily="34" charset="-122"/>
+                <a:cs typeface="Calibri" pitchFamily="34" charset="-120"/>
+              </a:rPr>
+              <a:t>その際は「1つの計算の重さを測ってから手分けを決める」という第12回の教訓に従って進める。</a:t>
+            </a:r>
+            <a:endParaRPr lang="en-US" sz="1700" dirty="0"/>
+          </a:p>
+        </p:txBody>
       </p:sp>
       <p:sp>
         <p:nvSpPr>
@@ -5929,8 +5716,8 @@
         </p:nvSpPr>
         <p:spPr>
           <a:xfrm>
-            <a:off x="548640" y="1691640"/>
-            <a:ext cx="685800" cy="685800"/>
+            <a:off x="731520" y="5669280"/>
+            <a:ext cx="10698480" cy="548640"/>
           </a:xfrm>
           <a:prstGeom prst="rect">
             <a:avLst/>
@@ -5946,369 +5733,17 @@
               <a:buNone/>
             </a:pPr>
             <a:r>
-              <a:rPr lang="en-US" sz="2400" b="1" dirty="0">
-                <a:solidFill>
-                  <a:srgbClr val="FFFFFF"/>
+              <a:rPr lang="en-US" sz="2000" i="1" dirty="0">
+                <a:solidFill>
+                  <a:srgbClr val="A7BEAE"/>
                 </a:solidFill>
                 <a:latin typeface="Cambria" pitchFamily="34" charset="0"/>
                 <a:ea typeface="Cambria" pitchFamily="34" charset="-122"/>
                 <a:cs typeface="Cambria" pitchFamily="34" charset="-120"/>
               </a:rPr>
-              <a:t>1</a:t>
-            </a:r>
-            <a:endParaRPr lang="en-US" sz="2400" dirty="0"/>
-          </a:p>
-        </p:txBody>
-      </p:sp>
-      <p:sp>
-        <p:nvSpPr>
-          <p:cNvPr id="5" name="Text 3"/>
-          <p:cNvSpPr/>
-          <p:nvPr/>
-        </p:nvSpPr>
-        <p:spPr>
-          <a:xfrm>
-            <a:off x="1508760" y="1417320"/>
-            <a:ext cx="10058400" cy="411480"/>
-          </a:xfrm>
-          <a:prstGeom prst="rect">
-            <a:avLst/>
-          </a:prstGeom>
-          <a:noFill/>
-          <a:ln/>
-        </p:spPr>
-        <p:txBody>
-          <a:bodyPr wrap="square" lIns="0" tIns="0" rIns="0" bIns="0" rtlCol="0" anchor="ctr"/>
-          <a:lstStyle/>
-          <a:p>
-            <a:pPr indent="0" marL="0">
-              <a:buNone/>
-            </a:pPr>
-            <a:r>
-              <a:rPr lang="en-US" sz="1700" b="1" dirty="0">
-                <a:solidFill>
-                  <a:srgbClr val="333333"/>
-                </a:solidFill>
-                <a:latin typeface="Cambria" pitchFamily="34" charset="0"/>
-                <a:ea typeface="Cambria" pitchFamily="34" charset="-122"/>
-                <a:cs typeface="Cambria" pitchFamily="34" charset="-120"/>
-              </a:rPr>
-              <a:t>たくさんの条件で精度テスト</a:t>
-            </a:r>
-            <a:endParaRPr lang="en-US" sz="1700" dirty="0"/>
-          </a:p>
-        </p:txBody>
-      </p:sp>
-      <p:sp>
-        <p:nvSpPr>
-          <p:cNvPr id="6" name="Text 4"/>
-          <p:cNvSpPr/>
-          <p:nvPr/>
-        </p:nvSpPr>
-        <p:spPr>
-          <a:xfrm>
-            <a:off x="1508760" y="1874520"/>
-            <a:ext cx="10058400" cy="1005840"/>
-          </a:xfrm>
-          <a:prstGeom prst="rect">
-            <a:avLst/>
-          </a:prstGeom>
-          <a:noFill/>
-          <a:ln/>
-        </p:spPr>
-        <p:txBody>
-          <a:bodyPr wrap="square" lIns="0" tIns="0" rIns="0" bIns="0" rtlCol="0" anchor="ctr"/>
-          <a:lstStyle/>
-          <a:p>
-            <a:pPr indent="0" marL="0">
-              <a:buNone/>
-            </a:pPr>
-            <a:r>
-              <a:rPr lang="en-US" sz="1350" dirty="0">
-                <a:solidFill>
-                  <a:srgbClr val="333333"/>
-                </a:solidFill>
-                <a:latin typeface="Calibri" pitchFamily="34" charset="0"/>
-                <a:ea typeface="Calibri" pitchFamily="34" charset="-122"/>
-                <a:cs typeface="Calibri" pitchFamily="34" charset="-120"/>
-              </a:rPr>
-              <a:t>ノイズや欠けの量を変えたテストデータを大量に作って、どこまで正しく測れるか調べる。条件ごとに独立した計算なので、手分けして同時に走らせる。</a:t>
-            </a:r>
-            <a:endParaRPr lang="en-US" sz="1350" dirty="0"/>
-          </a:p>
-        </p:txBody>
-      </p:sp>
-      <p:sp>
-        <p:nvSpPr>
-          <p:cNvPr id="7" name="Shape 5"/>
-          <p:cNvSpPr/>
-          <p:nvPr/>
-        </p:nvSpPr>
-        <p:spPr>
-          <a:xfrm>
-            <a:off x="548640" y="3337560"/>
-            <a:ext cx="685800" cy="685800"/>
-          </a:xfrm>
-          <a:prstGeom prst="ellipse">
-            <a:avLst/>
-          </a:prstGeom>
-          <a:solidFill>
-            <a:srgbClr val="B85042"/>
-          </a:solidFill>
-          <a:ln/>
-        </p:spPr>
-      </p:sp>
-      <p:sp>
-        <p:nvSpPr>
-          <p:cNvPr id="8" name="Text 6"/>
-          <p:cNvSpPr/>
-          <p:nvPr/>
-        </p:nvSpPr>
-        <p:spPr>
-          <a:xfrm>
-            <a:off x="548640" y="3337560"/>
-            <a:ext cx="685800" cy="685800"/>
-          </a:xfrm>
-          <a:prstGeom prst="rect">
-            <a:avLst/>
-          </a:prstGeom>
-          <a:noFill/>
-          <a:ln/>
-        </p:spPr>
-        <p:txBody>
-          <a:bodyPr wrap="square" lIns="0" tIns="0" rIns="0" bIns="0" rtlCol="0" anchor="ctr"/>
-          <a:lstStyle/>
-          <a:p>
-            <a:pPr algn="ctr" indent="0" marL="0">
-              <a:buNone/>
-            </a:pPr>
-            <a:r>
-              <a:rPr lang="en-US" sz="2400" b="1" dirty="0">
-                <a:solidFill>
-                  <a:srgbClr val="FFFFFF"/>
-                </a:solidFill>
-                <a:latin typeface="Cambria" pitchFamily="34" charset="0"/>
-                <a:ea typeface="Cambria" pitchFamily="34" charset="-122"/>
-                <a:cs typeface="Cambria" pitchFamily="34" charset="-120"/>
-              </a:rPr>
-              <a:t>2</a:t>
-            </a:r>
-            <a:endParaRPr lang="en-US" sz="2400" dirty="0"/>
-          </a:p>
-        </p:txBody>
-      </p:sp>
-      <p:sp>
-        <p:nvSpPr>
-          <p:cNvPr id="9" name="Text 7"/>
-          <p:cNvSpPr/>
-          <p:nvPr/>
-        </p:nvSpPr>
-        <p:spPr>
-          <a:xfrm>
-            <a:off x="1508760" y="3063240"/>
-            <a:ext cx="10058400" cy="411480"/>
-          </a:xfrm>
-          <a:prstGeom prst="rect">
-            <a:avLst/>
-          </a:prstGeom>
-          <a:noFill/>
-          <a:ln/>
-        </p:spPr>
-        <p:txBody>
-          <a:bodyPr wrap="square" lIns="0" tIns="0" rIns="0" bIns="0" rtlCol="0" anchor="ctr"/>
-          <a:lstStyle/>
-          <a:p>
-            <a:pPr indent="0" marL="0">
-              <a:buNone/>
-            </a:pPr>
-            <a:r>
-              <a:rPr lang="en-US" sz="1700" b="1" dirty="0">
-                <a:solidFill>
-                  <a:srgbClr val="333333"/>
-                </a:solidFill>
-                <a:latin typeface="Cambria" pitchFamily="34" charset="0"/>
-                <a:ea typeface="Cambria" pitchFamily="34" charset="-122"/>
-                <a:cs typeface="Cambria" pitchFamily="34" charset="-120"/>
-              </a:rPr>
-              <a:t>設定の自動チューニング</a:t>
-            </a:r>
-            <a:endParaRPr lang="en-US" sz="1700" dirty="0"/>
-          </a:p>
-        </p:txBody>
-      </p:sp>
-      <p:sp>
-        <p:nvSpPr>
-          <p:cNvPr id="10" name="Text 8"/>
-          <p:cNvSpPr/>
-          <p:nvPr/>
-        </p:nvSpPr>
-        <p:spPr>
-          <a:xfrm>
-            <a:off x="1508760" y="3520440"/>
-            <a:ext cx="10058400" cy="1005840"/>
-          </a:xfrm>
-          <a:prstGeom prst="rect">
-            <a:avLst/>
-          </a:prstGeom>
-          <a:noFill/>
-          <a:ln/>
-        </p:spPr>
-        <p:txBody>
-          <a:bodyPr wrap="square" lIns="0" tIns="0" rIns="0" bIns="0" rtlCol="0" anchor="ctr"/>
-          <a:lstStyle/>
-          <a:p>
-            <a:pPr indent="0" marL="0">
-              <a:buNone/>
-            </a:pPr>
-            <a:r>
-              <a:rPr lang="en-US" sz="1350" dirty="0">
-                <a:solidFill>
-                  <a:srgbClr val="333333"/>
-                </a:solidFill>
-                <a:latin typeface="Calibri" pitchFamily="34" charset="0"/>
-                <a:ea typeface="Calibri" pitchFamily="34" charset="-122"/>
-                <a:cs typeface="Calibri" pitchFamily="34" charset="-120"/>
-              </a:rPr>
-              <a:t>いま人が手で決めている設定を、第12回で学んだ遺伝的アルゴリズムなどで自動的に探させる。1回の試行が重い処理なので、今度は手分けの効果が出やすいはず。</a:t>
-            </a:r>
-            <a:endParaRPr lang="en-US" sz="1350" dirty="0"/>
-          </a:p>
-        </p:txBody>
-      </p:sp>
-      <p:sp>
-        <p:nvSpPr>
-          <p:cNvPr id="11" name="Shape 9"/>
-          <p:cNvSpPr/>
-          <p:nvPr/>
-        </p:nvSpPr>
-        <p:spPr>
-          <a:xfrm>
-            <a:off x="548640" y="4983480"/>
-            <a:ext cx="685800" cy="685800"/>
-          </a:xfrm>
-          <a:prstGeom prst="ellipse">
-            <a:avLst/>
-          </a:prstGeom>
-          <a:solidFill>
-            <a:srgbClr val="B85042"/>
-          </a:solidFill>
-          <a:ln/>
-        </p:spPr>
-      </p:sp>
-      <p:sp>
-        <p:nvSpPr>
-          <p:cNvPr id="12" name="Text 10"/>
-          <p:cNvSpPr/>
-          <p:nvPr/>
-        </p:nvSpPr>
-        <p:spPr>
-          <a:xfrm>
-            <a:off x="548640" y="4983480"/>
-            <a:ext cx="685800" cy="685800"/>
-          </a:xfrm>
-          <a:prstGeom prst="rect">
-            <a:avLst/>
-          </a:prstGeom>
-          <a:noFill/>
-          <a:ln/>
-        </p:spPr>
-        <p:txBody>
-          <a:bodyPr wrap="square" lIns="0" tIns="0" rIns="0" bIns="0" rtlCol="0" anchor="ctr"/>
-          <a:lstStyle/>
-          <a:p>
-            <a:pPr algn="ctr" indent="0" marL="0">
-              <a:buNone/>
-            </a:pPr>
-            <a:r>
-              <a:rPr lang="en-US" sz="2400" b="1" dirty="0">
-                <a:solidFill>
-                  <a:srgbClr val="FFFFFF"/>
-                </a:solidFill>
-                <a:latin typeface="Cambria" pitchFamily="34" charset="0"/>
-                <a:ea typeface="Cambria" pitchFamily="34" charset="-122"/>
-                <a:cs typeface="Cambria" pitchFamily="34" charset="-120"/>
-              </a:rPr>
-              <a:t>3</a:t>
-            </a:r>
-            <a:endParaRPr lang="en-US" sz="2400" dirty="0"/>
-          </a:p>
-        </p:txBody>
-      </p:sp>
-      <p:sp>
-        <p:nvSpPr>
-          <p:cNvPr id="13" name="Text 11"/>
-          <p:cNvSpPr/>
-          <p:nvPr/>
-        </p:nvSpPr>
-        <p:spPr>
-          <a:xfrm>
-            <a:off x="1508760" y="4709160"/>
-            <a:ext cx="10058400" cy="411480"/>
-          </a:xfrm>
-          <a:prstGeom prst="rect">
-            <a:avLst/>
-          </a:prstGeom>
-          <a:noFill/>
-          <a:ln/>
-        </p:spPr>
-        <p:txBody>
-          <a:bodyPr wrap="square" lIns="0" tIns="0" rIns="0" bIns="0" rtlCol="0" anchor="ctr"/>
-          <a:lstStyle/>
-          <a:p>
-            <a:pPr indent="0" marL="0">
-              <a:buNone/>
-            </a:pPr>
-            <a:r>
-              <a:rPr lang="en-US" sz="1700" b="1" dirty="0">
-                <a:solidFill>
-                  <a:srgbClr val="333333"/>
-                </a:solidFill>
-                <a:latin typeface="Cambria" pitchFamily="34" charset="0"/>
-                <a:ea typeface="Cambria" pitchFamily="34" charset="-122"/>
-                <a:cs typeface="Cambria" pitchFamily="34" charset="-120"/>
-              </a:rPr>
-              <a:t>たくさんの土器への適用</a:t>
-            </a:r>
-            <a:endParaRPr lang="en-US" sz="1700" dirty="0"/>
-          </a:p>
-        </p:txBody>
-      </p:sp>
-      <p:sp>
-        <p:nvSpPr>
-          <p:cNvPr id="14" name="Text 12"/>
-          <p:cNvSpPr/>
-          <p:nvPr/>
-        </p:nvSpPr>
-        <p:spPr>
-          <a:xfrm>
-            <a:off x="1508760" y="5166360"/>
-            <a:ext cx="10058400" cy="1005840"/>
-          </a:xfrm>
-          <a:prstGeom prst="rect">
-            <a:avLst/>
-          </a:prstGeom>
-          <a:noFill/>
-          <a:ln/>
-        </p:spPr>
-        <p:txBody>
-          <a:bodyPr wrap="square" lIns="0" tIns="0" rIns="0" bIns="0" rtlCol="0" anchor="ctr"/>
-          <a:lstStyle/>
-          <a:p>
-            <a:pPr indent="0" marL="0">
-              <a:buNone/>
-            </a:pPr>
-            <a:r>
-              <a:rPr lang="en-US" sz="1350" dirty="0">
-                <a:solidFill>
-                  <a:srgbClr val="333333"/>
-                </a:solidFill>
-                <a:latin typeface="Calibri" pitchFamily="34" charset="0"/>
-                <a:ea typeface="Calibri" pitchFamily="34" charset="-122"/>
-                <a:cs typeface="Calibri" pitchFamily="34" charset="-120"/>
-              </a:rPr>
-              <a:t>複数の土器を自動で測って、測った値どうしを比べる。土器ごとの違いを統計的に調べていく。</a:t>
-            </a:r>
-            <a:endParaRPr lang="en-US" sz="1350" dirty="0"/>
+              <a:t>ご清聴ありがとうございました</a:t>
+            </a:r>
+            <a:endParaRPr lang="en-US" sz="2000" dirty="0"/>
           </a:p>
         </p:txBody>
       </p:sp>

--- a/13/第13回発表_修士研究と大規模計算.pptx
+++ b/13/第13回発表_修士研究と大規模計算.pptx
@@ -511,8 +511,8 @@
             <a:r>
               <a:rPr lang="en-US" dirty="0"/>
               <a:t>（約30秒）
-第13回の発表を始めます。私の修士研究は、ひとことで言うと「縄文土器の表面にある縄目のもようを、コンピュータで自動的に測る」というものです。
-本日は前半で研究の中身を紹介し、後半で、この講義で学んだことを使うと、研究のどこをこれから効率化できそうか、という見通しをお話しします。</a:t>
+それでは発表を始めます。私の修士研究のテーマは、縄文土器の3Dスキャンデータから、表面の縄目文様を自動計測することです。
+本日は、前半で研究の概要を紹介し、後半で、本講義で学んだ内容を応用して研究のどこを今後効率化できるか、その見通しについて述べます。</a:t>
             </a:r>
             <a:endParaRPr lang="en-US" dirty="0"/>
           </a:p>
@@ -601,10 +601,10 @@
             <a:r>
               <a:rPr lang="en-US" dirty="0"/>
               <a:t>（約50秒）
-まず、どんな研究かを説明します。縄文土器の表面には、縄を転がして付けた縄目のもようが残っています。右の画像が、実際に使っている土器のかけらの3Dスキャンです。
-このもようの間隔や、縄が1回転する長さがわかると、どんな縄を使ってどう作られたのか、という考古学の手がかりになります。
-ただ、いままでは研究者が目で見て手作業で測っていました。時間がかかりますし、測る人によって結果が変わってしまうという問題があります。
-そこで私の研究では、土器を3Dスキャンしたデータをコンピュータに読み込ませて、縄目の間隔や向きを全部自動で測れるようにすることを目指しています。</a:t>
+まず研究の背景です。縄文土器の表面には、縄を転がして付けた縄目文様が残っています。右の図が、実際に研究で使用している土器片の3Dスキャンデータです。
+この文様の間隔や、縄が1回転する長さは、製作に使われた縄の種類や製作技法を知るための、考古学的に重要な手がかりとなります。
+しかし従来は、研究者が目視と手作業で計測してきたため、時間を要するうえ、計測者によって結果が異なり、再現性に乏しいという課題がありました。
+そこで本研究では、土器の3Dスキャンデータを入力として、縄目の間隔・向き・縄1回転分の区切り位置を全自動で計測する手法の確立を目的としています。</a:t>
             </a:r>
             <a:endParaRPr lang="en-US" dirty="0"/>
           </a:p>
@@ -693,11 +693,11 @@
             <a:r>
               <a:rPr lang="en-US" dirty="0"/>
               <a:t>（約55秒）
-処理の流れは5つのステップです。
-まず3Dスキャンのデータを読み込み、次に、縄目のもようがある面だけを選び出します。3つ目のステップで、その面のでこぼこを普通の2次元の画像に変換します。ここまでくれば、あとは画像処理の問題になります。
-4つ目のステップで、もようの繰り返しの間隔と向きを測り、最後の5つ目で、縄が1回転するごとの区切りの位置を見つけます。
-ポイントは、3Dの複雑な形をそのまま扱うのではなく、2Dの画像、さらに1本の波形へと、だんだんシンプルなデータに変換しながら測っていくことです。
-プログラムはすでに動いていて、答えがわかっているテスト用のデータでは、正しく測れることを確認しています。</a:t>
+提案手法の処理の流れです。5つの段階で構成しています。
+まず3Dスキャンデータを読み込み、次に、縄目文様のある面だけを抽出します。第3段階で、その面の凹凸を2次元の画像に変換します。ここまで変換すれば、以降は画像処理の問題として扱えます。
+第4段階で文様の繰り返しの間隔と向きを計測し、最後の第5段階で、縄が1回転するごとの区切り位置を検出します。
+本手法のポイントは、3次元の複雑な形状をそのまま扱うのではなく、2次元の画像、さらに1次元の波形へと、段階的に単純なデータに変換しながら計測することです。
+現在、全段階を実装済みで、正解が既知のテストデータで正しく計測できることを確認しています。</a:t>
             </a:r>
             <a:endParaRPr lang="en-US" dirty="0"/>
           </a:p>
@@ -786,10 +786,10 @@
             <a:r>
               <a:rPr lang="en-US" dirty="0"/>
               <a:t>（約50秒）
-この研究のいちばんの新しさが、最後のステップです。
-縄は1回転するごとに同じもようが繰り返されます。右の画像の黒い点は、人が目で見て付けた「縄1回転分の区切り」の位置です。これをコンピュータに見つけさせたい、というわけです。
-やり方のイメージは単純で、もようの画像を少しずつずらしながら重ねてみて、「どれだけずらすと一番ぴったり重なるか」を調べます。一番よく重なるずらし幅が、ちょうど縄1回転分の長さになります。
-テスト用のデータで確認したところ、正解とのずれは2%未満で、データの2割が欠けていても精度を保てました。用意した16件のテストにすべて合格しています。</a:t>
+本研究の新規性にあたるのが、最後の第5段階です。
+縄は1回転するごとに同一の文様を繰り返します。右の図の黒い点は、人が目視で付けた「縄1回転分の区切り」の位置で、これを自動で検出することが目標です。
+手法の考え方としては、文様の画像を少しずつずらして重ね合わせ、最も一致するずらし幅を求めます。このずらし幅が、ちょうど縄1回転分の長さに対応します。
+テストデータによる検証では、既知の正解に対する誤差は2%未満であり、データの20%が欠損していても精度を維持できました。用意した16件のテストすべてに合格しています。</a:t>
             </a:r>
             <a:endParaRPr lang="en-US" dirty="0"/>
           </a:p>
@@ -878,10 +878,10 @@
             <a:r>
               <a:rPr lang="en-US" dirty="0"/>
               <a:t>（約45秒）
-いまどこまでできているかです。本物の土器のデータで動かすと、縄目の間隔が約3.4ミリ、縄1回転分の長さが約44ミリ、区切りの位置が6か所、というように自動で測れています。
-ただし課題もあります。いちばん大きいのは、本物の土器については「本当の正解」のデータがまだ手元になく、どれくらい正確に測れているのかを数字で示せていないことです。いま、正解データの計測を指導教員にお願いしています。
-また、測るときの細かい設定を人が手で決めている点も、今後自動化したいところです。
-ここからが後半の本題で、この研究を、講義で学んだ内容を使ってこれからどう効率化できそうか、という見通しの話です。</a:t>
+現状の結果です。実際の土器片データに適用したところ、縄目の間隔が約3.4ミリ、縄1回転分の長さが約44ミリ、区切り位置が6か所、と自動で計測できています。
+一方で課題も残っています。最も大きいのは、実データに対する正解値がまだ手元になく、計測精度を定量的に評価できていない点です。現在、指導教員に正解値の計測を依頼しています。
+また、計測時のパラメータを手動で設定している点も、今後自動化が必要です。
+ここからが後半の本題です。本講義で学んだ内容を応用して、この研究を今後どのように効率化できるか、その見通しを述べます。</a:t>
             </a:r>
             <a:endParaRPr lang="en-US" dirty="0"/>
           </a:p>
@@ -970,9 +970,9 @@
             <a:r>
               <a:rPr lang="en-US" dirty="0"/>
               <a:t>（約40秒）
-効率化の余地についてです。土器のかけら1つで点の数が約700万個という大きなデータですが、いまのプログラムは、これを1台のマシンで順番に処理しています。
-土器1つを測るだけならこれでも動きます。ただ、研究はこれから「テストを何百回も回す」「土器を何十個も測る」というフェーズに入っていきます。
-つまり、講義で学んだ効率化の考え方が本領を発揮するのはまさにこれからです。次の2枚で、その候補を挙げます。</a:t>
+まず、効率化の余地についてです。土器片1つのメッシュは約700万頂点に及ぶ大規模なデータですが、現在のプログラムは、これを1台の計算機で逐次的に処理しています。
+土器1点を計測するだけであれば、現状でも実用的な時間で動作します。しかし研究は今後、精度検証の大量実行や、多数の土器への適用という段階に進みます。
+したがって、講義で学んだ効率化の考え方が有効になるのは、まさにこれからです。次の2枚で、その候補を検討します。</a:t>
             </a:r>
             <a:endParaRPr lang="en-US" dirty="0"/>
           </a:p>
@@ -1061,10 +1061,10 @@
             <a:r>
               <a:rPr lang="en-US" dirty="0"/>
               <a:t>（約70秒）
-これから効率化できそうな場所は、大きく3つあると考えています。
-1つ目は、精度テストの大量実行です。今後、ノイズや欠けの量を変えたテストデータで、何百回も精度を測る予定です。それぞれの条件は独立した計算で、お互いの結果を待つ必要がありません。第11回・12回で学んだ並列化がそのまま使える形だと考えています。
-2つ目は、手動の設定の自動チューニングです。いまは画像の細かさや探す範囲などを人が手で決めていて、ここに試行錯誤の時間がかかっています。第12回で学んだ遺伝的アルゴリズムのような「よい設定を自動で探す」手法に置き換えれば、この時間をなくせるはずです。
-3つ目は、たくさんの土器をまとめて処理する段階です。土器ごとの処理は独立なので手分けできますし、測った値を土器どうしで比べるところでは、講義前半で学んだ統計的な手法が使えると考えています。</a:t>
+今後効率化が見込める処理として、3つの候補を考えています。
+1つ目は、精度検証実験の並列実行です。今後、ノイズや欠損の量を変えたテストデータで、数百回規模の精度検証を行う予定です。各条件は互いに独立した計算で、他の結果を待つ必要がありません。第11回・12回で学んだ並列化を、直接適用できる形だと考えています。
+2つ目は、パラメータの自動チューニングです。現在は画像の解像度や探索範囲などを手動で設定しており、ここに試行錯誤の時間を要しています。第12回で学んだ遺伝的アルゴリズムのような最適化手法で自動探索させることで、この時間を削減できると考えています。
+3つ目は、多数の土器への一括適用です。土器ごとの計測処理は独立であるため並列実行が可能であり、得られた計測値の比較・分析には、講義前半で学んだ統計的手法が適用できると見込んでいます。</a:t>
             </a:r>
             <a:endParaRPr lang="en-US" dirty="0"/>
           </a:p>
@@ -1153,10 +1153,10 @@
             <a:r>
               <a:rPr lang="en-US" dirty="0"/>
               <a:t>（約60秒）
-ただし、手分けすれば必ず速くなるわけではない、というのが第12回の実験で学んだことです。
-第12回の遺伝的アルゴリズムの実験では、1つ1つの計算が軽すぎたため、手分けの準備、つまりWorkerの用意やデータの受け渡しのほうに時間がかかって、並列化するとかえって遅くなりました。
-これを本研究にあてはめると、土器1つの処理やテスト1回は数分かかる重い計算です。準備のコストより計算そのもののほうがずっと重いので、こちらは手分けの効果が出やすい形だと見込んでいます。
-とはいえ、思い込みで並列化はしません。まず1つの計算にかかる時間をきちんと測ってから、手分けする単位を決める。これが第12回の実験から得たいちばんの教訓だと考えています。</a:t>
+ただし、並列化すれば必ず速くなるわけではない、というのが第12回の実験で得られた知見です。
+第12回の遺伝的アルゴリズムの実験では、1つあたりの計算が軽かったため、Workerの準備やデータの受け渡しといったオーバーヘッドが計算時間を上回り、並列化によってかえって処理時間が増加しました。
+これを本研究に当てはめると、土器1点の計測や精度検証1回は、数分を要する重い処理です。オーバーヘッドに対して計算本体が十分に重いため、並列化の効果が得られやすい条件だと見込んでいます。
+とはいえ、効果を仮定だけで判断することはせず、まず1タスクあたりの処理時間を計測したうえで、並列化する単位を決定する方針です。これが第12回の実験から得た、最も重要な知見だと考えています。</a:t>
             </a:r>
             <a:endParaRPr lang="en-US" dirty="0"/>
           </a:p>
@@ -1245,10 +1245,10 @@
             <a:r>
               <a:rPr lang="en-US" dirty="0"/>
               <a:t>（約35秒）
-まとめです。私の研究は、縄文土器の縄目もようを3Dスキャンデータから全自動で測る仕組みづくりで、テスト用データでは精度を確認できています。
-研究はこれから、テストの大量実行、設定の調整、多数の土器への適用というフェーズに入り、ここに効率化の余地が大きくあります。
-具体的には、独立な計算の並列実行と、遺伝的アルゴリズムによる設定の自動チューニングが使えそうだと考えており、その際は「1つの計算の重さを測ってから手分けを決める」という第12回の教訓に従って進めていきます。
-ご清聴ありがとうございました。</a:t>
+まとめです。本研究では、縄文土器の3Dスキャンデータから縄目文様を全自動で計測する手法を開発しており、テストデータでは精度を確認できています。
+研究は今後、精度検証の大量実行、パラメータ調整、多数の土器への適用という段階に進み、ここに効率化の余地が大きくあります。
+具体的には、独立した計算の並列実行と、遺伝的アルゴリズムによるパラメータの自動チューニングの適用が見込めます。適用にあたっては、1タスクあたりの処理時間を計測したうえで並列化の単位を決定するという、第12回の実験で得た知見に基づいて進めます。
+以上で発表を終わります。ご清聴ありがとうございました。</a:t>
             </a:r>
             <a:endParaRPr lang="en-US" dirty="0"/>
           </a:p>
@@ -1693,7 +1693,7 @@
                 <a:ea typeface="Cambria" pitchFamily="34" charset="-122"/>
                 <a:cs typeface="Cambria" pitchFamily="34" charset="-120"/>
               </a:rPr>
-              <a:t>縄文土器の縄目もようを</a:t>
+              <a:t>縄文土器の3Dスキャンデータからの</a:t>
             </a:r>
             <a:endParaRPr lang="en-US" sz="4000" dirty="0"/>
           </a:p>
@@ -1710,7 +1710,7 @@
                 <a:ea typeface="Cambria" pitchFamily="34" charset="-122"/>
                 <a:cs typeface="Cambria" pitchFamily="34" charset="-120"/>
               </a:rPr>
-              <a:t>コンピュータで自動計測する研究</a:t>
+              <a:t>縄目文様の自動計測</a:t>
             </a:r>
             <a:endParaRPr lang="en-US" sz="4000" dirty="0"/>
           </a:p>
@@ -1749,7 +1749,7 @@
                 <a:ea typeface="Calibri" pitchFamily="34" charset="-122"/>
                 <a:cs typeface="Calibri" pitchFamily="34" charset="-120"/>
               </a:rPr>
-              <a:t>— 研究紹介と、講義内容を活かした今後の効率化 —</a:t>
+              <a:t>— 修士研究の紹介と、講義内容を応用した今後の効率化の検討 —</a:t>
             </a:r>
             <a:endParaRPr lang="en-US" sz="2000" dirty="0"/>
           </a:p>
@@ -1859,7 +1859,7 @@
                 <a:ea typeface="Cambria" pitchFamily="34" charset="-122"/>
                 <a:cs typeface="Cambria" pitchFamily="34" charset="-120"/>
               </a:rPr>
-              <a:t>どんな研究か</a:t>
+              <a:t>研究の背景と目的</a:t>
             </a:r>
             <a:endParaRPr lang="en-US" sz="3000" dirty="0"/>
           </a:p>
@@ -1959,7 +1959,7 @@
                 <a:ea typeface="Calibri" pitchFamily="34" charset="-122"/>
                 <a:cs typeface="Calibri" pitchFamily="34" charset="-120"/>
               </a:rPr>
-              <a:t>縄文土器の表面には、縄を転がして付けた「縄目もよう」が残っている。もようの間隔や縄1回転分の長さがわかると、どんな縄でどう作られたかの手がかりになる。</a:t>
+              <a:t>縄文土器の表面には、縄を転がして付けた「縄目文様」が残る。文様の間隔や縄1回転分の長さは、製作に使われた縄と製作技法を知る考古学的な手がかりとなる。</a:t>
             </a:r>
             <a:endParaRPr lang="en-US" sz="1250" dirty="0"/>
           </a:p>
@@ -2020,7 +2020,7 @@
                 <a:ea typeface="Cambria" pitchFamily="34" charset="-122"/>
                 <a:cs typeface="Cambria" pitchFamily="34" charset="-120"/>
               </a:rPr>
-              <a:t>困りごと</a:t>
+              <a:t>課題</a:t>
             </a:r>
             <a:endParaRPr lang="en-US" sz="1600" dirty="0"/>
           </a:p>
@@ -2059,7 +2059,7 @@
                 <a:ea typeface="Calibri" pitchFamily="34" charset="-122"/>
                 <a:cs typeface="Calibri" pitchFamily="34" charset="-120"/>
               </a:rPr>
-              <a:t>いままでは研究者が目で見て手作業で測っていた。時間がかかるし、人によって結果が変わってしまう。</a:t>
+              <a:t>従来は研究者が目視と手作業で計測してきたため、時間を要するうえ、計測者によって結果が異なり、再現性に乏しい。</a:t>
             </a:r>
             <a:endParaRPr lang="en-US" sz="1250" dirty="0"/>
           </a:p>
@@ -2120,7 +2120,7 @@
                 <a:ea typeface="Cambria" pitchFamily="34" charset="-122"/>
                 <a:cs typeface="Cambria" pitchFamily="34" charset="-120"/>
               </a:rPr>
-              <a:t>やりたいこと</a:t>
+              <a:t>目的</a:t>
             </a:r>
             <a:endParaRPr lang="en-US" sz="1600" dirty="0"/>
           </a:p>
@@ -2159,7 +2159,7 @@
                 <a:ea typeface="Calibri" pitchFamily="34" charset="-122"/>
                 <a:cs typeface="Calibri" pitchFamily="34" charset="-120"/>
               </a:rPr>
-              <a:t>土器を3Dスキャンしたデータをコンピュータに読み込ませて、縄目の間隔・向き・縄1回転分の区切りを、全部自動で測れるようにする。</a:t>
+              <a:t>土器の3Dスキャンデータ（メッシュ）を入力とし、縄目の間隔・向き・縄1回転分の区切り位置を全自動で計測する手法を確立する。</a:t>
             </a:r>
             <a:endParaRPr lang="en-US" sz="1250" dirty="0"/>
           </a:p>
@@ -2222,7 +2222,7 @@
                 <a:ea typeface="Calibri" pitchFamily="34" charset="-122"/>
                 <a:cs typeface="Calibri" pitchFamily="34" charset="-120"/>
               </a:rPr>
-              <a:t>研究で使っている土器片の3Dスキャンデータ</a:t>
+              <a:t>図1: 研究対象の土器片の3Dスキャンデータ</a:t>
             </a:r>
             <a:endParaRPr lang="en-US" sz="1100" dirty="0"/>
           </a:p>
@@ -2293,7 +2293,7 @@
                 <a:ea typeface="Cambria" pitchFamily="34" charset="-122"/>
                 <a:cs typeface="Cambria" pitchFamily="34" charset="-120"/>
               </a:rPr>
-              <a:t>処理の流れ（5つのステップ）</a:t>
+              <a:t>提案手法の処理の流れ（5段階）</a:t>
             </a:r>
             <a:endParaRPr lang="en-US" sz="3000" dirty="0"/>
           </a:p>
@@ -2393,7 +2393,7 @@
                 <a:ea typeface="Calibri" pitchFamily="34" charset="-122"/>
                 <a:cs typeface="Calibri" pitchFamily="34" charset="-120"/>
               </a:rPr>
-              <a:t>読み込み</a:t>
+              <a:t>データ読込</a:t>
             </a:r>
             <a:endParaRPr lang="en-US" sz="1400" dirty="0"/>
           </a:p>
@@ -2432,7 +2432,7 @@
                 <a:ea typeface="Calibri" pitchFamily="34" charset="-122"/>
                 <a:cs typeface="Calibri" pitchFamily="34" charset="-120"/>
               </a:rPr>
-              <a:t>3Dスキャンデータを</a:t>
+              <a:t>3Dスキャンデータ</a:t>
             </a:r>
             <a:endParaRPr lang="en-US" sz="1100" dirty="0"/>
           </a:p>
@@ -2449,7 +2449,7 @@
                 <a:ea typeface="Calibri" pitchFamily="34" charset="-122"/>
                 <a:cs typeface="Calibri" pitchFamily="34" charset="-120"/>
               </a:rPr>
-              <a:t>読み込む</a:t>
+              <a:t>（メッシュ）を読み込む</a:t>
             </a:r>
             <a:endParaRPr lang="en-US" sz="1100" dirty="0"/>
           </a:p>
@@ -2588,7 +2588,7 @@
                 <a:ea typeface="Calibri" pitchFamily="34" charset="-122"/>
                 <a:cs typeface="Calibri" pitchFamily="34" charset="-120"/>
               </a:rPr>
-              <a:t>面の切り出し</a:t>
+              <a:t>対象面の抽出</a:t>
             </a:r>
             <a:endParaRPr lang="en-US" sz="1400" dirty="0"/>
           </a:p>
@@ -2627,7 +2627,7 @@
                 <a:ea typeface="Calibri" pitchFamily="34" charset="-122"/>
                 <a:cs typeface="Calibri" pitchFamily="34" charset="-120"/>
               </a:rPr>
-              <a:t>縄目がある面だけを</a:t>
+              <a:t>縄目文様のある面だけを</a:t>
             </a:r>
             <a:endParaRPr lang="en-US" sz="1100" dirty="0"/>
           </a:p>
@@ -2783,7 +2783,7 @@
                 <a:ea typeface="Calibri" pitchFamily="34" charset="-122"/>
                 <a:cs typeface="Calibri" pitchFamily="34" charset="-120"/>
               </a:rPr>
-              <a:t>画像に変換</a:t>
+              <a:t>2D画像化</a:t>
             </a:r>
             <a:endParaRPr lang="en-US" sz="1400" dirty="0"/>
           </a:p>
@@ -2822,7 +2822,7 @@
                 <a:ea typeface="Calibri" pitchFamily="34" charset="-122"/>
                 <a:cs typeface="Calibri" pitchFamily="34" charset="-120"/>
               </a:rPr>
-              <a:t>でこぼこを</a:t>
+              <a:t>表面の凹凸を</a:t>
             </a:r>
             <a:endParaRPr lang="en-US" sz="1100" dirty="0"/>
           </a:p>
@@ -2839,7 +2839,7 @@
                 <a:ea typeface="Calibri" pitchFamily="34" charset="-122"/>
                 <a:cs typeface="Calibri" pitchFamily="34" charset="-120"/>
               </a:rPr>
-              <a:t>2Dの画像にする</a:t>
+              <a:t>2次元画像に変換する</a:t>
             </a:r>
             <a:endParaRPr lang="en-US" sz="1100" dirty="0"/>
           </a:p>
@@ -2978,7 +2978,7 @@
                 <a:ea typeface="Calibri" pitchFamily="34" charset="-122"/>
                 <a:cs typeface="Calibri" pitchFamily="34" charset="-120"/>
               </a:rPr>
-              <a:t>間隔を測る</a:t>
+              <a:t>周期の計測</a:t>
             </a:r>
             <a:endParaRPr lang="en-US" sz="1400" dirty="0"/>
           </a:p>
@@ -3017,7 +3017,7 @@
                 <a:ea typeface="Calibri" pitchFamily="34" charset="-122"/>
                 <a:cs typeface="Calibri" pitchFamily="34" charset="-120"/>
               </a:rPr>
-              <a:t>もようの繰り返しの</a:t>
+              <a:t>文様の繰り返しの</a:t>
             </a:r>
             <a:endParaRPr lang="en-US" sz="1100" dirty="0"/>
           </a:p>
@@ -3034,7 +3034,7 @@
                 <a:ea typeface="Calibri" pitchFamily="34" charset="-122"/>
                 <a:cs typeface="Calibri" pitchFamily="34" charset="-120"/>
               </a:rPr>
-              <a:t>間隔と向きを測る</a:t>
+              <a:t>間隔と向きを計測する</a:t>
             </a:r>
             <a:endParaRPr lang="en-US" sz="1100" dirty="0"/>
           </a:p>
@@ -3173,7 +3173,7 @@
                 <a:ea typeface="Calibri" pitchFamily="34" charset="-122"/>
                 <a:cs typeface="Calibri" pitchFamily="34" charset="-120"/>
               </a:rPr>
-              <a:t>回転を見つける</a:t>
+              <a:t>回転の検出</a:t>
             </a:r>
             <a:endParaRPr lang="en-US" sz="1400" dirty="0"/>
           </a:p>
@@ -3229,7 +3229,7 @@
                 <a:ea typeface="Calibri" pitchFamily="34" charset="-122"/>
                 <a:cs typeface="Calibri" pitchFamily="34" charset="-120"/>
               </a:rPr>
-              <a:t>区切り位置を見つける</a:t>
+              <a:t>区切り位置を検出する</a:t>
             </a:r>
             <a:endParaRPr lang="en-US" sz="1100" dirty="0"/>
           </a:p>
@@ -3272,7 +3272,7 @@
                 <a:ea typeface="Calibri" pitchFamily="34" charset="-122"/>
                 <a:cs typeface="Calibri" pitchFamily="34" charset="-120"/>
               </a:rPr>
-              <a:t>「3Dの形 → 2Dの画像 → 1本の波形」と、だんだんシンプルなデータに変換しながら測っていく。</a:t>
+              <a:t>3次元の形状 → 2次元の画像 → 1次元の波形へと、段階的に単純なデータへ変換しながら計測する構成。</a:t>
             </a:r>
             <a:endParaRPr lang="en-US" sz="1500" dirty="0"/>
           </a:p>
@@ -3290,7 +3290,7 @@
                 <a:ea typeface="Calibri" pitchFamily="34" charset="-122"/>
                 <a:cs typeface="Calibri" pitchFamily="34" charset="-120"/>
               </a:rPr>
-              <a:t>プログラムは実装済みで、答えがわかっているテスト用データでは正しく測れることを確認済み。</a:t>
+              <a:t>全段階を実装済みであり、正解が既知のテストデータで正しく計測できることを確認している。</a:t>
             </a:r>
             <a:endParaRPr lang="en-US" sz="1500" dirty="0"/>
           </a:p>
@@ -3361,7 +3361,7 @@
                 <a:ea typeface="Cambria" pitchFamily="34" charset="-122"/>
                 <a:cs typeface="Cambria" pitchFamily="34" charset="-120"/>
               </a:rPr>
-              <a:t>いちばんの新しさ: 縄1回転分の区切りを見つける</a:t>
+              <a:t>本研究の新規性: 縄1回転分の区切り位置の自動検出</a:t>
             </a:r>
             <a:endParaRPr lang="en-US" sz="3000" dirty="0"/>
           </a:p>
@@ -3404,7 +3404,7 @@
                 <a:ea typeface="Calibri" pitchFamily="34" charset="-122"/>
                 <a:cs typeface="Calibri" pitchFamily="34" charset="-120"/>
               </a:rPr>
-              <a:t>縄は1回転するごとに同じもようが繰り返される。その「同じもようが現れる点」を自動で見つけたい。</a:t>
+              <a:t>縄は1回転するごとに同一の文様を繰り返す。この「同じ文様が再び現れる位置」を自動で検出する。</a:t>
             </a:r>
             <a:endParaRPr lang="en-US" sz="1450" dirty="0"/>
           </a:p>
@@ -3425,7 +3425,7 @@
                 <a:ea typeface="Calibri" pitchFamily="34" charset="-122"/>
                 <a:cs typeface="Calibri" pitchFamily="34" charset="-120"/>
               </a:rPr>
-              <a:t>画像をずらしながら重ね、「どれだけずらすと一番よく重なるか」を調べると、1回転分の長さがわかる。</a:t>
+              <a:t>画像を少しずつずらして重ね合わせ、最も一致するずらし幅を求めることで、縄1回転分の長さを推定する。</a:t>
             </a:r>
             <a:endParaRPr lang="en-US" sz="1450" dirty="0"/>
           </a:p>
@@ -3446,7 +3446,7 @@
                 <a:ea typeface="Calibri" pitchFamily="34" charset="-122"/>
                 <a:cs typeface="Calibri" pitchFamily="34" charset="-120"/>
               </a:rPr>
-              <a:t>見つけた区切り位置は、元の3Dデータ上の座標として出力する。</a:t>
+              <a:t>検出した区切り位置は、元の3Dデータ上の座標として出力する。</a:t>
             </a:r>
             <a:endParaRPr lang="en-US" sz="1450" dirty="0"/>
           </a:p>
@@ -3464,7 +3464,7 @@
                 <a:ea typeface="Calibri" pitchFamily="34" charset="-122"/>
                 <a:cs typeface="Calibri" pitchFamily="34" charset="-120"/>
               </a:rPr>
-              <a:t>土器は丸く曲がっているので、小さい範囲ごとに平らとみなして処理する工夫をしている。</a:t>
+              <a:t>土器表面の曲率には、局所的に平面とみなす近似で対応している。</a:t>
             </a:r>
             <a:endParaRPr lang="en-US" sz="1450" dirty="0"/>
           </a:p>
@@ -3525,7 +3525,7 @@
                 <a:ea typeface="Cambria" pitchFamily="34" charset="-122"/>
                 <a:cs typeface="Cambria" pitchFamily="34" charset="-120"/>
               </a:rPr>
-              <a:t>テスト用データでの確認結果</a:t>
+              <a:t>テストデータによる検証結果</a:t>
             </a:r>
             <a:endParaRPr lang="en-US" sz="1400" dirty="0"/>
           </a:p>
@@ -3568,7 +3568,7 @@
                 <a:ea typeface="Calibri" pitchFamily="34" charset="-122"/>
                 <a:cs typeface="Calibri" pitchFamily="34" charset="-120"/>
               </a:rPr>
-              <a:t>正解と比べたずれは 2% 未満</a:t>
+              <a:t>既知の正解に対する誤差は 2% 未満</a:t>
             </a:r>
             <a:endParaRPr lang="en-US" sz="1300" dirty="0"/>
           </a:p>
@@ -3589,7 +3589,7 @@
                 <a:ea typeface="Calibri" pitchFamily="34" charset="-122"/>
                 <a:cs typeface="Calibri" pitchFamily="34" charset="-120"/>
               </a:rPr>
-              <a:t>データの2割が欠けていても、精度を保てた</a:t>
+              <a:t>データの20%が欠損していても精度を維持</a:t>
             </a:r>
             <a:endParaRPr lang="en-US" sz="1300" dirty="0"/>
           </a:p>
@@ -3607,7 +3607,7 @@
                 <a:ea typeface="Calibri" pitchFamily="34" charset="-122"/>
                 <a:cs typeface="Calibri" pitchFamily="34" charset="-120"/>
               </a:rPr>
-              <a:t>テスト16件すべてに合格</a:t>
+              <a:t>16件のテストすべてに合格</a:t>
             </a:r>
             <a:endParaRPr lang="en-US" sz="1300" dirty="0"/>
           </a:p>
@@ -3670,7 +3670,7 @@
                 <a:ea typeface="Calibri" pitchFamily="34" charset="-122"/>
                 <a:cs typeface="Calibri" pitchFamily="34" charset="-120"/>
               </a:rPr>
-              <a:t>黒い点 = 人が目で見て付けた「縄1回転分の区切り」の位置</a:t>
+              <a:t>図2: 黒点は目視で付与された「縄1回転分の区切り」の位置</a:t>
             </a:r>
             <a:endParaRPr lang="en-US" sz="1100" dirty="0"/>
           </a:p>
@@ -3741,7 +3741,7 @@
                 <a:ea typeface="Cambria" pitchFamily="34" charset="-122"/>
                 <a:cs typeface="Cambria" pitchFamily="34" charset="-120"/>
               </a:rPr>
-              <a:t>いまどこまでできているか</a:t>
+              <a:t>実データでの計測結果と今後の課題</a:t>
             </a:r>
             <a:endParaRPr lang="en-US" sz="3000" dirty="0"/>
           </a:p>
@@ -3780,7 +3780,7 @@
                 <a:ea typeface="Cambria" pitchFamily="34" charset="-122"/>
                 <a:cs typeface="Cambria" pitchFamily="34" charset="-120"/>
               </a:rPr>
-              <a:t>本物の土器データで測れた値の例</a:t>
+              <a:t>実際の土器片データでの計測結果の例</a:t>
             </a:r>
             <a:endParaRPr lang="en-US" sz="1600" dirty="0"/>
           </a:p>
@@ -4041,7 +4041,7 @@
                 <a:ea typeface="Calibri" pitchFamily="34" charset="-122"/>
                 <a:cs typeface="Calibri" pitchFamily="34" charset="-120"/>
               </a:rPr>
-              <a:t>見つけた区切りの数</a:t>
+              <a:t>検出した区切り位置</a:t>
             </a:r>
             <a:endParaRPr lang="en-US" sz="1400" dirty="0"/>
           </a:p>
@@ -4119,7 +4119,7 @@
                 <a:ea typeface="Cambria" pitchFamily="34" charset="-122"/>
                 <a:cs typeface="Cambria" pitchFamily="34" charset="-120"/>
               </a:rPr>
-              <a:t>これからやること・課題</a:t>
+              <a:t>今後の課題</a:t>
             </a:r>
             <a:endParaRPr lang="en-US" sz="1600" dirty="0"/>
           </a:p>
@@ -4162,7 +4162,7 @@
                 <a:ea typeface="Calibri" pitchFamily="34" charset="-122"/>
                 <a:cs typeface="Calibri" pitchFamily="34" charset="-120"/>
               </a:rPr>
-              <a:t>本物の土器では「本当の正解」がまだ手元になく、どれくらい正確かを数字で示せていない</a:t>
+              <a:t>実データに対する正解値が未入手のため、計測精度を定量的に評価できていない（現在、指導教員に正解値の計測を依頼中）</a:t>
             </a:r>
             <a:endParaRPr lang="en-US" sz="1350" dirty="0"/>
           </a:p>
@@ -4183,15 +4183,12 @@
                 <a:ea typeface="Calibri" pitchFamily="34" charset="-122"/>
                 <a:cs typeface="Calibri" pitchFamily="34" charset="-120"/>
               </a:rPr>
-              <a:t>正解データの計測を指導教員にお願いしているところ</a:t>
+              <a:t>計測時のパラメータ（画像の解像度・探索範囲など）を手動で設定しており、自動化が必要</a:t>
             </a:r>
             <a:endParaRPr lang="en-US" sz="1350" dirty="0"/>
           </a:p>
           <a:p>
             <a:pPr marL="342900" indent="-342900">
-              <a:spcAft>
-                <a:spcPts val="800"/>
-              </a:spcAft>
               <a:buSzPct val="100000"/>
               <a:buChar char="•"/>
             </a:pPr>
@@ -4204,25 +4201,7 @@
                 <a:ea typeface="Calibri" pitchFamily="34" charset="-122"/>
                 <a:cs typeface="Calibri" pitchFamily="34" charset="-120"/>
               </a:rPr>
-              <a:t>測るときの細かい設定を、いまは人が手で決めている → 自動にしたい</a:t>
-            </a:r>
-            <a:endParaRPr lang="en-US" sz="1350" dirty="0"/>
-          </a:p>
-          <a:p>
-            <a:pPr marL="342900" indent="-342900">
-              <a:buSzPct val="100000"/>
-              <a:buChar char="•"/>
-            </a:pPr>
-            <a:r>
-              <a:rPr lang="en-US" sz="1350" dirty="0">
-                <a:solidFill>
-                  <a:srgbClr val="333333"/>
-                </a:solidFill>
-                <a:latin typeface="Calibri" pitchFamily="34" charset="0"/>
-                <a:ea typeface="Calibri" pitchFamily="34" charset="-122"/>
-                <a:cs typeface="Calibri" pitchFamily="34" charset="-120"/>
-              </a:rPr>
-              <a:t>土器の丸い曲がりへの対応を、もっとしっかりしたやり方にしたい</a:t>
+              <a:t>土器表面の曲率への対応を、より厳密な手法に拡張したい</a:t>
             </a:r>
             <a:endParaRPr lang="en-US" sz="1350" dirty="0"/>
           </a:p>
@@ -4293,7 +4272,7 @@
                 <a:ea typeface="Cambria" pitchFamily="34" charset="-122"/>
                 <a:cs typeface="Cambria" pitchFamily="34" charset="-120"/>
               </a:rPr>
-              <a:t>効率化の余地 — データは大きく、いまは1台で順番に計算</a:t>
+              <a:t>効率化の余地 — 大規模なデータと逐次処理</a:t>
             </a:r>
             <a:endParaRPr lang="en-US" sz="3000" dirty="0"/>
           </a:p>
@@ -4393,7 +4372,7 @@
                 <a:ea typeface="Calibri" pitchFamily="34" charset="-122"/>
                 <a:cs typeface="Calibri" pitchFamily="34" charset="-120"/>
               </a:rPr>
-              <a:t>土器片1つ分の点の数（1つめ）</a:t>
+              <a:t>土器片1つあたりの頂点数（1点目）</a:t>
             </a:r>
             <a:endParaRPr lang="en-US" sz="1400" dirty="0"/>
           </a:p>
@@ -4493,7 +4472,7 @@
                 <a:ea typeface="Calibri" pitchFamily="34" charset="-122"/>
                 <a:cs typeface="Calibri" pitchFamily="34" charset="-120"/>
               </a:rPr>
-              <a:t>土器片1つ分の点の数（2つめ）</a:t>
+              <a:t>土器片1つあたりの頂点数（2点目）</a:t>
             </a:r>
             <a:endParaRPr lang="en-US" sz="1400" dirty="0"/>
           </a:p>
@@ -4546,7 +4525,7 @@
               <a:buNone/>
             </a:pPr>
             <a:r>
-              <a:rPr lang="en-US" sz="5400" b="1" dirty="0">
+              <a:rPr lang="en-US" sz="4000" b="1" dirty="0">
                 <a:solidFill>
                   <a:srgbClr val="A7BEAE"/>
                 </a:solidFill>
@@ -4554,9 +4533,9 @@
                 <a:ea typeface="Cambria" pitchFamily="34" charset="-122"/>
                 <a:cs typeface="Cambria" pitchFamily="34" charset="-120"/>
               </a:rPr>
-              <a:t>1台</a:t>
-            </a:r>
-            <a:endParaRPr lang="en-US" sz="5400" dirty="0"/>
+              <a:t>逐次処理</a:t>
+            </a:r>
+            <a:endParaRPr lang="en-US" sz="4000" dirty="0"/>
           </a:p>
         </p:txBody>
       </p:sp>
@@ -4593,7 +4572,7 @@
                 <a:ea typeface="Calibri" pitchFamily="34" charset="-122"/>
                 <a:cs typeface="Calibri" pitchFamily="34" charset="-120"/>
               </a:rPr>
-              <a:t>いまは並列化なしで順番に処理</a:t>
+              <a:t>現在は並列化を行っていない</a:t>
             </a:r>
             <a:endParaRPr lang="en-US" sz="1400" dirty="0"/>
           </a:p>
@@ -4636,7 +4615,7 @@
                 <a:ea typeface="Calibri" pitchFamily="34" charset="-122"/>
                 <a:cs typeface="Calibri" pitchFamily="34" charset="-120"/>
               </a:rPr>
-              <a:t>土器のかけら1つで約700万個の点。いまのプログラムは、これを1台のマシンで順番に処理している。</a:t>
+              <a:t>土器片1つのメッシュは約700万頂点に及ぶ大規模データであり、現在は1台の計算機で逐次的に処理している。</a:t>
             </a:r>
             <a:endParaRPr lang="en-US" sz="1500" dirty="0"/>
           </a:p>
@@ -4657,7 +4636,7 @@
                 <a:ea typeface="Calibri" pitchFamily="34" charset="-122"/>
                 <a:cs typeface="Calibri" pitchFamily="34" charset="-120"/>
               </a:rPr>
-              <a:t>土器1つを測るだけならこれでも動くが、今後は「テストを何百回も回す」「土器を何十個も測る」フェーズに入る。</a:t>
+              <a:t>土器1点の計測であれば現状でも実用的だが、研究は今後「精度検証の大量実行」「多数の土器への適用」の段階に進む。</a:t>
             </a:r>
             <a:endParaRPr lang="en-US" sz="1500" dirty="0"/>
           </a:p>
@@ -4675,7 +4654,7 @@
                 <a:ea typeface="Calibri" pitchFamily="34" charset="-122"/>
                 <a:cs typeface="Calibri" pitchFamily="34" charset="-120"/>
               </a:rPr>
-              <a:t>つまり、講義で学んだ効率化の考え方が本領を発揮するのはまさにこれから。次の2枚で候補を挙げる。</a:t>
+              <a:t>したがって、講義で学んだ効率化の考え方が有効になるのはまさにこれからである。次の2枚でその候補を検討する。</a:t>
             </a:r>
             <a:endParaRPr lang="en-US" sz="1500" dirty="0"/>
           </a:p>
@@ -4746,7 +4725,7 @@
                 <a:ea typeface="Cambria" pitchFamily="34" charset="-122"/>
                 <a:cs typeface="Cambria" pitchFamily="34" charset="-120"/>
               </a:rPr>
-              <a:t>これから効率化できそうな場所</a:t>
+              <a:t>今後効率化が見込める処理（3つの候補）</a:t>
             </a:r>
             <a:endParaRPr lang="en-US" sz="3000" dirty="0"/>
           </a:p>
@@ -4844,7 +4823,7 @@
                 <a:ea typeface="Cambria" pitchFamily="34" charset="-122"/>
                 <a:cs typeface="Cambria" pitchFamily="34" charset="-120"/>
               </a:rPr>
-              <a:t>精度テストの大量実行を手分けする</a:t>
+              <a:t>精度検証実験の並列実行</a:t>
             </a:r>
             <a:endParaRPr lang="en-US" sz="1700" dirty="0"/>
           </a:p>
@@ -4883,7 +4862,7 @@
                 <a:ea typeface="Calibri" pitchFamily="34" charset="-122"/>
                 <a:cs typeface="Calibri" pitchFamily="34" charset="-120"/>
               </a:rPr>
-              <a:t>ノイズや欠けの量を変えたテストデータで何百回も精度を測る予定。条件ごとに独立した計算なので、第11–12回で学んだ並列化がそのまま使えるはず。</a:t>
+              <a:t>ノイズや欠損の量を変えたテストデータで、数百回規模の精度検証を行う予定。各条件は互いに独立した計算であるため、第11・12回で学んだ並列化を直接適用できると考えられる。</a:t>
             </a:r>
             <a:endParaRPr lang="en-US" sz="1350" dirty="0"/>
           </a:p>
@@ -4981,7 +4960,7 @@
                 <a:ea typeface="Cambria" pitchFamily="34" charset="-122"/>
                 <a:cs typeface="Cambria" pitchFamily="34" charset="-120"/>
               </a:rPr>
-              <a:t>手動の設定を自動チューニングに置き換える</a:t>
+              <a:t>パラメータの自動チューニング</a:t>
             </a:r>
             <a:endParaRPr lang="en-US" sz="1700" dirty="0"/>
           </a:p>
@@ -5020,7 +4999,7 @@
                 <a:ea typeface="Calibri" pitchFamily="34" charset="-122"/>
                 <a:cs typeface="Calibri" pitchFamily="34" charset="-120"/>
               </a:rPr>
-              <a:t>いまは人が手で決めている設定（画像の細かさ・探す範囲など）を、第12回で学んだ遺伝的アルゴリズムなどに探させれば、人の試行錯誤の時間をなくせるはず。</a:t>
+              <a:t>現在手動で設定しているパラメータ（画像の解像度・探索範囲など）を、第12回で学んだ遺伝的アルゴリズムなどの最適化手法で自動探索させることで、試行錯誤に要する時間を削減できると考えられる。</a:t>
             </a:r>
             <a:endParaRPr lang="en-US" sz="1350" dirty="0"/>
           </a:p>
@@ -5118,7 +5097,7 @@
                 <a:ea typeface="Cambria" pitchFamily="34" charset="-122"/>
                 <a:cs typeface="Cambria" pitchFamily="34" charset="-120"/>
               </a:rPr>
-              <a:t>たくさんの土器をまとめて処理する</a:t>
+              <a:t>多数の土器への一括適用</a:t>
             </a:r>
             <a:endParaRPr lang="en-US" sz="1700" dirty="0"/>
           </a:p>
@@ -5157,7 +5136,7 @@
                 <a:ea typeface="Calibri" pitchFamily="34" charset="-122"/>
                 <a:cs typeface="Calibri" pitchFamily="34" charset="-120"/>
               </a:rPr>
-              <a:t>土器ごとの処理は独立なので、何十個も測る段階では手分けして同時に走らせられる。測った値の比較には、講義前半の統計的な手法が使えるはず。</a:t>
+              <a:t>土器ごとの計測処理は独立であるため、数十点規模の適用段階では並列実行が可能。計測値の比較・分析には、講義前半で学んだ統計的手法の適用が見込める。</a:t>
             </a:r>
             <a:endParaRPr lang="en-US" sz="1350" dirty="0"/>
           </a:p>
@@ -5228,7 +5207,7 @@
                 <a:ea typeface="Cambria" pitchFamily="34" charset="-122"/>
                 <a:cs typeface="Cambria" pitchFamily="34" charset="-120"/>
               </a:rPr>
-              <a:t>手分けは本当に効くのか — 第12回の実験からの見通し</a:t>
+              <a:t>並列化の効果の見通し — 第12回の実験結果を踏まえて</a:t>
             </a:r>
             <a:endParaRPr lang="en-US" sz="3000" dirty="0"/>
           </a:p>
@@ -5289,7 +5268,7 @@
                 <a:ea typeface="Cambria" pitchFamily="34" charset="-122"/>
                 <a:cs typeface="Cambria" pitchFamily="34" charset="-120"/>
               </a:rPr>
-              <a:t>第12回の実験でわかったこと</a:t>
+              <a:t>第12回の実験で得られた知見</a:t>
             </a:r>
             <a:endParaRPr lang="en-US" sz="1500" dirty="0"/>
           </a:p>
@@ -5328,7 +5307,7 @@
                 <a:ea typeface="Calibri" pitchFamily="34" charset="-122"/>
                 <a:cs typeface="Calibri" pitchFamily="34" charset="-120"/>
               </a:rPr>
-              <a:t>1つ1つの計算が軽すぎると、手分けの準備（Workerの用意やデータの受け渡し）のほうに時間がかかり、並列化してもかえって遅くなった。</a:t>
+              <a:t>1つあたりの計算が軽い場合、Workerの準備やデータの受け渡しといったオーバーヘッドが上回り、並列化によってかえって処理時間が増加した。</a:t>
             </a:r>
             <a:endParaRPr lang="en-US" sz="1300" dirty="0"/>
           </a:p>
@@ -5389,7 +5368,7 @@
                 <a:ea typeface="Cambria" pitchFamily="34" charset="-122"/>
                 <a:cs typeface="Cambria" pitchFamily="34" charset="-120"/>
               </a:rPr>
-              <a:t>本研究にあてはめると</a:t>
+              <a:t>本研究への当てはめ</a:t>
             </a:r>
             <a:endParaRPr lang="en-US" sz="1500" dirty="0"/>
           </a:p>
@@ -5428,7 +5407,7 @@
                 <a:ea typeface="Calibri" pitchFamily="34" charset="-122"/>
                 <a:cs typeface="Calibri" pitchFamily="34" charset="-120"/>
               </a:rPr>
-              <a:t>土器1つの処理やテスト1回は、数分かかる重い計算。準備のコストより計算そのものがずっと重いので、手分けの効果が出やすい形だと見込んでいる。</a:t>
+              <a:t>土器1点の計測や精度検証1回は、数分を要する重い処理である。オーバーヘッドに対して計算本体が十分に重いため、並列化の効果が得られやすい条件だと見込まれる。</a:t>
             </a:r>
             <a:endParaRPr lang="en-US" sz="1300" dirty="0"/>
           </a:p>
@@ -5489,7 +5468,7 @@
                 <a:ea typeface="Cambria" pitchFamily="34" charset="-122"/>
                 <a:cs typeface="Cambria" pitchFamily="34" charset="-120"/>
               </a:rPr>
-              <a:t>進め方</a:t>
+              <a:t>適用の方針</a:t>
             </a:r>
             <a:endParaRPr lang="en-US" sz="1500" dirty="0"/>
           </a:p>
@@ -5528,7 +5507,7 @@
                 <a:ea typeface="Calibri" pitchFamily="34" charset="-122"/>
                 <a:cs typeface="Calibri" pitchFamily="34" charset="-120"/>
               </a:rPr>
-              <a:t>思い込みで並列化せず、まず「1つの計算にかかる時間」を測ってから、手分けする単位を決める。これは第12回の実験から得たいちばんの教訓。</a:t>
+              <a:t>並列化の効果を仮定で判断せず、まず1タスクあたりの処理時間を計測したうえで、並列化する単位を決定する。これが第12回の実験から得た最も重要な知見である。</a:t>
             </a:r>
             <a:endParaRPr lang="en-US" sz="1300" dirty="0"/>
           </a:p>
@@ -5642,7 +5621,7 @@
                 <a:ea typeface="Calibri" pitchFamily="34" charset="-122"/>
                 <a:cs typeface="Calibri" pitchFamily="34" charset="-120"/>
               </a:rPr>
-              <a:t>縄文土器の縄目もようを、3Dスキャンデータから全自動で測る仕組みを作っている。テスト用データでは精度を確認済み。</a:t>
+              <a:t>縄文土器の3Dスキャンデータから縄目文様を全自動で計測する手法を開発しており、テストデータでは精度を確認済みである。</a:t>
             </a:r>
             <a:endParaRPr lang="en-US" sz="1700" dirty="0"/>
           </a:p>
@@ -5663,7 +5642,7 @@
                 <a:ea typeface="Calibri" pitchFamily="34" charset="-122"/>
                 <a:cs typeface="Calibri" pitchFamily="34" charset="-120"/>
               </a:rPr>
-              <a:t>研究はこれから「テストの大量実行」「設定の調整」「多数の土器への適用」のフェーズに入り、ここに効率化の余地が大きい。</a:t>
+              <a:t>研究は今後「精度検証の大量実行」「パラメータ調整」「多数の土器への適用」の段階に進み、ここに効率化の余地が大きい。</a:t>
             </a:r>
             <a:endParaRPr lang="en-US" sz="1700" dirty="0"/>
           </a:p>
@@ -5684,7 +5663,7 @@
                 <a:ea typeface="Calibri" pitchFamily="34" charset="-122"/>
                 <a:cs typeface="Calibri" pitchFamily="34" charset="-120"/>
               </a:rPr>
-              <a:t>具体的には、独立な計算の並列実行（第11–12回）と、遺伝的アルゴリズムによる設定の自動チューニング（第12回）が使えそうだと考えている。</a:t>
+              <a:t>具体的には、独立した計算の並列実行（第11・12回）と、遺伝的アルゴリズムによるパラメータの自動チューニング（第12回）の適用が見込める。</a:t>
             </a:r>
             <a:endParaRPr lang="en-US" sz="1700" dirty="0"/>
           </a:p>
@@ -5702,7 +5681,7 @@
                 <a:ea typeface="Calibri" pitchFamily="34" charset="-122"/>
                 <a:cs typeface="Calibri" pitchFamily="34" charset="-120"/>
               </a:rPr>
-              <a:t>その際は「1つの計算の重さを測ってから手分けを決める」という第12回の教訓に従って進める。</a:t>
+              <a:t>適用にあたっては、1タスクあたりの処理時間を計測したうえで並列化の単位を決定するという、第12回の実験で得た知見に基づいて進める。</a:t>
             </a:r>
             <a:endParaRPr lang="en-US" sz="1700" dirty="0"/>
           </a:p>

--- a/13/第13回発表_修士研究と大規模計算.pptx
+++ b/13/第13回発表_修士研究と大規模計算.pptx
@@ -971,8 +971,8 @@
               <a:rPr lang="en-US" dirty="0"/>
               <a:t>（約40秒）
 まず、効率化の余地についてです。土器片1つのメッシュは約700万頂点に及ぶ大規模なデータですが、現在のプログラムは、これを1台の計算機で逐次的に処理しています。
-土器1点を計測するだけであれば、現状でも実用的な時間で動作します。しかし研究は今後、精度検証の大量実行や、多数の土器への適用という段階に進みます。
-したがって、講義で学んだ効率化の考え方が有効になるのは、まさにこれからです。次の2枚で、その候補を検討します。</a:t>
+土器1点を計測するだけであれば、現状でも実用的な時間で動作します。しかし研究は今後、手法の信頼性を示すために、精度検証実験を大量に実行する段階に進みます。
+この段階でこそ、講義で学んだ並列化の考え方が有効になると考えています。次の2枚で具体的に検討します。</a:t>
             </a:r>
             <a:endParaRPr lang="en-US" dirty="0"/>
           </a:p>
@@ -1060,11 +1060,11 @@
           <a:p>
             <a:r>
               <a:rPr lang="en-US" dirty="0"/>
-              <a:t>（約70秒）
-今後効率化が見込める処理として、3つの候補を考えています。
-1つ目は、精度検証実験の並列実行です。今後、ノイズや欠損の量を変えたテストデータで、数百回規模の精度検証を行う予定です。各条件は互いに独立した計算で、他の結果を待つ必要がありません。第11回・12回で学んだ並列化を、直接適用できる形だと考えています。
-2つ目は、パラメータの自動チューニングです。現在は画像の解像度や探索範囲などを手動で設定しており、ここに試行錯誤の時間を要しています。第12回で学んだ遺伝的アルゴリズムのような最適化手法で自動探索させることで、この時間を削減できると考えています。
-3つ目は、多数の土器への一括適用です。土器ごとの計測処理は独立であるため並列実行が可能であり、得られた計測値の比較・分析には、講義前半で学んだ統計的手法が適用できると見込んでいます。</a:t>
+              <a:t>（約65秒）
+今後効率化が見込める処理として、精度検証実験の並列実行に注目しています。
+まず、どのような実験かです。手法の信頼性を示すためには、ノイズや欠損の量を段階的に変えたテストデータを多数生成し、それぞれの条件で計測精度を検証する必要があります。条件の組合せは数百通りに及ぶ見込みです。
+次に、なぜ並列化に向くかです。各条件の検証は互いに独立した計算で、他の条件の結果を待つ必要がありません。これは第12回の遺伝的アルゴリズムにおける個体評価と同じ構造であり、複数のWorkerへ分配して同時に実行できます。
+期待される効果です。検証1回に数分を要するため、数百条件を逐次実行すると1日以上かかる見込みです。並列実行によって実行時間を大幅に短縮できれば、条件を追加した再実験も繰り返しやすくなり、研究のサイクル全体が速くなると考えています。</a:t>
             </a:r>
             <a:endParaRPr lang="en-US" dirty="0"/>
           </a:p>
@@ -1155,8 +1155,8 @@
               <a:t>（約60秒）
 ただし、並列化すれば必ず速くなるわけではない、というのが第12回の実験で得られた知見です。
 第12回の遺伝的アルゴリズムの実験では、1つあたりの計算が軽かったため、Workerの準備やデータの受け渡しといったオーバーヘッドが計算時間を上回り、並列化によってかえって処理時間が増加しました。
-これを本研究に当てはめると、土器1点の計測や精度検証1回は、数分を要する重い処理です。オーバーヘッドに対して計算本体が十分に重いため、並列化の効果が得られやすい条件だと見込んでいます。
-とはいえ、効果を仮定だけで判断することはせず、まず1タスクあたりの処理時間を計測したうえで、並列化する単位を決定する方針です。これが第12回の実験から得た、最も重要な知見だと考えています。</a:t>
+これを本研究の精度検証実験に当てはめると、検証1回は数分を要する重い処理です。オーバーヘッドに対して計算本体が十分に重いため、並列化の効果が得られやすい条件だと見込んでいます。
+とはいえ、効果を仮定だけで判断することはせず、まず検証1回あたりの処理時間を計測したうえで、並列化する単位とWorker数を決定する方針です。これが第12回の実験から得た、最も重要な知見だと考えています。</a:t>
             </a:r>
             <a:endParaRPr lang="en-US" dirty="0"/>
           </a:p>
@@ -1246,8 +1246,8 @@
               <a:rPr lang="en-US" dirty="0"/>
               <a:t>（約35秒）
 まとめです。本研究では、縄文土器の3Dスキャンデータから縄目文様を全自動で計測する手法を開発しており、テストデータでは精度を確認できています。
-研究は今後、精度検証の大量実行、パラメータ調整、多数の土器への適用という段階に進み、ここに効率化の余地が大きくあります。
-具体的には、独立した計算の並列実行と、遺伝的アルゴリズムによるパラメータの自動チューニングの適用が見込めます。適用にあたっては、1タスクあたりの処理時間を計測したうえで並列化の単位を決定するという、第12回の実験で得た知見に基づいて進めます。
+研究は今後、手法の信頼性を示すための精度検証実験を大量に実行する段階に進みます。数百条件の逐次実行には1日以上を要する見込みですが、各条件の検証は独立した計算であるため、講義で学んだ並列化を適用することで、実行時間の大幅な短縮が見込めます。
+適用にあたっては、検証1回あたりの処理時間を計測したうえで並列化の単位を決定するという、第12回の実験で得た知見に基づいて進めます。
 以上で発表を終わります。ご清聴ありがとうございました。</a:t>
             </a:r>
             <a:endParaRPr lang="en-US" dirty="0"/>
@@ -4636,7 +4636,7 @@
                 <a:ea typeface="Calibri" pitchFamily="34" charset="-122"/>
                 <a:cs typeface="Calibri" pitchFamily="34" charset="-120"/>
               </a:rPr>
-              <a:t>土器1点の計測であれば現状でも実用的だが、研究は今後「精度検証の大量実行」「多数の土器への適用」の段階に進む。</a:t>
+              <a:t>土器1点の計測であれば現状でも実用的だが、研究は今後、手法の信頼性を示すための「精度検証実験の大量実行」の段階に進む。</a:t>
             </a:r>
             <a:endParaRPr lang="en-US" sz="1500" dirty="0"/>
           </a:p>
@@ -4654,7 +4654,7 @@
                 <a:ea typeface="Calibri" pitchFamily="34" charset="-122"/>
                 <a:cs typeface="Calibri" pitchFamily="34" charset="-120"/>
               </a:rPr>
-              <a:t>したがって、講義で学んだ効率化の考え方が有効になるのはまさにこれからである。次の2枚でその候補を検討する。</a:t>
+              <a:t>この段階で、講義で学んだ並列化の考え方が有効になると考えられる。次の2枚で具体的に検討する。</a:t>
             </a:r>
             <a:endParaRPr lang="en-US" sz="1500" dirty="0"/>
           </a:p>
@@ -4725,7 +4725,7 @@
                 <a:ea typeface="Cambria" pitchFamily="34" charset="-122"/>
                 <a:cs typeface="Cambria" pitchFamily="34" charset="-120"/>
               </a:rPr>
-              <a:t>今後効率化が見込める処理（3つの候補）</a:t>
+              <a:t>今後効率化が見込める処理 — 精度検証実験の並列実行</a:t>
             </a:r>
             <a:endParaRPr lang="en-US" sz="3000" dirty="0"/>
           </a:p>
@@ -4739,11 +4739,213 @@
         </p:nvSpPr>
         <p:spPr>
           <a:xfrm>
-            <a:off x="548640" y="1691640"/>
-            <a:ext cx="685800" cy="685800"/>
-          </a:xfrm>
-          <a:prstGeom prst="ellipse">
-            <a:avLst/>
+            <a:off x="548640" y="1371600"/>
+            <a:ext cx="11064240" cy="1463040"/>
+          </a:xfrm>
+          <a:prstGeom prst="roundRect">
+            <a:avLst>
+              <a:gd name="adj" fmla="val 6250"/>
+            </a:avLst>
+          </a:prstGeom>
+          <a:solidFill>
+            <a:srgbClr val="E7E8D1"/>
+          </a:solidFill>
+          <a:ln/>
+        </p:spPr>
+      </p:sp>
+      <p:sp>
+        <p:nvSpPr>
+          <p:cNvPr id="4" name="Text 2"/>
+          <p:cNvSpPr/>
+          <p:nvPr/>
+        </p:nvSpPr>
+        <p:spPr>
+          <a:xfrm>
+            <a:off x="777240" y="1481328"/>
+            <a:ext cx="3108960" cy="1188720"/>
+          </a:xfrm>
+          <a:prstGeom prst="rect">
+            <a:avLst/>
+          </a:prstGeom>
+          <a:noFill/>
+          <a:ln/>
+        </p:spPr>
+        <p:txBody>
+          <a:bodyPr wrap="square" lIns="0" tIns="0" rIns="0" bIns="0" rtlCol="0" anchor="ctr"/>
+          <a:lstStyle/>
+          <a:p>
+            <a:pPr indent="0" marL="0">
+              <a:buNone/>
+            </a:pPr>
+            <a:r>
+              <a:rPr lang="en-US" sz="1500" b="1" dirty="0">
+                <a:solidFill>
+                  <a:srgbClr val="B85042"/>
+                </a:solidFill>
+                <a:latin typeface="Cambria" pitchFamily="34" charset="0"/>
+                <a:ea typeface="Cambria" pitchFamily="34" charset="-122"/>
+                <a:cs typeface="Cambria" pitchFamily="34" charset="-120"/>
+              </a:rPr>
+              <a:t>どのような実験か</a:t>
+            </a:r>
+            <a:endParaRPr lang="en-US" sz="1500" dirty="0"/>
+          </a:p>
+        </p:txBody>
+      </p:sp>
+      <p:sp>
+        <p:nvSpPr>
+          <p:cNvPr id="5" name="Text 3"/>
+          <p:cNvSpPr/>
+          <p:nvPr/>
+        </p:nvSpPr>
+        <p:spPr>
+          <a:xfrm>
+            <a:off x="4023360" y="1508760"/>
+            <a:ext cx="7315200" cy="1234440"/>
+          </a:xfrm>
+          <a:prstGeom prst="rect">
+            <a:avLst/>
+          </a:prstGeom>
+          <a:noFill/>
+          <a:ln/>
+        </p:spPr>
+        <p:txBody>
+          <a:bodyPr wrap="square" lIns="0" tIns="0" rIns="0" bIns="0" rtlCol="0" anchor="ctr"/>
+          <a:lstStyle/>
+          <a:p>
+            <a:pPr indent="0" marL="0">
+              <a:buNone/>
+            </a:pPr>
+            <a:r>
+              <a:rPr lang="en-US" sz="1300" dirty="0">
+                <a:solidFill>
+                  <a:srgbClr val="333333"/>
+                </a:solidFill>
+                <a:latin typeface="Calibri" pitchFamily="34" charset="0"/>
+                <a:ea typeface="Calibri" pitchFamily="34" charset="-122"/>
+                <a:cs typeface="Calibri" pitchFamily="34" charset="-120"/>
+              </a:rPr>
+              <a:t>ノイズや欠損の量を段階的に変えたテストデータを多数生成し、それぞれの条件で計測精度を検証する。手法の信頼性を示すうえで必須の実験であり、条件の組合せは数百通りに及ぶ見込み。</a:t>
+            </a:r>
+            <a:endParaRPr lang="en-US" sz="1300" dirty="0"/>
+          </a:p>
+        </p:txBody>
+      </p:sp>
+      <p:sp>
+        <p:nvSpPr>
+          <p:cNvPr id="6" name="Shape 4"/>
+          <p:cNvSpPr/>
+          <p:nvPr/>
+        </p:nvSpPr>
+        <p:spPr>
+          <a:xfrm>
+            <a:off x="548640" y="3017520"/>
+            <a:ext cx="11064240" cy="1463040"/>
+          </a:xfrm>
+          <a:prstGeom prst="roundRect">
+            <a:avLst>
+              <a:gd name="adj" fmla="val 6250"/>
+            </a:avLst>
+          </a:prstGeom>
+          <a:solidFill>
+            <a:srgbClr val="E7E8D1"/>
+          </a:solidFill>
+          <a:ln/>
+        </p:spPr>
+      </p:sp>
+      <p:sp>
+        <p:nvSpPr>
+          <p:cNvPr id="7" name="Text 5"/>
+          <p:cNvSpPr/>
+          <p:nvPr/>
+        </p:nvSpPr>
+        <p:spPr>
+          <a:xfrm>
+            <a:off x="777240" y="3127248"/>
+            <a:ext cx="3108960" cy="1188720"/>
+          </a:xfrm>
+          <a:prstGeom prst="rect">
+            <a:avLst/>
+          </a:prstGeom>
+          <a:noFill/>
+          <a:ln/>
+        </p:spPr>
+        <p:txBody>
+          <a:bodyPr wrap="square" lIns="0" tIns="0" rIns="0" bIns="0" rtlCol="0" anchor="ctr"/>
+          <a:lstStyle/>
+          <a:p>
+            <a:pPr indent="0" marL="0">
+              <a:buNone/>
+            </a:pPr>
+            <a:r>
+              <a:rPr lang="en-US" sz="1500" b="1" dirty="0">
+                <a:solidFill>
+                  <a:srgbClr val="B85042"/>
+                </a:solidFill>
+                <a:latin typeface="Cambria" pitchFamily="34" charset="0"/>
+                <a:ea typeface="Cambria" pitchFamily="34" charset="-122"/>
+                <a:cs typeface="Cambria" pitchFamily="34" charset="-120"/>
+              </a:rPr>
+              <a:t>なぜ並列化に向くか</a:t>
+            </a:r>
+            <a:endParaRPr lang="en-US" sz="1500" dirty="0"/>
+          </a:p>
+        </p:txBody>
+      </p:sp>
+      <p:sp>
+        <p:nvSpPr>
+          <p:cNvPr id="8" name="Text 6"/>
+          <p:cNvSpPr/>
+          <p:nvPr/>
+        </p:nvSpPr>
+        <p:spPr>
+          <a:xfrm>
+            <a:off x="4023360" y="3154680"/>
+            <a:ext cx="7315200" cy="1234440"/>
+          </a:xfrm>
+          <a:prstGeom prst="rect">
+            <a:avLst/>
+          </a:prstGeom>
+          <a:noFill/>
+          <a:ln/>
+        </p:spPr>
+        <p:txBody>
+          <a:bodyPr wrap="square" lIns="0" tIns="0" rIns="0" bIns="0" rtlCol="0" anchor="ctr"/>
+          <a:lstStyle/>
+          <a:p>
+            <a:pPr indent="0" marL="0">
+              <a:buNone/>
+            </a:pPr>
+            <a:r>
+              <a:rPr lang="en-US" sz="1300" dirty="0">
+                <a:solidFill>
+                  <a:srgbClr val="333333"/>
+                </a:solidFill>
+                <a:latin typeface="Calibri" pitchFamily="34" charset="0"/>
+                <a:ea typeface="Calibri" pitchFamily="34" charset="-122"/>
+                <a:cs typeface="Calibri" pitchFamily="34" charset="-120"/>
+              </a:rPr>
+              <a:t>各条件の検証は互いに独立した計算であり、他の条件の結果を待つ必要がない。第12回の遺伝的アルゴリズムにおける個体評価と同じ構造であり、複数のWorkerへ分配して同時に実行できる。</a:t>
+            </a:r>
+            <a:endParaRPr lang="en-US" sz="1300" dirty="0"/>
+          </a:p>
+        </p:txBody>
+      </p:sp>
+      <p:sp>
+        <p:nvSpPr>
+          <p:cNvPr id="9" name="Shape 7"/>
+          <p:cNvSpPr/>
+          <p:nvPr/>
+        </p:nvSpPr>
+        <p:spPr>
+          <a:xfrm>
+            <a:off x="548640" y="4663440"/>
+            <a:ext cx="11064240" cy="1463040"/>
+          </a:xfrm>
+          <a:prstGeom prst="roundRect">
+            <a:avLst>
+              <a:gd name="adj" fmla="val 6250"/>
+            </a:avLst>
           </a:prstGeom>
           <a:solidFill>
             <a:srgbClr val="B85042"/>
@@ -4753,30 +4955,30 @@
       </p:sp>
       <p:sp>
         <p:nvSpPr>
-          <p:cNvPr id="4" name="Text 2"/>
-          <p:cNvSpPr/>
-          <p:nvPr/>
-        </p:nvSpPr>
-        <p:spPr>
-          <a:xfrm>
-            <a:off x="548640" y="1691640"/>
-            <a:ext cx="685800" cy="685800"/>
-          </a:xfrm>
-          <a:prstGeom prst="rect">
-            <a:avLst/>
-          </a:prstGeom>
-          <a:noFill/>
-          <a:ln/>
-        </p:spPr>
-        <p:txBody>
-          <a:bodyPr wrap="square" lIns="0" tIns="0" rIns="0" bIns="0" rtlCol="0" anchor="ctr"/>
-          <a:lstStyle/>
-          <a:p>
-            <a:pPr algn="ctr" indent="0" marL="0">
-              <a:buNone/>
-            </a:pPr>
-            <a:r>
-              <a:rPr lang="en-US" sz="2400" b="1" dirty="0">
+          <p:cNvPr id="10" name="Text 8"/>
+          <p:cNvSpPr/>
+          <p:nvPr/>
+        </p:nvSpPr>
+        <p:spPr>
+          <a:xfrm>
+            <a:off x="777240" y="4773168"/>
+            <a:ext cx="3108960" cy="1188720"/>
+          </a:xfrm>
+          <a:prstGeom prst="rect">
+            <a:avLst/>
+          </a:prstGeom>
+          <a:noFill/>
+          <a:ln/>
+        </p:spPr>
+        <p:txBody>
+          <a:bodyPr wrap="square" lIns="0" tIns="0" rIns="0" bIns="0" rtlCol="0" anchor="ctr"/>
+          <a:lstStyle/>
+          <a:p>
+            <a:pPr indent="0" marL="0">
+              <a:buNone/>
+            </a:pPr>
+            <a:r>
+              <a:rPr lang="en-US" sz="1500" b="1" dirty="0">
                 <a:solidFill>
                   <a:srgbClr val="FFFFFF"/>
                 </a:solidFill>
@@ -4784,22 +4986,22 @@
                 <a:ea typeface="Cambria" pitchFamily="34" charset="-122"/>
                 <a:cs typeface="Cambria" pitchFamily="34" charset="-120"/>
               </a:rPr>
-              <a:t>1</a:t>
-            </a:r>
-            <a:endParaRPr lang="en-US" sz="2400" dirty="0"/>
-          </a:p>
-        </p:txBody>
-      </p:sp>
-      <p:sp>
-        <p:nvSpPr>
-          <p:cNvPr id="5" name="Text 3"/>
-          <p:cNvSpPr/>
-          <p:nvPr/>
-        </p:nvSpPr>
-        <p:spPr>
-          <a:xfrm>
-            <a:off x="1508760" y="1417320"/>
-            <a:ext cx="10058400" cy="411480"/>
+              <a:t>期待される効果</a:t>
+            </a:r>
+            <a:endParaRPr lang="en-US" sz="1500" dirty="0"/>
+          </a:p>
+        </p:txBody>
+      </p:sp>
+      <p:sp>
+        <p:nvSpPr>
+          <p:cNvPr id="11" name="Text 9"/>
+          <p:cNvSpPr/>
+          <p:nvPr/>
+        </p:nvSpPr>
+        <p:spPr>
+          <a:xfrm>
+            <a:off x="4023360" y="4800600"/>
+            <a:ext cx="7315200" cy="1234440"/>
           </a:xfrm>
           <a:prstGeom prst="rect">
             <a:avLst/>
@@ -4815,330 +5017,17 @@
               <a:buNone/>
             </a:pPr>
             <a:r>
-              <a:rPr lang="en-US" sz="1700" b="1" dirty="0">
-                <a:solidFill>
-                  <a:srgbClr val="333333"/>
-                </a:solidFill>
-                <a:latin typeface="Cambria" pitchFamily="34" charset="0"/>
-                <a:ea typeface="Cambria" pitchFamily="34" charset="-122"/>
-                <a:cs typeface="Cambria" pitchFamily="34" charset="-120"/>
-              </a:rPr>
-              <a:t>精度検証実験の並列実行</a:t>
-            </a:r>
-            <a:endParaRPr lang="en-US" sz="1700" dirty="0"/>
-          </a:p>
-        </p:txBody>
-      </p:sp>
-      <p:sp>
-        <p:nvSpPr>
-          <p:cNvPr id="6" name="Text 4"/>
-          <p:cNvSpPr/>
-          <p:nvPr/>
-        </p:nvSpPr>
-        <p:spPr>
-          <a:xfrm>
-            <a:off x="1508760" y="1874520"/>
-            <a:ext cx="10058400" cy="1005840"/>
-          </a:xfrm>
-          <a:prstGeom prst="rect">
-            <a:avLst/>
-          </a:prstGeom>
-          <a:noFill/>
-          <a:ln/>
-        </p:spPr>
-        <p:txBody>
-          <a:bodyPr wrap="square" lIns="0" tIns="0" rIns="0" bIns="0" rtlCol="0" anchor="ctr"/>
-          <a:lstStyle/>
-          <a:p>
-            <a:pPr indent="0" marL="0">
-              <a:buNone/>
-            </a:pPr>
-            <a:r>
-              <a:rPr lang="en-US" sz="1350" dirty="0">
-                <a:solidFill>
-                  <a:srgbClr val="333333"/>
+              <a:rPr lang="en-US" sz="1300" dirty="0">
+                <a:solidFill>
+                  <a:srgbClr val="FFFFFF"/>
                 </a:solidFill>
                 <a:latin typeface="Calibri" pitchFamily="34" charset="0"/>
                 <a:ea typeface="Calibri" pitchFamily="34" charset="-122"/>
                 <a:cs typeface="Calibri" pitchFamily="34" charset="-120"/>
               </a:rPr>
-              <a:t>ノイズや欠損の量を変えたテストデータで、数百回規模の精度検証を行う予定。各条件は互いに独立した計算であるため、第11・12回で学んだ並列化を直接適用できると考えられる。</a:t>
-            </a:r>
-            <a:endParaRPr lang="en-US" sz="1350" dirty="0"/>
-          </a:p>
-        </p:txBody>
-      </p:sp>
-      <p:sp>
-        <p:nvSpPr>
-          <p:cNvPr id="7" name="Shape 5"/>
-          <p:cNvSpPr/>
-          <p:nvPr/>
-        </p:nvSpPr>
-        <p:spPr>
-          <a:xfrm>
-            <a:off x="548640" y="3337560"/>
-            <a:ext cx="685800" cy="685800"/>
-          </a:xfrm>
-          <a:prstGeom prst="ellipse">
-            <a:avLst/>
-          </a:prstGeom>
-          <a:solidFill>
-            <a:srgbClr val="B85042"/>
-          </a:solidFill>
-          <a:ln/>
-        </p:spPr>
-      </p:sp>
-      <p:sp>
-        <p:nvSpPr>
-          <p:cNvPr id="8" name="Text 6"/>
-          <p:cNvSpPr/>
-          <p:nvPr/>
-        </p:nvSpPr>
-        <p:spPr>
-          <a:xfrm>
-            <a:off x="548640" y="3337560"/>
-            <a:ext cx="685800" cy="685800"/>
-          </a:xfrm>
-          <a:prstGeom prst="rect">
-            <a:avLst/>
-          </a:prstGeom>
-          <a:noFill/>
-          <a:ln/>
-        </p:spPr>
-        <p:txBody>
-          <a:bodyPr wrap="square" lIns="0" tIns="0" rIns="0" bIns="0" rtlCol="0" anchor="ctr"/>
-          <a:lstStyle/>
-          <a:p>
-            <a:pPr algn="ctr" indent="0" marL="0">
-              <a:buNone/>
-            </a:pPr>
-            <a:r>
-              <a:rPr lang="en-US" sz="2400" b="1" dirty="0">
-                <a:solidFill>
-                  <a:srgbClr val="FFFFFF"/>
-                </a:solidFill>
-                <a:latin typeface="Cambria" pitchFamily="34" charset="0"/>
-                <a:ea typeface="Cambria" pitchFamily="34" charset="-122"/>
-                <a:cs typeface="Cambria" pitchFamily="34" charset="-120"/>
-              </a:rPr>
-              <a:t>2</a:t>
-            </a:r>
-            <a:endParaRPr lang="en-US" sz="2400" dirty="0"/>
-          </a:p>
-        </p:txBody>
-      </p:sp>
-      <p:sp>
-        <p:nvSpPr>
-          <p:cNvPr id="9" name="Text 7"/>
-          <p:cNvSpPr/>
-          <p:nvPr/>
-        </p:nvSpPr>
-        <p:spPr>
-          <a:xfrm>
-            <a:off x="1508760" y="3063240"/>
-            <a:ext cx="10058400" cy="411480"/>
-          </a:xfrm>
-          <a:prstGeom prst="rect">
-            <a:avLst/>
-          </a:prstGeom>
-          <a:noFill/>
-          <a:ln/>
-        </p:spPr>
-        <p:txBody>
-          <a:bodyPr wrap="square" lIns="0" tIns="0" rIns="0" bIns="0" rtlCol="0" anchor="ctr"/>
-          <a:lstStyle/>
-          <a:p>
-            <a:pPr indent="0" marL="0">
-              <a:buNone/>
-            </a:pPr>
-            <a:r>
-              <a:rPr lang="en-US" sz="1700" b="1" dirty="0">
-                <a:solidFill>
-                  <a:srgbClr val="333333"/>
-                </a:solidFill>
-                <a:latin typeface="Cambria" pitchFamily="34" charset="0"/>
-                <a:ea typeface="Cambria" pitchFamily="34" charset="-122"/>
-                <a:cs typeface="Cambria" pitchFamily="34" charset="-120"/>
-              </a:rPr>
-              <a:t>パラメータの自動チューニング</a:t>
-            </a:r>
-            <a:endParaRPr lang="en-US" sz="1700" dirty="0"/>
-          </a:p>
-        </p:txBody>
-      </p:sp>
-      <p:sp>
-        <p:nvSpPr>
-          <p:cNvPr id="10" name="Text 8"/>
-          <p:cNvSpPr/>
-          <p:nvPr/>
-        </p:nvSpPr>
-        <p:spPr>
-          <a:xfrm>
-            <a:off x="1508760" y="3520440"/>
-            <a:ext cx="10058400" cy="1005840"/>
-          </a:xfrm>
-          <a:prstGeom prst="rect">
-            <a:avLst/>
-          </a:prstGeom>
-          <a:noFill/>
-          <a:ln/>
-        </p:spPr>
-        <p:txBody>
-          <a:bodyPr wrap="square" lIns="0" tIns="0" rIns="0" bIns="0" rtlCol="0" anchor="ctr"/>
-          <a:lstStyle/>
-          <a:p>
-            <a:pPr indent="0" marL="0">
-              <a:buNone/>
-            </a:pPr>
-            <a:r>
-              <a:rPr lang="en-US" sz="1350" dirty="0">
-                <a:solidFill>
-                  <a:srgbClr val="333333"/>
-                </a:solidFill>
-                <a:latin typeface="Calibri" pitchFamily="34" charset="0"/>
-                <a:ea typeface="Calibri" pitchFamily="34" charset="-122"/>
-                <a:cs typeface="Calibri" pitchFamily="34" charset="-120"/>
-              </a:rPr>
-              <a:t>現在手動で設定しているパラメータ（画像の解像度・探索範囲など）を、第12回で学んだ遺伝的アルゴリズムなどの最適化手法で自動探索させることで、試行錯誤に要する時間を削減できると考えられる。</a:t>
-            </a:r>
-            <a:endParaRPr lang="en-US" sz="1350" dirty="0"/>
-          </a:p>
-        </p:txBody>
-      </p:sp>
-      <p:sp>
-        <p:nvSpPr>
-          <p:cNvPr id="11" name="Shape 9"/>
-          <p:cNvSpPr/>
-          <p:nvPr/>
-        </p:nvSpPr>
-        <p:spPr>
-          <a:xfrm>
-            <a:off x="548640" y="4983480"/>
-            <a:ext cx="685800" cy="685800"/>
-          </a:xfrm>
-          <a:prstGeom prst="ellipse">
-            <a:avLst/>
-          </a:prstGeom>
-          <a:solidFill>
-            <a:srgbClr val="B85042"/>
-          </a:solidFill>
-          <a:ln/>
-        </p:spPr>
-      </p:sp>
-      <p:sp>
-        <p:nvSpPr>
-          <p:cNvPr id="12" name="Text 10"/>
-          <p:cNvSpPr/>
-          <p:nvPr/>
-        </p:nvSpPr>
-        <p:spPr>
-          <a:xfrm>
-            <a:off x="548640" y="4983480"/>
-            <a:ext cx="685800" cy="685800"/>
-          </a:xfrm>
-          <a:prstGeom prst="rect">
-            <a:avLst/>
-          </a:prstGeom>
-          <a:noFill/>
-          <a:ln/>
-        </p:spPr>
-        <p:txBody>
-          <a:bodyPr wrap="square" lIns="0" tIns="0" rIns="0" bIns="0" rtlCol="0" anchor="ctr"/>
-          <a:lstStyle/>
-          <a:p>
-            <a:pPr algn="ctr" indent="0" marL="0">
-              <a:buNone/>
-            </a:pPr>
-            <a:r>
-              <a:rPr lang="en-US" sz="2400" b="1" dirty="0">
-                <a:solidFill>
-                  <a:srgbClr val="FFFFFF"/>
-                </a:solidFill>
-                <a:latin typeface="Cambria" pitchFamily="34" charset="0"/>
-                <a:ea typeface="Cambria" pitchFamily="34" charset="-122"/>
-                <a:cs typeface="Cambria" pitchFamily="34" charset="-120"/>
-              </a:rPr>
-              <a:t>3</a:t>
-            </a:r>
-            <a:endParaRPr lang="en-US" sz="2400" dirty="0"/>
-          </a:p>
-        </p:txBody>
-      </p:sp>
-      <p:sp>
-        <p:nvSpPr>
-          <p:cNvPr id="13" name="Text 11"/>
-          <p:cNvSpPr/>
-          <p:nvPr/>
-        </p:nvSpPr>
-        <p:spPr>
-          <a:xfrm>
-            <a:off x="1508760" y="4709160"/>
-            <a:ext cx="10058400" cy="411480"/>
-          </a:xfrm>
-          <a:prstGeom prst="rect">
-            <a:avLst/>
-          </a:prstGeom>
-          <a:noFill/>
-          <a:ln/>
-        </p:spPr>
-        <p:txBody>
-          <a:bodyPr wrap="square" lIns="0" tIns="0" rIns="0" bIns="0" rtlCol="0" anchor="ctr"/>
-          <a:lstStyle/>
-          <a:p>
-            <a:pPr indent="0" marL="0">
-              <a:buNone/>
-            </a:pPr>
-            <a:r>
-              <a:rPr lang="en-US" sz="1700" b="1" dirty="0">
-                <a:solidFill>
-                  <a:srgbClr val="333333"/>
-                </a:solidFill>
-                <a:latin typeface="Cambria" pitchFamily="34" charset="0"/>
-                <a:ea typeface="Cambria" pitchFamily="34" charset="-122"/>
-                <a:cs typeface="Cambria" pitchFamily="34" charset="-120"/>
-              </a:rPr>
-              <a:t>多数の土器への一括適用</a:t>
-            </a:r>
-            <a:endParaRPr lang="en-US" sz="1700" dirty="0"/>
-          </a:p>
-        </p:txBody>
-      </p:sp>
-      <p:sp>
-        <p:nvSpPr>
-          <p:cNvPr id="14" name="Text 12"/>
-          <p:cNvSpPr/>
-          <p:nvPr/>
-        </p:nvSpPr>
-        <p:spPr>
-          <a:xfrm>
-            <a:off x="1508760" y="5166360"/>
-            <a:ext cx="10058400" cy="1005840"/>
-          </a:xfrm>
-          <a:prstGeom prst="rect">
-            <a:avLst/>
-          </a:prstGeom>
-          <a:noFill/>
-          <a:ln/>
-        </p:spPr>
-        <p:txBody>
-          <a:bodyPr wrap="square" lIns="0" tIns="0" rIns="0" bIns="0" rtlCol="0" anchor="ctr"/>
-          <a:lstStyle/>
-          <a:p>
-            <a:pPr indent="0" marL="0">
-              <a:buNone/>
-            </a:pPr>
-            <a:r>
-              <a:rPr lang="en-US" sz="1350" dirty="0">
-                <a:solidFill>
-                  <a:srgbClr val="333333"/>
-                </a:solidFill>
-                <a:latin typeface="Calibri" pitchFamily="34" charset="0"/>
-                <a:ea typeface="Calibri" pitchFamily="34" charset="-122"/>
-                <a:cs typeface="Calibri" pitchFamily="34" charset="-120"/>
-              </a:rPr>
-              <a:t>土器ごとの計測処理は独立であるため、数十点規模の適用段階では並列実行が可能。計測値の比較・分析には、講義前半で学んだ統計的手法の適用が見込める。</a:t>
-            </a:r>
-            <a:endParaRPr lang="en-US" sz="1350" dirty="0"/>
+              <a:t>検証1回に数分を要するため、数百条件を逐次実行すると1日以上かかる見込み。並列実行により、実行時間をWorker数に応じて大幅に短縮し、条件を追加した再実験も繰り返しやすくなる。</a:t>
+            </a:r>
+            <a:endParaRPr lang="en-US" sz="1300" dirty="0"/>
           </a:p>
         </p:txBody>
       </p:sp>
@@ -5407,7 +5296,7 @@
                 <a:ea typeface="Calibri" pitchFamily="34" charset="-122"/>
                 <a:cs typeface="Calibri" pitchFamily="34" charset="-120"/>
               </a:rPr>
-              <a:t>土器1点の計測や精度検証1回は、数分を要する重い処理である。オーバーヘッドに対して計算本体が十分に重いため、並列化の効果が得られやすい条件だと見込まれる。</a:t>
+              <a:t>精度検証1回は数分を要する重い処理である。オーバーヘッドに対して計算本体が十分に重いため、並列化の効果が得られやすい条件だと見込まれる。</a:t>
             </a:r>
             <a:endParaRPr lang="en-US" sz="1300" dirty="0"/>
           </a:p>
@@ -5507,7 +5396,7 @@
                 <a:ea typeface="Calibri" pitchFamily="34" charset="-122"/>
                 <a:cs typeface="Calibri" pitchFamily="34" charset="-120"/>
               </a:rPr>
-              <a:t>並列化の効果を仮定で判断せず、まず1タスクあたりの処理時間を計測したうえで、並列化する単位を決定する。これが第12回の実験から得た最も重要な知見である。</a:t>
+              <a:t>並列化の効果を仮定で判断せず、まず検証1回あたりの処理時間を計測したうえで、並列化する単位とWorker数を決定する。これが第12回の実験から得た最も重要な知見である。</a:t>
             </a:r>
             <a:endParaRPr lang="en-US" sz="1300" dirty="0"/>
           </a:p>
@@ -5642,7 +5531,7 @@
                 <a:ea typeface="Calibri" pitchFamily="34" charset="-122"/>
                 <a:cs typeface="Calibri" pitchFamily="34" charset="-120"/>
               </a:rPr>
-              <a:t>研究は今後「精度検証の大量実行」「パラメータ調整」「多数の土器への適用」の段階に進み、ここに効率化の余地が大きい。</a:t>
+              <a:t>研究は今後、手法の信頼性を示すための「精度検証実験の大量実行」の段階に進み、数百条件の逐次実行には1日以上を要する見込みである。</a:t>
             </a:r>
             <a:endParaRPr lang="en-US" sz="1700" dirty="0"/>
           </a:p>
@@ -5663,7 +5552,7 @@
                 <a:ea typeface="Calibri" pitchFamily="34" charset="-122"/>
                 <a:cs typeface="Calibri" pitchFamily="34" charset="-120"/>
               </a:rPr>
-              <a:t>具体的には、独立した計算の並列実行（第11・12回）と、遺伝的アルゴリズムによるパラメータの自動チューニング（第12回）の適用が見込める。</a:t>
+              <a:t>各条件の検証は独立した計算であるため、第11・12回で学んだ並列化を適用し、実行時間の大幅な短縮が見込める。</a:t>
             </a:r>
             <a:endParaRPr lang="en-US" sz="1700" dirty="0"/>
           </a:p>
@@ -5681,7 +5570,7 @@
                 <a:ea typeface="Calibri" pitchFamily="34" charset="-122"/>
                 <a:cs typeface="Calibri" pitchFamily="34" charset="-120"/>
               </a:rPr>
-              <a:t>適用にあたっては、1タスクあたりの処理時間を計測したうえで並列化の単位を決定するという、第12回の実験で得た知見に基づいて進める。</a:t>
+              <a:t>適用にあたっては、検証1回あたりの処理時間を計測したうえで並列化の単位を決定するという、第12回の実験で得た知見に基づいて進める。</a:t>
             </a:r>
             <a:endParaRPr lang="en-US" sz="1700" dirty="0"/>
           </a:p>

--- a/13/第13回発表_修士研究と大規模計算.pptx
+++ b/13/第13回発表_修士研究と大規模計算.pptx
@@ -12,11 +12,9 @@
     <p:sldId id="260" r:id="rId6"/>
     <p:sldId id="261" r:id="rId7"/>
     <p:sldId id="262" r:id="rId8"/>
-    <p:sldId id="263" r:id="rId9"/>
-    <p:sldId id="264" r:id="rId10"/>
   </p:sldIdLst>
   <p:notesMasterIdLst>
-    <p:notesMasterId r:id="rId11"/>
+    <p:notesMasterId r:id="rId9"/>
   </p:notesMasterIdLst>
   <p:sldSz cx="12192000" cy="6858000"/>
   <p:notesSz cx="6858000" cy="12192000"/>
@@ -969,10 +967,11 @@
           <a:p>
             <a:r>
               <a:rPr lang="en-US" dirty="0"/>
-              <a:t>（約40秒）
-まず、効率化の余地についてです。土器片1つのメッシュは約700万頂点に及ぶ大規模なデータですが、現在のプログラムは、これを1台の計算機で逐次的に処理しています。
-土器1点を計測するだけであれば、現状でも実用的な時間で動作します。しかし研究は今後、手法の信頼性を示すために、精度検証実験を大量に実行する段階に進みます。
-この段階でこそ、講義で学んだ並列化の考え方が有効になると考えています。次の2枚で具体的に検討します。</a:t>
+              <a:t>（約60秒）
+後半として、講義内容を応用した今後の効率化について、簡潔に述べます。
+研究は今後、手法の信頼性を示すために、ノイズや欠損の量を変えた数百条件で計測精度を検証する段階に進みます。検証1回に数分を要するため、逐次実行では1日以上かかる見込みです。
+ここに並列化を適用します。各条件の検証は互いに独立した計算で、これは第12回の遺伝的アルゴリズムにおける個体評価と同じ構造です。複数のWorkerへ分配して同時に実行することで、実行時間の大幅な短縮が見込めます。
+ただし第12回の実験では、計算が軽い場合はオーバーヘッドが上回り、並列化でかえって遅くなることも確認しました。この知見を踏まえ、まず検証1回あたりの処理時間を計測したうえで、並列化の単位とWorker数を決定する方針です。</a:t>
             </a:r>
             <a:endParaRPr lang="en-US" dirty="0"/>
           </a:p>
@@ -1060,11 +1059,10 @@
           <a:p>
             <a:r>
               <a:rPr lang="en-US" dirty="0"/>
-              <a:t>（約65秒）
-今後効率化が見込める処理として、精度検証実験の並列実行に注目しています。
-まず、どのような実験かです。手法の信頼性を示すためには、ノイズや欠損の量を段階的に変えたテストデータを多数生成し、それぞれの条件で計測精度を検証する必要があります。条件の組合せは数百通りに及ぶ見込みです。
-次に、なぜ並列化に向くかです。各条件の検証は互いに独立した計算で、他の条件の結果を待つ必要がありません。これは第12回の遺伝的アルゴリズムにおける個体評価と同じ構造であり、複数のWorkerへ分配して同時に実行できます。
-期待される効果です。検証1回に数分を要するため、数百条件を逐次実行すると1日以上かかる見込みです。並列実行によって実行時間を大幅に短縮できれば、条件を追加した再実験も繰り返しやすくなり、研究のサイクル全体が速くなると考えています。</a:t>
+              <a:t>（約30秒）
+まとめです。本研究では、縄文土器の3Dスキャンデータから縄目文様を全自動で計測する手法を開発しており、テストデータでは精度を確認できています。
+今後の課題は、実データでの定量評価と、数百条件におよぶ精度検証実験の実施です。この実験には講義で学んだ並列化を適用し、処理時間を計測したうえで並列化の単位を決めるという第12回の知見に基づいて進めます。
+以上で発表を終わります。ご清聴ありがとうございました。</a:t>
             </a:r>
             <a:endParaRPr lang="en-US" dirty="0"/>
           </a:p>
@@ -1088,190 +1086,6 @@
             <a:fld id="{F7021451-1387-4CA6-816F-3879F97B5CBC}" type="slidenum">
               <a:rPr lang="en-US"/>
               <a:t>7</a:t>
-            </a:fld>
-            <a:endParaRPr lang="en-US"/>
-          </a:p>
-        </p:txBody>
-      </p:sp>
-    </p:spTree>
-    <p:extLst>
-      <p:ext uri="{BB962C8B-B14F-4D97-AF65-F5344CB8AC3E}">
-        <p14:creationId xmlns:p14="http://schemas.microsoft.com/office/powerpoint/2010/main" val="1024086991"/>
-      </p:ext>
-    </p:extLst>
-  </p:cSld>
-  <p:clrMapOvr>
-    <a:masterClrMapping/>
-  </p:clrMapOvr>
-</p:notes>
-</file>
-
-<file path=ppt/notesSlides/notesSlide8.xml><?xml version="1.0" encoding="utf-8"?>
-<p:notes xmlns:a="http://schemas.openxmlformats.org/drawingml/2006/main" xmlns:r="http://schemas.openxmlformats.org/officeDocument/2006/relationships" xmlns:p="http://schemas.openxmlformats.org/presentationml/2006/main">
-  <p:cSld>
-    <p:spTree>
-      <p:nvGrpSpPr>
-        <p:cNvPr id="1" name=""/>
-        <p:cNvGrpSpPr/>
-        <p:nvPr/>
-      </p:nvGrpSpPr>
-      <p:grpSpPr>
-        <a:xfrm>
-          <a:off x="0" y="0"/>
-          <a:ext cx="0" cy="0"/>
-          <a:chOff x="0" y="0"/>
-          <a:chExt cx="0" cy="0"/>
-        </a:xfrm>
-      </p:grpSpPr>
-      <p:sp>
-        <p:nvSpPr>
-          <p:cNvPr id="2" name="Slide Image Placeholder 1"/>
-          <p:cNvSpPr>
-            <a:spLocks noGrp="1" noRot="1" noChangeAspect="1"/>
-          </p:cNvSpPr>
-          <p:nvPr>
-            <p:ph type="sldImg"/>
-          </p:nvPr>
-        </p:nvSpPr>
-        <p:spPr/>
-      </p:sp>
-      <p:sp>
-        <p:nvSpPr>
-          <p:cNvPr id="3" name="Notes Placeholder 2"/>
-          <p:cNvSpPr>
-            <a:spLocks noGrp="1"/>
-          </p:cNvSpPr>
-          <p:nvPr>
-            <p:ph type="body" idx="1"/>
-          </p:nvPr>
-        </p:nvSpPr>
-        <p:spPr/>
-        <p:txBody>
-          <a:bodyPr/>
-          <a:lstStyle/>
-          <a:p>
-            <a:r>
-              <a:rPr lang="en-US" dirty="0"/>
-              <a:t>（約60秒）
-ただし、並列化すれば必ず速くなるわけではない、というのが第12回の実験で得られた知見です。
-第12回の遺伝的アルゴリズムの実験では、1つあたりの計算が軽かったため、Workerの準備やデータの受け渡しといったオーバーヘッドが計算時間を上回り、並列化によってかえって処理時間が増加しました。
-これを本研究の精度検証実験に当てはめると、検証1回は数分を要する重い処理です。オーバーヘッドに対して計算本体が十分に重いため、並列化の効果が得られやすい条件だと見込んでいます。
-とはいえ、効果を仮定だけで判断することはせず、まず検証1回あたりの処理時間を計測したうえで、並列化する単位とWorker数を決定する方針です。これが第12回の実験から得た、最も重要な知見だと考えています。</a:t>
-            </a:r>
-            <a:endParaRPr lang="en-US" dirty="0"/>
-          </a:p>
-        </p:txBody>
-      </p:sp>
-      <p:sp>
-        <p:nvSpPr>
-          <p:cNvPr id="4" name="Slide Number Placeholder 3"/>
-          <p:cNvSpPr>
-            <a:spLocks noGrp="1"/>
-          </p:cNvSpPr>
-          <p:nvPr>
-            <p:ph type="sldNum" sz="quarter" idx="10"/>
-          </p:nvPr>
-        </p:nvSpPr>
-        <p:spPr/>
-        <p:txBody>
-          <a:bodyPr/>
-          <a:lstStyle/>
-          <a:p>
-            <a:fld id="{F7021451-1387-4CA6-816F-3879F97B5CBC}" type="slidenum">
-              <a:rPr lang="en-US"/>
-              <a:t>8</a:t>
-            </a:fld>
-            <a:endParaRPr lang="en-US"/>
-          </a:p>
-        </p:txBody>
-      </p:sp>
-    </p:spTree>
-    <p:extLst>
-      <p:ext uri="{BB962C8B-B14F-4D97-AF65-F5344CB8AC3E}">
-        <p14:creationId xmlns:p14="http://schemas.microsoft.com/office/powerpoint/2010/main" val="1024086991"/>
-      </p:ext>
-    </p:extLst>
-  </p:cSld>
-  <p:clrMapOvr>
-    <a:masterClrMapping/>
-  </p:clrMapOvr>
-</p:notes>
-</file>
-
-<file path=ppt/notesSlides/notesSlide9.xml><?xml version="1.0" encoding="utf-8"?>
-<p:notes xmlns:a="http://schemas.openxmlformats.org/drawingml/2006/main" xmlns:r="http://schemas.openxmlformats.org/officeDocument/2006/relationships" xmlns:p="http://schemas.openxmlformats.org/presentationml/2006/main">
-  <p:cSld>
-    <p:spTree>
-      <p:nvGrpSpPr>
-        <p:cNvPr id="1" name=""/>
-        <p:cNvGrpSpPr/>
-        <p:nvPr/>
-      </p:nvGrpSpPr>
-      <p:grpSpPr>
-        <a:xfrm>
-          <a:off x="0" y="0"/>
-          <a:ext cx="0" cy="0"/>
-          <a:chOff x="0" y="0"/>
-          <a:chExt cx="0" cy="0"/>
-        </a:xfrm>
-      </p:grpSpPr>
-      <p:sp>
-        <p:nvSpPr>
-          <p:cNvPr id="2" name="Slide Image Placeholder 1"/>
-          <p:cNvSpPr>
-            <a:spLocks noGrp="1" noRot="1" noChangeAspect="1"/>
-          </p:cNvSpPr>
-          <p:nvPr>
-            <p:ph type="sldImg"/>
-          </p:nvPr>
-        </p:nvSpPr>
-        <p:spPr/>
-      </p:sp>
-      <p:sp>
-        <p:nvSpPr>
-          <p:cNvPr id="3" name="Notes Placeholder 2"/>
-          <p:cNvSpPr>
-            <a:spLocks noGrp="1"/>
-          </p:cNvSpPr>
-          <p:nvPr>
-            <p:ph type="body" idx="1"/>
-          </p:nvPr>
-        </p:nvSpPr>
-        <p:spPr/>
-        <p:txBody>
-          <a:bodyPr/>
-          <a:lstStyle/>
-          <a:p>
-            <a:r>
-              <a:rPr lang="en-US" dirty="0"/>
-              <a:t>（約35秒）
-まとめです。本研究では、縄文土器の3Dスキャンデータから縄目文様を全自動で計測する手法を開発しており、テストデータでは精度を確認できています。
-研究は今後、手法の信頼性を示すための精度検証実験を大量に実行する段階に進みます。数百条件の逐次実行には1日以上を要する見込みですが、各条件の検証は独立した計算であるため、講義で学んだ並列化を適用することで、実行時間の大幅な短縮が見込めます。
-適用にあたっては、検証1回あたりの処理時間を計測したうえで並列化の単位を決定するという、第12回の実験で得た知見に基づいて進めます。
-以上で発表を終わります。ご清聴ありがとうございました。</a:t>
-            </a:r>
-            <a:endParaRPr lang="en-US" dirty="0"/>
-          </a:p>
-        </p:txBody>
-      </p:sp>
-      <p:sp>
-        <p:nvSpPr>
-          <p:cNvPr id="4" name="Slide Number Placeholder 3"/>
-          <p:cNvSpPr>
-            <a:spLocks noGrp="1"/>
-          </p:cNvSpPr>
-          <p:nvPr>
-            <p:ph type="sldNum" sz="quarter" idx="10"/>
-          </p:nvPr>
-        </p:nvSpPr>
-        <p:spPr/>
-        <p:txBody>
-          <a:bodyPr/>
-          <a:lstStyle/>
-          <a:p>
-            <a:fld id="{F7021451-1387-4CA6-816F-3879F97B5CBC}" type="slidenum">
-              <a:rPr lang="en-US"/>
-              <a:t>9</a:t>
             </a:fld>
             <a:endParaRPr lang="en-US"/>
           </a:p>
@@ -4272,7 +4086,7 @@
                 <a:ea typeface="Cambria" pitchFamily="34" charset="-122"/>
                 <a:cs typeface="Cambria" pitchFamily="34" charset="-120"/>
               </a:rPr>
-              <a:t>効率化の余地 — 大規模なデータと逐次処理</a:t>
+              <a:t>今後の効率化 — 精度検証実験の並列実行</a:t>
             </a:r>
             <a:endParaRPr lang="en-US" sz="3000" dirty="0"/>
           </a:p>
@@ -4286,12 +4100,12 @@
         </p:nvSpPr>
         <p:spPr>
           <a:xfrm>
-            <a:off x="548640" y="1463040"/>
-            <a:ext cx="3566160" cy="2011680"/>
+            <a:off x="548640" y="1371600"/>
+            <a:ext cx="11064240" cy="1463040"/>
           </a:xfrm>
           <a:prstGeom prst="roundRect">
             <a:avLst>
-              <a:gd name="adj" fmla="val 4545"/>
+              <a:gd name="adj" fmla="val 6250"/>
             </a:avLst>
           </a:prstGeom>
           <a:solidFill>
@@ -4308,24 +4122,24 @@
         </p:nvSpPr>
         <p:spPr>
           <a:xfrm>
-            <a:off x="548640" y="1691640"/>
-            <a:ext cx="3566160" cy="1005840"/>
-          </a:xfrm>
-          <a:prstGeom prst="rect">
-            <a:avLst/>
-          </a:prstGeom>
-          <a:noFill/>
-          <a:ln/>
-        </p:spPr>
-        <p:txBody>
-          <a:bodyPr wrap="square" lIns="0" tIns="0" rIns="0" bIns="0" rtlCol="0" anchor="ctr"/>
-          <a:lstStyle/>
-          <a:p>
-            <a:pPr algn="ctr" indent="0" marL="0">
-              <a:buNone/>
-            </a:pPr>
-            <a:r>
-              <a:rPr lang="en-US" sz="5400" b="1" dirty="0">
+            <a:off x="777240" y="1481328"/>
+            <a:ext cx="3108960" cy="1188720"/>
+          </a:xfrm>
+          <a:prstGeom prst="rect">
+            <a:avLst/>
+          </a:prstGeom>
+          <a:noFill/>
+          <a:ln/>
+        </p:spPr>
+        <p:txBody>
+          <a:bodyPr wrap="square" lIns="0" tIns="0" rIns="0" bIns="0" rtlCol="0" anchor="ctr"/>
+          <a:lstStyle/>
+          <a:p>
+            <a:pPr indent="0" marL="0">
+              <a:buNone/>
+            </a:pPr>
+            <a:r>
+              <a:rPr lang="en-US" sz="1500" b="1" dirty="0">
                 <a:solidFill>
                   <a:srgbClr val="B85042"/>
                 </a:solidFill>
@@ -4333,9 +4147,9 @@
                 <a:ea typeface="Cambria" pitchFamily="34" charset="-122"/>
                 <a:cs typeface="Cambria" pitchFamily="34" charset="-120"/>
               </a:rPr>
-              <a:t>741万</a:t>
-            </a:r>
-            <a:endParaRPr lang="en-US" sz="5400" dirty="0"/>
+              <a:t>これから必要な実験</a:t>
+            </a:r>
+            <a:endParaRPr lang="en-US" sz="1500" dirty="0"/>
           </a:p>
         </p:txBody>
       </p:sp>
@@ -4347,24 +4161,24 @@
         </p:nvSpPr>
         <p:spPr>
           <a:xfrm>
-            <a:off x="548640" y="2788920"/>
-            <a:ext cx="3566160" cy="457200"/>
-          </a:xfrm>
-          <a:prstGeom prst="rect">
-            <a:avLst/>
-          </a:prstGeom>
-          <a:noFill/>
-          <a:ln/>
-        </p:spPr>
-        <p:txBody>
-          <a:bodyPr wrap="square" lIns="0" tIns="0" rIns="0" bIns="0" rtlCol="0" anchor="ctr"/>
-          <a:lstStyle/>
-          <a:p>
-            <a:pPr algn="ctr" indent="0" marL="0">
-              <a:buNone/>
-            </a:pPr>
-            <a:r>
-              <a:rPr lang="en-US" sz="1400" dirty="0">
+            <a:off x="4023360" y="1508760"/>
+            <a:ext cx="7315200" cy="1234440"/>
+          </a:xfrm>
+          <a:prstGeom prst="rect">
+            <a:avLst/>
+          </a:prstGeom>
+          <a:noFill/>
+          <a:ln/>
+        </p:spPr>
+        <p:txBody>
+          <a:bodyPr wrap="square" lIns="0" tIns="0" rIns="0" bIns="0" rtlCol="0" anchor="ctr"/>
+          <a:lstStyle/>
+          <a:p>
+            <a:pPr indent="0" marL="0">
+              <a:buNone/>
+            </a:pPr>
+            <a:r>
+              <a:rPr lang="en-US" sz="1300" dirty="0">
                 <a:solidFill>
                   <a:srgbClr val="333333"/>
                 </a:solidFill>
@@ -4372,9 +4186,9 @@
                 <a:ea typeface="Calibri" pitchFamily="34" charset="-122"/>
                 <a:cs typeface="Calibri" pitchFamily="34" charset="-120"/>
               </a:rPr>
-              <a:t>土器片1つあたりの頂点数（1点目）</a:t>
-            </a:r>
-            <a:endParaRPr lang="en-US" sz="1400" dirty="0"/>
+              <a:t>手法の信頼性を示すため、ノイズや欠損の量を変えた数百条件で計測精度を検証する予定。検証1回に数分を要し、逐次実行では1日以上かかる見込み。</a:t>
+            </a:r>
+            <a:endParaRPr lang="en-US" sz="1300" dirty="0"/>
           </a:p>
         </p:txBody>
       </p:sp>
@@ -4386,12 +4200,12 @@
         </p:nvSpPr>
         <p:spPr>
           <a:xfrm>
-            <a:off x="4434840" y="1463040"/>
-            <a:ext cx="3566160" cy="2011680"/>
+            <a:off x="548640" y="3017520"/>
+            <a:ext cx="11064240" cy="1463040"/>
           </a:xfrm>
           <a:prstGeom prst="roundRect">
             <a:avLst>
-              <a:gd name="adj" fmla="val 4545"/>
+              <a:gd name="adj" fmla="val 6250"/>
             </a:avLst>
           </a:prstGeom>
           <a:solidFill>
@@ -4408,24 +4222,24 @@
         </p:nvSpPr>
         <p:spPr>
           <a:xfrm>
-            <a:off x="4434840" y="1691640"/>
-            <a:ext cx="3566160" cy="1005840"/>
-          </a:xfrm>
-          <a:prstGeom prst="rect">
-            <a:avLst/>
-          </a:prstGeom>
-          <a:noFill/>
-          <a:ln/>
-        </p:spPr>
-        <p:txBody>
-          <a:bodyPr wrap="square" lIns="0" tIns="0" rIns="0" bIns="0" rtlCol="0" anchor="ctr"/>
-          <a:lstStyle/>
-          <a:p>
-            <a:pPr algn="ctr" indent="0" marL="0">
-              <a:buNone/>
-            </a:pPr>
-            <a:r>
-              <a:rPr lang="en-US" sz="5400" b="1" dirty="0">
+            <a:off x="777240" y="3127248"/>
+            <a:ext cx="3108960" cy="1188720"/>
+          </a:xfrm>
+          <a:prstGeom prst="rect">
+            <a:avLst/>
+          </a:prstGeom>
+          <a:noFill/>
+          <a:ln/>
+        </p:spPr>
+        <p:txBody>
+          <a:bodyPr wrap="square" lIns="0" tIns="0" rIns="0" bIns="0" rtlCol="0" anchor="ctr"/>
+          <a:lstStyle/>
+          <a:p>
+            <a:pPr indent="0" marL="0">
+              <a:buNone/>
+            </a:pPr>
+            <a:r>
+              <a:rPr lang="en-US" sz="1500" b="1" dirty="0">
                 <a:solidFill>
                   <a:srgbClr val="B85042"/>
                 </a:solidFill>
@@ -4433,9 +4247,9 @@
                 <a:ea typeface="Cambria" pitchFamily="34" charset="-122"/>
                 <a:cs typeface="Cambria" pitchFamily="34" charset="-120"/>
               </a:rPr>
-              <a:t>697万</a:t>
-            </a:r>
-            <a:endParaRPr lang="en-US" sz="5400" dirty="0"/>
+              <a:t>並列化の適用</a:t>
+            </a:r>
+            <a:endParaRPr lang="en-US" sz="1500" dirty="0"/>
           </a:p>
         </p:txBody>
       </p:sp>
@@ -4447,24 +4261,24 @@
         </p:nvSpPr>
         <p:spPr>
           <a:xfrm>
-            <a:off x="4434840" y="2788920"/>
-            <a:ext cx="3566160" cy="457200"/>
-          </a:xfrm>
-          <a:prstGeom prst="rect">
-            <a:avLst/>
-          </a:prstGeom>
-          <a:noFill/>
-          <a:ln/>
-        </p:spPr>
-        <p:txBody>
-          <a:bodyPr wrap="square" lIns="0" tIns="0" rIns="0" bIns="0" rtlCol="0" anchor="ctr"/>
-          <a:lstStyle/>
-          <a:p>
-            <a:pPr algn="ctr" indent="0" marL="0">
-              <a:buNone/>
-            </a:pPr>
-            <a:r>
-              <a:rPr lang="en-US" sz="1400" dirty="0">
+            <a:off x="4023360" y="3154680"/>
+            <a:ext cx="7315200" cy="1234440"/>
+          </a:xfrm>
+          <a:prstGeom prst="rect">
+            <a:avLst/>
+          </a:prstGeom>
+          <a:noFill/>
+          <a:ln/>
+        </p:spPr>
+        <p:txBody>
+          <a:bodyPr wrap="square" lIns="0" tIns="0" rIns="0" bIns="0" rtlCol="0" anchor="ctr"/>
+          <a:lstStyle/>
+          <a:p>
+            <a:pPr indent="0" marL="0">
+              <a:buNone/>
+            </a:pPr>
+            <a:r>
+              <a:rPr lang="en-US" sz="1300" dirty="0">
                 <a:solidFill>
                   <a:srgbClr val="333333"/>
                 </a:solidFill>
@@ -4472,9 +4286,9 @@
                 <a:ea typeface="Calibri" pitchFamily="34" charset="-122"/>
                 <a:cs typeface="Calibri" pitchFamily="34" charset="-120"/>
               </a:rPr>
-              <a:t>土器片1つあたりの頂点数（2点目）</a:t>
-            </a:r>
-            <a:endParaRPr lang="en-US" sz="1400" dirty="0"/>
+              <a:t>各条件の検証は互いに独立した計算であり、第12回の遺伝的アルゴリズムにおける個体評価と同じ構造。複数のWorkerへ分配して同時に実行することで、実行時間の大幅な短縮が見込める。</a:t>
+            </a:r>
+            <a:endParaRPr lang="en-US" sz="1300" dirty="0"/>
           </a:p>
         </p:txBody>
       </p:sp>
@@ -4486,16 +4300,16 @@
         </p:nvSpPr>
         <p:spPr>
           <a:xfrm>
-            <a:off x="8321040" y="1463040"/>
-            <a:ext cx="3566160" cy="2011680"/>
+            <a:off x="548640" y="4663440"/>
+            <a:ext cx="11064240" cy="1463040"/>
           </a:xfrm>
           <a:prstGeom prst="roundRect">
             <a:avLst>
-              <a:gd name="adj" fmla="val 4545"/>
+              <a:gd name="adj" fmla="val 6250"/>
             </a:avLst>
           </a:prstGeom>
           <a:solidFill>
-            <a:srgbClr val="E7E8D1"/>
+            <a:srgbClr val="B85042"/>
           </a:solidFill>
           <a:ln/>
         </p:spPr>
@@ -4508,34 +4322,34 @@
         </p:nvSpPr>
         <p:spPr>
           <a:xfrm>
-            <a:off x="8321040" y="1691640"/>
-            <a:ext cx="3566160" cy="1005840"/>
-          </a:xfrm>
-          <a:prstGeom prst="rect">
-            <a:avLst/>
-          </a:prstGeom>
-          <a:noFill/>
-          <a:ln/>
-        </p:spPr>
-        <p:txBody>
-          <a:bodyPr wrap="square" lIns="0" tIns="0" rIns="0" bIns="0" rtlCol="0" anchor="ctr"/>
-          <a:lstStyle/>
-          <a:p>
-            <a:pPr algn="ctr" indent="0" marL="0">
-              <a:buNone/>
-            </a:pPr>
-            <a:r>
-              <a:rPr lang="en-US" sz="4000" b="1" dirty="0">
-                <a:solidFill>
-                  <a:srgbClr val="A7BEAE"/>
+            <a:off x="777240" y="4773168"/>
+            <a:ext cx="3108960" cy="1188720"/>
+          </a:xfrm>
+          <a:prstGeom prst="rect">
+            <a:avLst/>
+          </a:prstGeom>
+          <a:noFill/>
+          <a:ln/>
+        </p:spPr>
+        <p:txBody>
+          <a:bodyPr wrap="square" lIns="0" tIns="0" rIns="0" bIns="0" rtlCol="0" anchor="ctr"/>
+          <a:lstStyle/>
+          <a:p>
+            <a:pPr indent="0" marL="0">
+              <a:buNone/>
+            </a:pPr>
+            <a:r>
+              <a:rPr lang="en-US" sz="1500" b="1" dirty="0">
+                <a:solidFill>
+                  <a:srgbClr val="FFFFFF"/>
                 </a:solidFill>
                 <a:latin typeface="Cambria" pitchFamily="34" charset="0"/>
                 <a:ea typeface="Cambria" pitchFamily="34" charset="-122"/>
                 <a:cs typeface="Cambria" pitchFamily="34" charset="-120"/>
               </a:rPr>
-              <a:t>逐次処理</a:t>
-            </a:r>
-            <a:endParaRPr lang="en-US" sz="4000" dirty="0"/>
+              <a:t>第12回の実験を踏まえた方針</a:t>
+            </a:r>
+            <a:endParaRPr lang="en-US" sz="1500" dirty="0"/>
           </a:p>
         </p:txBody>
       </p:sp>
@@ -4547,116 +4361,34 @@
         </p:nvSpPr>
         <p:spPr>
           <a:xfrm>
-            <a:off x="8321040" y="2788920"/>
-            <a:ext cx="3566160" cy="457200"/>
-          </a:xfrm>
-          <a:prstGeom prst="rect">
-            <a:avLst/>
-          </a:prstGeom>
-          <a:noFill/>
-          <a:ln/>
-        </p:spPr>
-        <p:txBody>
-          <a:bodyPr wrap="square" lIns="0" tIns="0" rIns="0" bIns="0" rtlCol="0" anchor="ctr"/>
-          <a:lstStyle/>
-          <a:p>
-            <a:pPr algn="ctr" indent="0" marL="0">
-              <a:buNone/>
-            </a:pPr>
-            <a:r>
-              <a:rPr lang="en-US" sz="1400" dirty="0">
-                <a:solidFill>
-                  <a:srgbClr val="333333"/>
+            <a:off x="4023360" y="4800600"/>
+            <a:ext cx="7315200" cy="1234440"/>
+          </a:xfrm>
+          <a:prstGeom prst="rect">
+            <a:avLst/>
+          </a:prstGeom>
+          <a:noFill/>
+          <a:ln/>
+        </p:spPr>
+        <p:txBody>
+          <a:bodyPr wrap="square" lIns="0" tIns="0" rIns="0" bIns="0" rtlCol="0" anchor="ctr"/>
+          <a:lstStyle/>
+          <a:p>
+            <a:pPr indent="0" marL="0">
+              <a:buNone/>
+            </a:pPr>
+            <a:r>
+              <a:rPr lang="en-US" sz="1300" dirty="0">
+                <a:solidFill>
+                  <a:srgbClr val="FFFFFF"/>
                 </a:solidFill>
                 <a:latin typeface="Calibri" pitchFamily="34" charset="0"/>
                 <a:ea typeface="Calibri" pitchFamily="34" charset="-122"/>
                 <a:cs typeface="Calibri" pitchFamily="34" charset="-120"/>
               </a:rPr>
-              <a:t>現在は並列化を行っていない</a:t>
-            </a:r>
-            <a:endParaRPr lang="en-US" sz="1400" dirty="0"/>
-          </a:p>
-        </p:txBody>
-      </p:sp>
-      <p:sp>
-        <p:nvSpPr>
-          <p:cNvPr id="12" name="Text 10"/>
-          <p:cNvSpPr/>
-          <p:nvPr/>
-        </p:nvSpPr>
-        <p:spPr>
-          <a:xfrm>
-            <a:off x="640080" y="3931920"/>
-            <a:ext cx="10972800" cy="2103120"/>
-          </a:xfrm>
-          <a:prstGeom prst="rect">
-            <a:avLst/>
-          </a:prstGeom>
-          <a:noFill/>
-          <a:ln/>
-        </p:spPr>
-        <p:txBody>
-          <a:bodyPr wrap="square" rtlCol="0" anchor="ctr"/>
-          <a:lstStyle/>
-          <a:p>
-            <a:pPr marL="342900" indent="-342900">
-              <a:spcAft>
-                <a:spcPts val="800"/>
-              </a:spcAft>
-              <a:buSzPct val="100000"/>
-              <a:buChar char="•"/>
-            </a:pPr>
-            <a:r>
-              <a:rPr lang="en-US" sz="1500" dirty="0">
-                <a:solidFill>
-                  <a:srgbClr val="333333"/>
-                </a:solidFill>
-                <a:latin typeface="Calibri" pitchFamily="34" charset="0"/>
-                <a:ea typeface="Calibri" pitchFamily="34" charset="-122"/>
-                <a:cs typeface="Calibri" pitchFamily="34" charset="-120"/>
-              </a:rPr>
-              <a:t>土器片1つのメッシュは約700万頂点に及ぶ大規模データであり、現在は1台の計算機で逐次的に処理している。</a:t>
-            </a:r>
-            <a:endParaRPr lang="en-US" sz="1500" dirty="0"/>
-          </a:p>
-          <a:p>
-            <a:pPr marL="342900" indent="-342900">
-              <a:spcAft>
-                <a:spcPts val="800"/>
-              </a:spcAft>
-              <a:buSzPct val="100000"/>
-              <a:buChar char="•"/>
-            </a:pPr>
-            <a:r>
-              <a:rPr lang="en-US" sz="1500" dirty="0">
-                <a:solidFill>
-                  <a:srgbClr val="333333"/>
-                </a:solidFill>
-                <a:latin typeface="Calibri" pitchFamily="34" charset="0"/>
-                <a:ea typeface="Calibri" pitchFamily="34" charset="-122"/>
-                <a:cs typeface="Calibri" pitchFamily="34" charset="-120"/>
-              </a:rPr>
-              <a:t>土器1点の計測であれば現状でも実用的だが、研究は今後、手法の信頼性を示すための「精度検証実験の大量実行」の段階に進む。</a:t>
-            </a:r>
-            <a:endParaRPr lang="en-US" sz="1500" dirty="0"/>
-          </a:p>
-          <a:p>
-            <a:pPr marL="342900" indent="-342900">
-              <a:buSzPct val="100000"/>
-              <a:buChar char="•"/>
-            </a:pPr>
-            <a:r>
-              <a:rPr lang="en-US" sz="1500" dirty="0">
-                <a:solidFill>
-                  <a:srgbClr val="333333"/>
-                </a:solidFill>
-                <a:latin typeface="Calibri" pitchFamily="34" charset="0"/>
-                <a:ea typeface="Calibri" pitchFamily="34" charset="-122"/>
-                <a:cs typeface="Calibri" pitchFamily="34" charset="-120"/>
-              </a:rPr>
-              <a:t>この段階で、講義で学んだ並列化の考え方が有効になると考えられる。次の2枚で具体的に検討する。</a:t>
-            </a:r>
-            <a:endParaRPr lang="en-US" sz="1500" dirty="0"/>
+              <a:t>計算が軽い場合はオーバーヘッドで逆に遅くなるという知見を踏まえ、まず検証1回あたりの処理時間を計測したうえで、並列化の単位とWorker数を決定する。</a:t>
+            </a:r>
+            <a:endParaRPr lang="en-US" sz="1300" dirty="0"/>
           </a:p>
         </p:txBody>
       </p:sp>
@@ -4671,748 +4403,6 @@
 <file path=ppt/slides/slide7.xml><?xml version="1.0" encoding="utf-8"?>
 <p:sld xmlns:a="http://schemas.openxmlformats.org/drawingml/2006/main" xmlns:r="http://schemas.openxmlformats.org/officeDocument/2006/relationships" xmlns:p="http://schemas.openxmlformats.org/presentationml/2006/main">
   <p:cSld name="Slide 7">
-    <p:bg>
-      <p:bgPr>
-        <a:solidFill>
-          <a:srgbClr val="FFFFFF"/>
-        </a:solidFill>
-      </p:bgPr>
-    </p:bg>
-    <p:spTree>
-      <p:nvGrpSpPr>
-        <p:cNvPr id="1" name=""/>
-        <p:cNvGrpSpPr/>
-        <p:nvPr/>
-      </p:nvGrpSpPr>
-      <p:grpSpPr>
-        <a:xfrm>
-          <a:off x="0" y="0"/>
-          <a:ext cx="0" cy="0"/>
-          <a:chOff x="0" y="0"/>
-          <a:chExt cx="0" cy="0"/>
-        </a:xfrm>
-      </p:grpSpPr>
-      <p:sp>
-        <p:nvSpPr>
-          <p:cNvPr id="2" name="Text 0"/>
-          <p:cNvSpPr/>
-          <p:nvPr/>
-        </p:nvSpPr>
-        <p:spPr>
-          <a:xfrm>
-            <a:off x="548640" y="320040"/>
-            <a:ext cx="11064240" cy="731520"/>
-          </a:xfrm>
-          <a:prstGeom prst="rect">
-            <a:avLst/>
-          </a:prstGeom>
-          <a:noFill/>
-          <a:ln/>
-        </p:spPr>
-        <p:txBody>
-          <a:bodyPr wrap="square" lIns="0" tIns="0" rIns="0" bIns="0" rtlCol="0" anchor="ctr"/>
-          <a:lstStyle/>
-          <a:p>
-            <a:pPr indent="0" marL="0">
-              <a:buNone/>
-            </a:pPr>
-            <a:r>
-              <a:rPr lang="en-US" sz="3000" b="1" dirty="0">
-                <a:solidFill>
-                  <a:srgbClr val="333333"/>
-                </a:solidFill>
-                <a:latin typeface="Cambria" pitchFamily="34" charset="0"/>
-                <a:ea typeface="Cambria" pitchFamily="34" charset="-122"/>
-                <a:cs typeface="Cambria" pitchFamily="34" charset="-120"/>
-              </a:rPr>
-              <a:t>今後効率化が見込める処理 — 精度検証実験の並列実行</a:t>
-            </a:r>
-            <a:endParaRPr lang="en-US" sz="3000" dirty="0"/>
-          </a:p>
-        </p:txBody>
-      </p:sp>
-      <p:sp>
-        <p:nvSpPr>
-          <p:cNvPr id="3" name="Shape 1"/>
-          <p:cNvSpPr/>
-          <p:nvPr/>
-        </p:nvSpPr>
-        <p:spPr>
-          <a:xfrm>
-            <a:off x="548640" y="1371600"/>
-            <a:ext cx="11064240" cy="1463040"/>
-          </a:xfrm>
-          <a:prstGeom prst="roundRect">
-            <a:avLst>
-              <a:gd name="adj" fmla="val 6250"/>
-            </a:avLst>
-          </a:prstGeom>
-          <a:solidFill>
-            <a:srgbClr val="E7E8D1"/>
-          </a:solidFill>
-          <a:ln/>
-        </p:spPr>
-      </p:sp>
-      <p:sp>
-        <p:nvSpPr>
-          <p:cNvPr id="4" name="Text 2"/>
-          <p:cNvSpPr/>
-          <p:nvPr/>
-        </p:nvSpPr>
-        <p:spPr>
-          <a:xfrm>
-            <a:off x="777240" y="1481328"/>
-            <a:ext cx="3108960" cy="1188720"/>
-          </a:xfrm>
-          <a:prstGeom prst="rect">
-            <a:avLst/>
-          </a:prstGeom>
-          <a:noFill/>
-          <a:ln/>
-        </p:spPr>
-        <p:txBody>
-          <a:bodyPr wrap="square" lIns="0" tIns="0" rIns="0" bIns="0" rtlCol="0" anchor="ctr"/>
-          <a:lstStyle/>
-          <a:p>
-            <a:pPr indent="0" marL="0">
-              <a:buNone/>
-            </a:pPr>
-            <a:r>
-              <a:rPr lang="en-US" sz="1500" b="1" dirty="0">
-                <a:solidFill>
-                  <a:srgbClr val="B85042"/>
-                </a:solidFill>
-                <a:latin typeface="Cambria" pitchFamily="34" charset="0"/>
-                <a:ea typeface="Cambria" pitchFamily="34" charset="-122"/>
-                <a:cs typeface="Cambria" pitchFamily="34" charset="-120"/>
-              </a:rPr>
-              <a:t>どのような実験か</a:t>
-            </a:r>
-            <a:endParaRPr lang="en-US" sz="1500" dirty="0"/>
-          </a:p>
-        </p:txBody>
-      </p:sp>
-      <p:sp>
-        <p:nvSpPr>
-          <p:cNvPr id="5" name="Text 3"/>
-          <p:cNvSpPr/>
-          <p:nvPr/>
-        </p:nvSpPr>
-        <p:spPr>
-          <a:xfrm>
-            <a:off x="4023360" y="1508760"/>
-            <a:ext cx="7315200" cy="1234440"/>
-          </a:xfrm>
-          <a:prstGeom prst="rect">
-            <a:avLst/>
-          </a:prstGeom>
-          <a:noFill/>
-          <a:ln/>
-        </p:spPr>
-        <p:txBody>
-          <a:bodyPr wrap="square" lIns="0" tIns="0" rIns="0" bIns="0" rtlCol="0" anchor="ctr"/>
-          <a:lstStyle/>
-          <a:p>
-            <a:pPr indent="0" marL="0">
-              <a:buNone/>
-            </a:pPr>
-            <a:r>
-              <a:rPr lang="en-US" sz="1300" dirty="0">
-                <a:solidFill>
-                  <a:srgbClr val="333333"/>
-                </a:solidFill>
-                <a:latin typeface="Calibri" pitchFamily="34" charset="0"/>
-                <a:ea typeface="Calibri" pitchFamily="34" charset="-122"/>
-                <a:cs typeface="Calibri" pitchFamily="34" charset="-120"/>
-              </a:rPr>
-              <a:t>ノイズや欠損の量を段階的に変えたテストデータを多数生成し、それぞれの条件で計測精度を検証する。手法の信頼性を示すうえで必須の実験であり、条件の組合せは数百通りに及ぶ見込み。</a:t>
-            </a:r>
-            <a:endParaRPr lang="en-US" sz="1300" dirty="0"/>
-          </a:p>
-        </p:txBody>
-      </p:sp>
-      <p:sp>
-        <p:nvSpPr>
-          <p:cNvPr id="6" name="Shape 4"/>
-          <p:cNvSpPr/>
-          <p:nvPr/>
-        </p:nvSpPr>
-        <p:spPr>
-          <a:xfrm>
-            <a:off x="548640" y="3017520"/>
-            <a:ext cx="11064240" cy="1463040"/>
-          </a:xfrm>
-          <a:prstGeom prst="roundRect">
-            <a:avLst>
-              <a:gd name="adj" fmla="val 6250"/>
-            </a:avLst>
-          </a:prstGeom>
-          <a:solidFill>
-            <a:srgbClr val="E7E8D1"/>
-          </a:solidFill>
-          <a:ln/>
-        </p:spPr>
-      </p:sp>
-      <p:sp>
-        <p:nvSpPr>
-          <p:cNvPr id="7" name="Text 5"/>
-          <p:cNvSpPr/>
-          <p:nvPr/>
-        </p:nvSpPr>
-        <p:spPr>
-          <a:xfrm>
-            <a:off x="777240" y="3127248"/>
-            <a:ext cx="3108960" cy="1188720"/>
-          </a:xfrm>
-          <a:prstGeom prst="rect">
-            <a:avLst/>
-          </a:prstGeom>
-          <a:noFill/>
-          <a:ln/>
-        </p:spPr>
-        <p:txBody>
-          <a:bodyPr wrap="square" lIns="0" tIns="0" rIns="0" bIns="0" rtlCol="0" anchor="ctr"/>
-          <a:lstStyle/>
-          <a:p>
-            <a:pPr indent="0" marL="0">
-              <a:buNone/>
-            </a:pPr>
-            <a:r>
-              <a:rPr lang="en-US" sz="1500" b="1" dirty="0">
-                <a:solidFill>
-                  <a:srgbClr val="B85042"/>
-                </a:solidFill>
-                <a:latin typeface="Cambria" pitchFamily="34" charset="0"/>
-                <a:ea typeface="Cambria" pitchFamily="34" charset="-122"/>
-                <a:cs typeface="Cambria" pitchFamily="34" charset="-120"/>
-              </a:rPr>
-              <a:t>なぜ並列化に向くか</a:t>
-            </a:r>
-            <a:endParaRPr lang="en-US" sz="1500" dirty="0"/>
-          </a:p>
-        </p:txBody>
-      </p:sp>
-      <p:sp>
-        <p:nvSpPr>
-          <p:cNvPr id="8" name="Text 6"/>
-          <p:cNvSpPr/>
-          <p:nvPr/>
-        </p:nvSpPr>
-        <p:spPr>
-          <a:xfrm>
-            <a:off x="4023360" y="3154680"/>
-            <a:ext cx="7315200" cy="1234440"/>
-          </a:xfrm>
-          <a:prstGeom prst="rect">
-            <a:avLst/>
-          </a:prstGeom>
-          <a:noFill/>
-          <a:ln/>
-        </p:spPr>
-        <p:txBody>
-          <a:bodyPr wrap="square" lIns="0" tIns="0" rIns="0" bIns="0" rtlCol="0" anchor="ctr"/>
-          <a:lstStyle/>
-          <a:p>
-            <a:pPr indent="0" marL="0">
-              <a:buNone/>
-            </a:pPr>
-            <a:r>
-              <a:rPr lang="en-US" sz="1300" dirty="0">
-                <a:solidFill>
-                  <a:srgbClr val="333333"/>
-                </a:solidFill>
-                <a:latin typeface="Calibri" pitchFamily="34" charset="0"/>
-                <a:ea typeface="Calibri" pitchFamily="34" charset="-122"/>
-                <a:cs typeface="Calibri" pitchFamily="34" charset="-120"/>
-              </a:rPr>
-              <a:t>各条件の検証は互いに独立した計算であり、他の条件の結果を待つ必要がない。第12回の遺伝的アルゴリズムにおける個体評価と同じ構造であり、複数のWorkerへ分配して同時に実行できる。</a:t>
-            </a:r>
-            <a:endParaRPr lang="en-US" sz="1300" dirty="0"/>
-          </a:p>
-        </p:txBody>
-      </p:sp>
-      <p:sp>
-        <p:nvSpPr>
-          <p:cNvPr id="9" name="Shape 7"/>
-          <p:cNvSpPr/>
-          <p:nvPr/>
-        </p:nvSpPr>
-        <p:spPr>
-          <a:xfrm>
-            <a:off x="548640" y="4663440"/>
-            <a:ext cx="11064240" cy="1463040"/>
-          </a:xfrm>
-          <a:prstGeom prst="roundRect">
-            <a:avLst>
-              <a:gd name="adj" fmla="val 6250"/>
-            </a:avLst>
-          </a:prstGeom>
-          <a:solidFill>
-            <a:srgbClr val="B85042"/>
-          </a:solidFill>
-          <a:ln/>
-        </p:spPr>
-      </p:sp>
-      <p:sp>
-        <p:nvSpPr>
-          <p:cNvPr id="10" name="Text 8"/>
-          <p:cNvSpPr/>
-          <p:nvPr/>
-        </p:nvSpPr>
-        <p:spPr>
-          <a:xfrm>
-            <a:off x="777240" y="4773168"/>
-            <a:ext cx="3108960" cy="1188720"/>
-          </a:xfrm>
-          <a:prstGeom prst="rect">
-            <a:avLst/>
-          </a:prstGeom>
-          <a:noFill/>
-          <a:ln/>
-        </p:spPr>
-        <p:txBody>
-          <a:bodyPr wrap="square" lIns="0" tIns="0" rIns="0" bIns="0" rtlCol="0" anchor="ctr"/>
-          <a:lstStyle/>
-          <a:p>
-            <a:pPr indent="0" marL="0">
-              <a:buNone/>
-            </a:pPr>
-            <a:r>
-              <a:rPr lang="en-US" sz="1500" b="1" dirty="0">
-                <a:solidFill>
-                  <a:srgbClr val="FFFFFF"/>
-                </a:solidFill>
-                <a:latin typeface="Cambria" pitchFamily="34" charset="0"/>
-                <a:ea typeface="Cambria" pitchFamily="34" charset="-122"/>
-                <a:cs typeface="Cambria" pitchFamily="34" charset="-120"/>
-              </a:rPr>
-              <a:t>期待される効果</a:t>
-            </a:r>
-            <a:endParaRPr lang="en-US" sz="1500" dirty="0"/>
-          </a:p>
-        </p:txBody>
-      </p:sp>
-      <p:sp>
-        <p:nvSpPr>
-          <p:cNvPr id="11" name="Text 9"/>
-          <p:cNvSpPr/>
-          <p:nvPr/>
-        </p:nvSpPr>
-        <p:spPr>
-          <a:xfrm>
-            <a:off x="4023360" y="4800600"/>
-            <a:ext cx="7315200" cy="1234440"/>
-          </a:xfrm>
-          <a:prstGeom prst="rect">
-            <a:avLst/>
-          </a:prstGeom>
-          <a:noFill/>
-          <a:ln/>
-        </p:spPr>
-        <p:txBody>
-          <a:bodyPr wrap="square" lIns="0" tIns="0" rIns="0" bIns="0" rtlCol="0" anchor="ctr"/>
-          <a:lstStyle/>
-          <a:p>
-            <a:pPr indent="0" marL="0">
-              <a:buNone/>
-            </a:pPr>
-            <a:r>
-              <a:rPr lang="en-US" sz="1300" dirty="0">
-                <a:solidFill>
-                  <a:srgbClr val="FFFFFF"/>
-                </a:solidFill>
-                <a:latin typeface="Calibri" pitchFamily="34" charset="0"/>
-                <a:ea typeface="Calibri" pitchFamily="34" charset="-122"/>
-                <a:cs typeface="Calibri" pitchFamily="34" charset="-120"/>
-              </a:rPr>
-              <a:t>検証1回に数分を要するため、数百条件を逐次実行すると1日以上かかる見込み。並列実行により、実行時間をWorker数に応じて大幅に短縮し、条件を追加した再実験も繰り返しやすくなる。</a:t>
-            </a:r>
-            <a:endParaRPr lang="en-US" sz="1300" dirty="0"/>
-          </a:p>
-        </p:txBody>
-      </p:sp>
-    </p:spTree>
-  </p:cSld>
-  <p:clrMapOvr>
-    <a:masterClrMapping/>
-  </p:clrMapOvr>
-</p:sld>
-</file>
-
-<file path=ppt/slides/slide8.xml><?xml version="1.0" encoding="utf-8"?>
-<p:sld xmlns:a="http://schemas.openxmlformats.org/drawingml/2006/main" xmlns:r="http://schemas.openxmlformats.org/officeDocument/2006/relationships" xmlns:p="http://schemas.openxmlformats.org/presentationml/2006/main">
-  <p:cSld name="Slide 8">
-    <p:bg>
-      <p:bgPr>
-        <a:solidFill>
-          <a:srgbClr val="FFFFFF"/>
-        </a:solidFill>
-      </p:bgPr>
-    </p:bg>
-    <p:spTree>
-      <p:nvGrpSpPr>
-        <p:cNvPr id="1" name=""/>
-        <p:cNvGrpSpPr/>
-        <p:nvPr/>
-      </p:nvGrpSpPr>
-      <p:grpSpPr>
-        <a:xfrm>
-          <a:off x="0" y="0"/>
-          <a:ext cx="0" cy="0"/>
-          <a:chOff x="0" y="0"/>
-          <a:chExt cx="0" cy="0"/>
-        </a:xfrm>
-      </p:grpSpPr>
-      <p:sp>
-        <p:nvSpPr>
-          <p:cNvPr id="2" name="Text 0"/>
-          <p:cNvSpPr/>
-          <p:nvPr/>
-        </p:nvSpPr>
-        <p:spPr>
-          <a:xfrm>
-            <a:off x="548640" y="320040"/>
-            <a:ext cx="11064240" cy="731520"/>
-          </a:xfrm>
-          <a:prstGeom prst="rect">
-            <a:avLst/>
-          </a:prstGeom>
-          <a:noFill/>
-          <a:ln/>
-        </p:spPr>
-        <p:txBody>
-          <a:bodyPr wrap="square" lIns="0" tIns="0" rIns="0" bIns="0" rtlCol="0" anchor="ctr"/>
-          <a:lstStyle/>
-          <a:p>
-            <a:pPr indent="0" marL="0">
-              <a:buNone/>
-            </a:pPr>
-            <a:r>
-              <a:rPr lang="en-US" sz="3000" b="1" dirty="0">
-                <a:solidFill>
-                  <a:srgbClr val="333333"/>
-                </a:solidFill>
-                <a:latin typeface="Cambria" pitchFamily="34" charset="0"/>
-                <a:ea typeface="Cambria" pitchFamily="34" charset="-122"/>
-                <a:cs typeface="Cambria" pitchFamily="34" charset="-120"/>
-              </a:rPr>
-              <a:t>並列化の効果の見通し — 第12回の実験結果を踏まえて</a:t>
-            </a:r>
-            <a:endParaRPr lang="en-US" sz="3000" dirty="0"/>
-          </a:p>
-        </p:txBody>
-      </p:sp>
-      <p:sp>
-        <p:nvSpPr>
-          <p:cNvPr id="3" name="Shape 1"/>
-          <p:cNvSpPr/>
-          <p:nvPr/>
-        </p:nvSpPr>
-        <p:spPr>
-          <a:xfrm>
-            <a:off x="548640" y="1371600"/>
-            <a:ext cx="11064240" cy="1463040"/>
-          </a:xfrm>
-          <a:prstGeom prst="roundRect">
-            <a:avLst>
-              <a:gd name="adj" fmla="val 6250"/>
-            </a:avLst>
-          </a:prstGeom>
-          <a:solidFill>
-            <a:srgbClr val="E7E8D1"/>
-          </a:solidFill>
-          <a:ln/>
-        </p:spPr>
-      </p:sp>
-      <p:sp>
-        <p:nvSpPr>
-          <p:cNvPr id="4" name="Text 2"/>
-          <p:cNvSpPr/>
-          <p:nvPr/>
-        </p:nvSpPr>
-        <p:spPr>
-          <a:xfrm>
-            <a:off x="777240" y="1481328"/>
-            <a:ext cx="3108960" cy="1188720"/>
-          </a:xfrm>
-          <a:prstGeom prst="rect">
-            <a:avLst/>
-          </a:prstGeom>
-          <a:noFill/>
-          <a:ln/>
-        </p:spPr>
-        <p:txBody>
-          <a:bodyPr wrap="square" lIns="0" tIns="0" rIns="0" bIns="0" rtlCol="0" anchor="ctr"/>
-          <a:lstStyle/>
-          <a:p>
-            <a:pPr indent="0" marL="0">
-              <a:buNone/>
-            </a:pPr>
-            <a:r>
-              <a:rPr lang="en-US" sz="1500" b="1" dirty="0">
-                <a:solidFill>
-                  <a:srgbClr val="B85042"/>
-                </a:solidFill>
-                <a:latin typeface="Cambria" pitchFamily="34" charset="0"/>
-                <a:ea typeface="Cambria" pitchFamily="34" charset="-122"/>
-                <a:cs typeface="Cambria" pitchFamily="34" charset="-120"/>
-              </a:rPr>
-              <a:t>第12回の実験で得られた知見</a:t>
-            </a:r>
-            <a:endParaRPr lang="en-US" sz="1500" dirty="0"/>
-          </a:p>
-        </p:txBody>
-      </p:sp>
-      <p:sp>
-        <p:nvSpPr>
-          <p:cNvPr id="5" name="Text 3"/>
-          <p:cNvSpPr/>
-          <p:nvPr/>
-        </p:nvSpPr>
-        <p:spPr>
-          <a:xfrm>
-            <a:off x="4023360" y="1508760"/>
-            <a:ext cx="7315200" cy="1234440"/>
-          </a:xfrm>
-          <a:prstGeom prst="rect">
-            <a:avLst/>
-          </a:prstGeom>
-          <a:noFill/>
-          <a:ln/>
-        </p:spPr>
-        <p:txBody>
-          <a:bodyPr wrap="square" lIns="0" tIns="0" rIns="0" bIns="0" rtlCol="0" anchor="ctr"/>
-          <a:lstStyle/>
-          <a:p>
-            <a:pPr indent="0" marL="0">
-              <a:buNone/>
-            </a:pPr>
-            <a:r>
-              <a:rPr lang="en-US" sz="1300" dirty="0">
-                <a:solidFill>
-                  <a:srgbClr val="333333"/>
-                </a:solidFill>
-                <a:latin typeface="Calibri" pitchFamily="34" charset="0"/>
-                <a:ea typeface="Calibri" pitchFamily="34" charset="-122"/>
-                <a:cs typeface="Calibri" pitchFamily="34" charset="-120"/>
-              </a:rPr>
-              <a:t>1つあたりの計算が軽い場合、Workerの準備やデータの受け渡しといったオーバーヘッドが上回り、並列化によってかえって処理時間が増加した。</a:t>
-            </a:r>
-            <a:endParaRPr lang="en-US" sz="1300" dirty="0"/>
-          </a:p>
-        </p:txBody>
-      </p:sp>
-      <p:sp>
-        <p:nvSpPr>
-          <p:cNvPr id="6" name="Shape 4"/>
-          <p:cNvSpPr/>
-          <p:nvPr/>
-        </p:nvSpPr>
-        <p:spPr>
-          <a:xfrm>
-            <a:off x="548640" y="3017520"/>
-            <a:ext cx="11064240" cy="1463040"/>
-          </a:xfrm>
-          <a:prstGeom prst="roundRect">
-            <a:avLst>
-              <a:gd name="adj" fmla="val 6250"/>
-            </a:avLst>
-          </a:prstGeom>
-          <a:solidFill>
-            <a:srgbClr val="E7E8D1"/>
-          </a:solidFill>
-          <a:ln/>
-        </p:spPr>
-      </p:sp>
-      <p:sp>
-        <p:nvSpPr>
-          <p:cNvPr id="7" name="Text 5"/>
-          <p:cNvSpPr/>
-          <p:nvPr/>
-        </p:nvSpPr>
-        <p:spPr>
-          <a:xfrm>
-            <a:off x="777240" y="3127248"/>
-            <a:ext cx="3108960" cy="1188720"/>
-          </a:xfrm>
-          <a:prstGeom prst="rect">
-            <a:avLst/>
-          </a:prstGeom>
-          <a:noFill/>
-          <a:ln/>
-        </p:spPr>
-        <p:txBody>
-          <a:bodyPr wrap="square" lIns="0" tIns="0" rIns="0" bIns="0" rtlCol="0" anchor="ctr"/>
-          <a:lstStyle/>
-          <a:p>
-            <a:pPr indent="0" marL="0">
-              <a:buNone/>
-            </a:pPr>
-            <a:r>
-              <a:rPr lang="en-US" sz="1500" b="1" dirty="0">
-                <a:solidFill>
-                  <a:srgbClr val="B85042"/>
-                </a:solidFill>
-                <a:latin typeface="Cambria" pitchFamily="34" charset="0"/>
-                <a:ea typeface="Cambria" pitchFamily="34" charset="-122"/>
-                <a:cs typeface="Cambria" pitchFamily="34" charset="-120"/>
-              </a:rPr>
-              <a:t>本研究への当てはめ</a:t>
-            </a:r>
-            <a:endParaRPr lang="en-US" sz="1500" dirty="0"/>
-          </a:p>
-        </p:txBody>
-      </p:sp>
-      <p:sp>
-        <p:nvSpPr>
-          <p:cNvPr id="8" name="Text 6"/>
-          <p:cNvSpPr/>
-          <p:nvPr/>
-        </p:nvSpPr>
-        <p:spPr>
-          <a:xfrm>
-            <a:off x="4023360" y="3154680"/>
-            <a:ext cx="7315200" cy="1234440"/>
-          </a:xfrm>
-          <a:prstGeom prst="rect">
-            <a:avLst/>
-          </a:prstGeom>
-          <a:noFill/>
-          <a:ln/>
-        </p:spPr>
-        <p:txBody>
-          <a:bodyPr wrap="square" lIns="0" tIns="0" rIns="0" bIns="0" rtlCol="0" anchor="ctr"/>
-          <a:lstStyle/>
-          <a:p>
-            <a:pPr indent="0" marL="0">
-              <a:buNone/>
-            </a:pPr>
-            <a:r>
-              <a:rPr lang="en-US" sz="1300" dirty="0">
-                <a:solidFill>
-                  <a:srgbClr val="333333"/>
-                </a:solidFill>
-                <a:latin typeface="Calibri" pitchFamily="34" charset="0"/>
-                <a:ea typeface="Calibri" pitchFamily="34" charset="-122"/>
-                <a:cs typeface="Calibri" pitchFamily="34" charset="-120"/>
-              </a:rPr>
-              <a:t>精度検証1回は数分を要する重い処理である。オーバーヘッドに対して計算本体が十分に重いため、並列化の効果が得られやすい条件だと見込まれる。</a:t>
-            </a:r>
-            <a:endParaRPr lang="en-US" sz="1300" dirty="0"/>
-          </a:p>
-        </p:txBody>
-      </p:sp>
-      <p:sp>
-        <p:nvSpPr>
-          <p:cNvPr id="9" name="Shape 7"/>
-          <p:cNvSpPr/>
-          <p:nvPr/>
-        </p:nvSpPr>
-        <p:spPr>
-          <a:xfrm>
-            <a:off x="548640" y="4663440"/>
-            <a:ext cx="11064240" cy="1463040"/>
-          </a:xfrm>
-          <a:prstGeom prst="roundRect">
-            <a:avLst>
-              <a:gd name="adj" fmla="val 6250"/>
-            </a:avLst>
-          </a:prstGeom>
-          <a:solidFill>
-            <a:srgbClr val="B85042"/>
-          </a:solidFill>
-          <a:ln/>
-        </p:spPr>
-      </p:sp>
-      <p:sp>
-        <p:nvSpPr>
-          <p:cNvPr id="10" name="Text 8"/>
-          <p:cNvSpPr/>
-          <p:nvPr/>
-        </p:nvSpPr>
-        <p:spPr>
-          <a:xfrm>
-            <a:off x="777240" y="4773168"/>
-            <a:ext cx="3108960" cy="1188720"/>
-          </a:xfrm>
-          <a:prstGeom prst="rect">
-            <a:avLst/>
-          </a:prstGeom>
-          <a:noFill/>
-          <a:ln/>
-        </p:spPr>
-        <p:txBody>
-          <a:bodyPr wrap="square" lIns="0" tIns="0" rIns="0" bIns="0" rtlCol="0" anchor="ctr"/>
-          <a:lstStyle/>
-          <a:p>
-            <a:pPr indent="0" marL="0">
-              <a:buNone/>
-            </a:pPr>
-            <a:r>
-              <a:rPr lang="en-US" sz="1500" b="1" dirty="0">
-                <a:solidFill>
-                  <a:srgbClr val="FFFFFF"/>
-                </a:solidFill>
-                <a:latin typeface="Cambria" pitchFamily="34" charset="0"/>
-                <a:ea typeface="Cambria" pitchFamily="34" charset="-122"/>
-                <a:cs typeface="Cambria" pitchFamily="34" charset="-120"/>
-              </a:rPr>
-              <a:t>適用の方針</a:t>
-            </a:r>
-            <a:endParaRPr lang="en-US" sz="1500" dirty="0"/>
-          </a:p>
-        </p:txBody>
-      </p:sp>
-      <p:sp>
-        <p:nvSpPr>
-          <p:cNvPr id="11" name="Text 9"/>
-          <p:cNvSpPr/>
-          <p:nvPr/>
-        </p:nvSpPr>
-        <p:spPr>
-          <a:xfrm>
-            <a:off x="4023360" y="4800600"/>
-            <a:ext cx="7315200" cy="1234440"/>
-          </a:xfrm>
-          <a:prstGeom prst="rect">
-            <a:avLst/>
-          </a:prstGeom>
-          <a:noFill/>
-          <a:ln/>
-        </p:spPr>
-        <p:txBody>
-          <a:bodyPr wrap="square" lIns="0" tIns="0" rIns="0" bIns="0" rtlCol="0" anchor="ctr"/>
-          <a:lstStyle/>
-          <a:p>
-            <a:pPr indent="0" marL="0">
-              <a:buNone/>
-            </a:pPr>
-            <a:r>
-              <a:rPr lang="en-US" sz="1300" dirty="0">
-                <a:solidFill>
-                  <a:srgbClr val="FFFFFF"/>
-                </a:solidFill>
-                <a:latin typeface="Calibri" pitchFamily="34" charset="0"/>
-                <a:ea typeface="Calibri" pitchFamily="34" charset="-122"/>
-                <a:cs typeface="Calibri" pitchFamily="34" charset="-120"/>
-              </a:rPr>
-              <a:t>並列化の効果を仮定で判断せず、まず検証1回あたりの処理時間を計測したうえで、並列化する単位とWorker数を決定する。これが第12回の実験から得た最も重要な知見である。</a:t>
-            </a:r>
-            <a:endParaRPr lang="en-US" sz="1300" dirty="0"/>
-          </a:p>
-        </p:txBody>
-      </p:sp>
-    </p:spTree>
-  </p:cSld>
-  <p:clrMapOvr>
-    <a:masterClrMapping/>
-  </p:clrMapOvr>
-</p:sld>
-</file>
-
-<file path=ppt/slides/slide9.xml><?xml version="1.0" encoding="utf-8"?>
-<p:sld xmlns:a="http://schemas.openxmlformats.org/drawingml/2006/main" xmlns:r="http://schemas.openxmlformats.org/officeDocument/2006/relationships" xmlns:p="http://schemas.openxmlformats.org/presentationml/2006/main">
-  <p:cSld name="Slide 9">
     <p:bg>
       <p:bgPr>
         <a:solidFill>
@@ -5531,15 +4521,12 @@
                 <a:ea typeface="Calibri" pitchFamily="34" charset="-122"/>
                 <a:cs typeface="Calibri" pitchFamily="34" charset="-120"/>
               </a:rPr>
-              <a:t>研究は今後、手法の信頼性を示すための「精度検証実験の大量実行」の段階に進み、数百条件の逐次実行には1日以上を要する見込みである。</a:t>
+              <a:t>今後の課題は、実データでの定量評価と、数百条件におよぶ精度検証実験の実施である。</a:t>
             </a:r>
             <a:endParaRPr lang="en-US" sz="1700" dirty="0"/>
           </a:p>
           <a:p>
             <a:pPr marL="342900" indent="-342900">
-              <a:spcAft>
-                <a:spcPts val="1400"/>
-              </a:spcAft>
               <a:buSzPct val="100000"/>
               <a:buChar char="•"/>
             </a:pPr>
@@ -5552,25 +4539,7 @@
                 <a:ea typeface="Calibri" pitchFamily="34" charset="-122"/>
                 <a:cs typeface="Calibri" pitchFamily="34" charset="-120"/>
               </a:rPr>
-              <a:t>各条件の検証は独立した計算であるため、第11・12回で学んだ並列化を適用し、実行時間の大幅な短縮が見込める。</a:t>
-            </a:r>
-            <a:endParaRPr lang="en-US" sz="1700" dirty="0"/>
-          </a:p>
-          <a:p>
-            <a:pPr marL="342900" indent="-342900">
-              <a:buSzPct val="100000"/>
-              <a:buChar char="•"/>
-            </a:pPr>
-            <a:r>
-              <a:rPr lang="en-US" sz="1700" dirty="0">
-                <a:solidFill>
-                  <a:srgbClr val="E7E8D1"/>
-                </a:solidFill>
-                <a:latin typeface="Calibri" pitchFamily="34" charset="0"/>
-                <a:ea typeface="Calibri" pitchFamily="34" charset="-122"/>
-                <a:cs typeface="Calibri" pitchFamily="34" charset="-120"/>
-              </a:rPr>
-              <a:t>適用にあたっては、検証1回あたりの処理時間を計測したうえで並列化の単位を決定するという、第12回の実験で得た知見に基づいて進める。</a:t>
+              <a:t>精度検証実験には、講義で学んだ並列化を適用して実行時間を短縮する。その際は第12回の実験で得た知見に基づき、処理時間を計測したうえで並列化の単位を決定する。</a:t>
             </a:r>
             <a:endParaRPr lang="en-US" sz="1700" dirty="0"/>
           </a:p>
